--- a/courses/ai-native/sessions/s05.pptx
+++ b/courses/ai-native/sessions/s05.pptx
@@ -564,7 +564,7 @@
             <a:pPr lvl="0"/>
             <a:r>
               <a:rPr lang="ko-KR" sz="1200"/>
-              <a:t>주문 사례에서는 업무 담당자와 30분 회의로 정한 업무 규칙("03. 요구의 구체화와 명세")이 저장소로 옮겨야 할 첫 지식이다.</a:t>
+              <a:t>주문 사례에서는 업무 담당자와 30분 회의로 정한 업무 규칙("세션 03. 요구의 구체화와 명세")이 저장소로 옮겨야 할 첫 지식이다.</a:t>
             </a:r>
           </a:p>
         </p:txBody>
@@ -761,7 +761,7 @@
             <a:pPr lvl="0"/>
             <a:r>
               <a:rPr lang="ko-KR" sz="1200"/>
-              <a:t>공개 형식 [AGENTS.md]를 쓰면 도구가 바뀌어도 같은 파일을 읽는다. vendor 독립성은 "11. 평가 세트와 운영 점검 — 보안·비용·모델 변경"에서 다룬다.</a:t>
+              <a:t>공개 형식 [AGENTS.md]를 쓰면 도구가 바뀌어도 같은 파일을 읽는다. vendor 독립성은 "세션 11. 평가 세트와 운영 점검 — 보안·비용·모델 변경"에서 다룬다.</a:t>
             </a:r>
           </a:p>
           <a:p>
@@ -836,7 +836,7 @@
             <a:pPr lvl="0"/>
             <a:r>
               <a:rPr lang="ko-KR" sz="1200"/>
-              <a:t>본질적·우연적 복잡성은 "01. AI 협업의 특성과 사람의 판단 책임"의 「03. AI가 바꾼 것과 바꾸지 못한 것」의 「본질적 복잡성과 우연적 복잡성」에서 [Brooks 1986]으로 정의했다.</a:t>
+              <a:t>본질적·우연적 복잡성은 "세션 01. AI 협업의 특성과 사람의 판단 책임"의 「03. AI가 바꾼 것과 바꾸지 못한 것」의 「본질적 복잡성과 우연적 복잡성」에서 [Brooks 1986]으로 정의했다.</a:t>
             </a:r>
           </a:p>
           <a:p>
@@ -850,7 +850,7 @@
             <a:pPr lvl="0"/>
             <a:r>
               <a:rPr lang="ko-KR" sz="1200"/>
-              <a:t>분석 모델을 형식 언어로 적은 것이 온톨로지다. 수단의 비교는 "01. AI 협업의 특성과 사람의 판단 책임"의 「04. 업무 규칙의 명시」에 있다.</a:t>
+              <a:t>분석 모델을 형식 언어로 적은 것이 온톨로지다. 수단의 비교는 "세션 01. AI 협업의 특성과 사람의 판단 책임"의 「04. 업무 규칙의 명시」에 있다.</a:t>
             </a:r>
           </a:p>
         </p:txBody>
@@ -918,7 +918,7 @@
             <a:pPr lvl="0"/>
             <a:r>
               <a:rPr lang="ko-KR" sz="1200"/>
-              <a:t>상태 기계를 다시 그리지 않고 "01. AI 협업의 특성과 사람의 판단 책임"의 「04. 업무 규칙의 명시」의 「모델로 보이는 업무 규칙」을 가리킨다. 같은 지식을 두 곳에 두지 않는다.</a:t>
+              <a:t>상태 기계를 다시 그리지 않고 "세션 01. AI 협업의 특성과 사람의 판단 책임"의 「04. 업무 규칙의 명시」의 「모델로 보이는 업무 규칙」을 가리킨다. 같은 지식을 두 곳에 두지 않는다.</a:t>
             </a:r>
           </a:p>
           <a:p>
@@ -986,7 +986,7 @@
             <a:pPr lvl="0"/>
             <a:r>
               <a:rPr lang="ko-KR" sz="1200"/>
-              <a:t>보편 언어 인용([Evans 2015])은 "01. AI 협업의 특성과 사람의 판단 책임"의 「04. 업무 규칙의 명시」에 있다. 여기서는 맥락으로 쓰는 쪽만 다룬다.</a:t>
+              <a:t>보편 언어 인용([Evans 2015])은 "세션 01. AI 협업의 특성과 사람의 판단 책임"의 「04. 업무 규칙의 명시」에 있다. 여기서는 맥락으로 쓰는 쪽만 다룬다.</a:t>
             </a:r>
           </a:p>
           <a:p>
@@ -1136,7 +1136,7 @@
             <a:pPr lvl="0"/>
             <a:r>
               <a:rPr lang="ko-KR" sz="1200"/>
-              <a:t>두 축과 넣는 기준은 course-design.md의 「요구에서 코드까지의 경로」이며, "03. 요구의 구체화와 명세"의 「명세의 알맞은 수준과 경로」에서 명세의 높이로 다뤘다.</a:t>
+              <a:t>두 축과 넣는 기준은 course-design.md의 「요구에서 코드까지의 경로」이며, "세션 03. 요구의 구체화와 명세"의 「명세의 알맞은 수준과 경로」에서 명세의 높이로 다뤘다.</a:t>
             </a:r>
           </a:p>
           <a:p>
@@ -1286,7 +1286,7 @@
             <a:pPr lvl="0"/>
             <a:r>
               <a:rPr lang="ko-KR" sz="1200"/>
-              <a:t>용어집·도메인 모델·상태 기계·온톨로지의 뜻은 "01. AI 협업의 특성과 사람의 판단 책임"의 「04. 업무 규칙의 명시」에서 이미 정의했다. 여기서는 그중 무엇을 골라 주는가를 다룬다.</a:t>
+              <a:t>용어집·도메인 모델·상태 기계·온톨로지의 뜻은 "세션 01. AI 협업의 특성과 사람의 판단 책임"의 「04. 업무 규칙의 명시」에서 이미 정의했다. 여기서는 그중 무엇을 골라 주는가를 다룬다.</a:t>
             </a:r>
           </a:p>
         </p:txBody>
@@ -1354,7 +1354,7 @@
             <a:pPr lvl="0"/>
             <a:r>
               <a:rPr lang="ko-KR" sz="1200"/>
-              <a:t>기능 목록과 진행 기록은 "04. 수용 기준과 검증 가능한 작업 단위"의 「기능 목록과 점진적 진행」에서 [Anthropic 2025d]로 다뤘다. 실패 뒤 이어받기는 "10. 실패 대응·재시도·복구"가 맡는다.</a:t>
+              <a:t>기능 목록과 진행 기록은 "세션 04. 수용 기준과 검증 가능한 작업 단위"의 「기능 목록과 점진적 진행」에서 [Anthropic 2025d]로 다뤘다. 실패 뒤 이어받기는 "세션 10. 실패 대응·재시도·복구"가 맡는다.</a:t>
             </a:r>
           </a:p>
         </p:txBody>
@@ -1422,7 +1422,7 @@
             <a:pPr lvl="0"/>
             <a:r>
               <a:rPr lang="ko-KR" sz="1200"/>
-              <a:t>200쪽 매뉴얼 장면은 course-design.md의 강의 시나리오이며, "01. AI 협업의 특성과 사람의 판단 책임"의 「03. AI가 바꾼 것과 바꾸지 못한 것」의 「맥락의 한계」가 이 세션을 가리킨다.</a:t>
+              <a:t>200쪽 매뉴얼 장면은 course-design.md의 강의 시나리오이며, "세션 01. AI 협업의 특성과 사람의 판단 책임"의 「03. AI가 바꾼 것과 바꾸지 못한 것」의 「맥락의 한계」가 이 세션을 가리킨다.</a:t>
             </a:r>
           </a:p>
           <a:p>
@@ -1497,7 +1497,7 @@
             <a:pPr lvl="0"/>
             <a:r>
               <a:rPr lang="ko-KR" sz="1200"/>
-              <a:t>규칙을 검사로 옮기는 방법은 "08. 실행 제약과 가드레일의 역할"과 "09. 검증 하네스·결과 점검·피드백"에서 다룬다.</a:t>
+              <a:t>규칙을 검사로 옮기는 방법은 "세션 08. 실행 제약과 가드레일의 역할"과 "세션 09. 검증 하네스·결과 점검·피드백"에서 다룬다.</a:t>
             </a:r>
           </a:p>
         </p:txBody>
@@ -1769,7 +1769,7 @@
             <a:pPr lvl="0"/>
             <a:r>
               <a:rPr lang="ko-KR" sz="1200"/>
-              <a:t>값(회차 7개·70,000원)은 "03. 요구의 구체화와 명세"의 실습 답에서 정한 교육용 값이다.</a:t>
+              <a:t>값(회차 7개·70,000원)은 "세션 03. 요구의 구체화와 명세"의 실습 답에서 정한 교육용 값이다.</a:t>
             </a:r>
           </a:p>
         </p:txBody>
@@ -1837,7 +1837,7 @@
             <a:pPr lvl="0"/>
             <a:r>
               <a:rPr lang="ko-KR" sz="1200"/>
-              <a:t>용어집의 보완은 "01. AI 협업의 특성과 사람의 판단 책임"의 「04. 업무 규칙의 명시」가 보인 판매가·단가 구분과 같은 판단이다. 실습에서 같은 일이 반복되는 것을 짚는다.</a:t>
+              <a:t>용어집의 보완은 "세션 01. AI 협업의 특성과 사람의 판단 책임"의 「04. 업무 규칙의 명시」가 보인 판매가·단가 구분과 같은 판단이다. 실습에서 같은 일이 반복되는 것을 짚는다.</a:t>
             </a:r>
           </a:p>
         </p:txBody>
@@ -1905,7 +1905,7 @@
             <a:pPr lvl="0"/>
             <a:r>
               <a:rPr lang="ko-KR" sz="1200"/>
-              <a:t>두 번째 인용은 "01. AI 협업의 특성과 사람의 판단 책임"의 「03. AI가 바꾼 것과 바꾸지 못한 것」의 「맥락의 한계」에서 이미 보였다. 여기서는 고르는 기준으로 다시 쓴다.</a:t>
+              <a:t>두 번째 인용은 "세션 01. AI 협업의 특성과 사람의 판단 책임"의 「03. AI가 바꾼 것과 바꾸지 못한 것」의 「맥락의 한계」에서 이미 보였다. 여기서는 고르는 기준으로 다시 쓴다.</a:t>
             </a:r>
           </a:p>
         </p:txBody>
@@ -1973,7 +1973,7 @@
             <a:pPr lvl="0"/>
             <a:r>
               <a:rPr lang="ko-KR" sz="1200"/>
-              <a:t>첫 시도의 실패("01. AI 협업의 특성과 사람의 판단 책임")는 지시가 짧아서가 아니라 업무 규칙이 맥락에 없어서였다. 질문으로 되짚는다.</a:t>
+              <a:t>첫 시도의 실패("세션 01. AI 협업의 특성과 사람의 판단 책임")는 지시가 짧아서가 아니라 업무 규칙이 맥락에 없어서였다. 질문으로 되짚는다.</a:t>
             </a:r>
           </a:p>
         </p:txBody>
@@ -2109,7 +2109,7 @@
             <a:pPr lvl="0"/>
             <a:r>
               <a:rPr lang="ko-KR" sz="1200"/>
-              <a:t>갱신을 기계로 확인하는 방법(문서 린터·검사 작업)은 "09. 검증 하네스·결과 점검·피드백"에서 센서로 다룬다.</a:t>
+              <a:t>갱신을 기계로 확인하는 방법(문서 린터·검사 작업)은 "세션 09. 검증 하네스·결과 점검·피드백"에서 센서로 다룬다.</a:t>
             </a:r>
           </a:p>
         </p:txBody>

--- a/courses/ai-native/sessions/s05.pptx
+++ b/courses/ai-native/sessions/s05.pptx
@@ -1701,7 +1701,7 @@
             <a:pPr lvl="0"/>
             <a:r>
               <a:rPr lang="ko-KR" sz="1200"/>
-              <a:t>2의 다섯 줄이 신청한다의 판단을 바꾸는 전제다. 더 줄이면 추측이 생긴다.</a:t>
+              <a:t>2의 다섯 줄이 "신청한다"의 판단을 바꾸는 전제다. 더 줄이면 추측이 생긴다.</a:t>
             </a:r>
           </a:p>
         </p:txBody>
@@ -2313,7 +2313,7 @@
             <a:pPr lvl="0"/>
             <a:r>
               <a:rPr lang="ko-KR" sz="1200"/>
-              <a:t>주문한다에서 결제 연동 매뉴얼은 가리키기만 한다. 통째로 준 결과는 「11. 잘못된 관행」에서 본다.</a:t>
+              <a:t>"주문한다"에서 결제 연동 매뉴얼은 가리키기만 한다. 통째로 준 결과는 「11. 잘못된 관행」에서 본다.</a:t>
             </a:r>
           </a:p>
         </p:txBody>
@@ -5747,7 +5747,7 @@
                 <a:latin typeface="맑은 고딕"/>
                 <a:ea typeface="맑은 고딕"/>
               </a:rPr>
-              <a:t>주문한다</a:t>
+              <a:t>"주문한다"</a:t>
             </a:r>
             <a:r>
               <a:rPr sz="1200" b="0">
@@ -6656,7 +6656,7 @@
                           <a:ea typeface="맑은 고딕" panose="020B0503020000020004" pitchFamily="34" charset="-127"/>
                           <a:cs typeface="맑은 고딕"/>
                         </a:rPr>
-                        <a:t>주문한다의 예</a:t>
+                        <a:t>"주문한다"의 예</a:t>
                       </a:r>
                     </a:p>
                   </a:txBody>
@@ -10929,7 +10929,7 @@
                 <a:latin typeface="맑은 고딕"/>
                 <a:ea typeface="맑은 고딕"/>
               </a:rPr>
-              <a:t>주문한다의 자리</a:t>
+              <a:t>"주문한다"의 자리</a:t>
             </a:r>
             <a:r>
               <a:rPr sz="1800" b="0">
@@ -12808,7 +12808,7 @@
                 <a:latin typeface="맑은 고딕"/>
                 <a:ea typeface="맑은 고딕"/>
               </a:rPr>
-              <a:t>주문한다에서 고른 순서</a:t>
+              <a:t>"주문한다"에서 고른 순서</a:t>
             </a:r>
           </a:p>
         </p:txBody>
@@ -13919,7 +13919,7 @@
                           <a:ea typeface="맑은 고딕" panose="020B0503020000020004" pitchFamily="34" charset="-127"/>
                           <a:cs typeface="맑은 고딕"/>
                         </a:rPr>
-                        <a:t>주문한다에서</a:t>
+                        <a:t>"주문한다"에서</a:t>
                       </a:r>
                     </a:p>
                   </a:txBody>
@@ -17242,7 +17242,7 @@
                 <a:latin typeface="맑은 고딕"/>
                 <a:ea typeface="맑은 고딕"/>
               </a:rPr>
-              <a:t> 주는 것마다 신청한다의 결과를 바꾸는 이유가 있는가?</a:t>
+              <a:t> 주는 것마다 "신청한다"의 결과를 바꾸는 이유가 있는가?</a:t>
             </a:r>
           </a:p>
           <a:p>
@@ -18451,7 +18451,7 @@
                 <a:latin typeface="맑은 고딕"/>
                 <a:ea typeface="맑은 고딕"/>
               </a:rPr>
-              <a:t>신청한다</a:t>
+              <a:t>"신청한다"</a:t>
             </a:r>
             <a:r>
               <a:rPr sz="1200" b="0">
@@ -18744,7 +18744,7 @@
                 <a:latin typeface="맑은 고딕"/>
                 <a:ea typeface="맑은 고딕"/>
               </a:rPr>
-              <a:t>. 신청한다의 범위와 제외.</a:t>
+              <a:t>. "신청한다"의 범위와 제외.</a:t>
             </a:r>
           </a:p>
           <a:p>
@@ -18887,7 +18887,7 @@
                 <a:latin typeface="맑은 고딕"/>
                 <a:ea typeface="맑은 고딕"/>
               </a:rPr>
-              <a:t>신청한다 과제가 읽을 문서를 가리키는 지도</a:t>
+              <a:t>"신청한다" 과제가 읽을 문서를 가리키는 지도</a:t>
             </a:r>
             <a:r>
               <a:rPr sz="1400" b="0">
@@ -19798,7 +19798,7 @@
                 <a:latin typeface="맑은 고딕"/>
                 <a:ea typeface="맑은 고딕"/>
               </a:rPr>
-              <a:t>신청한다의 결과를 바꾸는 것만</a:t>
+              <a:t>"신청한다"의 결과를 바꾸는 것만</a:t>
             </a:r>
             <a:r>
               <a:rPr sz="1400" b="0">

--- a/courses/ai-native/sessions/s05.pptx
+++ b/courses/ai-native/sessions/s05.pptx
@@ -4482,8 +4482,8 @@
         </p:blipFill>
         <p:spPr>
           <a:xfrm>
-            <a:off x="1460500" y="4673692"/>
-            <a:ext cx="6223000" cy="579438"/>
+            <a:off x="2301689" y="4673692"/>
+            <a:ext cx="4540622" cy="1125250"/>
           </a:xfrm>
           <a:prstGeom prst="rect">
             <a:avLst/>
@@ -9953,8 +9953,8 @@
         </p:blipFill>
         <p:spPr>
           <a:xfrm>
-            <a:off x="2593731" y="3962954"/>
-            <a:ext cx="3956538" cy="2168769"/>
+            <a:off x="2432538" y="3962954"/>
+            <a:ext cx="4278923" cy="2168769"/>
           </a:xfrm>
           <a:prstGeom prst="rect">
             <a:avLst/>
@@ -17884,7 +17884,7 @@
                 <a:latin typeface="맑은 고딕"/>
                 <a:ea typeface="맑은 고딕"/>
               </a:rPr>
-              <a:t> 주의 예산을 깎고 맥락 부패를 부르므로, 넣는 근거가 있어야 한다</a:t>
+              <a:t> 주의 예산을 깎고 맥락 부패를 부른다. 근거가 필요하다</a:t>
             </a:r>
           </a:p>
           <a:p>

--- a/courses/ai-native/sessions/s05.pptx
+++ b/courses/ai-native/sessions/s05.pptx
@@ -4788,7 +4788,7 @@
                 <a:latin typeface="맑은 고딕"/>
                 <a:ea typeface="맑은 고딕"/>
               </a:rPr>
-              <a:t> — 모든 것이 중요하면 중요한 것이 없고</a:t>
+              <a:t> — 모든 것이 중요하면 중요한 것이 없고 에이전트는 의도대로 찾아가는 대신 가까운 패턴을 흉내 낸다</a:t>
             </a:r>
             <a:r>
               <a:rPr sz="1000" b="0">
@@ -4808,7 +4808,7 @@
                 <a:latin typeface="맑은 고딕"/>
                 <a:ea typeface="맑은 고딕"/>
               </a:rPr>
-              <a:t>에이전트는 의도대로 찾아가는 대신 가까운 패턴을 흉내 낸다, "Too much guidance becomes non-guidance. When everything is "important," nothing is. Agents end up pattern-matching locally instead of navigating intentionally.", [Lopopolo 2026]</a:t>
+              <a:t>"Too much guidance becomes non-guidance. When everything is "important," nothing is. Agents end up pattern-matching locally instead of navigating intentionally.", [Lopopolo 2026]</a:t>
             </a:r>
           </a:p>
           <a:p>
@@ -14578,7 +14578,7 @@
                 <a:latin typeface="맑은 고딕"/>
                 <a:ea typeface="맑은 고딕"/>
               </a:rPr>
-              <a:t>압축·구조화한 노트·하위 에이전트</a:t>
+              <a:t>압축·구조화한 노트·여러 에이전트 구조</a:t>
             </a:r>
             <a:r>
               <a:rPr sz="1800" b="0">
@@ -22456,6 +22456,16 @@
               <a:t>반복되며</a:t>
             </a:r>
             <a:r>
+              <a:rPr sz="1800" b="0">
+                <a:solidFill>
+                  <a:srgbClr val="000000"/>
+                </a:solidFill>
+                <a:latin typeface="맑은 고딕"/>
+                <a:ea typeface="맑은 고딕"/>
+              </a:rPr>
+              <a:t> 모델에 무엇을 넘길지 결정할 때마다 선별 단계가 일어난다</a:t>
+            </a:r>
+            <a:r>
               <a:rPr sz="1000" b="0">
                 <a:solidFill>
                   <a:srgbClr val="000000"/>
@@ -22473,7 +22483,7 @@
                 <a:latin typeface="맑은 고딕"/>
                 <a:ea typeface="맑은 고딕"/>
               </a:rPr>
-              <a:t>모델에 무엇을 넘길지 결정할 때마다 선별 단계가 일어난다, "iterative and the curation phase happens each time we decide what to pass to the model.", [Anthropic 2025c]</a:t>
+              <a:t>"iterative and the curation phase happens each time we decide what to pass to the model.", [Anthropic 2025c]</a:t>
             </a:r>
           </a:p>
         </p:txBody>
@@ -23580,7 +23590,7 @@
                 <a:latin typeface="맑은 고딕"/>
                 <a:ea typeface="맑은 고딕"/>
               </a:rPr>
-              <a:t>이 되고</a:t>
+              <a:t>이 된다 — 에이전트는 무엇이 아직 참인지 알 수 없고 사람은 유지를 멈춘다</a:t>
             </a:r>
             <a:r>
               <a:rPr sz="1000" b="0">
@@ -23600,7 +23610,7 @@
                 <a:latin typeface="맑은 고딕"/>
                 <a:ea typeface="맑은 고딕"/>
               </a:rPr>
-              <a:t>에이전트는 무엇이 아직 참인지 알 수 없고 사람은 유지를 멈춘다, "It rots instantly. A monolithic manual turns into a graveyard of stale rules. Agents can't tell what's still true, humans stop maintaining it", [Lopopolo 2026]</a:t>
+              <a:t>"It rots instantly. A monolithic manual turns into a graveyard of stale rules. Agents can't tell what's still true, humans stop maintaining it", [Lopopolo 2026]</a:t>
             </a:r>
           </a:p>
           <a:p>
@@ -25899,7 +25909,7 @@
                 <a:latin typeface="맑은 고딕"/>
                 <a:ea typeface="맑은 고딕"/>
               </a:rPr>
-              <a:t>"그때그때" 방식의 에이전트는 </a:t>
+              <a:t>그때그때 가져오는 에이전트는 </a:t>
             </a:r>
             <a:r>
               <a:rPr sz="1800" b="1">
@@ -25919,7 +25929,7 @@
                 <a:latin typeface="맑은 고딕"/>
                 <a:ea typeface="맑은 고딕"/>
               </a:rPr>
-              <a:t>를 들고</a:t>
+              <a:t>를 들고 실행 중에 그것으로 데이터를 불러온다</a:t>
             </a:r>
             <a:r>
               <a:rPr sz="1000" b="0">
@@ -25939,7 +25949,7 @@
                 <a:latin typeface="맑은 고딕"/>
                 <a:ea typeface="맑은 고딕"/>
               </a:rPr>
-              <a:t>실행 중에 그것으로 데이터를 불러온다, "maintain lightweight identifiers (file paths, stored queries, web links, etc.) and use these references to dynamically load data into context at runtime", [Anthropic 2025c]</a:t>
+              <a:t>"maintain lightweight identifiers (file paths, stored queries, web links, etc.) and use these references to dynamically load data into context at runtime", [Anthropic 2025c]</a:t>
             </a:r>
           </a:p>
           <a:p>

--- a/courses/ai-native/sessions/s05.pptx
+++ b/courses/ai-native/sessions/s05.pptx
@@ -775,6 +775,13 @@
             <a:pPr lvl="0"/>
             <a:r>
               <a:rPr lang="ko-KR" sz="1200"/>
+              <a:t>파일 경로와 약 30줄의 분량은 주문 사례의 예시다. 도구가 요구하는 고정 구조나 줄 수가 아니다.</a:t>
+            </a:r>
+          </a:p>
+          <a:p>
+            <a:pPr lvl="0"/>
+            <a:r>
+              <a:rPr lang="ko-KR" sz="1200"/>
               <a:t>네 번째 묶음이 「04. 맥락의 구성」의 「필요할 때 가져오기」를 실제로 적용한 자리다.</a:t>
             </a:r>
           </a:p>
@@ -1694,14 +1701,14 @@
             <a:pPr lvl="0"/>
             <a:r>
               <a:rPr lang="ko-KR" sz="1200"/>
-              <a:t>30줄 안쪽을 지키려고 규칙을 지웠다. 지운 규칙은 docs/의 문서에 있다.</a:t>
+              <a:t>상세 규칙을 중복해 쓰지 않고 해당 문서를 안내했다. 작업 개요와 완료·멈출 조건은 맥락 파일에도 간단히 남긴다.</a:t>
             </a:r>
           </a:p>
           <a:p>
             <a:pPr lvl="0"/>
             <a:r>
               <a:rPr lang="ko-KR" sz="1200"/>
-              <a:t>2의 다섯 줄이 "신청한다"의 판단을 바꾸는 전제다. 더 줄이면 추측이 생긴다.</a:t>
+              <a:t>먼저 읽을 문서가 각각 어떤 판단에 필요한지 설명하게 한다. 30줄은 실습의 분량 기준이며 도구의 제한이 아니다.</a:t>
             </a:r>
           </a:p>
         </p:txBody>
@@ -4177,7 +4184,7 @@
                 <a:latin typeface="맑은 고딕"/>
                 <a:ea typeface="맑은 고딕"/>
               </a:rPr>
-              <a:t>에이전트가 </a:t>
+              <a:t>에이전트가 문서를 찾아 읽게 하려면 </a:t>
             </a:r>
             <a:r>
               <a:rPr sz="1800" b="1">
@@ -4187,7 +4194,7 @@
                 <a:latin typeface="맑은 고딕"/>
                 <a:ea typeface="맑은 고딕"/>
               </a:rPr>
-              <a:t>실행 중에 볼 수 없는 지식은 없는 것</a:t>
+              <a:t>합의한 내용을 접근 가능한 곳에 기록</a:t>
             </a:r>
             <a:r>
               <a:rPr sz="1800" b="0">
@@ -4197,7 +4204,7 @@
                 <a:latin typeface="맑은 고딕"/>
                 <a:ea typeface="맑은 고딕"/>
               </a:rPr>
-              <a:t>이다. 회의에서 합의한 규칙도 저장소에 없으면 반영되지 않는다.</a:t>
+              <a:t>해야 한다. 업무 규칙과 설계 결정을 저장소에 두면 코드와 함께 관리할 수 있다.</a:t>
             </a:r>
           </a:p>
           <a:p>
@@ -4250,7 +4257,27 @@
                 <a:latin typeface="맑은 고딕"/>
                 <a:ea typeface="맑은 고딕"/>
               </a:rPr>
-              <a:t>"From the agent's point of view, anything it can't access in-context while running effectively doesn't exist. Knowledge that lives in Google Docs, chat threads, or people's heads are not accessible to the system.", [Lopopolo 2026]</a:t>
+              <a:t>"From the agent's point of view, anything it can't access in-context while running effectively doesn't exist. Knowledge that lives in Google Docs, chat threads, or people's heads are not accessible to the system."</a:t>
+            </a:r>
+            <a:r>
+              <a:rPr sz="1000" b="0">
+                <a:solidFill>
+                  <a:srgbClr val="000000"/>
+                </a:solidFill>
+                <a:latin typeface="맑은 고딕"/>
+                <a:ea typeface="맑은 고딕"/>
+              </a:rPr>
+              <a:t>, </a:t>
+            </a:r>
+            <a:r>
+              <a:rPr sz="1000" b="0">
+                <a:solidFill>
+                  <a:srgbClr val="000000"/>
+                </a:solidFill>
+                <a:latin typeface="맑은 고딕"/>
+                <a:ea typeface="맑은 고딕"/>
+              </a:rPr>
+              <a:t>[Lopopolo 2026]</a:t>
             </a:r>
           </a:p>
           <a:p>
@@ -4273,7 +4300,7 @@
                 <a:latin typeface="맑은 고딕"/>
                 <a:ea typeface="맑은 고딕"/>
               </a:rPr>
-              <a:t>옮길 것</a:t>
+              <a:t>기록할 내용</a:t>
             </a:r>
             <a:r>
               <a:rPr sz="1800" b="0">
@@ -4293,7 +4320,7 @@
                 <a:latin typeface="맑은 고딕"/>
                 <a:ea typeface="맑은 고딕"/>
               </a:rPr>
-              <a:t> 업무 담당자와 정한 규칙, 설계 결정, 미정으로 남긴 질문이다.</a:t>
+              <a:t> 업무 담당자와 정한 규칙, 설계 결정, 아직 답하지 못한 질문을 남긴다.</a:t>
             </a:r>
           </a:p>
           <a:p>
@@ -4316,7 +4343,7 @@
                 <a:latin typeface="맑은 고딕"/>
                 <a:ea typeface="맑은 고딕"/>
               </a:rPr>
-              <a:t>옮기는 방법</a:t>
+              <a:t>기록 방법</a:t>
             </a:r>
             <a:r>
               <a:rPr sz="1800" b="0">
@@ -4336,47 +4363,7 @@
                 <a:latin typeface="맑은 고딕"/>
                 <a:ea typeface="맑은 고딕"/>
               </a:rPr>
-              <a:t> 버전이 관리되는 </a:t>
-            </a:r>
-            <a:r>
-              <a:rPr sz="1600" b="1">
-                <a:solidFill>
-                  <a:srgbClr val="000000"/>
-                </a:solidFill>
-                <a:latin typeface="맑은 고딕"/>
-                <a:ea typeface="맑은 고딕"/>
-              </a:rPr>
-              <a:t>마크다운·코드·테스트</a:t>
-            </a:r>
-            <a:r>
-              <a:rPr sz="1600" b="0">
-                <a:solidFill>
-                  <a:srgbClr val="000000"/>
-                </a:solidFill>
-                <a:latin typeface="맑은 고딕"/>
-                <a:ea typeface="맑은 고딕"/>
-              </a:rPr>
-              <a:t>로 둔다. 형식보다 </a:t>
-            </a:r>
-            <a:r>
-              <a:rPr sz="1600" b="1">
-                <a:solidFill>
-                  <a:srgbClr val="000000"/>
-                </a:solidFill>
-                <a:latin typeface="맑은 고딕"/>
-                <a:ea typeface="맑은 고딕"/>
-              </a:rPr>
-              <a:t>찾을 수 있음</a:t>
-            </a:r>
-            <a:r>
-              <a:rPr sz="1600" b="0">
-                <a:solidFill>
-                  <a:srgbClr val="000000"/>
-                </a:solidFill>
-                <a:latin typeface="맑은 고딕"/>
-                <a:ea typeface="맑은 고딕"/>
-              </a:rPr>
-              <a:t>이 중요하다.</a:t>
+              <a:t> 문서·코드·테스트로 작성하고 버전을 관리한다. 에이전트가 필요한 자료를 찾을 수 있도록 맥락 파일에서 안내한다.</a:t>
             </a:r>
           </a:p>
           <a:p>
@@ -4399,7 +4386,7 @@
                 <a:latin typeface="맑은 고딕"/>
                 <a:ea typeface="맑은 고딕"/>
               </a:rPr>
-              <a:t>덤으로 얻는 것</a:t>
+              <a:t>팀의 활용</a:t>
             </a:r>
             <a:r>
               <a:rPr sz="1800" b="0">
@@ -4419,7 +4406,7 @@
                 <a:latin typeface="맑은 고딕"/>
                 <a:ea typeface="맑은 고딕"/>
               </a:rPr>
-              <a:t> 사람이 새로 들어와도 같은 곳을 읽는다.</a:t>
+              <a:t> 새로 참여한 개발자도 같은 자료를 읽고 결정의 근거를 확인할 수 있다.</a:t>
             </a:r>
           </a:p>
         </p:txBody>
@@ -4438,7 +4425,7 @@
         </p:nvSpPr>
         <p:spPr>
           <a:xfrm>
-            <a:off x="365760" y="4435948"/>
+            <a:off x="365760" y="4984588"/>
             <a:ext cx="8412480" cy="201168"/>
           </a:xfrm>
           <a:prstGeom prst="rect">
@@ -4482,8 +4469,8 @@
         </p:blipFill>
         <p:spPr>
           <a:xfrm>
-            <a:off x="2301689" y="4673692"/>
-            <a:ext cx="4540622" cy="1125250"/>
+            <a:off x="2107406" y="5222332"/>
+            <a:ext cx="4929188" cy="1127125"/>
           </a:xfrm>
           <a:prstGeom prst="rect">
             <a:avLst/>
@@ -4725,7 +4712,7 @@
                 <a:latin typeface="맑은 고딕"/>
                 <a:ea typeface="맑은 고딕"/>
               </a:rPr>
-              <a:t>맥락 파일 하나에 모든 지침을 담으면 </a:t>
+              <a:t>모든 지침을 한 파일에 모으면, 에이전트가 </a:t>
             </a:r>
             <a:r>
               <a:rPr sz="1800" b="1">
@@ -4735,7 +4722,7 @@
                 <a:latin typeface="맑은 고딕"/>
                 <a:ea typeface="맑은 고딕"/>
               </a:rPr>
-              <a:t>지침이 아니게 된다</a:t>
+              <a:t>현재 작업에 필요한 규칙을 찾기 어려워진다</a:t>
             </a:r>
             <a:r>
               <a:rPr sz="1800" b="0">
@@ -4808,7 +4795,27 @@
                 <a:latin typeface="맑은 고딕"/>
                 <a:ea typeface="맑은 고딕"/>
               </a:rPr>
-              <a:t>"Too much guidance becomes non-guidance. When everything is "important," nothing is. Agents end up pattern-matching locally instead of navigating intentionally.", [Lopopolo 2026]</a:t>
+              <a:t>"Too much guidance becomes non-guidance. When everything is "important," nothing is. Agents end up pattern-matching locally instead of navigating intentionally."</a:t>
+            </a:r>
+            <a:r>
+              <a:rPr sz="1000" b="0">
+                <a:solidFill>
+                  <a:srgbClr val="000000"/>
+                </a:solidFill>
+                <a:latin typeface="맑은 고딕"/>
+                <a:ea typeface="맑은 고딕"/>
+              </a:rPr>
+              <a:t>, </a:t>
+            </a:r>
+            <a:r>
+              <a:rPr sz="1000" b="0">
+                <a:solidFill>
+                  <a:srgbClr val="000000"/>
+                </a:solidFill>
+                <a:latin typeface="맑은 고딕"/>
+                <a:ea typeface="맑은 고딕"/>
+              </a:rPr>
+              <a:t>[Lopopolo 2026]</a:t>
             </a:r>
           </a:p>
           <a:p>
@@ -4831,7 +4838,7 @@
                 <a:latin typeface="맑은 고딕"/>
                 <a:ea typeface="맑은 고딕"/>
               </a:rPr>
-              <a:t>과제를 밀어낸다</a:t>
+              <a:t>입력 공간을 차지한다</a:t>
             </a:r>
             <a:r>
               <a:rPr sz="1800" b="0">
@@ -4851,27 +4858,7 @@
                 <a:latin typeface="맑은 고딕"/>
                 <a:ea typeface="맑은 고딕"/>
               </a:rPr>
-              <a:t> 큰 지시 파일이 창을 차지해 </a:t>
-            </a:r>
-            <a:r>
-              <a:rPr sz="1600" b="1">
-                <a:solidFill>
-                  <a:srgbClr val="000000"/>
-                </a:solidFill>
-                <a:latin typeface="맑은 고딕"/>
-                <a:ea typeface="맑은 고딕"/>
-              </a:rPr>
-              <a:t>코드와 문서가 들어갈 자리</a:t>
-            </a:r>
-            <a:r>
-              <a:rPr sz="1600" b="0">
-                <a:solidFill>
-                  <a:srgbClr val="000000"/>
-                </a:solidFill>
-                <a:latin typeface="맑은 고딕"/>
-                <a:ea typeface="맑은 고딕"/>
-              </a:rPr>
-              <a:t>를 없앤다.</a:t>
+              <a:t> 관련 없는 지침까지 함께 읽으면, 작업에 필요한 코드와 문서를 제공할 공간이 줄어든다.</a:t>
             </a:r>
           </a:p>
           <a:p>
@@ -4894,7 +4881,7 @@
                 <a:latin typeface="맑은 고딕"/>
                 <a:ea typeface="맑은 고딕"/>
               </a:rPr>
-              <a:t>검증할 수 없다</a:t>
+              <a:t>갱신하기 어렵다</a:t>
             </a:r>
             <a:r>
               <a:rPr sz="1800" b="0">
@@ -4914,7 +4901,7 @@
                 <a:latin typeface="맑은 고딕"/>
                 <a:ea typeface="맑은 고딕"/>
               </a:rPr>
-              <a:t> 한 덩어리는 최신인지 기계로 확인하기 어렵다.</a:t>
+              <a:t> 서로 다른 주제의 규칙이 섞여 있으면, 어떤 내용을 고치고 검사해야 하는지 파악하기 어렵다.</a:t>
             </a:r>
           </a:p>
         </p:txBody>
@@ -5154,7 +5141,7 @@
                 <a:latin typeface="맑은 고딕"/>
                 <a:ea typeface="맑은 고딕"/>
               </a:rPr>
-              <a:t>맥락 파일은 </a:t>
+              <a:t>맥락 파일에는 </a:t>
             </a:r>
             <a:r>
               <a:rPr sz="1800" b="1">
@@ -5164,7 +5151,7 @@
                 <a:latin typeface="맑은 고딕"/>
                 <a:ea typeface="맑은 고딕"/>
               </a:rPr>
-              <a:t>백과사전이 아니라 지도</a:t>
+              <a:t>작업의 개요와 문서 안내</a:t>
             </a:r>
             <a:r>
               <a:rPr sz="1800" b="0">
@@ -5174,7 +5161,7 @@
                 <a:latin typeface="맑은 고딕"/>
                 <a:ea typeface="맑은 고딕"/>
               </a:rPr>
-              <a:t>다. 작은 진입점을 주고 어디를 볼지 알려 준다.</a:t>
+              <a:t>를 둔다. 상세한 규칙은 해당 문서에서 읽게 하면, 모든 내용을 한 번에 제공하지 않아도 된다.</a:t>
             </a:r>
           </a:p>
           <a:p>
@@ -5237,7 +5224,27 @@
                 <a:latin typeface="맑은 고딕"/>
                 <a:ea typeface="맑은 고딕"/>
               </a:rPr>
-              <a:t>"give Codex a map, not a 1,000-page instruction manual", [Lopopolo 2026]</a:t>
+              <a:t>"give Codex a map, not a 1,000-page instruction manual"</a:t>
+            </a:r>
+            <a:r>
+              <a:rPr sz="1000" b="0">
+                <a:solidFill>
+                  <a:srgbClr val="000000"/>
+                </a:solidFill>
+                <a:latin typeface="맑은 고딕"/>
+                <a:ea typeface="맑은 고딕"/>
+              </a:rPr>
+              <a:t>, </a:t>
+            </a:r>
+            <a:r>
+              <a:rPr sz="1000" b="0">
+                <a:solidFill>
+                  <a:srgbClr val="000000"/>
+                </a:solidFill>
+                <a:latin typeface="맑은 고딕"/>
+                <a:ea typeface="맑은 고딕"/>
+              </a:rPr>
+              <a:t>[Lopopolo 2026]</a:t>
             </a:r>
           </a:p>
           <a:p>
@@ -5343,7 +5350,7 @@
                 <a:latin typeface="맑은 고딕"/>
                 <a:ea typeface="맑은 고딕"/>
               </a:rPr>
-              <a:t>이렇게 하면 </a:t>
+              <a:t>에이전트가 문서 안내를 따라 필요한 정보를 차례로 읽는 방식이 </a:t>
             </a:r>
             <a:r>
               <a:rPr sz="1800" b="1">
@@ -5373,7 +5380,7 @@
                 <a:latin typeface="맑은 고딕"/>
                 <a:ea typeface="맑은 고딕"/>
               </a:rPr>
-              <a:t>가 가능하다. 에이전트는 작고 안정된 입구에서 시작해 다음에 볼 곳을 배운다.</a:t>
+              <a:t>다.</a:t>
             </a:r>
           </a:p>
           <a:p>
@@ -5436,7 +5443,27 @@
                 <a:latin typeface="맑은 고딕"/>
                 <a:ea typeface="맑은 고딕"/>
               </a:rPr>
-              <a:t>"progressive disclosure—in other words, allows agents to incrementally discover relevant context through exploration.", [Anthropic 2025c]</a:t>
+              <a:t>"progressive disclosure—in other words, allows agents to incrementally discover relevant context through exploration."</a:t>
+            </a:r>
+            <a:r>
+              <a:rPr sz="1000" b="0">
+                <a:solidFill>
+                  <a:srgbClr val="000000"/>
+                </a:solidFill>
+                <a:latin typeface="맑은 고딕"/>
+                <a:ea typeface="맑은 고딕"/>
+              </a:rPr>
+              <a:t>, </a:t>
+            </a:r>
+            <a:r>
+              <a:rPr sz="1000" b="0">
+                <a:solidFill>
+                  <a:srgbClr val="000000"/>
+                </a:solidFill>
+                <a:latin typeface="맑은 고딕"/>
+                <a:ea typeface="맑은 고딕"/>
+              </a:rPr>
+              <a:t>[Anthropic 2025c]</a:t>
             </a:r>
           </a:p>
         </p:txBody>
@@ -5654,8 +5681,8 @@
         </p:nvSpPr>
         <p:spPr>
           <a:xfrm>
-            <a:off x="233172" y="1414318"/>
-            <a:ext cx="4338828" cy="4898147"/>
+            <a:off x="233172" y="1616364"/>
+            <a:ext cx="4338828" cy="4696101"/>
           </a:xfrm>
         </p:spPr>
         <p:txBody>
@@ -6001,7 +6028,7 @@
         <p:spPr>
           <a:xfrm>
             <a:off x="233172" y="960120"/>
-            <a:ext cx="8778240" cy="454198"/>
+            <a:ext cx="8778240" cy="656244"/>
           </a:xfrm>
         </p:spPr>
         <p:txBody>
@@ -6027,7 +6054,7 @@
                 <a:latin typeface="맑은 고딕"/>
                 <a:ea typeface="맑은 고딕"/>
               </a:rPr>
-              <a:t>주문 저장소의 맥락 파일은 </a:t>
+              <a:t>주문 시스템의 맥락 파일은 </a:t>
             </a:r>
             <a:r>
               <a:rPr sz="1400" b="1">
@@ -6037,7 +6064,7 @@
                 <a:latin typeface="맑은 고딕"/>
                 <a:ea typeface="맑은 고딕"/>
               </a:rPr>
-              <a:t>약 30줄의 지도</a:t>
+              <a:t>먼저 읽을 문서와 필요할 때 읽을 문서를 구분</a:t>
             </a:r>
             <a:r>
               <a:rPr sz="1400" b="0">
@@ -6047,47 +6074,7 @@
                 <a:latin typeface="맑은 고딕"/>
                 <a:ea typeface="맑은 고딕"/>
               </a:rPr>
-              <a:t>다. 각 줄이 </a:t>
-            </a:r>
-            <a:r>
-              <a:rPr sz="1400" b="1">
-                <a:solidFill>
-                  <a:srgbClr val="000000"/>
-                </a:solidFill>
-                <a:latin typeface="맑은 고딕"/>
-                <a:ea typeface="맑은 고딕"/>
-              </a:rPr>
-              <a:t>어느 파일을 왜 보는지</a:t>
-            </a:r>
-            <a:r>
-              <a:rPr sz="1400" b="0">
-                <a:solidFill>
-                  <a:srgbClr val="000000"/>
-                </a:solidFill>
-                <a:latin typeface="맑은 고딕"/>
-                <a:ea typeface="맑은 고딕"/>
-              </a:rPr>
-              <a:t>를 말하고, 규칙 자체는 </a:t>
-            </a:r>
-            <a:r>
-              <a:rPr sz="1400" b="0">
-                <a:solidFill>
-                  <a:srgbClr val="000000"/>
-                </a:solidFill>
-                <a:latin typeface="맑은 고딕"/>
-                <a:ea typeface="맑은 고딕"/>
-              </a:rPr>
-              <a:t>docs/</a:t>
-            </a:r>
-            <a:r>
-              <a:rPr sz="1400" b="0">
-                <a:solidFill>
-                  <a:srgbClr val="000000"/>
-                </a:solidFill>
-                <a:latin typeface="맑은 고딕"/>
-                <a:ea typeface="맑은 고딕"/>
-              </a:rPr>
-              <a:t>가 가진다.</a:t>
+              <a:t>한다. 업무 규칙은 문서에 두고, 맥락 파일에는 각 문서를 읽어야 하는 이유를 적는다.</a:t>
             </a:r>
           </a:p>
         </p:txBody>
@@ -6110,8 +6097,8 @@
         </p:nvSpPr>
         <p:spPr>
           <a:xfrm>
-            <a:off x="4572000" y="1414318"/>
-            <a:ext cx="4439412" cy="4898147"/>
+            <a:off x="4572000" y="1616364"/>
+            <a:ext cx="4439412" cy="4696101"/>
           </a:xfrm>
         </p:spPr>
         <p:txBody>
@@ -6307,7 +6294,7 @@
                 <a:latin typeface="맑은 고딕"/>
                 <a:ea typeface="맑은 고딕"/>
               </a:rPr>
-              <a:t>. 요청할 때만 읽는다.</a:t>
+              <a:t>. 결제 승인 요청을 구현할 때 읽는다.</a:t>
             </a:r>
           </a:p>
         </p:txBody>
@@ -7262,7 +7249,7 @@
                 <a:latin typeface="맑은 고딕"/>
                 <a:ea typeface="맑은 고딕"/>
               </a:rPr>
-              <a:t>도메인 지식의 맥락은 </a:t>
+              <a:t>분석 모델은 </a:t>
             </a:r>
             <a:r>
               <a:rPr sz="1800" b="1">
@@ -7272,7 +7259,7 @@
                 <a:latin typeface="맑은 고딕"/>
                 <a:ea typeface="맑은 고딕"/>
               </a:rPr>
-              <a:t>분석 모델</a:t>
+              <a:t>업무의 개념·관계·상태·규칙</a:t>
             </a:r>
             <a:r>
               <a:rPr sz="1800" b="0">
@@ -7282,27 +7269,7 @@
                 <a:latin typeface="맑은 고딕"/>
                 <a:ea typeface="맑은 고딕"/>
               </a:rPr>
-              <a:t>이다. 분석 모델은 업무의 </a:t>
-            </a:r>
-            <a:r>
-              <a:rPr sz="1800" b="1">
-                <a:solidFill>
-                  <a:srgbClr val="000000"/>
-                </a:solidFill>
-                <a:latin typeface="맑은 고딕"/>
-                <a:ea typeface="맑은 고딕"/>
-              </a:rPr>
-              <a:t>본질적 복잡성</a:t>
-            </a:r>
-            <a:r>
-              <a:rPr sz="1800" b="0">
-                <a:solidFill>
-                  <a:srgbClr val="000000"/>
-                </a:solidFill>
-                <a:latin typeface="맑은 고딕"/>
-                <a:ea typeface="맑은 고딕"/>
-              </a:rPr>
-              <a:t>을 적고, 구현 수단은 적지 않는다.</a:t>
+              <a:t>을 설명한다. 이를 맥락으로 제공하면 에이전트가 업무의 의미를 확인하면서 구현할 수 있다.</a:t>
             </a:r>
           </a:p>
         </p:txBody>
@@ -7468,7 +7435,7 @@
                 <a:latin typeface="맑은 고딕"/>
                 <a:ea typeface="맑은 고딕"/>
               </a:rPr>
-              <a:t>왜 나누는가</a:t>
+              <a:t>업무와 구현의 구분</a:t>
             </a:r>
             <a:r>
               <a:rPr sz="1800" b="0">
@@ -7488,27 +7455,7 @@
                 <a:latin typeface="맑은 고딕"/>
                 <a:ea typeface="맑은 고딕"/>
               </a:rPr>
-              <a:t> 구현을 섞어 적으면 에이전트가 </a:t>
-            </a:r>
-            <a:r>
-              <a:rPr sz="1600" b="1">
-                <a:solidFill>
-                  <a:srgbClr val="000000"/>
-                </a:solidFill>
-                <a:latin typeface="맑은 고딕"/>
-                <a:ea typeface="맑은 고딕"/>
-              </a:rPr>
-              <a:t>규칙과 수단을 구분하지 못한다</a:t>
-            </a:r>
-            <a:r>
-              <a:rPr sz="1600" b="0">
-                <a:solidFill>
-                  <a:srgbClr val="000000"/>
-                </a:solidFill>
-                <a:latin typeface="맑은 고딕"/>
-                <a:ea typeface="맑은 고딕"/>
-              </a:rPr>
-              <a:t>.</a:t>
+              <a:t> 업무 규칙과 기술 선택을 구분해 적어야, 에이전트가 규칙을 지키면서 구현 방법을 선택할 수 있다.</a:t>
             </a:r>
           </a:p>
           <a:p>
@@ -7531,7 +7478,7 @@
                 <a:latin typeface="맑은 고딕"/>
                 <a:ea typeface="맑은 고딕"/>
               </a:rPr>
-              <a:t>역사적 뿌리</a:t>
+              <a:t>분석의 관점</a:t>
             </a:r>
             <a:r>
               <a:rPr sz="1800" b="0">
@@ -7551,47 +7498,7 @@
                 <a:latin typeface="맑은 고딕"/>
                 <a:ea typeface="맑은 고딕"/>
               </a:rPr>
-              <a:t> 정보공학은 자료 흐름과 정보 구조를 </a:t>
-            </a:r>
-            <a:r>
-              <a:rPr sz="1600" b="1">
-                <a:solidFill>
-                  <a:srgbClr val="000000"/>
-                </a:solidFill>
-                <a:latin typeface="맑은 고딕"/>
-                <a:ea typeface="맑은 고딕"/>
-              </a:rPr>
-              <a:t>함께</a:t>
-            </a:r>
-            <a:r>
-              <a:rPr sz="1600" b="0">
-                <a:solidFill>
-                  <a:srgbClr val="000000"/>
-                </a:solidFill>
-                <a:latin typeface="맑은 고딕"/>
-                <a:ea typeface="맑은 고딕"/>
-              </a:rPr>
-              <a:t> 적어 업무를 분석했고, 객체지향 분석은 같은 업무를 </a:t>
-            </a:r>
-            <a:r>
-              <a:rPr sz="1600" b="1">
-                <a:solidFill>
-                  <a:srgbClr val="000000"/>
-                </a:solidFill>
-                <a:latin typeface="맑은 고딕"/>
-                <a:ea typeface="맑은 고딕"/>
-              </a:rPr>
-              <a:t>책임과 상태</a:t>
-            </a:r>
-            <a:r>
-              <a:rPr sz="1600" b="0">
-                <a:solidFill>
-                  <a:srgbClr val="000000"/>
-                </a:solidFill>
-                <a:latin typeface="맑은 고딕"/>
-                <a:ea typeface="맑은 고딕"/>
-              </a:rPr>
-              <a:t>로 적는다.</a:t>
+              <a:t> 정보공학은 자료 흐름과 정보 구조를 함께 살피고, 객체지향 분석은 업무 개념의 관계와 상태 변화를 함께 살핀다.</a:t>
             </a:r>
           </a:p>
         </p:txBody>
@@ -7836,7 +7743,7 @@
                 <a:latin typeface="맑은 고딕"/>
                 <a:ea typeface="맑은 고딕"/>
               </a:rPr>
-              <a:t>분석 모델은 </a:t>
+              <a:t>정적 모델은 </a:t>
             </a:r>
             <a:r>
               <a:rPr sz="1800" b="1">
@@ -7846,7 +7753,7 @@
                 <a:latin typeface="맑은 고딕"/>
                 <a:ea typeface="맑은 고딕"/>
               </a:rPr>
-              <a:t>정적 모델과 동적 모델</a:t>
+              <a:t>업무 개념의 구조</a:t>
             </a:r>
             <a:r>
               <a:rPr sz="1800" b="0">
@@ -7856,7 +7763,27 @@
                 <a:latin typeface="맑은 고딕"/>
                 <a:ea typeface="맑은 고딕"/>
               </a:rPr>
-              <a:t>이 짝을 이룬다. 하나만 주면 에이전트가 나머지를 추측한다.</a:t>
+              <a:t>를, 동적 모델은 </a:t>
+            </a:r>
+            <a:r>
+              <a:rPr sz="1800" b="1">
+                <a:solidFill>
+                  <a:srgbClr val="000000"/>
+                </a:solidFill>
+                <a:latin typeface="맑은 고딕"/>
+                <a:ea typeface="맑은 고딕"/>
+              </a:rPr>
+              <a:t>사건에 따른 상태 변화</a:t>
+            </a:r>
+            <a:r>
+              <a:rPr sz="1800" b="0">
+                <a:solidFill>
+                  <a:srgbClr val="000000"/>
+                </a:solidFill>
+                <a:latin typeface="맑은 고딕"/>
+                <a:ea typeface="맑은 고딕"/>
+              </a:rPr>
+              <a:t>를 설명한다. 작업에 필요한 구조와 동작을 함께 알려 주어야 추측을 줄일 수 있다.</a:t>
             </a:r>
           </a:p>
           <a:p>
@@ -7899,7 +7826,7 @@
                 <a:latin typeface="맑은 고딕"/>
                 <a:ea typeface="맑은 고딕"/>
               </a:rPr>
-              <a:t> 단가가 </a:t>
+              <a:t> 주문 항목의 </a:t>
             </a:r>
             <a:r>
               <a:rPr sz="1600" b="1">
@@ -7909,7 +7836,7 @@
                 <a:latin typeface="맑은 고딕"/>
                 <a:ea typeface="맑은 고딕"/>
               </a:rPr>
-              <a:t>주문 항목에 있다</a:t>
+              <a:t>단가</a:t>
             </a:r>
             <a:r>
               <a:rPr sz="1600" b="0">
@@ -7919,7 +7846,27 @@
                 <a:latin typeface="맑은 고딕"/>
                 <a:ea typeface="맑은 고딕"/>
               </a:rPr>
-              <a:t>. 상품의 판매가와 다른 자리다.</a:t>
+              <a:t>와 상품의 </a:t>
+            </a:r>
+            <a:r>
+              <a:rPr sz="1600" b="1">
+                <a:solidFill>
+                  <a:srgbClr val="000000"/>
+                </a:solidFill>
+                <a:latin typeface="맑은 고딕"/>
+                <a:ea typeface="맑은 고딕"/>
+              </a:rPr>
+              <a:t>판매가</a:t>
+            </a:r>
+            <a:r>
+              <a:rPr sz="1600" b="0">
+                <a:solidFill>
+                  <a:srgbClr val="000000"/>
+                </a:solidFill>
+                <a:latin typeface="맑은 고딕"/>
+                <a:ea typeface="맑은 고딕"/>
+              </a:rPr>
+              <a:t>를 구분한다. 주문 금액을 계산할 때 어떤 값을 쓸지 판단하는 근거다.</a:t>
             </a:r>
           </a:p>
           <a:p>
@@ -7962,7 +7909,7 @@
                 <a:latin typeface="맑은 고딕"/>
                 <a:ea typeface="맑은 고딕"/>
               </a:rPr>
-              <a:t> 결제 거절이 </a:t>
+              <a:t> 결제가 거절되면 주문이 </a:t>
             </a:r>
             <a:r>
               <a:rPr sz="1600" b="1">
@@ -7972,7 +7919,7 @@
                 <a:latin typeface="맑은 고딕"/>
                 <a:ea typeface="맑은 고딕"/>
               </a:rPr>
-              <a:t>결제대기에 머무는 전이</a:t>
+              <a:t>결제대기에 머문다</a:t>
             </a:r>
             <a:r>
               <a:rPr sz="1600" b="0">
@@ -7982,7 +7929,7 @@
                 <a:latin typeface="맑은 고딕"/>
                 <a:ea typeface="맑은 고딕"/>
               </a:rPr>
-              <a:t>다.</a:t>
+              <a:t>는 규칙을 보여 준다.</a:t>
             </a:r>
           </a:p>
           <a:p>
@@ -8005,7 +7952,7 @@
                 <a:latin typeface="맑은 고딕"/>
                 <a:ea typeface="맑은 고딕"/>
               </a:rPr>
-              <a:t>둘이 함께</a:t>
+              <a:t>함께 제공하는 이유</a:t>
             </a:r>
             <a:r>
               <a:rPr sz="1800" b="0">
@@ -8015,7 +7962,17 @@
                 <a:latin typeface="맑은 고딕"/>
                 <a:ea typeface="맑은 고딕"/>
               </a:rPr>
-              <a:t> 있어야 "거절되면 취소됨"이라는 추측이 생기지 않는다.</a:t>
+              <a:t> —</a:t>
+            </a:r>
+            <a:r>
+              <a:rPr sz="1600" b="0">
+                <a:solidFill>
+                  <a:srgbClr val="000000"/>
+                </a:solidFill>
+                <a:latin typeface="맑은 고딕"/>
+                <a:ea typeface="맑은 고딕"/>
+              </a:rPr>
+              <a:t> 구조만으로는 결제 거절 뒤의 상태를 알 수 없고, 상태 변화만으로는 금액의 근거를 알 수 없다.</a:t>
             </a:r>
           </a:p>
         </p:txBody>
@@ -8034,7 +7991,7 @@
         </p:nvSpPr>
         <p:spPr>
           <a:xfrm>
-            <a:off x="365760" y="2938272"/>
+            <a:off x="365760" y="4035552"/>
             <a:ext cx="8412480" cy="201168"/>
           </a:xfrm>
           <a:prstGeom prst="rect">
@@ -8078,7 +8035,7 @@
         </p:blipFill>
         <p:spPr>
           <a:xfrm>
-            <a:off x="3331308" y="3176016"/>
+            <a:off x="3331308" y="4273296"/>
             <a:ext cx="2481385" cy="798635"/>
           </a:xfrm>
           <a:prstGeom prst="rect">
@@ -8298,7 +8255,7 @@
                           <a:ea typeface="맑은 고딕" panose="020B0503020000020004" pitchFamily="34" charset="-127"/>
                           <a:cs typeface="맑은 고딕"/>
                         </a:rPr>
-                        <a:t>자리</a:t>
+                        <a:t>자료</a:t>
                       </a:r>
                     </a:p>
                   </a:txBody>
@@ -9036,7 +8993,7 @@
                 <a:latin typeface="맑은 고딕"/>
                 <a:ea typeface="맑은 고딕"/>
               </a:rPr>
-              <a:t>분석은 </a:t>
+              <a:t>OOAD의 분석 모델은 </a:t>
             </a:r>
             <a:r>
               <a:rPr sz="1800" b="1">
@@ -9046,7 +9003,7 @@
                 <a:latin typeface="맑은 고딕"/>
                 <a:ea typeface="맑은 고딕"/>
               </a:rPr>
-              <a:t>한글</a:t>
+              <a:t>업무의 의미와 구조</a:t>
             </a:r>
             <a:r>
               <a:rPr sz="1800" b="0">
@@ -9056,27 +9013,7 @@
                 <a:latin typeface="맑은 고딕"/>
                 <a:ea typeface="맑은 고딕"/>
               </a:rPr>
-              <a:t>, 설계와 코드는 </a:t>
-            </a:r>
-            <a:r>
-              <a:rPr sz="1800" b="1">
-                <a:solidFill>
-                  <a:srgbClr val="000000"/>
-                </a:solidFill>
-                <a:latin typeface="맑은 고딕"/>
-                <a:ea typeface="맑은 고딕"/>
-              </a:rPr>
-              <a:t>용어집의 영문명</a:t>
-            </a:r>
-            <a:r>
-              <a:rPr sz="1800" b="0">
-                <a:solidFill>
-                  <a:srgbClr val="000000"/>
-                </a:solidFill>
-                <a:latin typeface="맑은 고딕"/>
-                <a:ea typeface="맑은 고딕"/>
-              </a:rPr>
-              <a:t>이다. 둘을 잇는 것이 용어집이다.</a:t>
+              <a:t>를 설명한다. DDD의 보편 언어는 그 의미를 대화와 코드에서 일관되게 표현하도록 한다.</a:t>
             </a:r>
           </a:p>
         </p:txBody>
@@ -9190,7 +9127,7 @@
                 <a:latin typeface="맑은 고딕"/>
                 <a:ea typeface="맑은 고딕"/>
               </a:rPr>
-              <a:t>용어집이 잇는 세 자리</a:t>
+              <a:t>업무 용어와 코드 이름의 대응</a:t>
             </a:r>
           </a:p>
         </p:txBody>
@@ -9242,7 +9179,7 @@
                 <a:latin typeface="맑은 고딕"/>
                 <a:ea typeface="맑은 고딕"/>
               </a:rPr>
-              <a:t>DDD의 보편 언어</a:t>
+              <a:t>용어의 일관성</a:t>
             </a:r>
             <a:r>
               <a:rPr sz="1800" b="0">
@@ -9262,27 +9199,7 @@
                 <a:latin typeface="맑은 고딕"/>
                 <a:ea typeface="맑은 고딕"/>
               </a:rPr>
-              <a:t> 대화와 코드가 </a:t>
-            </a:r>
-            <a:r>
-              <a:rPr sz="1600" b="1">
-                <a:solidFill>
-                  <a:srgbClr val="000000"/>
-                </a:solidFill>
-                <a:latin typeface="맑은 고딕"/>
-                <a:ea typeface="맑은 고딕"/>
-              </a:rPr>
-              <a:t>같은 언어</a:t>
-            </a:r>
-            <a:r>
-              <a:rPr sz="1600" b="0">
-                <a:solidFill>
-                  <a:srgbClr val="000000"/>
-                </a:solidFill>
-                <a:latin typeface="맑은 고딕"/>
-                <a:ea typeface="맑은 고딕"/>
-              </a:rPr>
-              <a:t>를 쓴다는 원칙이다. 용어집이 그 언어의 뼈대다.</a:t>
+              <a:t> 한글 업무 용어와 영문 코드 이름을 용어집에서 연결한다. 표현 언어가 달라도 같은 업무 개념을 뜻해야 한다.</a:t>
             </a:r>
           </a:p>
           <a:p>
@@ -9305,7 +9222,7 @@
                 <a:latin typeface="맑은 고딕"/>
                 <a:ea typeface="맑은 고딕"/>
               </a:rPr>
-              <a:t>에이전트에게 주는 효과</a:t>
+              <a:t>에이전트의 활용</a:t>
             </a:r>
             <a:r>
               <a:rPr sz="1800" b="0">
@@ -9325,17 +9242,7 @@
                 <a:latin typeface="맑은 고딕"/>
                 <a:ea typeface="맑은 고딕"/>
               </a:rPr>
-              <a:t> 용어집이 있으면 한글 명세를 영문 코드로 옮길 때 </a:t>
-            </a:r>
-            <a:r>
-              <a:rPr sz="1600" b="1">
-                <a:solidFill>
-                  <a:srgbClr val="000000"/>
-                </a:solidFill>
-                <a:latin typeface="맑은 고딕"/>
-                <a:ea typeface="맑은 고딕"/>
-              </a:rPr>
-              <a:t>이름을 지어내지 않는다</a:t>
+              <a:t> 용어집을 읽고 정해진 코드 이름을 사용하게 한다. 예를 들어 단가는 </a:t>
             </a:r>
             <a:r>
               <a:rPr sz="1600" b="0">
@@ -9345,7 +9252,17 @@
                 <a:latin typeface="맑은 고딕"/>
                 <a:ea typeface="맑은 고딕"/>
               </a:rPr>
-              <a:t>.</a:t>
+              <a:t>unitPrice</a:t>
+            </a:r>
+            <a:r>
+              <a:rPr sz="1600" b="0">
+                <a:solidFill>
+                  <a:srgbClr val="000000"/>
+                </a:solidFill>
+                <a:latin typeface="맑은 고딕"/>
+                <a:ea typeface="맑은 고딕"/>
+              </a:rPr>
+              <a:t>로 표현하고 판매가와 구분한다.</a:t>
             </a:r>
           </a:p>
         </p:txBody>
@@ -9552,7 +9469,7 @@
         <p:spPr>
           <a:xfrm>
             <a:off x="365760" y="960120"/>
-            <a:ext cx="8412480" cy="2463338"/>
+            <a:ext cx="8412480" cy="3011978"/>
           </a:xfrm>
         </p:spPr>
         <p:txBody>
@@ -9578,7 +9495,7 @@
                 <a:latin typeface="맑은 고딕"/>
                 <a:ea typeface="맑은 고딕"/>
               </a:rPr>
-              <a:t>설계 지식의 맥락은 </a:t>
+              <a:t>업무의 의미와 함께 </a:t>
             </a:r>
             <a:r>
               <a:rPr sz="1800" b="1">
@@ -9588,7 +9505,7 @@
                 <a:latin typeface="맑은 고딕"/>
                 <a:ea typeface="맑은 고딕"/>
               </a:rPr>
-              <a:t>경계와 의존 규칙</a:t>
+              <a:t>패키지의 경계와 의존 규칙</a:t>
             </a:r>
             <a:r>
               <a:rPr sz="1800" b="0">
@@ -9598,27 +9515,7 @@
                 <a:latin typeface="맑은 고딕"/>
                 <a:ea typeface="맑은 고딕"/>
               </a:rPr>
-              <a:t>이다. 에이전트는 </a:t>
-            </a:r>
-            <a:r>
-              <a:rPr sz="1800" b="1">
-                <a:solidFill>
-                  <a:srgbClr val="000000"/>
-                </a:solidFill>
-                <a:latin typeface="맑은 고딕"/>
-                <a:ea typeface="맑은 고딕"/>
-              </a:rPr>
-              <a:t>있는 패턴을 흉내 내므로</a:t>
-            </a:r>
-            <a:r>
-              <a:rPr sz="1800" b="0">
-                <a:solidFill>
-                  <a:srgbClr val="000000"/>
-                </a:solidFill>
-                <a:latin typeface="맑은 고딕"/>
-                <a:ea typeface="맑은 고딕"/>
-              </a:rPr>
-              <a:t>, 구조를 먼저 적는다.</a:t>
+              <a:t>도 알려 주어야 한다. 기존 코드만 참고하면 잘못된 구조까지 따를 수 있다.</a:t>
             </a:r>
           </a:p>
           <a:p>
@@ -9681,7 +9578,27 @@
                 <a:latin typeface="맑은 고딕"/>
                 <a:ea typeface="맑은 고딕"/>
               </a:rPr>
-              <a:t>"Agents are most effective in environments with strict boundaries and predictable structure", [Lopopolo 2026]</a:t>
+              <a:t>"Agents are most effective in environments with strict boundaries and predictable structure"</a:t>
+            </a:r>
+            <a:r>
+              <a:rPr sz="1000" b="0">
+                <a:solidFill>
+                  <a:srgbClr val="000000"/>
+                </a:solidFill>
+                <a:latin typeface="맑은 고딕"/>
+                <a:ea typeface="맑은 고딕"/>
+              </a:rPr>
+              <a:t>, </a:t>
+            </a:r>
+            <a:r>
+              <a:rPr sz="1000" b="0">
+                <a:solidFill>
+                  <a:srgbClr val="000000"/>
+                </a:solidFill>
+                <a:latin typeface="맑은 고딕"/>
+                <a:ea typeface="맑은 고딕"/>
+              </a:rPr>
+              <a:t>[Lopopolo 2026]</a:t>
             </a:r>
           </a:p>
           <a:p>
@@ -9724,47 +9641,7 @@
                 <a:latin typeface="맑은 고딕"/>
                 <a:ea typeface="맑은 고딕"/>
               </a:rPr>
-              <a:t> </a:t>
-            </a:r>
-            <a:r>
-              <a:rPr sz="1600" b="0">
-                <a:solidFill>
-                  <a:srgbClr val="000000"/>
-                </a:solidFill>
-                <a:latin typeface="맑은 고딕"/>
-                <a:ea typeface="맑은 고딕"/>
-              </a:rPr>
-              <a:t>order</a:t>
-            </a:r>
-            <a:r>
-              <a:rPr sz="1600" b="0">
-                <a:solidFill>
-                  <a:srgbClr val="000000"/>
-                </a:solidFill>
-                <a:latin typeface="맑은 고딕"/>
-                <a:ea typeface="맑은 고딕"/>
-              </a:rPr>
-              <a:t>는 연동·저장 패키지를 </a:t>
-            </a:r>
-            <a:r>
-              <a:rPr sz="1600" b="1">
-                <a:solidFill>
-                  <a:srgbClr val="000000"/>
-                </a:solidFill>
-                <a:latin typeface="맑은 고딕"/>
-                <a:ea typeface="맑은 고딕"/>
-              </a:rPr>
-              <a:t>import하지 않는다</a:t>
-            </a:r>
-            <a:r>
-              <a:rPr sz="1600" b="0">
-                <a:solidFill>
-                  <a:srgbClr val="000000"/>
-                </a:solidFill>
-                <a:latin typeface="맑은 고딕"/>
-                <a:ea typeface="맑은 고딕"/>
-              </a:rPr>
-              <a:t>.</a:t>
+              <a:t> 주문 패키지는 연동·영속 패키지에 의존하지 않아, 외부 통신과 저장 방식에서 분리된다.</a:t>
             </a:r>
           </a:p>
           <a:p>
@@ -9807,27 +9684,7 @@
                 <a:latin typeface="맑은 고딕"/>
                 <a:ea typeface="맑은 고딕"/>
               </a:rPr>
-              <a:t> </a:t>
-            </a:r>
-            <a:r>
-              <a:rPr sz="1600" b="1">
-                <a:solidFill>
-                  <a:srgbClr val="000000"/>
-                </a:solidFill>
-                <a:latin typeface="맑은 고딕"/>
-                <a:ea typeface="맑은 고딕"/>
-              </a:rPr>
-              <a:t>순환이 없어야</a:t>
-            </a:r>
-            <a:r>
-              <a:rPr sz="1600" b="0">
-                <a:solidFill>
-                  <a:srgbClr val="000000"/>
-                </a:solidFill>
-                <a:latin typeface="맑은 고딕"/>
-                <a:ea typeface="맑은 고딕"/>
-              </a:rPr>
-              <a:t> 변경의 파급을 예측할 수 있다.</a:t>
+              <a:t> 패키지의 의존 순환을 막아 변경의 영향을 파악하기 쉽게 한다.</a:t>
             </a:r>
           </a:p>
           <a:p>
@@ -9850,7 +9707,7 @@
                 <a:latin typeface="맑은 고딕"/>
                 <a:ea typeface="맑은 고딕"/>
               </a:rPr>
-              <a:t>규칙으로 적는 이유</a:t>
+              <a:t>구조의 검증</a:t>
             </a:r>
             <a:r>
               <a:rPr sz="1800" b="0">
@@ -9870,27 +9727,7 @@
                 <a:latin typeface="맑은 고딕"/>
                 <a:ea typeface="맑은 고딕"/>
               </a:rPr>
-              <a:t> 말로 한 구조는 지켜지지 않는다. 규칙은 </a:t>
-            </a:r>
-            <a:r>
-              <a:rPr sz="1600" b="1">
-                <a:solidFill>
-                  <a:srgbClr val="000000"/>
-                </a:solidFill>
-                <a:latin typeface="맑은 고딕"/>
-                <a:ea typeface="맑은 고딕"/>
-              </a:rPr>
-              <a:t>센서</a:t>
-            </a:r>
-            <a:r>
-              <a:rPr sz="1600" b="0">
-                <a:solidFill>
-                  <a:srgbClr val="000000"/>
-                </a:solidFill>
-                <a:latin typeface="맑은 고딕"/>
-                <a:ea typeface="맑은 고딕"/>
-              </a:rPr>
-              <a:t>가 된다.</a:t>
+              <a:t> 의존 규칙을 문서로 안내하고, 코드가 지키는지 자동 검사로 확인한다.</a:t>
             </a:r>
           </a:p>
         </p:txBody>
@@ -9909,7 +9746,7 @@
         </p:nvSpPr>
         <p:spPr>
           <a:xfrm>
-            <a:off x="365760" y="3725210"/>
+            <a:off x="365760" y="4273850"/>
             <a:ext cx="8412480" cy="201168"/>
           </a:xfrm>
           <a:prstGeom prst="rect">
@@ -9953,8 +9790,8 @@
         </p:blipFill>
         <p:spPr>
           <a:xfrm>
-            <a:off x="2432538" y="3962954"/>
-            <a:ext cx="4278923" cy="2168769"/>
+            <a:off x="2732322" y="4511594"/>
+            <a:ext cx="3679356" cy="1864879"/>
           </a:xfrm>
           <a:prstGeom prst="rect">
             <a:avLst/>
@@ -10743,7 +10580,7 @@
                 <a:latin typeface="맑은 고딕"/>
                 <a:ea typeface="맑은 고딕"/>
               </a:rPr>
-              <a:t>무엇을 더 적을지는 </a:t>
+              <a:t>필요한 자료는 </a:t>
             </a:r>
             <a:r>
               <a:rPr sz="1800" b="1">
@@ -10753,7 +10590,7 @@
                 <a:latin typeface="맑은 고딕"/>
                 <a:ea typeface="맑은 고딕"/>
               </a:rPr>
-              <a:t>도메인 복잡성과 기술 복잡성</a:t>
+              <a:t>업무 규칙의 복잡성</a:t>
             </a:r>
             <a:r>
               <a:rPr sz="1800" b="0">
@@ -10763,7 +10600,27 @@
                 <a:latin typeface="맑은 고딕"/>
                 <a:ea typeface="맑은 고딕"/>
               </a:rPr>
-              <a:t>이 정한다. 사다리처럼 차례로 더하지 않는다.</a:t>
+              <a:t>과 </a:t>
+            </a:r>
+            <a:r>
+              <a:rPr sz="1800" b="1">
+                <a:solidFill>
+                  <a:srgbClr val="000000"/>
+                </a:solidFill>
+                <a:latin typeface="맑은 고딕"/>
+                <a:ea typeface="맑은 고딕"/>
+              </a:rPr>
+              <a:t>구현 기술의 복잡성</a:t>
+            </a:r>
+            <a:r>
+              <a:rPr sz="1800" b="0">
+                <a:solidFill>
+                  <a:srgbClr val="000000"/>
+                </a:solidFill>
+                <a:latin typeface="맑은 고딕"/>
+                <a:ea typeface="맑은 고딕"/>
+              </a:rPr>
+              <a:t>을 따로 살펴 고른다. 모든 과제에 같은 문서 묶음을 제공할 필요는 없다.</a:t>
             </a:r>
           </a:p>
         </p:txBody>
@@ -10929,7 +10786,7 @@
                 <a:latin typeface="맑은 고딕"/>
                 <a:ea typeface="맑은 고딕"/>
               </a:rPr>
-              <a:t>"주문한다"의 자리</a:t>
+              <a:t>"주문한다"에 필요한 자료</a:t>
             </a:r>
             <a:r>
               <a:rPr sz="1800" b="0">
@@ -10949,27 +10806,7 @@
                 <a:latin typeface="맑은 고딕"/>
                 <a:ea typeface="맑은 고딕"/>
               </a:rPr>
-              <a:t> 업무 규칙 3가지와 외부 연동이 있어 </a:t>
-            </a:r>
-            <a:r>
-              <a:rPr sz="1600" b="1">
-                <a:solidFill>
-                  <a:srgbClr val="000000"/>
-                </a:solidFill>
-                <a:latin typeface="맑은 고딕"/>
-                <a:ea typeface="맑은 고딕"/>
-              </a:rPr>
-              <a:t>둘 다 중간</a:t>
-            </a:r>
-            <a:r>
-              <a:rPr sz="1600" b="0">
-                <a:solidFill>
-                  <a:srgbClr val="000000"/>
-                </a:solidFill>
-                <a:latin typeface="맑은 고딕"/>
-                <a:ea typeface="맑은 고딕"/>
-              </a:rPr>
-              <a:t>이다. 용어집·분석 모델과 의존 규칙을 함께 둔다.</a:t>
+              <a:t> 업무 규칙과 상태를 설명하는 용어집·분석 모델, 외부 연동 구조를 설명하는 의존 규칙을 함께 제공한다.</a:t>
             </a:r>
           </a:p>
           <a:p>
@@ -10992,7 +10829,7 @@
                 <a:latin typeface="맑은 고딕"/>
                 <a:ea typeface="맑은 고딕"/>
               </a:rPr>
-              <a:t>넣는 기준</a:t>
+              <a:t>추가할지 판단하는 기준</a:t>
             </a:r>
             <a:r>
               <a:rPr sz="1800" b="0">
@@ -11012,27 +10849,7 @@
                 <a:latin typeface="맑은 고딕"/>
                 <a:ea typeface="맑은 고딕"/>
               </a:rPr>
-              <a:t> 그 문서가 </a:t>
-            </a:r>
-            <a:r>
-              <a:rPr sz="1600" b="1">
-                <a:solidFill>
-                  <a:srgbClr val="000000"/>
-                </a:solidFill>
-                <a:latin typeface="맑은 고딕"/>
-                <a:ea typeface="맑은 고딕"/>
-              </a:rPr>
-              <a:t>에이전트의 결과나 사람의 확인을 바꾸는가</a:t>
-            </a:r>
-            <a:r>
-              <a:rPr sz="1600" b="0">
-                <a:solidFill>
-                  <a:srgbClr val="000000"/>
-                </a:solidFill>
-                <a:latin typeface="맑은 고딕"/>
-                <a:ea typeface="맑은 고딕"/>
-              </a:rPr>
-              <a:t>다. 바꾸지 않으면 넣지 않는다.</a:t>
+              <a:t> 그 자료가 구현이나 검증의 어떤 판단에 필요한지 설명할 수 있어야 한다. 관련 없는 자료는 제외한다.</a:t>
             </a:r>
           </a:p>
         </p:txBody>
@@ -11218,8 +11035,8 @@
           </p:nvPr>
         </p:nvGraphicFramePr>
         <p:xfrm>
-          <a:off x="2086166" y="2112010"/>
-          <a:ext cx="4958080" cy="3873500"/>
+          <a:off x="1693736" y="2112010"/>
+          <a:ext cx="5742940" cy="3873500"/>
         </p:xfrm>
         <a:graphic>
           <a:graphicData uri="http://schemas.openxmlformats.org/drawingml/2006/table">
@@ -11228,8 +11045,8 @@
               <a:tblGrid>
                 <a:gridCol w="889000"/>
                 <a:gridCol w="947420"/>
-                <a:gridCol w="889000"/>
-                <a:gridCol w="2232660"/>
+                <a:gridCol w="1310640"/>
+                <a:gridCol w="2595880"/>
               </a:tblGrid>
               <a:tr h="288000">
                 <a:tc>
@@ -11312,7 +11129,7 @@
                           <a:ea typeface="맑은 고딕" panose="020B0503020000020004" pitchFamily="34" charset="-127"/>
                           <a:cs typeface="맑은 고딕"/>
                         </a:rPr>
-                        <a:t>맥락</a:t>
+                        <a:t>자료</a:t>
                       </a:r>
                     </a:p>
                   </a:txBody>
@@ -11382,7 +11199,7 @@
                           <a:ea typeface="맑은 고딕" panose="020B0503020000020004" pitchFamily="34" charset="-127"/>
                           <a:cs typeface="맑은 고딕"/>
                         </a:rPr>
-                        <a:t>비용</a:t>
+                        <a:t>준비·입력 부담</a:t>
                       </a:r>
                     </a:p>
                   </a:txBody>
@@ -11452,7 +11269,7 @@
                           <a:ea typeface="맑은 고딕" panose="020B0503020000020004" pitchFamily="34" charset="-127"/>
                           <a:cs typeface="맑은 고딕"/>
                         </a:rPr>
-                        <a:t>판단을 바꾸는가?</a:t>
+                        <a:t>활용 목적</a:t>
                       </a:r>
                     </a:p>
                   </a:txBody>
@@ -11690,7 +11507,7 @@
                           <a:ea typeface="맑은 고딕" panose="020B0503020000020004" pitchFamily="34" charset="-127"/>
                           <a:cs typeface="맑은 고딕"/>
                         </a:rPr>
-                        <a:t>판매가와 단가를 가른다</a:t>
+                        <a:t>판매가와 단가를 구분한다</a:t>
                       </a:r>
                     </a:p>
                   </a:txBody>
@@ -11914,7 +11731,7 @@
                           <a:ea typeface="맑은 고딕" panose="020B0503020000020004" pitchFamily="34" charset="-127"/>
                           <a:cs typeface="맑은 고딕"/>
                         </a:rPr>
-                        <a:t>거절 뒤의 상태를 가른다</a:t>
+                        <a:t>결제 거절 뒤의 상태를 확인한다</a:t>
                       </a:r>
                     </a:p>
                   </a:txBody>
@@ -12138,7 +11955,7 @@
                           <a:ea typeface="맑은 고딕" panose="020B0503020000020004" pitchFamily="34" charset="-127"/>
                           <a:cs typeface="맑은 고딕"/>
                         </a:rPr>
-                        <a:t>단가가 놓일 자리를 가른다</a:t>
+                        <a:t>단가를 가진 개념을 확인한다</a:t>
                       </a:r>
                     </a:p>
                   </a:txBody>
@@ -12362,7 +12179,7 @@
                           <a:ea typeface="맑은 고딕" panose="020B0503020000020004" pitchFamily="34" charset="-127"/>
                           <a:cs typeface="맑은 고딕"/>
                         </a:rPr>
-                        <a:t>연동을 부르는 자리를 가른다</a:t>
+                        <a:t>연동 코드의 의존 방향을 확인한다</a:t>
                       </a:r>
                     </a:p>
                   </a:txBody>
@@ -12586,7 +12403,7 @@
                           <a:ea typeface="맑은 고딕" panose="020B0503020000020004" pitchFamily="34" charset="-127"/>
                           <a:cs typeface="맑은 고딕"/>
                         </a:rPr>
-                        <a:t>가리키기만 한다</a:t>
+                        <a:t>연동 구현에 필요한 부분을 읽는다</a:t>
                       </a:r>
                     </a:p>
                   </a:txBody>
@@ -12674,7 +12491,7 @@
                 <a:latin typeface="맑은 고딕"/>
                 <a:ea typeface="맑은 고딕"/>
               </a:rPr>
-              <a:t>여유가 부족하면 </a:t>
+              <a:t>필요한 자료 가운데 </a:t>
             </a:r>
             <a:r>
               <a:rPr sz="1800" b="1">
@@ -12684,7 +12501,7 @@
                 <a:latin typeface="맑은 고딕"/>
                 <a:ea typeface="맑은 고딕"/>
               </a:rPr>
-              <a:t>비용 대비 효과가 큰 것부터</a:t>
+              <a:t>자주 쓰고 구현에 미치는 영향이 큰 자료</a:t>
             </a:r>
             <a:r>
               <a:rPr sz="1800" b="0">
@@ -12694,7 +12511,7 @@
                 <a:latin typeface="맑은 고딕"/>
                 <a:ea typeface="맑은 고딕"/>
               </a:rPr>
-              <a:t> 둔다. 순서는 과제의 복잡성이 정한다.</a:t>
+              <a:t>부터 읽게 한다. 작성·검토에 드는 노력과 입력 분량도 함께 고려한다.</a:t>
             </a:r>
           </a:p>
         </p:txBody>
@@ -12860,7 +12677,7 @@
                 <a:latin typeface="맑은 고딕"/>
                 <a:ea typeface="맑은 고딕"/>
               </a:rPr>
-              <a:t>먼저 둘 것</a:t>
+              <a:t>처음에 읽을 자료</a:t>
             </a:r>
             <a:r>
               <a:rPr sz="1800" b="0">
@@ -12880,27 +12697,7 @@
                 <a:latin typeface="맑은 고딕"/>
                 <a:ea typeface="맑은 고딕"/>
               </a:rPr>
-              <a:t> 적고 자주 쓰이는 것이다. 용어집 한 장이 </a:t>
-            </a:r>
-            <a:r>
-              <a:rPr sz="1600" b="1">
-                <a:solidFill>
-                  <a:srgbClr val="000000"/>
-                </a:solidFill>
-                <a:latin typeface="맑은 고딕"/>
-                <a:ea typeface="맑은 고딕"/>
-              </a:rPr>
-              <a:t>금액 추측을 없앴다</a:t>
-            </a:r>
-            <a:r>
-              <a:rPr sz="1600" b="0">
-                <a:solidFill>
-                  <a:srgbClr val="000000"/>
-                </a:solidFill>
-                <a:latin typeface="맑은 고딕"/>
-                <a:ea typeface="맑은 고딕"/>
-              </a:rPr>
-              <a:t>.</a:t>
+              <a:t> 용어집과 모델처럼 과제 전반에서 반복해 쓰는 자료다.</a:t>
             </a:r>
           </a:p>
           <a:p>
@@ -12923,7 +12720,7 @@
                 <a:latin typeface="맑은 고딕"/>
                 <a:ea typeface="맑은 고딕"/>
               </a:rPr>
-              <a:t>뒤에 둘 것</a:t>
+              <a:t>필요할 때 읽을 자료</a:t>
             </a:r>
             <a:r>
               <a:rPr sz="1800" b="0">
@@ -12943,27 +12740,7 @@
                 <a:latin typeface="맑은 고딕"/>
                 <a:ea typeface="맑은 고딕"/>
               </a:rPr>
-              <a:t> 크고 드물게 쓰이는 것이다. 연동 규격은 </a:t>
-            </a:r>
-            <a:r>
-              <a:rPr sz="1600" b="1">
-                <a:solidFill>
-                  <a:srgbClr val="000000"/>
-                </a:solidFill>
-                <a:latin typeface="맑은 고딕"/>
-                <a:ea typeface="맑은 고딕"/>
-              </a:rPr>
-              <a:t>경로로만</a:t>
-            </a:r>
-            <a:r>
-              <a:rPr sz="1600" b="0">
-                <a:solidFill>
-                  <a:srgbClr val="000000"/>
-                </a:solidFill>
-                <a:latin typeface="맑은 고딕"/>
-                <a:ea typeface="맑은 고딕"/>
-              </a:rPr>
-              <a:t> 준다.</a:t>
+              <a:t> 연동 규격처럼 분량이 크고 특정 작업에서 쓰는 자료는 위치를 안내한다.</a:t>
             </a:r>
           </a:p>
           <a:p>
@@ -12986,7 +12763,7 @@
                 <a:latin typeface="맑은 고딕"/>
                 <a:ea typeface="맑은 고딕"/>
               </a:rPr>
-              <a:t>순위는 고정이 아니다</a:t>
+              <a:t>과제에 따른 조정</a:t>
             </a:r>
             <a:r>
               <a:rPr sz="1800" b="0">
@@ -13006,7 +12783,7 @@
                 <a:latin typeface="맑은 고딕"/>
                 <a:ea typeface="맑은 고딕"/>
               </a:rPr>
-              <a:t> 기술 복잡성이 큰 과제는 의존 규칙이 먼저 온다.</a:t>
+              <a:t> 연동 구조가 핵심인 과제에서는 의존 규칙부터 확인할 수 있다.</a:t>
             </a:r>
           </a:p>
         </p:txBody>
@@ -13234,7 +13011,7 @@
                 <a:latin typeface="맑은 고딕"/>
                 <a:ea typeface="맑은 고딕"/>
               </a:rPr>
-              <a:t>좋은 맥락은 많은 맥락이 아니라 </a:t>
+              <a:t>에이전트에게는 </a:t>
             </a:r>
             <a:r>
               <a:rPr sz="1800" b="1">
@@ -13244,7 +13021,7 @@
                 <a:latin typeface="맑은 고딕"/>
                 <a:ea typeface="맑은 고딕"/>
               </a:rPr>
-              <a:t>판단을 바꾸는 최소의 고신호 정보</a:t>
+              <a:t>구현과 검증에 필요한 규칙과 자료를 선별해서</a:t>
             </a:r>
             <a:r>
               <a:rPr sz="1800" b="0">
@@ -13254,7 +13031,7 @@
                 <a:latin typeface="맑은 고딕"/>
                 <a:ea typeface="맑은 고딕"/>
               </a:rPr>
-              <a:t>다.</a:t>
+              <a:t> 제공해야 한다.</a:t>
             </a:r>
           </a:p>
           <a:p>
@@ -13340,7 +13117,7 @@
                 <a:latin typeface="맑은 고딕"/>
                 <a:ea typeface="맑은 고딕"/>
               </a:rPr>
-              <a:t>로 맥락을 늘리는 것이 공짜가 아님을 설명한다.</a:t>
+              <a:t>를 바탕으로, 자료를 많이 제공해도 필요한 정보를 놓칠 수 있는 이유를 설명한다.</a:t>
             </a:r>
           </a:p>
           <a:p>
@@ -13426,7 +13203,7 @@
                 <a:latin typeface="맑은 고딕"/>
                 <a:ea typeface="맑은 고딕"/>
               </a:rPr>
-              <a:t>에이전트가 볼 수 없는 지식은 없는 것이므로, </a:t>
+              <a:t>업무 규칙과 설계 결정을 </a:t>
             </a:r>
             <a:r>
               <a:rPr sz="1800" b="1">
@@ -13446,27 +13223,7 @@
                 <a:latin typeface="맑은 고딕"/>
                 <a:ea typeface="맑은 고딕"/>
               </a:rPr>
-              <a:t>를 기록의 원천으로 삼고 맥락 파일을 </a:t>
-            </a:r>
-            <a:r>
-              <a:rPr sz="1800" b="1">
-                <a:solidFill>
-                  <a:srgbClr val="000000"/>
-                </a:solidFill>
-                <a:latin typeface="맑은 고딕"/>
-                <a:ea typeface="맑은 고딕"/>
-              </a:rPr>
-              <a:t>지도</a:t>
-            </a:r>
-            <a:r>
-              <a:rPr sz="1800" b="0">
-                <a:solidFill>
-                  <a:srgbClr val="000000"/>
-                </a:solidFill>
-                <a:latin typeface="맑은 고딕"/>
-                <a:ea typeface="맑은 고딕"/>
-              </a:rPr>
-              <a:t>로 쓴다.</a:t>
+              <a:t>에 기록하고, 맥락 파일에서 필요한 문서를 안내한다.</a:t>
             </a:r>
           </a:p>
           <a:p>
@@ -13572,7 +13329,7 @@
                 <a:latin typeface="맑은 고딕"/>
                 <a:ea typeface="맑은 고딕"/>
               </a:rPr>
-              <a:t>복잡성의 두 축</a:t>
+              <a:t>도메인·기술 복잡성</a:t>
             </a:r>
             <a:r>
               <a:rPr sz="1800" b="0">
@@ -13582,7 +13339,7 @@
                 <a:latin typeface="맑은 고딕"/>
                 <a:ea typeface="맑은 고딕"/>
               </a:rPr>
-              <a:t>과 비용 대비 효과로 맥락의 적정량과 순서를 정한다.</a:t>
+              <a:t>에 따라 필요한 자료를 고르고, 작성·검토 비용과 활용도를 고려해 우선순위를 정한다.</a:t>
             </a:r>
           </a:p>
         </p:txBody>
@@ -13756,8 +13513,8 @@
           </p:nvPr>
         </p:nvGraphicFramePr>
         <p:xfrm>
-          <a:off x="1495616" y="2736850"/>
-          <a:ext cx="6139180" cy="3873500"/>
+          <a:off x="1174306" y="2736850"/>
+          <a:ext cx="6781800" cy="3873500"/>
         </p:xfrm>
         <a:graphic>
           <a:graphicData uri="http://schemas.openxmlformats.org/drawingml/2006/table">
@@ -13765,8 +13522,8 @@
               <a:tblPr/>
               <a:tblGrid>
                 <a:gridCol w="1226820"/>
-                <a:gridCol w="2456180"/>
-                <a:gridCol w="2456180"/>
+                <a:gridCol w="2959100"/>
+                <a:gridCol w="2595880"/>
               </a:tblGrid>
               <a:tr h="288000">
                 <a:tc>
@@ -14045,7 +13802,7 @@
                           <a:ea typeface="맑은 고딕" panose="020B0503020000020004" pitchFamily="34" charset="-127"/>
                           <a:cs typeface="맑은 고딕"/>
                         </a:rPr>
-                        <a:t>지난 대화를 요약해 창을 비운다</a:t>
+                        <a:t>지난 대화를 요약해 입력 분량을 줄인다</a:t>
                       </a:r>
                     </a:p>
                   </a:txBody>
@@ -14101,7 +13858,7 @@
                           <a:ea typeface="맑은 고딕" panose="020B0503020000020004" pitchFamily="34" charset="-127"/>
                           <a:cs typeface="맑은 고딕"/>
                         </a:rPr>
-                        <a:t>끝난 작업 단위의 기록을 줄인다</a:t>
+                        <a:t>끝난 작업 단위의 기록을 요약한다</a:t>
                       </a:r>
                     </a:p>
                   </a:txBody>
@@ -14525,7 +14282,7 @@
                 <a:latin typeface="맑은 고딕"/>
                 <a:ea typeface="맑은 고딕"/>
               </a:rPr>
-              <a:t>한 번의 창에 들어가지 않는 과제는 </a:t>
+              <a:t>작업이 길어져 대화와 실행 기록이 쌓이면, </a:t>
             </a:r>
             <a:r>
               <a:rPr sz="1800" b="1">
@@ -14535,7 +14292,7 @@
                 <a:latin typeface="맑은 고딕"/>
                 <a:ea typeface="맑은 고딕"/>
               </a:rPr>
-              <a:t>맥락을 줄이거나 넘기는 방법</a:t>
+              <a:t>계속 필요한 정보는 남기고 지난 기록은 정리</a:t>
             </a:r>
             <a:r>
               <a:rPr sz="1800" b="0">
@@ -14545,7 +14302,7 @@
                 <a:latin typeface="맑은 고딕"/>
                 <a:ea typeface="맑은 고딕"/>
               </a:rPr>
-              <a:t>으로 잇는다.</a:t>
+              <a:t>해야 한다.</a:t>
             </a:r>
           </a:p>
           <a:p>
@@ -14608,7 +14365,27 @@
                 <a:latin typeface="맑은 고딕"/>
                 <a:ea typeface="맑은 고딕"/>
               </a:rPr>
-              <a:t>"compaction, structured note-taking, and multi-agent architectures", [Anthropic 2025c]</a:t>
+              <a:t>"compaction, structured note-taking, and multi-agent architectures"</a:t>
+            </a:r>
+            <a:r>
+              <a:rPr sz="1000" b="0">
+                <a:solidFill>
+                  <a:srgbClr val="000000"/>
+                </a:solidFill>
+                <a:latin typeface="맑은 고딕"/>
+                <a:ea typeface="맑은 고딕"/>
+              </a:rPr>
+              <a:t>, </a:t>
+            </a:r>
+            <a:r>
+              <a:rPr sz="1000" b="0">
+                <a:solidFill>
+                  <a:srgbClr val="000000"/>
+                </a:solidFill>
+                <a:latin typeface="맑은 고딕"/>
+                <a:ea typeface="맑은 고딕"/>
+              </a:rPr>
+              <a:t>[Anthropic 2025c]</a:t>
             </a:r>
           </a:p>
         </p:txBody>
@@ -14774,7 +14551,7 @@
                 <a:latin typeface="맑은 고딕"/>
                 <a:ea typeface="맑은 고딕"/>
               </a:rPr>
-              <a:t>노트가 저장소에 있어야</a:t>
+              <a:t>진행 기록</a:t>
             </a:r>
             <a:r>
               <a:rPr sz="1800" b="0">
@@ -14784,7 +14561,17 @@
                 <a:latin typeface="맑은 고딕"/>
                 <a:ea typeface="맑은 고딕"/>
               </a:rPr>
-              <a:t> 다음 실행이 이어 받는다. 대화에만 있으면 사라진다.</a:t>
+              <a:t> —</a:t>
+            </a:r>
+            <a:r>
+              <a:rPr sz="1600" b="0">
+                <a:solidFill>
+                  <a:srgbClr val="000000"/>
+                </a:solidFill>
+                <a:latin typeface="맑은 고딕"/>
+                <a:ea typeface="맑은 고딕"/>
+              </a:rPr>
+              <a:t> 완료한 일과 남은 일을 저장소에 기록하면, 새 실행에서도 진행 상황을 확인하고 이어서 작업할 수 있다.</a:t>
             </a:r>
           </a:p>
           <a:p>
@@ -14807,7 +14594,7 @@
                 <a:latin typeface="맑은 고딕"/>
                 <a:ea typeface="맑은 고딕"/>
               </a:rPr>
-              <a:t>압축의 대가</a:t>
+              <a:t>요약에서 빠뜨리지 않을 정보</a:t>
             </a:r>
             <a:r>
               <a:rPr sz="1800" b="0">
@@ -14827,27 +14614,7 @@
                 <a:latin typeface="맑은 고딕"/>
                 <a:ea typeface="맑은 고딕"/>
               </a:rPr>
-              <a:t> 요약은 정보를 잃는다. </a:t>
-            </a:r>
-            <a:r>
-              <a:rPr sz="1600" b="1">
-                <a:solidFill>
-                  <a:srgbClr val="000000"/>
-                </a:solidFill>
-                <a:latin typeface="맑은 고딕"/>
-                <a:ea typeface="맑은 고딕"/>
-              </a:rPr>
-              <a:t>기대값과 미정 질문</a:t>
-            </a:r>
-            <a:r>
-              <a:rPr sz="1600" b="0">
-                <a:solidFill>
-                  <a:srgbClr val="000000"/>
-                </a:solidFill>
-                <a:latin typeface="맑은 고딕"/>
-                <a:ea typeface="맑은 고딕"/>
-              </a:rPr>
-              <a:t>은 요약하지 않고 파일로 둔다.</a:t>
+              <a:t> 기대값과 미정 질문은 원문을 파일로 보관한다. 대화 요약에서 중요한 조건이 빠질 수 있기 때문이다.</a:t>
             </a:r>
           </a:p>
         </p:txBody>
@@ -15087,7 +14854,7 @@
                 <a:latin typeface="맑은 고딕"/>
                 <a:ea typeface="맑은 고딕"/>
               </a:rPr>
-              <a:t>많이 주는 것이 안전하지 않다. 결제 연동 매뉴얼 </a:t>
+              <a:t>관련 자료를 많이 제공해도 </a:t>
             </a:r>
             <a:r>
               <a:rPr sz="1800" b="1">
@@ -15097,7 +14864,7 @@
                 <a:latin typeface="맑은 고딕"/>
                 <a:ea typeface="맑은 고딕"/>
               </a:rPr>
-              <a:t>200쪽을 통째로</a:t>
+              <a:t>필요한 규격을 올바르게 고른다는 보장은 없다</a:t>
             </a:r>
             <a:r>
               <a:rPr sz="1800" b="0">
@@ -15107,27 +14874,7 @@
                 <a:latin typeface="맑은 고딕"/>
                 <a:ea typeface="맑은 고딕"/>
               </a:rPr>
-              <a:t> 주자 에이전트가 </a:t>
-            </a:r>
-            <a:r>
-              <a:rPr sz="1800" b="1">
-                <a:solidFill>
-                  <a:srgbClr val="000000"/>
-                </a:solidFill>
-                <a:latin typeface="맑은 고딕"/>
-                <a:ea typeface="맑은 고딕"/>
-              </a:rPr>
-              <a:t>옛 API</a:t>
-            </a:r>
-            <a:r>
-              <a:rPr sz="1800" b="0">
-                <a:solidFill>
-                  <a:srgbClr val="000000"/>
-                </a:solidFill>
-                <a:latin typeface="맑은 고딕"/>
-                <a:ea typeface="맑은 고딕"/>
-              </a:rPr>
-              <a:t>를 썼다.</a:t>
+              <a:t>. 주문 사례에서는 결제 연동 매뉴얼 200쪽을 통째로 주자 에이전트가 옛 API를 사용했다.</a:t>
             </a:r>
           </a:p>
           <a:p>
@@ -15150,7 +14897,7 @@
                 <a:latin typeface="맑은 고딕"/>
                 <a:ea typeface="맑은 고딕"/>
               </a:rPr>
-              <a:t>왜 틀렸나</a:t>
+              <a:t>실패 원인</a:t>
             </a:r>
             <a:r>
               <a:rPr sz="1800" b="0">
@@ -15170,27 +14917,7 @@
                 <a:latin typeface="맑은 고딕"/>
                 <a:ea typeface="맑은 고딕"/>
               </a:rPr>
-              <a:t> 매뉴얼에는 현행과 폐기된 규격이 함께 있었고, 에이전트는 </a:t>
-            </a:r>
-            <a:r>
-              <a:rPr sz="1600" b="1">
-                <a:solidFill>
-                  <a:srgbClr val="000000"/>
-                </a:solidFill>
-                <a:latin typeface="맑은 고딕"/>
-                <a:ea typeface="맑은 고딕"/>
-              </a:rPr>
-              <a:t>가까운 패턴</a:t>
-            </a:r>
-            <a:r>
-              <a:rPr sz="1600" b="0">
-                <a:solidFill>
-                  <a:srgbClr val="000000"/>
-                </a:solidFill>
-                <a:latin typeface="맑은 고딕"/>
-                <a:ea typeface="맑은 고딕"/>
-              </a:rPr>
-              <a:t>을 골랐다.</a:t>
+              <a:t> 현행 규격과 폐기된 규격이 섞여 있었고, 사용할 버전을 분명하게 안내하지 않았다.</a:t>
             </a:r>
           </a:p>
           <a:p>
@@ -15213,7 +14940,7 @@
                 <a:latin typeface="맑은 고딕"/>
                 <a:ea typeface="맑은 고딕"/>
               </a:rPr>
-              <a:t>무엇을 했어야 하나</a:t>
+              <a:t>보완 방법</a:t>
             </a:r>
             <a:r>
               <a:rPr sz="1800" b="0">
@@ -15233,27 +14960,7 @@
                 <a:latin typeface="맑은 고딕"/>
                 <a:ea typeface="맑은 고딕"/>
               </a:rPr>
-              <a:t> 이번 과제가 쓰는 </a:t>
-            </a:r>
-            <a:r>
-              <a:rPr sz="1600" b="1">
-                <a:solidFill>
-                  <a:srgbClr val="000000"/>
-                </a:solidFill>
-                <a:latin typeface="맑은 고딕"/>
-                <a:ea typeface="맑은 고딕"/>
-              </a:rPr>
-              <a:t>승인 요청 규격만</a:t>
-            </a:r>
-            <a:r>
-              <a:rPr sz="1600" b="0">
-                <a:solidFill>
-                  <a:srgbClr val="000000"/>
-                </a:solidFill>
-                <a:latin typeface="맑은 고딕"/>
-                <a:ea typeface="맑은 고딕"/>
-              </a:rPr>
-              <a:t> 발췌하거나 경로로 가리킨다.</a:t>
+              <a:t> 사용할 승인 요청 규격과 버전을 지정한다. 필요한 부분을 제공하거나 해당 문서를 찾아 읽게 한다.</a:t>
             </a:r>
           </a:p>
           <a:p>
@@ -15276,7 +14983,7 @@
                 <a:latin typeface="맑은 고딕"/>
                 <a:ea typeface="맑은 고딕"/>
               </a:rPr>
-              <a:t>같은 모습</a:t>
+              <a:t>지시 작성의 유사한 문제</a:t>
             </a:r>
             <a:r>
               <a:rPr sz="1800" b="0">
@@ -15296,7 +15003,7 @@
                 <a:latin typeface="맑은 고딕"/>
                 <a:ea typeface="맑은 고딕"/>
               </a:rPr>
-              <a:t> 모든 가장자리 경우를 지시에 적는 것이다.</a:t>
+              <a:t> 가능한 예외 상황을 모두 나열하면, 에이전트가 따라야 할 핵심 규칙을 파악하기 어려워진다.</a:t>
             </a:r>
           </a:p>
           <a:p>
@@ -15319,7 +15026,7 @@
                 <a:latin typeface="맑은 고딕"/>
                 <a:ea typeface="맑은 고딕"/>
               </a:rPr>
-              <a:t>팀은 모든 규칙을 적으려고 </a:t>
+              <a:t>팀은 가능한 모든 규칙을 명시하려고 </a:t>
             </a:r>
             <a:r>
               <a:rPr sz="1800" b="1">
@@ -15329,7 +15036,7 @@
                 <a:latin typeface="맑은 고딕"/>
                 <a:ea typeface="맑은 고딕"/>
               </a:rPr>
-              <a:t>가장자리 경우의 긴 목록</a:t>
+              <a:t>예외 상황의 긴 목록</a:t>
             </a:r>
             <a:r>
               <a:rPr sz="1800" b="0">
@@ -15339,7 +15046,7 @@
                 <a:latin typeface="맑은 고딕"/>
                 <a:ea typeface="맑은 고딕"/>
               </a:rPr>
-              <a:t>을 프롬프트에 밀어 넣는 일이 많다</a:t>
+              <a:t>을 프롬프트에 넣는 일이 많다</a:t>
             </a:r>
             <a:r>
               <a:rPr sz="1000" b="0">
@@ -15359,7 +15066,27 @@
                 <a:latin typeface="맑은 고딕"/>
                 <a:ea typeface="맑은 고딕"/>
               </a:rPr>
-              <a:t>"teams will often stuff a laundry list of edge cases into a prompt in an attempt to articulate every possible rule", [Anthropic 2025c]</a:t>
+              <a:t>"teams will often stuff a laundry list of edge cases into a prompt in an attempt to articulate every possible rule"</a:t>
+            </a:r>
+            <a:r>
+              <a:rPr sz="1000" b="0">
+                <a:solidFill>
+                  <a:srgbClr val="000000"/>
+                </a:solidFill>
+                <a:latin typeface="맑은 고딕"/>
+                <a:ea typeface="맑은 고딕"/>
+              </a:rPr>
+              <a:t>, </a:t>
+            </a:r>
+            <a:r>
+              <a:rPr sz="1000" b="0">
+                <a:solidFill>
+                  <a:srgbClr val="000000"/>
+                </a:solidFill>
+                <a:latin typeface="맑은 고딕"/>
+                <a:ea typeface="맑은 고딕"/>
+              </a:rPr>
+              <a:t>[Anthropic 2025c]</a:t>
             </a:r>
           </a:p>
           <a:p>
@@ -15382,7 +15109,7 @@
                 <a:latin typeface="맑은 고딕"/>
                 <a:ea typeface="맑은 고딕"/>
               </a:rPr>
-              <a:t>대신 할 것</a:t>
+              <a:t>대표 사례의 활용</a:t>
             </a:r>
             <a:r>
               <a:rPr sz="1800" b="0">
@@ -15402,27 +15129,7 @@
                 <a:latin typeface="맑은 고딕"/>
                 <a:ea typeface="맑은 고딕"/>
               </a:rPr>
-              <a:t> 기대하는 행동을 보이는 </a:t>
-            </a:r>
-            <a:r>
-              <a:rPr sz="1600" b="1">
-                <a:solidFill>
-                  <a:srgbClr val="000000"/>
-                </a:solidFill>
-                <a:latin typeface="맑은 고딕"/>
-                <a:ea typeface="맑은 고딕"/>
-              </a:rPr>
-              <a:t>대표 예 몇 개</a:t>
-            </a:r>
-            <a:r>
-              <a:rPr sz="1600" b="0">
-                <a:solidFill>
-                  <a:srgbClr val="000000"/>
-                </a:solidFill>
-                <a:latin typeface="맑은 고딕"/>
-                <a:ea typeface="맑은 고딕"/>
-              </a:rPr>
-              <a:t>를 둔다. 수용 기준의 허용·거절 예시가 그것이다.</a:t>
+              <a:t> 핵심 규칙과 함께 기대하는 행동을 보여 주는 예시를 제공한다. 수용 기준의 허용·거절 예시를 활용할 수 있다.</a:t>
             </a:r>
           </a:p>
         </p:txBody>
@@ -15608,17 +15315,17 @@
           </p:nvPr>
         </p:nvGraphicFramePr>
         <p:xfrm>
-          <a:off x="1593406" y="2112010"/>
-          <a:ext cx="5943600" cy="3873500"/>
+          <a:off x="1034606" y="2112010"/>
+          <a:ext cx="7061200" cy="3873500"/>
         </p:xfrm>
         <a:graphic>
           <a:graphicData uri="http://schemas.openxmlformats.org/drawingml/2006/table">
             <a:tbl>
               <a:tblPr/>
               <a:tblGrid>
-                <a:gridCol w="2260600"/>
-                <a:gridCol w="1729740"/>
-                <a:gridCol w="1953260"/>
+                <a:gridCol w="2092960"/>
+                <a:gridCol w="2232660"/>
+                <a:gridCol w="2735580"/>
               </a:tblGrid>
               <a:tr h="288000">
                 <a:tc>
@@ -15843,7 +15550,7 @@
                           <a:ea typeface="맑은 고딕" panose="020B0503020000020004" pitchFamily="34" charset="-127"/>
                           <a:cs typeface="맑은 고딕"/>
                         </a:rPr>
-                        <a:t>한 번의 실수마다 규칙 한 줄</a:t>
+                        <a:t>실수할 때마다 금지문 추가</a:t>
                       </a:r>
                     </a:p>
                   </a:txBody>
@@ -15897,7 +15604,7 @@
                           <a:ea typeface="맑은 고딕" panose="020B0503020000020004" pitchFamily="34" charset="-127"/>
                           <a:cs typeface="맑은 고딕"/>
                         </a:rPr>
-                        <a:t>재발을 막으려고</a:t>
+                        <a:t>지시로만 재발을 막으려 함</a:t>
                       </a:r>
                     </a:p>
                   </a:txBody>
@@ -15953,7 +15660,7 @@
                           <a:ea typeface="맑은 고딕" panose="020B0503020000020004" pitchFamily="34" charset="-127"/>
                           <a:cs typeface="맑은 고딕"/>
                         </a:rPr>
-                        <a:t>기계 검사로 옮긴다</a:t>
+                        <a:t>자동 검사로 확인할 규칙을 고른다</a:t>
                       </a:r>
                     </a:p>
                   </a:txBody>
@@ -16011,7 +15718,7 @@
                           <a:ea typeface="맑은 고딕" panose="020B0503020000020004" pitchFamily="34" charset="-127"/>
                           <a:cs typeface="맑은 고딕"/>
                         </a:rPr>
-                        <a:t>설명이 길어진 지시</a:t>
+                        <a:t>상세 설명이 지시에 쌓임</a:t>
                       </a:r>
                     </a:p>
                   </a:txBody>
@@ -16065,7 +15772,7 @@
                           <a:ea typeface="맑은 고딕" panose="020B0503020000020004" pitchFamily="34" charset="-127"/>
                           <a:cs typeface="맑은 고딕"/>
                         </a:rPr>
-                        <a:t>불안해서</a:t>
+                        <a:t>관련 내용을 모두 담으려 함</a:t>
                       </a:r>
                     </a:p>
                   </a:txBody>
@@ -16121,7 +15828,7 @@
                           <a:ea typeface="맑은 고딕" panose="020B0503020000020004" pitchFamily="34" charset="-127"/>
                           <a:cs typeface="맑은 고딕"/>
                         </a:rPr>
-                        <a:t>문서로 옮기고 가리킨다</a:t>
+                        <a:t>별도 문서로 옮기고 위치를 안내한다</a:t>
                       </a:r>
                     </a:p>
                   </a:txBody>
@@ -16179,7 +15886,7 @@
                           <a:ea typeface="맑은 고딕" panose="020B0503020000020004" pitchFamily="34" charset="-127"/>
                           <a:cs typeface="맑은 고딕"/>
                         </a:rPr>
-                        <a:t>지난 과제의 규칙이 남음</a:t>
+                        <a:t>끝난 과제의 지시가 남음</a:t>
                       </a:r>
                     </a:p>
                   </a:txBody>
@@ -16233,7 +15940,7 @@
                           <a:ea typeface="맑은 고딕" panose="020B0503020000020004" pitchFamily="34" charset="-127"/>
                           <a:cs typeface="맑은 고딕"/>
                         </a:rPr>
-                        <a:t>지우는 사람이 없어서</a:t>
+                        <a:t>정리할 담당자와 시점이 없음</a:t>
                       </a:r>
                     </a:p>
                   </a:txBody>
@@ -16289,7 +15996,7 @@
                           <a:ea typeface="맑은 고딕" panose="020B0503020000020004" pitchFamily="34" charset="-127"/>
                           <a:cs typeface="맑은 고딕"/>
                         </a:rPr>
-                        <a:t>끝난 과제의 줄을 지운다</a:t>
+                        <a:t>더 이상 쓰지 않는 지시를 제거한다</a:t>
                       </a:r>
                     </a:p>
                   </a:txBody>
@@ -16377,7 +16084,7 @@
                 <a:latin typeface="맑은 고딕"/>
                 <a:ea typeface="맑은 고딕"/>
               </a:rPr>
-              <a:t>맥락 파일은 </a:t>
+              <a:t>문제가 생길 때마다 지시를 추가하고 정리하지 않으면 </a:t>
             </a:r>
             <a:r>
               <a:rPr sz="1800" b="1">
@@ -16387,7 +16094,7 @@
                 <a:latin typeface="맑은 고딕"/>
                 <a:ea typeface="맑은 고딕"/>
               </a:rPr>
-              <a:t>늘어나기만 한다</a:t>
+              <a:t>중요한 규칙을 찾고 유지하기 어려워진다</a:t>
             </a:r>
             <a:r>
               <a:rPr sz="1800" b="0">
@@ -16397,7 +16104,7 @@
                 <a:latin typeface="맑은 고딕"/>
                 <a:ea typeface="맑은 고딕"/>
               </a:rPr>
-              <a:t>. 규칙을 더할 때마다 지침의 힘이 약해진다.</a:t>
+              <a:t>.</a:t>
             </a:r>
           </a:p>
         </p:txBody>
@@ -16531,7 +16238,7 @@
         <p:spPr>
           <a:xfrm>
             <a:off x="365760" y="3492610"/>
-            <a:ext cx="8412480" cy="1178518"/>
+            <a:ext cx="8412480" cy="1435556"/>
           </a:xfrm>
           <a:prstGeom prst="rect">
             <a:avLst/>
@@ -16563,7 +16270,7 @@
                 <a:latin typeface="맑은 고딕"/>
                 <a:ea typeface="맑은 고딕"/>
               </a:rPr>
-              <a:t>옮길 곳이 있다</a:t>
+              <a:t>자동 검사와의 분담</a:t>
             </a:r>
             <a:r>
               <a:rPr sz="1800" b="0">
@@ -16583,27 +16290,7 @@
                 <a:latin typeface="맑은 고딕"/>
                 <a:ea typeface="맑은 고딕"/>
               </a:rPr>
-              <a:t> 지킬 규칙은 지시보다 </a:t>
-            </a:r>
-            <a:r>
-              <a:rPr sz="1600" b="1">
-                <a:solidFill>
-                  <a:srgbClr val="000000"/>
-                </a:solidFill>
-                <a:latin typeface="맑은 고딕"/>
-                <a:ea typeface="맑은 고딕"/>
-              </a:rPr>
-              <a:t>센서</a:t>
-            </a:r>
-            <a:r>
-              <a:rPr sz="1600" b="0">
-                <a:solidFill>
-                  <a:srgbClr val="000000"/>
-                </a:solidFill>
-                <a:latin typeface="맑은 고딕"/>
-                <a:ea typeface="맑은 고딕"/>
-              </a:rPr>
-              <a:t>가 잘 지킨다. 검사의 오류 메시지가 고칠 방법을 알려 준다.</a:t>
+              <a:t> 기계로 판정할 수 있는 규칙은 검사로 확인한다. 오류 메시지에는 어긴 규칙과 수정 방법을 알려 준다.</a:t>
             </a:r>
           </a:p>
           <a:p>
@@ -16626,7 +16313,7 @@
                 <a:latin typeface="맑은 고딕"/>
                 <a:ea typeface="맑은 고딕"/>
               </a:rPr>
-              <a:t>지우는 일을 일정에 둔다</a:t>
+              <a:t>정기적인 정리</a:t>
             </a:r>
             <a:r>
               <a:rPr sz="1800" b="0">
@@ -16646,7 +16333,7 @@
                 <a:latin typeface="맑은 고딕"/>
                 <a:ea typeface="맑은 고딕"/>
               </a:rPr>
-              <a:t> 더하는 일만 하면 부패는 반드시 온다.</a:t>
+              <a:t> 지시를 갱신할 담당자와 시점을 정하고, 중복되거나 오래된 내용을 고친다.</a:t>
             </a:r>
           </a:p>
         </p:txBody>
@@ -16879,7 +16566,7 @@
                 <a:latin typeface="맑은 고딕"/>
                 <a:ea typeface="맑은 고딕"/>
               </a:rPr>
-              <a:t>실습 4의 수용 기준과 정기배송 모델 패키지를 LLM에 제공하여 </a:t>
+              <a:t>작업 명세서·수용 기준·정기배송 모델 패키지를 LLM에 제공하여 </a:t>
             </a:r>
             <a:r>
               <a:rPr sz="1600" b="1">
@@ -16889,7 +16576,7 @@
                 <a:latin typeface="맑은 고딕"/>
                 <a:ea typeface="맑은 고딕"/>
               </a:rPr>
-              <a:t>정기배송 저장소의 맥락 파일</a:t>
+              <a:t>맥락 파일과 제공·제외할 자료 목록</a:t>
             </a:r>
             <a:r>
               <a:rPr sz="1600" b="0">
@@ -16899,27 +16586,7 @@
                 <a:latin typeface="맑은 고딕"/>
                 <a:ea typeface="맑은 고딕"/>
               </a:rPr>
-              <a:t>과 </a:t>
-            </a:r>
-            <a:r>
-              <a:rPr sz="1600" b="1">
-                <a:solidFill>
-                  <a:srgbClr val="000000"/>
-                </a:solidFill>
-                <a:latin typeface="맑은 고딕"/>
-                <a:ea typeface="맑은 고딕"/>
-              </a:rPr>
-              <a:t>줄 것·주지 않을 것</a:t>
-            </a:r>
-            <a:r>
-              <a:rPr sz="1600" b="0">
-                <a:solidFill>
-                  <a:srgbClr val="000000"/>
-                </a:solidFill>
-                <a:latin typeface="맑은 고딕"/>
-                <a:ea typeface="맑은 고딕"/>
-              </a:rPr>
-              <a:t>을 만들고, 점검 항목으로 피드백하여 완성하십시오.</a:t>
+              <a:t>을 작성하고, 점검 항목에 따라 수정하십시오.</a:t>
             </a:r>
           </a:p>
           <a:p>
@@ -17057,7 +16724,7 @@
                 <a:latin typeface="맑은 고딕"/>
                 <a:ea typeface="맑은 고딕"/>
               </a:rPr>
-              <a:t>"저장소의 맥락 파일</a:t>
+              <a:t>"'신청한다' 과제의 맥락 파일</a:t>
             </a:r>
             <a:r>
               <a:rPr sz="1200" b="0">
@@ -17087,7 +16754,7 @@
                 <a:latin typeface="맑은 고딕"/>
                 <a:ea typeface="맑은 고딕"/>
               </a:rPr>
-              <a:t>30줄 안쪽의 지도</a:t>
+              <a:t>30줄 안쪽</a:t>
             </a:r>
             <a:r>
               <a:rPr sz="1600" b="0">
@@ -17097,7 +16764,7 @@
                 <a:latin typeface="맑은 고딕"/>
                 <a:ea typeface="맑은 고딕"/>
               </a:rPr>
-              <a:t>로 써줘. 규칙은 담지 말고 어느 문서를 왜 읽는지만 적어줘. 그리고 신청한다 과제에 </a:t>
+              <a:t>으로 써줘. 작업 개요와 완료·멈출 조건을 간단히 적고, 상세 규칙은 해당 문서를 안내해줘. 자료는 </a:t>
             </a:r>
             <a:r>
               <a:rPr sz="1600" b="1">
@@ -17107,7 +16774,7 @@
                 <a:latin typeface="맑은 고딕"/>
                 <a:ea typeface="맑은 고딕"/>
               </a:rPr>
-              <a:t>줄 것과 주지 않을 것</a:t>
+              <a:t>먼저 읽을 것·필요할 때 읽을 것·제외할 것</a:t>
             </a:r>
             <a:r>
               <a:rPr sz="1600" b="0">
@@ -17117,7 +16784,7 @@
                 <a:latin typeface="맑은 고딕"/>
                 <a:ea typeface="맑은 고딕"/>
               </a:rPr>
-              <a:t>을 나누고, 주지 않는 이유를 적어줘."</a:t>
+              <a:t>으로 나누고 이유를 적어줘."</a:t>
             </a:r>
           </a:p>
           <a:p>
@@ -17171,7 +16838,7 @@
                 <a:latin typeface="맑은 고딕"/>
                 <a:ea typeface="맑은 고딕"/>
               </a:rPr>
-              <a:t>지도인가?</a:t>
+              <a:t>문서 안내</a:t>
             </a:r>
             <a:r>
               <a:rPr sz="1600" b="0">
@@ -17191,7 +16858,7 @@
                 <a:latin typeface="맑은 고딕"/>
                 <a:ea typeface="맑은 고딕"/>
               </a:rPr>
-              <a:t> 규칙을 담지 않고 읽을 문서를 가리키는가?</a:t>
+              <a:t> 상세 규칙을 반복하지 않고 어느 문서를 왜 읽을지 안내하는가?</a:t>
             </a:r>
           </a:p>
           <a:p>
@@ -17222,7 +16889,7 @@
                 <a:latin typeface="맑은 고딕"/>
                 <a:ea typeface="맑은 고딕"/>
               </a:rPr>
-              <a:t>판단을 바꾸는가?</a:t>
+              <a:t>필요성</a:t>
             </a:r>
             <a:r>
               <a:rPr sz="1600" b="0">
@@ -17242,7 +16909,7 @@
                 <a:latin typeface="맑은 고딕"/>
                 <a:ea typeface="맑은 고딕"/>
               </a:rPr>
-              <a:t> 주는 것마다 "신청한다"의 결과를 바꾸는 이유가 있는가?</a:t>
+              <a:t> 각 자료가 "신청한다"의 구현과 검증에 필요한 이유를 설명했는가?</a:t>
             </a:r>
           </a:p>
           <a:p>
@@ -17395,7 +17062,7 @@
                 <a:latin typeface="맑은 고딕"/>
                 <a:ea typeface="맑은 고딕"/>
               </a:rPr>
-              <a:t>가리킴</a:t>
+              <a:t>접근 방법</a:t>
             </a:r>
             <a:r>
               <a:rPr sz="1600" b="0">
@@ -17415,27 +17082,7 @@
                 <a:latin typeface="맑은 고딕"/>
                 <a:ea typeface="맑은 고딕"/>
               </a:rPr>
-              <a:t> 큰 문서</a:t>
-            </a:r>
-            <a:r>
-              <a:rPr sz="1200" b="0">
-                <a:solidFill>
-                  <a:srgbClr val="000000"/>
-                </a:solidFill>
-                <a:latin typeface="맑은 고딕"/>
-                <a:ea typeface="맑은 고딕"/>
-              </a:rPr>
-              <a:t>(연동 규격)</a:t>
-            </a:r>
-            <a:r>
-              <a:rPr sz="1400" b="0">
-                <a:solidFill>
-                  <a:srgbClr val="000000"/>
-                </a:solidFill>
-                <a:latin typeface="맑은 고딕"/>
-                <a:ea typeface="맑은 고딕"/>
-              </a:rPr>
-              <a:t>를 통째로 담지 않고 경로로 두었는가?</a:t>
+              <a:t> 큰 문서의 위치와 읽어야 할 시점을 안내했는가?</a:t>
             </a:r>
           </a:p>
           <a:p>
@@ -17529,7 +17176,27 @@
                 <a:latin typeface="맑은 고딕"/>
                 <a:ea typeface="맑은 고딕"/>
               </a:rPr>
-              <a:t> 맥락 파일과 줄 것·주지 않을 것. 실습 6의 입력이 됩니다.</a:t>
+              <a:t> 맥락 파일과 제공·제외할 자료 목록</a:t>
+            </a:r>
+            <a:r>
+              <a:rPr sz="1400" b="0">
+                <a:solidFill>
+                  <a:srgbClr val="000000"/>
+                </a:solidFill>
+                <a:latin typeface="맑은 고딕"/>
+                <a:ea typeface="맑은 고딕"/>
+              </a:rPr>
+              <a:t>(먼저 읽을 것·필요할 때 읽을 것·제외할 것)</a:t>
+            </a:r>
+            <a:r>
+              <a:rPr sz="1600" b="0">
+                <a:solidFill>
+                  <a:srgbClr val="000000"/>
+                </a:solidFill>
+                <a:latin typeface="맑은 고딕"/>
+                <a:ea typeface="맑은 고딕"/>
+              </a:rPr>
+              <a:t>. 실습 6의 입력이 됩니다.</a:t>
             </a:r>
           </a:p>
         </p:txBody>
@@ -17757,7 +17424,7 @@
                 <a:latin typeface="맑은 고딕"/>
                 <a:ea typeface="맑은 고딕"/>
               </a:rPr>
-              <a:t>좋은 맥락은 많은 맥락이 아니라 </a:t>
+              <a:t>맥락에는 </a:t>
             </a:r>
             <a:r>
               <a:rPr sz="1800" b="1">
@@ -17767,7 +17434,7 @@
                 <a:latin typeface="맑은 고딕"/>
                 <a:ea typeface="맑은 고딕"/>
               </a:rPr>
-              <a:t>판단을 바꾸는 최소의 고신호 정보</a:t>
+              <a:t>구현과 검증에 필요한 규칙과 자료</a:t>
             </a:r>
             <a:r>
               <a:rPr sz="1800" b="0">
@@ -17777,7 +17444,7 @@
                 <a:latin typeface="맑은 고딕"/>
                 <a:ea typeface="맑은 고딕"/>
               </a:rPr>
-              <a:t>다.</a:t>
+              <a:t>를 선별해 담는다.</a:t>
             </a:r>
           </a:p>
           <a:p>
@@ -17821,7 +17488,7 @@
                 <a:latin typeface="맑은 고딕"/>
                 <a:ea typeface="맑은 고딕"/>
               </a:rPr>
-              <a:t>맥락 엔지니어링</a:t>
+              <a:t>정보 선별·갱신</a:t>
             </a:r>
             <a:r>
               <a:rPr sz="1800" b="0">
@@ -17841,7 +17508,7 @@
                 <a:latin typeface="맑은 고딕"/>
                 <a:ea typeface="맑은 고딕"/>
               </a:rPr>
-              <a:t> 차례마다 무엇을 넣을지 고르고 유지하는 일. 프롬프트 다듬기와 다르다</a:t>
+              <a:t> 필요한 자료를 고르고 갱신해, 중요한 정보가 묻히지 않게 한다</a:t>
             </a:r>
           </a:p>
           <a:p>
@@ -17864,7 +17531,7 @@
                 <a:latin typeface="맑은 고딕"/>
                 <a:ea typeface="맑은 고딕"/>
               </a:rPr>
-              <a:t>값이 있다</a:t>
+              <a:t>맥락의 구성</a:t>
             </a:r>
             <a:r>
               <a:rPr sz="1800" b="0">
@@ -17884,7 +17551,7 @@
                 <a:latin typeface="맑은 고딕"/>
                 <a:ea typeface="맑은 고딕"/>
               </a:rPr>
-              <a:t> 주의 예산을 깎고 맥락 부패를 부른다. 근거가 필요하다</a:t>
+              <a:t> 목표·규칙·도구·예시를 명확히 하고, 큰 문서는 필요할 때 읽게 한다</a:t>
             </a:r>
           </a:p>
           <a:p>
@@ -17907,7 +17574,7 @@
                 <a:latin typeface="맑은 고딕"/>
                 <a:ea typeface="맑은 고딕"/>
               </a:rPr>
-              <a:t>네 갈래</a:t>
+              <a:t>저장소와 맥락 파일</a:t>
             </a:r>
             <a:r>
               <a:rPr sz="1800" b="0">
@@ -17927,7 +17594,7 @@
                 <a:latin typeface="맑은 고딕"/>
                 <a:ea typeface="맑은 고딕"/>
               </a:rPr>
-              <a:t> 시스템 지시는 알맞은 추상화 수준으로, 큰 지식은 필요할 때 가져오게 한다</a:t>
+              <a:t> 업무 규칙과 설계 결정을 기록하고, 읽을 문서를 안내한다</a:t>
             </a:r>
           </a:p>
           <a:p>
@@ -17950,7 +17617,7 @@
                 <a:latin typeface="맑은 고딕"/>
                 <a:ea typeface="맑은 고딕"/>
               </a:rPr>
-              <a:t>저장소</a:t>
+              <a:t>도메인·설계 지식</a:t>
             </a:r>
             <a:r>
               <a:rPr sz="1800" b="0">
@@ -17970,7 +17637,7 @@
                 <a:latin typeface="맑은 고딕"/>
                 <a:ea typeface="맑은 고딕"/>
               </a:rPr>
-              <a:t> 에이전트가 볼 수 없는 지식은 없는 것이다. 맥락 파일은 백과사전이 아니라 지도다</a:t>
+              <a:t> 용어집·모델·의존 규칙으로 업무 의미와 구현 구조를 알려 준다</a:t>
             </a:r>
           </a:p>
           <a:p>
@@ -17993,7 +17660,7 @@
                 <a:latin typeface="맑은 고딕"/>
                 <a:ea typeface="맑은 고딕"/>
               </a:rPr>
-              <a:t>도메인·설계 지식</a:t>
+              <a:t>범위와 순서</a:t>
             </a:r>
             <a:r>
               <a:rPr sz="1800" b="0">
@@ -18013,50 +17680,7 @@
                 <a:latin typeface="맑은 고딕"/>
                 <a:ea typeface="맑은 고딕"/>
               </a:rPr>
-              <a:t> 용어집, 정적·동적 모델, 경계와 의존 규칙에서 판단을 바꾸는 것만 고른다</a:t>
-            </a:r>
-          </a:p>
-          <a:p>
-            <a:pPr lvl="2" marL="723900" indent="-368300">
-              <a:spcBef>
-                <a:spcPts val="600"/>
-              </a:spcBef>
-              <a:spcAft>
-                <a:spcPts val="600"/>
-              </a:spcAft>
-              <a:buSzPct val="90000"/>
-              <a:buFont typeface="Wingdings" pitchFamily="2" charset="2"/>
-              <a:buChar char=""/>
-            </a:pPr>
-            <a:r>
-              <a:rPr sz="1800" b="1">
-                <a:solidFill>
-                  <a:srgbClr val="000000"/>
-                </a:solidFill>
-                <a:latin typeface="맑은 고딕"/>
-                <a:ea typeface="맑은 고딕"/>
-              </a:rPr>
-              <a:t>적정량</a:t>
-            </a:r>
-            <a:r>
-              <a:rPr sz="1800" b="0">
-                <a:solidFill>
-                  <a:srgbClr val="000000"/>
-                </a:solidFill>
-                <a:latin typeface="맑은 고딕"/>
-                <a:ea typeface="맑은 고딕"/>
-              </a:rPr>
-              <a:t> —</a:t>
-            </a:r>
-            <a:r>
-              <a:rPr sz="1600" b="0">
-                <a:solidFill>
-                  <a:srgbClr val="000000"/>
-                </a:solidFill>
-                <a:latin typeface="맑은 고딕"/>
-                <a:ea typeface="맑은 고딕"/>
-              </a:rPr>
-              <a:t> 복잡성의 두 축으로 범위를, 비용 대비 효과로 순서를 정한다</a:t>
+              <a:t> 복잡성·활용도와 작성·입력 비용을 고려해 자료를 고른다</a:t>
             </a:r>
           </a:p>
           <a:p>
@@ -18358,8 +17982,8 @@
         </p:nvSpPr>
         <p:spPr>
           <a:xfrm>
-            <a:off x="233172" y="1414318"/>
-            <a:ext cx="4338828" cy="4898147"/>
+            <a:off x="233172" y="1616364"/>
+            <a:ext cx="4338828" cy="4696101"/>
           </a:xfrm>
         </p:spPr>
         <p:txBody>
@@ -18851,7 +18475,7 @@
         <p:spPr>
           <a:xfrm>
             <a:off x="233172" y="960120"/>
-            <a:ext cx="8778240" cy="454198"/>
+            <a:ext cx="8778240" cy="656244"/>
           </a:xfrm>
         </p:spPr>
         <p:txBody>
@@ -18877,7 +18501,7 @@
                 <a:latin typeface="맑은 고딕"/>
                 <a:ea typeface="맑은 고딕"/>
               </a:rPr>
-              <a:t>정기배송 저장소의 맥락 파일은 </a:t>
+              <a:t>정기배송의 맥락 파일에는 </a:t>
             </a:r>
             <a:r>
               <a:rPr sz="1400" b="1">
@@ -18887,7 +18511,7 @@
                 <a:latin typeface="맑은 고딕"/>
                 <a:ea typeface="맑은 고딕"/>
               </a:rPr>
-              <a:t>"신청한다" 과제가 읽을 문서를 가리키는 지도</a:t>
+              <a:t>"신청한다"의 작업 개요와 문서 안내</a:t>
             </a:r>
             <a:r>
               <a:rPr sz="1400" b="0">
@@ -18897,27 +18521,7 @@
                 <a:latin typeface="맑은 고딕"/>
                 <a:ea typeface="맑은 고딕"/>
               </a:rPr>
-              <a:t>이며, 규칙은 </a:t>
-            </a:r>
-            <a:r>
-              <a:rPr sz="1400" b="0">
-                <a:solidFill>
-                  <a:srgbClr val="000000"/>
-                </a:solidFill>
-                <a:latin typeface="맑은 고딕"/>
-                <a:ea typeface="맑은 고딕"/>
-              </a:rPr>
-              <a:t>docs/</a:t>
-            </a:r>
-            <a:r>
-              <a:rPr sz="1400" b="0">
-                <a:solidFill>
-                  <a:srgbClr val="000000"/>
-                </a:solidFill>
-                <a:latin typeface="맑은 고딕"/>
-                <a:ea typeface="맑은 고딕"/>
-              </a:rPr>
-              <a:t>가 가진다.</a:t>
+              <a:t>를 적는다. 상세한 업무 규칙은 해당 문서에서 확인하게 한다.</a:t>
             </a:r>
           </a:p>
         </p:txBody>
@@ -18940,8 +18544,8 @@
         </p:nvSpPr>
         <p:spPr>
           <a:xfrm>
-            <a:off x="4572000" y="1414318"/>
-            <a:ext cx="4439412" cy="4898147"/>
+            <a:off x="4572000" y="1616364"/>
+            <a:ext cx="4439412" cy="4696101"/>
           </a:xfrm>
         </p:spPr>
         <p:txBody>
@@ -19180,7 +18784,7 @@
                 <a:latin typeface="맑은 고딕"/>
                 <a:ea typeface="맑은 고딕"/>
               </a:rPr>
-              <a:t>. 요청할 때만 읽는다.</a:t>
+              <a:t>. 결제 승인 요청을 구현할 때 읽는다.</a:t>
             </a:r>
           </a:p>
         </p:txBody>
@@ -19437,17 +19041,7 @@
                 <a:latin typeface="맑은 고딕"/>
                 <a:ea typeface="맑은 고딕"/>
               </a:rPr>
-              <a:t>준다 —</a:t>
-            </a:r>
-            <a:r>
-              <a:rPr sz="1200" b="1">
-                <a:solidFill>
-                  <a:srgbClr val="000000"/>
-                </a:solidFill>
-                <a:latin typeface="맑은 고딕"/>
-                <a:ea typeface="맑은 고딕"/>
-              </a:rPr>
-              <a:t> 미리 올린다</a:t>
+              <a:t>먼저 읽는다</a:t>
             </a:r>
           </a:p>
           <a:p>
@@ -19490,7 +19084,7 @@
                 <a:latin typeface="맑은 고딕"/>
                 <a:ea typeface="맑은 고딕"/>
               </a:rPr>
-              <a:t> 가격과 회차 금액을 가른다. 10,000원을 추측하지 않는다</a:t>
+              <a:t> 가격과 회차 금액의 뜻을 구분한다</a:t>
             </a:r>
           </a:p>
           <a:p>
@@ -19662,7 +19256,7 @@
                 <a:latin typeface="맑은 고딕"/>
                 <a:ea typeface="맑은 고딕"/>
               </a:rPr>
-              <a:t> 연동을 부르는 자리를 가른다</a:t>
+              <a:t> 업무 코드와 연동·영속 코드의 의존 방향을 확인한다</a:t>
             </a:r>
           </a:p>
           <a:p>
@@ -19685,17 +19279,7 @@
                 <a:latin typeface="맑은 고딕"/>
                 <a:ea typeface="맑은 고딕"/>
               </a:rPr>
-              <a:t>준다 —</a:t>
-            </a:r>
-            <a:r>
-              <a:rPr sz="1200" b="1">
-                <a:solidFill>
-                  <a:srgbClr val="000000"/>
-                </a:solidFill>
-                <a:latin typeface="맑은 고딕"/>
-                <a:ea typeface="맑은 고딕"/>
-              </a:rPr>
-              <a:t> 가리킨다</a:t>
+              <a:t>필요할 때 읽는다</a:t>
             </a:r>
           </a:p>
           <a:p>
@@ -19738,7 +19322,7 @@
                 <a:latin typeface="맑은 고딕"/>
                 <a:ea typeface="맑은 고딕"/>
               </a:rPr>
-              <a:t> 양이 크고 승인 요청에만 쓴다. 경로로 둔다</a:t>
+              <a:t> 분량이 크고 연동 구현에 쓰므로 위치를 안내한다</a:t>
             </a:r>
           </a:p>
         </p:txBody>
@@ -19788,7 +19372,7 @@
                 <a:latin typeface="맑은 고딕"/>
                 <a:ea typeface="맑은 고딕"/>
               </a:rPr>
-              <a:t>맥락은 </a:t>
+              <a:t>"신청한다"의 구현과 검증에 필요한 자료를 고르고, </a:t>
             </a:r>
             <a:r>
               <a:rPr sz="1400" b="1">
@@ -19798,7 +19382,7 @@
                 <a:latin typeface="맑은 고딕"/>
                 <a:ea typeface="맑은 고딕"/>
               </a:rPr>
-              <a:t>"신청한다"의 결과를 바꾸는 것만</a:t>
+              <a:t>먼저 읽을 자료와 작업 중에 읽을 자료</a:t>
             </a:r>
             <a:r>
               <a:rPr sz="1400" b="0">
@@ -19808,7 +19392,7 @@
                 <a:latin typeface="맑은 고딕"/>
                 <a:ea typeface="맑은 고딕"/>
               </a:rPr>
-              <a:t> 준다. 나머지는 가리키거나 뺀다.</a:t>
+              <a:t>를 구분한다.</a:t>
             </a:r>
           </a:p>
         </p:txBody>
@@ -19860,7 +19444,7 @@
                 <a:latin typeface="맑은 고딕"/>
                 <a:ea typeface="맑은 고딕"/>
               </a:rPr>
-              <a:t>주지 않는다</a:t>
+              <a:t>제외한다</a:t>
             </a:r>
           </a:p>
           <a:p>
@@ -19969,7 +19553,7 @@
                 <a:latin typeface="맑은 고딕"/>
                 <a:ea typeface="맑은 고딕"/>
               </a:rPr>
-              <a:t>코딩 규칙</a:t>
+              <a:t>자동 검사로 확인하는 코딩 규칙의 상세</a:t>
             </a:r>
             <a:r>
               <a:rPr sz="1200" b="0">
@@ -19989,7 +19573,7 @@
                 <a:latin typeface="맑은 고딕"/>
                 <a:ea typeface="맑은 고딕"/>
               </a:rPr>
-              <a:t> 결과를 바꾸지 않는다. 검사로 강제한다</a:t>
+              <a:t> 지시에 반복하지 않고 검사 결과로 확인한다</a:t>
             </a:r>
           </a:p>
           <a:p>
@@ -20035,7 +19619,7 @@
                 <a:latin typeface="맑은 고딕"/>
                 <a:ea typeface="맑은 고딕"/>
               </a:rPr>
-              <a:t>미리 올림</a:t>
+              <a:t>먼저 읽기</a:t>
             </a:r>
             <a:r>
               <a:rPr sz="1200" b="0">
@@ -20055,7 +19639,7 @@
                 <a:latin typeface="맑은 고딕"/>
                 <a:ea typeface="맑은 고딕"/>
               </a:rPr>
-              <a:t> 모든 작업 단위가 쓰는 전제인가?</a:t>
+              <a:t> 현재 과제 전반에 필요한 자료인가?</a:t>
             </a:r>
           </a:p>
           <a:p>
@@ -20078,7 +19662,7 @@
                 <a:latin typeface="맑은 고딕"/>
                 <a:ea typeface="맑은 고딕"/>
               </a:rPr>
-              <a:t>가리킴</a:t>
+              <a:t>필요할 때 읽기</a:t>
             </a:r>
             <a:r>
               <a:rPr sz="1200" b="0">
@@ -20098,7 +19682,7 @@
                 <a:latin typeface="맑은 고딕"/>
                 <a:ea typeface="맑은 고딕"/>
               </a:rPr>
-              <a:t> 크고 드물게 쓰는가?</a:t>
+              <a:t> 특정 작업에서만 쓰거나 분량이 큰 자료인가?</a:t>
             </a:r>
           </a:p>
         </p:txBody>
@@ -20398,7 +19982,7 @@
                 <a:latin typeface="맑은 고딕"/>
                 <a:ea typeface="맑은 고딕"/>
               </a:rPr>
-              <a:t> 상태 기계를 정기배송과 회차의 두 파일로 나눈다. 맥락 파일이 따로 가리킬 수 있다.</a:t>
+              <a:t> 정기배송과 회차의 상태 기계를 두 파일로 나눈다. 필요한 상태 기계를 따로 찾아 읽게 한다.</a:t>
             </a:r>
           </a:p>
           <a:p>
@@ -20596,7 +20180,7 @@
                 <a:latin typeface="맑은 고딕"/>
                 <a:ea typeface="맑은 고딕"/>
               </a:rPr>
-              <a:t>참조를 경로로</a:t>
+              <a:t>참조에 위치를 명시한다</a:t>
             </a:r>
             <a:r>
               <a:rPr sz="1200" b="0">
@@ -20616,7 +20200,7 @@
                 <a:latin typeface="맑은 고딕"/>
                 <a:ea typeface="맑은 고딕"/>
               </a:rPr>
-              <a:t> 「참조」의 문서 이름을 저장소 경로로 바꾼다. 에이전트가 찾을 수 있어야 한다.</a:t>
+              <a:t> 「참조」에 문서의 저장소 경로를 적어 에이전트가 찾아 읽을 수 있게 한다.</a:t>
             </a:r>
           </a:p>
           <a:p>
@@ -20725,7 +20309,7 @@
                 <a:latin typeface="맑은 고딕"/>
                 <a:ea typeface="맑은 고딕"/>
               </a:rPr>
-              <a:t> 문서 이름의 경로화.</a:t>
+              <a:t> 작업 명세서의 참조에 경로를 적은 변경.</a:t>
             </a:r>
           </a:p>
         </p:txBody>
@@ -20965,7 +20549,7 @@
                 <a:latin typeface="맑은 고딕"/>
                 <a:ea typeface="맑은 고딕"/>
               </a:rPr>
-              <a:t>맥락 엔지니어링은 추론하는 동안 </a:t>
+              <a:t>맥락 엔지니어링은 LLM이 추론할 때 사용할 </a:t>
             </a:r>
             <a:r>
               <a:rPr sz="1800" b="1">
@@ -20975,7 +20559,7 @@
                 <a:latin typeface="맑은 고딕"/>
                 <a:ea typeface="맑은 고딕"/>
               </a:rPr>
-              <a:t>최적의 토큰을 골라 유지하는 전략</a:t>
+              <a:t>정보를 선별하고 적절한 상태로 유지하는 전략</a:t>
             </a:r>
             <a:r>
               <a:rPr sz="1800" b="0">
@@ -20985,7 +20569,7 @@
                 <a:latin typeface="맑은 고딕"/>
                 <a:ea typeface="맑은 고딕"/>
               </a:rPr>
-              <a:t>의 집합이다</a:t>
+              <a:t>을 뜻한다</a:t>
             </a:r>
             <a:r>
               <a:rPr sz="1000" b="0">
@@ -21005,7 +20589,27 @@
                 <a:latin typeface="맑은 고딕"/>
                 <a:ea typeface="맑은 고딕"/>
               </a:rPr>
-              <a:t>"Context engineering refers to the set of strategies for curating and maintaining the optimal set of tokens (information) during LLM inference", [Anthropic 2025c]</a:t>
+              <a:t>"Context engineering refers to the set of strategies for curating and maintaining the optimal set of tokens (information) during LLM inference"</a:t>
+            </a:r>
+            <a:r>
+              <a:rPr sz="1000" b="0">
+                <a:solidFill>
+                  <a:srgbClr val="000000"/>
+                </a:solidFill>
+                <a:latin typeface="맑은 고딕"/>
+                <a:ea typeface="맑은 고딕"/>
+              </a:rPr>
+              <a:t>, </a:t>
+            </a:r>
+            <a:r>
+              <a:rPr sz="1000" b="0">
+                <a:solidFill>
+                  <a:srgbClr val="000000"/>
+                </a:solidFill>
+                <a:latin typeface="맑은 고딕"/>
+                <a:ea typeface="맑은 고딕"/>
+              </a:rPr>
+              <a:t>[Anthropic 2025c]</a:t>
             </a:r>
           </a:p>
           <a:p>
@@ -21028,7 +20632,7 @@
                 <a:latin typeface="맑은 고딕"/>
                 <a:ea typeface="맑은 고딕"/>
               </a:rPr>
-              <a:t>고르는 일</a:t>
+              <a:t>정보 선별</a:t>
             </a:r>
             <a:r>
               <a:rPr sz="1800" b="0">
@@ -21048,27 +20652,7 @@
                 <a:latin typeface="맑은 고딕"/>
                 <a:ea typeface="맑은 고딕"/>
               </a:rPr>
-              <a:t> 에이전트가 가진 창에 들어갈 정보를 </a:t>
-            </a:r>
-            <a:r>
-              <a:rPr sz="1600" b="1">
-                <a:solidFill>
-                  <a:srgbClr val="000000"/>
-                </a:solidFill>
-                <a:latin typeface="맑은 고딕"/>
-                <a:ea typeface="맑은 고딕"/>
-              </a:rPr>
-              <a:t>사람이 선별</a:t>
-            </a:r>
-            <a:r>
-              <a:rPr sz="1600" b="0">
-                <a:solidFill>
-                  <a:srgbClr val="000000"/>
-                </a:solidFill>
-                <a:latin typeface="맑은 고딕"/>
-                <a:ea typeface="맑은 고딕"/>
-              </a:rPr>
-              <a:t>한다.</a:t>
+              <a:t> 사람이 작업에 필요한 규칙과 자료를 고르고, 에이전트가 맥락 창에서 읽을 수 있게 한다.</a:t>
             </a:r>
           </a:p>
           <a:p>
@@ -21091,7 +20675,7 @@
                 <a:latin typeface="맑은 고딕"/>
                 <a:ea typeface="맑은 고딕"/>
               </a:rPr>
-              <a:t>유지하는 일</a:t>
+              <a:t>정보 갱신</a:t>
             </a:r>
             <a:r>
               <a:rPr sz="1800" b="0">
@@ -21111,27 +20695,7 @@
                 <a:latin typeface="맑은 고딕"/>
                 <a:ea typeface="맑은 고딕"/>
               </a:rPr>
-              <a:t> 과제가 진행되는 동안 </a:t>
-            </a:r>
-            <a:r>
-              <a:rPr sz="1600" b="1">
-                <a:solidFill>
-                  <a:srgbClr val="000000"/>
-                </a:solidFill>
-                <a:latin typeface="맑은 고딕"/>
-                <a:ea typeface="맑은 고딕"/>
-              </a:rPr>
-              <a:t>낡은 정보를 덜어내고</a:t>
-            </a:r>
-            <a:r>
-              <a:rPr sz="1600" b="0">
-                <a:solidFill>
-                  <a:srgbClr val="000000"/>
-                </a:solidFill>
-                <a:latin typeface="맑은 고딕"/>
-                <a:ea typeface="맑은 고딕"/>
-              </a:rPr>
-              <a:t> 필요한 것을 넣는다.</a:t>
+              <a:t> 작업이 진행되면 낡거나 불필요해진 정보를 덜어내고, 새로 필요한 정보를 제공한다.</a:t>
             </a:r>
           </a:p>
           <a:p>
@@ -21154,7 +20718,7 @@
                 <a:latin typeface="맑은 고딕"/>
                 <a:ea typeface="맑은 고딕"/>
               </a:rPr>
-              <a:t>목표</a:t>
+              <a:t>선별 기준</a:t>
             </a:r>
             <a:r>
               <a:rPr sz="1800" b="0">
@@ -21174,7 +20738,7 @@
                 <a:latin typeface="맑은 고딕"/>
                 <a:ea typeface="맑은 고딕"/>
               </a:rPr>
-              <a:t> 원하는 결과가 나올 가능성을 가장 높이는 </a:t>
+              <a:t> 자료의 양보다, </a:t>
             </a:r>
             <a:r>
               <a:rPr sz="1600" b="1">
@@ -21184,7 +20748,7 @@
                 <a:latin typeface="맑은 고딕"/>
                 <a:ea typeface="맑은 고딕"/>
               </a:rPr>
-              <a:t>최소의 고신호 토큰</a:t>
+              <a:t>작업을 올바르게 수행하는 데 필요한 정보가 있는지</a:t>
             </a:r>
             <a:r>
               <a:rPr sz="1600" b="0">
@@ -21194,7 +20758,7 @@
                 <a:latin typeface="맑은 고딕"/>
                 <a:ea typeface="맑은 고딕"/>
               </a:rPr>
-              <a:t>이다.</a:t>
+              <a:t>를 본다.</a:t>
             </a:r>
           </a:p>
           <a:p>
@@ -21217,7 +20781,7 @@
                 <a:latin typeface="맑은 고딕"/>
                 <a:ea typeface="맑은 고딕"/>
               </a:rPr>
-              <a:t>좋은 맥락 엔지니어링은 바라는 결과가 나올 가능성을 극대화하는 </a:t>
+              <a:t>좋은 맥락 엔지니어링은 원하는 결과가 나올 가능성을 높이는 </a:t>
             </a:r>
             <a:r>
               <a:rPr sz="1800" b="1">
@@ -21227,7 +20791,7 @@
                 <a:latin typeface="맑은 고딕"/>
                 <a:ea typeface="맑은 고딕"/>
               </a:rPr>
-              <a:t>가장 작은 고신호 토큰 집합</a:t>
+              <a:t>핵심 정보를 가능한 적은 분량으로 구성</a:t>
             </a:r>
             <a:r>
               <a:rPr sz="1800" b="0">
@@ -21237,7 +20801,7 @@
                 <a:latin typeface="맑은 고딕"/>
                 <a:ea typeface="맑은 고딕"/>
               </a:rPr>
-              <a:t>을 찾는 것이다</a:t>
+              <a:t>하는 것이다</a:t>
             </a:r>
             <a:r>
               <a:rPr sz="1000" b="0">
@@ -21257,7 +20821,27 @@
                 <a:latin typeface="맑은 고딕"/>
                 <a:ea typeface="맑은 고딕"/>
               </a:rPr>
-              <a:t>"good context engineering means finding the smallest possible set of high-signal tokens that maximize the likelihood of some desired outcome", [Anthropic 2025c]</a:t>
+              <a:t>"good context engineering means finding the smallest possible set of high-signal tokens that maximize the likelihood of some desired outcome"</a:t>
+            </a:r>
+            <a:r>
+              <a:rPr sz="1000" b="0">
+                <a:solidFill>
+                  <a:srgbClr val="000000"/>
+                </a:solidFill>
+                <a:latin typeface="맑은 고딕"/>
+                <a:ea typeface="맑은 고딕"/>
+              </a:rPr>
+              <a:t>, </a:t>
+            </a:r>
+            <a:r>
+              <a:rPr sz="1000" b="0">
+                <a:solidFill>
+                  <a:srgbClr val="000000"/>
+                </a:solidFill>
+                <a:latin typeface="맑은 고딕"/>
+                <a:ea typeface="맑은 고딕"/>
+              </a:rPr>
+              <a:t>[Anthropic 2025c]</a:t>
             </a:r>
           </a:p>
         </p:txBody>
@@ -21443,8 +21027,8 @@
           </p:nvPr>
         </p:nvGraphicFramePr>
         <p:xfrm>
-          <a:off x="1816926" y="2898948"/>
-          <a:ext cx="5496560" cy="3873500"/>
+          <a:off x="1775016" y="2898948"/>
+          <a:ext cx="5580380" cy="3873500"/>
         </p:xfrm>
         <a:graphic>
           <a:graphicData uri="http://schemas.openxmlformats.org/drawingml/2006/table">
@@ -21452,7 +21036,7 @@
               <a:tblPr/>
               <a:tblGrid>
                 <a:gridCol w="1087120"/>
-                <a:gridCol w="1869440"/>
+                <a:gridCol w="1953260"/>
                 <a:gridCol w="2540000"/>
               </a:tblGrid>
               <a:tr h="288000">
@@ -21788,7 +21372,7 @@
                           <a:ea typeface="맑은 고딕" panose="020B0503020000020004" pitchFamily="34" charset="-127"/>
                           <a:cs typeface="맑은 고딕"/>
                         </a:rPr>
-                        <a:t>창에 들어갈 정보 전체</a:t>
+                        <a:t>맥락 창에 들어갈 정보 전체</a:t>
                       </a:r>
                     </a:p>
                   </a:txBody>
@@ -21846,7 +21430,7 @@
                           <a:ea typeface="맑은 고딕" panose="020B0503020000020004" pitchFamily="34" charset="-127"/>
                           <a:cs typeface="맑은 고딕"/>
                         </a:rPr>
-                        <a:t>시점</a:t>
+                        <a:t>초점</a:t>
                       </a:r>
                     </a:p>
                   </a:txBody>
@@ -21900,7 +21484,7 @@
                           <a:ea typeface="맑은 고딕" panose="020B0503020000020004" pitchFamily="34" charset="-127"/>
                           <a:cs typeface="맑은 고딕"/>
                         </a:rPr>
-                        <a:t>작업을 시킬 때 한 번</a:t>
+                        <a:t>의도를 어떻게 전달할까?</a:t>
                       </a:r>
                     </a:p>
                   </a:txBody>
@@ -21956,7 +21540,7 @@
                           <a:ea typeface="맑은 고딕" panose="020B0503020000020004" pitchFamily="34" charset="-127"/>
                           <a:cs typeface="맑은 고딕"/>
                         </a:rPr>
-                        <a:t>차례마다 반복</a:t>
+                        <a:t>지금 어떤 정보가 필요할까?</a:t>
                       </a:r>
                     </a:p>
                   </a:txBody>
@@ -22380,7 +21964,7 @@
                 <a:latin typeface="맑은 고딕"/>
                 <a:ea typeface="맑은 고딕"/>
               </a:rPr>
-              <a:t>프롬프트 엔지니어링은 </a:t>
+              <a:t>프롬프트 엔지니어링이 </a:t>
             </a:r>
             <a:r>
               <a:rPr sz="1800" b="1">
@@ -22390,7 +21974,7 @@
                 <a:latin typeface="맑은 고딕"/>
                 <a:ea typeface="맑은 고딕"/>
               </a:rPr>
-              <a:t>한 번의 지시를 잘 쓰는 일</a:t>
+              <a:t>지시의 표현</a:t>
             </a:r>
             <a:r>
               <a:rPr sz="1800" b="0">
@@ -22400,7 +21984,7 @@
                 <a:latin typeface="맑은 고딕"/>
                 <a:ea typeface="맑은 고딕"/>
               </a:rPr>
-              <a:t>이고, 맥락 엔지니어링은 </a:t>
+              <a:t>을 다룬다면, 맥락 엔지니어링은 그 지시와 함께 모델이 읽을 </a:t>
             </a:r>
             <a:r>
               <a:rPr sz="1800" b="1">
@@ -22410,7 +21994,7 @@
                 <a:latin typeface="맑은 고딕"/>
                 <a:ea typeface="맑은 고딕"/>
               </a:rPr>
-              <a:t>매 차례 무엇을 넣을지 고르는 일</a:t>
+              <a:t>정보 전체의 구성과 갱신</a:t>
             </a:r>
             <a:r>
               <a:rPr sz="1800" b="0">
@@ -22420,7 +22004,7 @@
                 <a:latin typeface="맑은 고딕"/>
                 <a:ea typeface="맑은 고딕"/>
               </a:rPr>
-              <a:t>이다.</a:t>
+              <a:t>을 다룬다.</a:t>
             </a:r>
           </a:p>
           <a:p>
@@ -22443,7 +22027,7 @@
                 <a:latin typeface="맑은 고딕"/>
                 <a:ea typeface="맑은 고딕"/>
               </a:rPr>
-              <a:t>맥락을 고르는 일은 </a:t>
+              <a:t>맥락 구성은 </a:t>
             </a:r>
             <a:r>
               <a:rPr sz="1800" b="1">
@@ -22453,7 +22037,7 @@
                 <a:latin typeface="맑은 고딕"/>
                 <a:ea typeface="맑은 고딕"/>
               </a:rPr>
-              <a:t>반복되며</a:t>
+              <a:t>반복적인 작업</a:t>
             </a:r>
             <a:r>
               <a:rPr sz="1800" b="0">
@@ -22463,7 +22047,7 @@
                 <a:latin typeface="맑은 고딕"/>
                 <a:ea typeface="맑은 고딕"/>
               </a:rPr>
-              <a:t> 모델에 무엇을 넘길지 결정할 때마다 선별 단계가 일어난다</a:t>
+              <a:t>이며, 모델에 무엇을 전달할지 결정할 때마다 정보를 선별한다</a:t>
             </a:r>
             <a:r>
               <a:rPr sz="1000" b="0">
@@ -22483,7 +22067,27 @@
                 <a:latin typeface="맑은 고딕"/>
                 <a:ea typeface="맑은 고딕"/>
               </a:rPr>
-              <a:t>"iterative and the curation phase happens each time we decide what to pass to the model.", [Anthropic 2025c]</a:t>
+              <a:t>"iterative and the curation phase happens each time we decide what to pass to the model."</a:t>
+            </a:r>
+            <a:r>
+              <a:rPr sz="1000" b="0">
+                <a:solidFill>
+                  <a:srgbClr val="000000"/>
+                </a:solidFill>
+                <a:latin typeface="맑은 고딕"/>
+                <a:ea typeface="맑은 고딕"/>
+              </a:rPr>
+              <a:t>, </a:t>
+            </a:r>
+            <a:r>
+              <a:rPr sz="1000" b="0">
+                <a:solidFill>
+                  <a:srgbClr val="000000"/>
+                </a:solidFill>
+                <a:latin typeface="맑은 고딕"/>
+                <a:ea typeface="맑은 고딕"/>
+              </a:rPr>
+              <a:t>[Anthropic 2025c]</a:t>
             </a:r>
           </a:p>
         </p:txBody>
@@ -22617,7 +22221,7 @@
         <p:spPr>
           <a:xfrm>
             <a:off x="365760" y="4567548"/>
-            <a:ext cx="8412480" cy="781278"/>
+            <a:ext cx="8412480" cy="1038316"/>
           </a:xfrm>
           <a:prstGeom prst="rect">
             <a:avLst/>
@@ -22649,7 +22253,7 @@
                 <a:latin typeface="맑은 고딕"/>
                 <a:ea typeface="맑은 고딕"/>
               </a:rPr>
-              <a:t>대체가 아니다</a:t>
+              <a:t>함께 필요한 작업</a:t>
             </a:r>
             <a:r>
               <a:rPr sz="1800" b="0">
@@ -22669,27 +22273,7 @@
                 <a:latin typeface="맑은 고딕"/>
                 <a:ea typeface="맑은 고딕"/>
               </a:rPr>
-              <a:t> 프롬프트를 잘 써도 </a:t>
-            </a:r>
-            <a:r>
-              <a:rPr sz="1600" b="1">
-                <a:solidFill>
-                  <a:srgbClr val="000000"/>
-                </a:solidFill>
-                <a:latin typeface="맑은 고딕"/>
-                <a:ea typeface="맑은 고딕"/>
-              </a:rPr>
-              <a:t>판단에 필요한 지식이 없으면</a:t>
-            </a:r>
-            <a:r>
-              <a:rPr sz="1600" b="0">
-                <a:solidFill>
-                  <a:srgbClr val="000000"/>
-                </a:solidFill>
-                <a:latin typeface="맑은 고딕"/>
-                <a:ea typeface="맑은 고딕"/>
-              </a:rPr>
-              <a:t> 에이전트는 빈칸을 추측으로 채운다.</a:t>
+              <a:t> 지시를 명확히 써도 업무 규칙이 빠져 있으면 에이전트가 추측할 수 있다. 작업이 진행될 때마다 필요한 자료도 다시 골라야 한다.</a:t>
             </a:r>
           </a:p>
         </p:txBody>
@@ -22929,7 +22513,7 @@
                 <a:latin typeface="맑은 고딕"/>
                 <a:ea typeface="맑은 고딕"/>
               </a:rPr>
-              <a:t>맥락을 넣는 데는 </a:t>
+              <a:t>모델이 입력을 받아들일 수 있는 양과, 그 안의 정보를 </a:t>
             </a:r>
             <a:r>
               <a:rPr sz="1800" b="1">
@@ -22939,7 +22523,7 @@
                 <a:latin typeface="맑은 고딕"/>
                 <a:ea typeface="맑은 고딕"/>
               </a:rPr>
-              <a:t>값이 따른다</a:t>
+              <a:t>정확히 활용할 수 있는 정도</a:t>
             </a:r>
             <a:r>
               <a:rPr sz="1800" b="0">
@@ -22949,7 +22533,7 @@
                 <a:latin typeface="맑은 고딕"/>
                 <a:ea typeface="맑은 고딕"/>
               </a:rPr>
-              <a:t>. 토큰이 늘면 모델이 쓸 수 있는 주의가 줄어든다.</a:t>
+              <a:t>는 다르다.</a:t>
             </a:r>
           </a:p>
           <a:p>
@@ -23002,7 +22586,27 @@
                 <a:latin typeface="맑은 고딕"/>
                 <a:ea typeface="맑은 고딕"/>
               </a:rPr>
-              <a:t>"LLMs, like humans, lose focus or experience confusion at a certain point", [Anthropic 2025c]</a:t>
+              <a:t>"LLMs, like humans, lose focus or experience confusion at a certain point"</a:t>
+            </a:r>
+            <a:r>
+              <a:rPr sz="1000" b="0">
+                <a:solidFill>
+                  <a:srgbClr val="000000"/>
+                </a:solidFill>
+                <a:latin typeface="맑은 고딕"/>
+                <a:ea typeface="맑은 고딕"/>
+              </a:rPr>
+              <a:t>, </a:t>
+            </a:r>
+            <a:r>
+              <a:rPr sz="1000" b="0">
+                <a:solidFill>
+                  <a:srgbClr val="000000"/>
+                </a:solidFill>
+                <a:latin typeface="맑은 고딕"/>
+                <a:ea typeface="맑은 고딕"/>
+              </a:rPr>
+              <a:t>[Anthropic 2025c]</a:t>
             </a:r>
           </a:p>
           <a:p>
@@ -23108,7 +22712,7 @@
                 <a:latin typeface="맑은 고딕"/>
                 <a:ea typeface="맑은 고딕"/>
               </a:rPr>
-              <a:t>창이 크다는 것과 다르다</a:t>
+              <a:t>맥락 창의 한계</a:t>
             </a:r>
             <a:r>
               <a:rPr sz="1800" b="0">
@@ -23128,27 +22732,7 @@
                 <a:latin typeface="맑은 고딕"/>
                 <a:ea typeface="맑은 고딕"/>
               </a:rPr>
-              <a:t> 토큰 한도가 남아 있어도 </a:t>
-            </a:r>
-            <a:r>
-              <a:rPr sz="1600" b="1">
-                <a:solidFill>
-                  <a:srgbClr val="000000"/>
-                </a:solidFill>
-                <a:latin typeface="맑은 고딕"/>
-                <a:ea typeface="맑은 고딕"/>
-              </a:rPr>
-              <a:t>주의는 먼저 바닥난다</a:t>
-            </a:r>
-            <a:r>
-              <a:rPr sz="1600" b="0">
-                <a:solidFill>
-                  <a:srgbClr val="000000"/>
-                </a:solidFill>
-                <a:latin typeface="맑은 고딕"/>
-                <a:ea typeface="맑은 고딕"/>
-              </a:rPr>
-              <a:t>.</a:t>
+              <a:t> 입력 한도 안에 들어가는 자료라도, 모델이 중요한 내용을 놓칠 수 있다.</a:t>
             </a:r>
           </a:p>
           <a:p>
@@ -23171,7 +22755,7 @@
                 <a:latin typeface="맑은 고딕"/>
                 <a:ea typeface="맑은 고딕"/>
               </a:rPr>
-              <a:t>넣을 때마다 쓴다</a:t>
+              <a:t>선별이 필요한 이유</a:t>
             </a:r>
             <a:r>
               <a:rPr sz="1800" b="0">
@@ -23191,7 +22775,7 @@
                 <a:latin typeface="맑은 고딕"/>
                 <a:ea typeface="맑은 고딕"/>
               </a:rPr>
-              <a:t> 새 토큰은 모두 예산을 깎으므로, 넣는 근거가 있어야 한다.</a:t>
+              <a:t> 불필요한 정보가 늘면 필요한 정보에 집중하기 어려워진다. 자료를 추가할 때는 작업에 필요한 이유를 확인한다.</a:t>
             </a:r>
           </a:p>
         </p:txBody>
@@ -23504,7 +23088,27 @@
                 <a:latin typeface="맑은 고딕"/>
                 <a:ea typeface="맑은 고딕"/>
               </a:rPr>
-              <a:t>"as the number of tokens in the context window increases, the model's ability to accurately recall information from that context decreases", [Anthropic 2025c]</a:t>
+              <a:t>"as the number of tokens in the context window increases, the model's ability to accurately recall information from that context decreases"</a:t>
+            </a:r>
+            <a:r>
+              <a:rPr sz="1000" b="0">
+                <a:solidFill>
+                  <a:srgbClr val="000000"/>
+                </a:solidFill>
+                <a:latin typeface="맑은 고딕"/>
+                <a:ea typeface="맑은 고딕"/>
+              </a:rPr>
+              <a:t>, </a:t>
+            </a:r>
+            <a:r>
+              <a:rPr sz="1000" b="0">
+                <a:solidFill>
+                  <a:srgbClr val="000000"/>
+                </a:solidFill>
+                <a:latin typeface="맑은 고딕"/>
+                <a:ea typeface="맑은 고딕"/>
+              </a:rPr>
+              <a:t>[Anthropic 2025c]</a:t>
             </a:r>
           </a:p>
           <a:p>
@@ -23527,7 +23131,7 @@
                 <a:latin typeface="맑은 고딕"/>
                 <a:ea typeface="맑은 고딕"/>
               </a:rPr>
-              <a:t>맥락 파일도 </a:t>
+              <a:t>문서의 내용이 </a:t>
             </a:r>
             <a:r>
               <a:rPr sz="1800" b="1">
@@ -23537,7 +23141,7 @@
                 <a:latin typeface="맑은 고딕"/>
                 <a:ea typeface="맑은 고딕"/>
               </a:rPr>
-              <a:t>낡아 간다</a:t>
+              <a:t>최신 상태인지</a:t>
             </a:r>
             <a:r>
               <a:rPr sz="1800" b="0">
@@ -23547,7 +23151,7 @@
                 <a:latin typeface="맑은 고딕"/>
                 <a:ea typeface="맑은 고딕"/>
               </a:rPr>
-              <a:t>. 하나의 큰 지시 파일은 유지하는 사람이 사라지면서 틀린 규칙의 저장소가 된다.</a:t>
+              <a:t>도 확인해야 한다. 규칙이 바뀌었는데 맥락 파일을 갱신하지 않으면 에이전트는 오래된 규칙을 따를 수 있다.</a:t>
             </a:r>
           </a:p>
           <a:p>
@@ -23610,7 +23214,27 @@
                 <a:latin typeface="맑은 고딕"/>
                 <a:ea typeface="맑은 고딕"/>
               </a:rPr>
-              <a:t>"It rots instantly. A monolithic manual turns into a graveyard of stale rules. Agents can't tell what's still true, humans stop maintaining it", [Lopopolo 2026]</a:t>
+              <a:t>"It rots instantly. A monolithic manual turns into a graveyard of stale rules. Agents can't tell what's still true, humans stop maintaining it"</a:t>
+            </a:r>
+            <a:r>
+              <a:rPr sz="1000" b="0">
+                <a:solidFill>
+                  <a:srgbClr val="000000"/>
+                </a:solidFill>
+                <a:latin typeface="맑은 고딕"/>
+                <a:ea typeface="맑은 고딕"/>
+              </a:rPr>
+              <a:t>, </a:t>
+            </a:r>
+            <a:r>
+              <a:rPr sz="1000" b="0">
+                <a:solidFill>
+                  <a:srgbClr val="000000"/>
+                </a:solidFill>
+                <a:latin typeface="맑은 고딕"/>
+                <a:ea typeface="맑은 고딕"/>
+              </a:rPr>
+              <a:t>[Lopopolo 2026]</a:t>
             </a:r>
           </a:p>
           <a:p>
@@ -23633,7 +23257,7 @@
                 <a:latin typeface="맑은 고딕"/>
                 <a:ea typeface="맑은 고딕"/>
               </a:rPr>
-              <a:t>두 가지 부패</a:t>
+              <a:t>맥락 부패에 대한 대응</a:t>
             </a:r>
             <a:r>
               <a:rPr sz="1800" b="0">
@@ -23653,47 +23277,7 @@
                 <a:latin typeface="맑은 고딕"/>
                 <a:ea typeface="맑은 고딕"/>
               </a:rPr>
-              <a:t> 한 번의 실행에서 </a:t>
-            </a:r>
-            <a:r>
-              <a:rPr sz="1600" b="1">
-                <a:solidFill>
-                  <a:srgbClr val="000000"/>
-                </a:solidFill>
-                <a:latin typeface="맑은 고딕"/>
-                <a:ea typeface="맑은 고딕"/>
-              </a:rPr>
-              <a:t>주의가 흩어지는 것</a:t>
-            </a:r>
-            <a:r>
-              <a:rPr sz="1600" b="0">
-                <a:solidFill>
-                  <a:srgbClr val="000000"/>
-                </a:solidFill>
-                <a:latin typeface="맑은 고딕"/>
-                <a:ea typeface="맑은 고딕"/>
-              </a:rPr>
-              <a:t>과, 시간이 지나며 </a:t>
-            </a:r>
-            <a:r>
-              <a:rPr sz="1600" b="1">
-                <a:solidFill>
-                  <a:srgbClr val="000000"/>
-                </a:solidFill>
-                <a:latin typeface="맑은 고딕"/>
-                <a:ea typeface="맑은 고딕"/>
-              </a:rPr>
-              <a:t>내용이 틀려지는 것</a:t>
-            </a:r>
-            <a:r>
-              <a:rPr sz="1600" b="0">
-                <a:solidFill>
-                  <a:srgbClr val="000000"/>
-                </a:solidFill>
-                <a:latin typeface="맑은 고딕"/>
-                <a:ea typeface="맑은 고딕"/>
-              </a:rPr>
-              <a:t>이다.</a:t>
+              <a:t> 현재 작업에 필요한 정보를 선별해, 맥락 창에 불필요한 자료가 쌓이지 않게 한다.</a:t>
             </a:r>
           </a:p>
           <a:p>
@@ -23716,7 +23300,7 @@
                 <a:latin typeface="맑은 고딕"/>
                 <a:ea typeface="맑은 고딕"/>
               </a:rPr>
-              <a:t>같은 처방</a:t>
+              <a:t>문서 노후화에 대한 대응</a:t>
             </a:r>
             <a:r>
               <a:rPr sz="1800" b="0">
@@ -23736,7 +23320,7 @@
                 <a:latin typeface="맑은 고딕"/>
                 <a:ea typeface="맑은 고딕"/>
               </a:rPr>
-              <a:t> 작게 나누고, 바뀐 곳만 고치고, 기계로 갱신을 확인한다.</a:t>
+              <a:t> 문서를 주제별로 나누고 변경된 규칙을 갱신한다. 문서 검사로 누락이나 불일치를 확인한다.</a:t>
             </a:r>
           </a:p>
         </p:txBody>
@@ -23955,7 +23539,7 @@
         <p:spPr>
           <a:xfrm>
             <a:off x="365760" y="960120"/>
-            <a:ext cx="8412480" cy="2026920"/>
+            <a:ext cx="8412480" cy="2301240"/>
           </a:xfrm>
         </p:spPr>
         <p:txBody>
@@ -23981,7 +23565,7 @@
                 <a:latin typeface="맑은 고딕"/>
                 <a:ea typeface="맑은 고딕"/>
               </a:rPr>
-              <a:t>맥락은 한 덩어리가 아니다. </a:t>
+              <a:t>맥락에는 </a:t>
             </a:r>
             <a:r>
               <a:rPr sz="1800" b="1">
@@ -23991,7 +23575,7 @@
                 <a:latin typeface="맑은 고딕"/>
                 <a:ea typeface="맑은 고딕"/>
               </a:rPr>
-              <a:t>네 갈래</a:t>
+              <a:t>시스템 지시·도구·예시·가져온 정보</a:t>
             </a:r>
             <a:r>
               <a:rPr sz="1800" b="0">
@@ -24001,7 +23585,7 @@
                 <a:latin typeface="맑은 고딕"/>
                 <a:ea typeface="맑은 고딕"/>
               </a:rPr>
-              <a:t>로 나누어 각각 무엇을 담을지 정한다.</a:t>
+              <a:t>가 포함된다. 각 요소의 역할에 맞게 필요한 정보를 고른다.</a:t>
             </a:r>
           </a:p>
           <a:p>
@@ -24044,27 +23628,7 @@
                 <a:latin typeface="맑은 고딕"/>
                 <a:ea typeface="맑은 고딕"/>
               </a:rPr>
-              <a:t> 목표와 지킬 규칙. 늘 창에 올라가 </a:t>
-            </a:r>
-            <a:r>
-              <a:rPr sz="1600" b="1">
-                <a:solidFill>
-                  <a:srgbClr val="000000"/>
-                </a:solidFill>
-                <a:latin typeface="맑은 고딕"/>
-                <a:ea typeface="맑은 고딕"/>
-              </a:rPr>
-              <a:t>가장 비싸다</a:t>
-            </a:r>
-            <a:r>
-              <a:rPr sz="1600" b="0">
-                <a:solidFill>
-                  <a:srgbClr val="000000"/>
-                </a:solidFill>
-                <a:latin typeface="맑은 고딕"/>
-                <a:ea typeface="맑은 고딕"/>
-              </a:rPr>
-              <a:t>.</a:t>
+              <a:t> 목표와 지킬 규칙이다. 반복해서 쓰이므로 간결하게 유지한다.</a:t>
             </a:r>
           </a:p>
           <a:p>
@@ -24107,7 +23671,7 @@
                 <a:latin typeface="맑은 고딕"/>
                 <a:ea typeface="맑은 고딕"/>
               </a:rPr>
-              <a:t> 쓸 수 있는 일의 목록. 다음 세션에서 정한다.</a:t>
+              <a:t> 호출할 기능의 이름·설명·인자를 알려 준다.</a:t>
             </a:r>
           </a:p>
           <a:p>
@@ -24150,27 +23714,7 @@
                 <a:latin typeface="맑은 고딕"/>
                 <a:ea typeface="맑은 고딕"/>
               </a:rPr>
-              <a:t> 기대하는 결과의 </a:t>
-            </a:r>
-            <a:r>
-              <a:rPr sz="1600" b="1">
-                <a:solidFill>
-                  <a:srgbClr val="000000"/>
-                </a:solidFill>
-                <a:latin typeface="맑은 고딕"/>
-                <a:ea typeface="맑은 고딕"/>
-              </a:rPr>
-              <a:t>대표 사례</a:t>
-            </a:r>
-            <a:r>
-              <a:rPr sz="1600" b="0">
-                <a:solidFill>
-                  <a:srgbClr val="000000"/>
-                </a:solidFill>
-                <a:latin typeface="맑은 고딕"/>
-                <a:ea typeface="맑은 고딕"/>
-              </a:rPr>
-              <a:t>. 규칙을 길게 쓰는 대신 보인다.</a:t>
+              <a:t> 허용·거절 사례로 규칙과 기대 결과를 구체적으로 보여 준다.</a:t>
             </a:r>
           </a:p>
           <a:p>
@@ -24213,27 +23757,7 @@
                 <a:latin typeface="맑은 고딕"/>
                 <a:ea typeface="맑은 고딕"/>
               </a:rPr>
-              <a:t> 그때 읽는 저장소의 파일. </a:t>
-            </a:r>
-            <a:r>
-              <a:rPr sz="1600" b="1">
-                <a:solidFill>
-                  <a:srgbClr val="000000"/>
-                </a:solidFill>
-                <a:latin typeface="맑은 고딕"/>
-                <a:ea typeface="맑은 고딕"/>
-              </a:rPr>
-              <a:t>미리 올리지 않는다</a:t>
-            </a:r>
-            <a:r>
-              <a:rPr sz="1600" b="0">
-                <a:solidFill>
-                  <a:srgbClr val="000000"/>
-                </a:solidFill>
-                <a:latin typeface="맑은 고딕"/>
-                <a:ea typeface="맑은 고딕"/>
-              </a:rPr>
-              <a:t>.</a:t>
+              <a:t> 작업 중 필요한 시점에 찾아 읽은 문서와 코드 등이다.</a:t>
             </a:r>
           </a:p>
         </p:txBody>
@@ -24252,7 +23776,7 @@
         </p:nvSpPr>
         <p:spPr>
           <a:xfrm>
-            <a:off x="365760" y="3288792"/>
+            <a:off x="365760" y="3563112"/>
             <a:ext cx="8412480" cy="201168"/>
           </a:xfrm>
           <a:prstGeom prst="rect">
@@ -24296,8 +23820,8 @@
         </p:blipFill>
         <p:spPr>
           <a:xfrm>
-            <a:off x="3532584" y="3526536"/>
-            <a:ext cx="2078831" cy="2728912"/>
+            <a:off x="3590973" y="3800856"/>
+            <a:ext cx="1962054" cy="2575617"/>
           </a:xfrm>
           <a:prstGeom prst="rect">
             <a:avLst/>
@@ -24485,8 +24009,8 @@
           </p:nvPr>
         </p:nvGraphicFramePr>
         <p:xfrm>
-          <a:off x="1244156" y="3411566"/>
-          <a:ext cx="6642100" cy="3873500"/>
+          <a:off x="1383856" y="3411566"/>
+          <a:ext cx="6362700" cy="3873500"/>
         </p:xfrm>
         <a:graphic>
           <a:graphicData uri="http://schemas.openxmlformats.org/drawingml/2006/table">
@@ -24495,7 +24019,7 @@
               <a:tblGrid>
                 <a:gridCol w="947420"/>
                 <a:gridCol w="3462020"/>
-                <a:gridCol w="2232660"/>
+                <a:gridCol w="1953260"/>
               </a:tblGrid>
               <a:tr h="288000">
                 <a:tc>
@@ -24578,7 +24102,7 @@
                           <a:ea typeface="맑은 고딕" panose="020B0503020000020004" pitchFamily="34" charset="-127"/>
                           <a:cs typeface="맑은 고딕"/>
                         </a:rPr>
-                        <a:t>쓴 모습</a:t>
+                        <a:t>지시 예시</a:t>
                       </a:r>
                     </a:p>
                   </a:txBody>
@@ -24648,7 +24172,7 @@
                           <a:ea typeface="맑은 고딕" panose="020B0503020000020004" pitchFamily="34" charset="-127"/>
                           <a:cs typeface="맑은 고딕"/>
                         </a:rPr>
-                        <a:t>문제와 자리</a:t>
+                        <a:t>에이전트에게 주는 정보</a:t>
                       </a:r>
                     </a:p>
                   </a:txBody>
@@ -24830,7 +24354,7 @@
                           <a:ea typeface="맑은 고딕" panose="020B0503020000020004" pitchFamily="34" charset="-127"/>
                           <a:cs typeface="맑은 고딕"/>
                         </a:rPr>
-                        <a:t>구현을 지시해 판단을 막는다</a:t>
+                        <a:t>필드 조작과 저장 방법</a:t>
                       </a:r>
                     </a:p>
                   </a:txBody>
@@ -24998,7 +24522,7 @@
                           <a:ea typeface="맑은 고딕" panose="020B0503020000020004" pitchFamily="34" charset="-127"/>
                           <a:cs typeface="맑은 고딕"/>
                         </a:rPr>
-                        <a:t>시스템 지시</a:t>
+                        <a:t>금액을 정하는 업무 규칙</a:t>
                       </a:r>
                     </a:p>
                   </a:txBody>
@@ -25166,7 +24690,7 @@
                           <a:ea typeface="맑은 고딕" panose="020B0503020000020004" pitchFamily="34" charset="-127"/>
                           <a:cs typeface="맑은 고딕"/>
                         </a:rPr>
-                        <a:t>무엇이 올바른지 추측한다</a:t>
+                        <a:t>계산 기준이 없는 목표</a:t>
                       </a:r>
                     </a:p>
                   </a:txBody>
@@ -25254,7 +24778,7 @@
                 <a:latin typeface="맑은 고딕"/>
                 <a:ea typeface="맑은 고딕"/>
               </a:rPr>
-              <a:t>시스템 지시는 </a:t>
+              <a:t>시스템 지시에는 </a:t>
             </a:r>
             <a:r>
               <a:rPr sz="1800" b="1">
@@ -25264,7 +24788,7 @@
                 <a:latin typeface="맑은 고딕"/>
                 <a:ea typeface="맑은 고딕"/>
               </a:rPr>
-              <a:t>알맞은 추상화 수준</a:t>
+              <a:t>지켜야 할 규칙을 구체적으로</a:t>
             </a:r>
             <a:r>
               <a:rPr sz="1800" b="0">
@@ -25274,7 +24798,7 @@
                 <a:latin typeface="맑은 고딕"/>
                 <a:ea typeface="맑은 고딕"/>
               </a:rPr>
-              <a:t>에서 쓴다. 너무 낮으면 규칙을 늘어놓게 되고, 너무 높으면 판단할 근거가 없다.</a:t>
+              <a:t> 쓰되, 불필요한 구현 세부까지 정하지 않는다.</a:t>
             </a:r>
           </a:p>
           <a:p>
@@ -25337,7 +24861,27 @@
                 <a:latin typeface="맑은 고딕"/>
                 <a:ea typeface="맑은 고딕"/>
               </a:rPr>
-              <a:t>"System prompts should be extremely clear and use simple, direct language that presents ideas at the right altitude", [Anthropic 2025c]</a:t>
+              <a:t>"System prompts should be extremely clear and use simple, direct language that presents ideas at the right altitude"</a:t>
+            </a:r>
+            <a:r>
+              <a:rPr sz="1000" b="0">
+                <a:solidFill>
+                  <a:srgbClr val="000000"/>
+                </a:solidFill>
+                <a:latin typeface="맑은 고딕"/>
+                <a:ea typeface="맑은 고딕"/>
+              </a:rPr>
+              <a:t>, </a:t>
+            </a:r>
+            <a:r>
+              <a:rPr sz="1000" b="0">
+                <a:solidFill>
+                  <a:srgbClr val="000000"/>
+                </a:solidFill>
+                <a:latin typeface="맑은 고딕"/>
+                <a:ea typeface="맑은 고딕"/>
+              </a:rPr>
+              <a:t>[Anthropic 2025c]</a:t>
             </a:r>
           </a:p>
           <a:p>
@@ -25554,7 +25098,7 @@
         <p:spPr>
           <a:xfrm>
             <a:off x="365760" y="4792166"/>
-            <a:ext cx="8412480" cy="524240"/>
+            <a:ext cx="8412480" cy="781278"/>
           </a:xfrm>
           <a:prstGeom prst="rect">
             <a:avLst/>
@@ -25586,7 +25130,7 @@
                 <a:latin typeface="맑은 고딕"/>
                 <a:ea typeface="맑은 고딕"/>
               </a:rPr>
-              <a:t>고르는 기준</a:t>
+              <a:t>추상화 수준의 기준</a:t>
             </a:r>
             <a:r>
               <a:rPr sz="1800" b="0">
@@ -25606,27 +25150,7 @@
                 <a:latin typeface="맑은 고딕"/>
                 <a:ea typeface="맑은 고딕"/>
               </a:rPr>
-              <a:t> 사람이 </a:t>
-            </a:r>
-            <a:r>
-              <a:rPr sz="1600" b="1">
-                <a:solidFill>
-                  <a:srgbClr val="000000"/>
-                </a:solidFill>
-                <a:latin typeface="맑은 고딕"/>
-                <a:ea typeface="맑은 고딕"/>
-              </a:rPr>
-              <a:t>규칙으로 말할 수 있는</a:t>
-            </a:r>
-            <a:r>
-              <a:rPr sz="1600" b="0">
-                <a:solidFill>
-                  <a:srgbClr val="000000"/>
-                </a:solidFill>
-                <a:latin typeface="맑은 고딕"/>
-                <a:ea typeface="맑은 고딕"/>
-              </a:rPr>
-              <a:t> 높이다.</a:t>
+              <a:t> 에이전트가 무엇을 지켜야 하는지 알 수 있고, 구체적인 구현 방법은 선택할 수 있어야 한다.</a:t>
             </a:r>
           </a:p>
         </p:txBody>
@@ -25866,7 +25390,7 @@
                 <a:latin typeface="맑은 고딕"/>
                 <a:ea typeface="맑은 고딕"/>
               </a:rPr>
-              <a:t>모든 지식을 미리 올리지 않고, </a:t>
+              <a:t>모든 문서를 처음부터 입력하지 않는다. </a:t>
             </a:r>
             <a:r>
               <a:rPr sz="1800" b="1">
@@ -25876,7 +25400,7 @@
                 <a:latin typeface="맑은 고딕"/>
                 <a:ea typeface="맑은 고딕"/>
               </a:rPr>
-              <a:t>가벼운 가리킴</a:t>
+              <a:t>문서의 위치와 읽어야 할 이유</a:t>
             </a:r>
             <a:r>
               <a:rPr sz="1800" b="0">
@@ -25886,7 +25410,7 @@
                 <a:latin typeface="맑은 고딕"/>
                 <a:ea typeface="맑은 고딕"/>
               </a:rPr>
-              <a:t>만 주고 에이전트가 그때 읽게 한다.</a:t>
+              <a:t>를 알려 주고, 에이전트가 필요한 시점에 찾아 읽게 한다.</a:t>
             </a:r>
           </a:p>
           <a:p>
@@ -25909,7 +25433,7 @@
                 <a:latin typeface="맑은 고딕"/>
                 <a:ea typeface="맑은 고딕"/>
               </a:rPr>
-              <a:t>그때그때 가져오는 에이전트는 </a:t>
+              <a:t>에이전트는 </a:t>
             </a:r>
             <a:r>
               <a:rPr sz="1800" b="1">
@@ -25919,7 +25443,7 @@
                 <a:latin typeface="맑은 고딕"/>
                 <a:ea typeface="맑은 고딕"/>
               </a:rPr>
-              <a:t>파일 경로·질의·링크 같은 가벼운 식별자</a:t>
+              <a:t>파일 경로·저장된 질의·웹 링크 등 간단한 참조 정보</a:t>
             </a:r>
             <a:r>
               <a:rPr sz="1800" b="0">
@@ -25929,7 +25453,7 @@
                 <a:latin typeface="맑은 고딕"/>
                 <a:ea typeface="맑은 고딕"/>
               </a:rPr>
-              <a:t>를 들고 실행 중에 그것으로 데이터를 불러온다</a:t>
+              <a:t>를 유지하고, 실행 중에 이를 이용해 필요한 데이터를 맥락으로 불러온다</a:t>
             </a:r>
             <a:r>
               <a:rPr sz="1000" b="0">
@@ -25949,7 +25473,27 @@
                 <a:latin typeface="맑은 고딕"/>
                 <a:ea typeface="맑은 고딕"/>
               </a:rPr>
-              <a:t>"maintain lightweight identifiers (file paths, stored queries, web links, etc.) and use these references to dynamically load data into context at runtime", [Anthropic 2025c]</a:t>
+              <a:t>"maintain lightweight identifiers (file paths, stored queries, web links, etc.) and use these references to dynamically load data into context at runtime"</a:t>
+            </a:r>
+            <a:r>
+              <a:rPr sz="1000" b="0">
+                <a:solidFill>
+                  <a:srgbClr val="000000"/>
+                </a:solidFill>
+                <a:latin typeface="맑은 고딕"/>
+                <a:ea typeface="맑은 고딕"/>
+              </a:rPr>
+              <a:t>, </a:t>
+            </a:r>
+            <a:r>
+              <a:rPr sz="1000" b="0">
+                <a:solidFill>
+                  <a:srgbClr val="000000"/>
+                </a:solidFill>
+                <a:latin typeface="맑은 고딕"/>
+                <a:ea typeface="맑은 고딕"/>
+              </a:rPr>
+              <a:t>[Anthropic 2025c]</a:t>
             </a:r>
           </a:p>
           <a:p>
@@ -25972,7 +25516,7 @@
                 <a:latin typeface="맑은 고딕"/>
                 <a:ea typeface="맑은 고딕"/>
               </a:rPr>
-              <a:t>미리 올리는 것</a:t>
+              <a:t>먼저 읽을 자료</a:t>
             </a:r>
             <a:r>
               <a:rPr sz="1800" b="0">
@@ -25992,27 +25536,7 @@
                 <a:latin typeface="맑은 고딕"/>
                 <a:ea typeface="맑은 고딕"/>
               </a:rPr>
-              <a:t> 모든 과제가 쓰는 것만 둔다. 용어집, 상태 기계처럼 </a:t>
-            </a:r>
-            <a:r>
-              <a:rPr sz="1600" b="1">
-                <a:solidFill>
-                  <a:srgbClr val="000000"/>
-                </a:solidFill>
-                <a:latin typeface="맑은 고딕"/>
-                <a:ea typeface="맑은 고딕"/>
-              </a:rPr>
-              <a:t>판단의 전제</a:t>
-            </a:r>
-            <a:r>
-              <a:rPr sz="1600" b="0">
-                <a:solidFill>
-                  <a:srgbClr val="000000"/>
-                </a:solidFill>
-                <a:latin typeface="맑은 고딕"/>
-                <a:ea typeface="맑은 고딕"/>
-              </a:rPr>
-              <a:t>가 되는 것이다.</a:t>
+              <a:t> 현재 과제 전반에 필요한 용어집과 상태 기계다. 구현을 시작하기 전에 규칙을 확인하게 한다.</a:t>
             </a:r>
           </a:p>
           <a:p>
@@ -26035,7 +25559,7 @@
                 <a:latin typeface="맑은 고딕"/>
                 <a:ea typeface="맑은 고딕"/>
               </a:rPr>
-              <a:t>가리키는 것</a:t>
+              <a:t>필요할 때 읽을 자료</a:t>
             </a:r>
             <a:r>
               <a:rPr sz="1800" b="0">
@@ -26055,27 +25579,7 @@
                 <a:latin typeface="맑은 고딕"/>
                 <a:ea typeface="맑은 고딕"/>
               </a:rPr>
-              <a:t> 과제에 따라 필요한 것을 둔다. 연동 매뉴얼, 과거 설계 기록처럼 </a:t>
-            </a:r>
-            <a:r>
-              <a:rPr sz="1600" b="1">
-                <a:solidFill>
-                  <a:srgbClr val="000000"/>
-                </a:solidFill>
-                <a:latin typeface="맑은 고딕"/>
-                <a:ea typeface="맑은 고딕"/>
-              </a:rPr>
-              <a:t>양이 큰 것</a:t>
-            </a:r>
-            <a:r>
-              <a:rPr sz="1600" b="0">
-                <a:solidFill>
-                  <a:srgbClr val="000000"/>
-                </a:solidFill>
-                <a:latin typeface="맑은 고딕"/>
-                <a:ea typeface="맑은 고딕"/>
-              </a:rPr>
-              <a:t>이다.</a:t>
+              <a:t> 연동 매뉴얼이나 과거 설계 기록처럼 특정 작업에서만 쓰는 자료다.</a:t>
             </a:r>
           </a:p>
           <a:p>
@@ -26098,7 +25602,7 @@
                 <a:latin typeface="맑은 고딕"/>
                 <a:ea typeface="맑은 고딕"/>
               </a:rPr>
-              <a:t>가리킴이 작동할 조건</a:t>
+              <a:t>찾아 읽을 수 있는 조건</a:t>
             </a:r>
             <a:r>
               <a:rPr sz="1800" b="0">
@@ -26118,27 +25622,7 @@
                 <a:latin typeface="맑은 고딕"/>
                 <a:ea typeface="맑은 고딕"/>
               </a:rPr>
-              <a:t> 경로가 </a:t>
-            </a:r>
-            <a:r>
-              <a:rPr sz="1600" b="1">
-                <a:solidFill>
-                  <a:srgbClr val="000000"/>
-                </a:solidFill>
-                <a:latin typeface="맑은 고딕"/>
-                <a:ea typeface="맑은 고딕"/>
-              </a:rPr>
-              <a:t>저장소 안에</a:t>
-            </a:r>
-            <a:r>
-              <a:rPr sz="1600" b="0">
-                <a:solidFill>
-                  <a:srgbClr val="000000"/>
-                </a:solidFill>
-                <a:latin typeface="맑은 고딕"/>
-                <a:ea typeface="맑은 고딕"/>
-              </a:rPr>
-              <a:t> 있고, 이름이 내용을 알려 주어야 한다.</a:t>
+              <a:t> 에이전트가 해당 자료에 접근할 수 있어야 한다. 문서 이름과 설명으로 언제 읽을지 판단할 수 있어야 한다.</a:t>
             </a:r>
           </a:p>
         </p:txBody>

--- a/courses/ai-native/sessions/s05.pptx
+++ b/courses/ai-native/sessions/s05.pptx
@@ -704,7 +704,7 @@
             <a:pPr lvl="0"/>
             <a:r>
               <a:rPr lang="ko-KR" sz="1200"/>
-              <a:t>실습은 신청·금액 및 예정일 계산·승인과 회차 생성·거절과 재결제를 적정 크기로 나누게 한다. 결과가 같다면 분할의 개수 자체를 채점하지 않는다.</a:t>
+              <a:t>실습은 고지·확정과 결제 결과·미확정 안내·반복 전달 응답을 적정 크기로 나누게 한다. 결과가 같다면 분할의 개수 자체를 채점하지 않는다.</a:t>
             </a:r>
           </a:p>
         </p:txBody>
@@ -908,6 +908,13 @@
             <a:pPr lvl="0"/>
             <a:r>
               <a:rPr lang="ko-KR" sz="1200"/>
+              <a:t>실행 환경: 2026-10-08, Claude Code 2.1.293(비대화형), 모델 claude-opus-5-5. 각 조건을 한 번씩 실행했으므로 도구·모델의 일반적인 우열을 판단하는 자료가 아니다. 날짜와 버전은 기록을 재현·추적하기 위한 정보다.</a:t>
+            </a:r>
+          </a:p>
+          <a:p>
+            <a:pPr lvl="0"/>
+            <a:r>
+              <a:rPr lang="ko-KR" sz="1200"/>
               <a:t>실제 원본: code/s04/demo-results/README.md, A와 B의 prompt.txt·result.json·diff·실행 로그. 현재 세션 번호와 다른 경로지만 기록 원본을 보존해 참조한다.</a:t>
             </a:r>
           </a:p>
@@ -983,7 +990,7 @@
             <a:pPr lvl="0"/>
             <a:r>
               <a:rPr lang="ko-KR" sz="1200"/>
-              <a:t>A 결과의 중복 결제 방지·새 주소는 저장된 실제 테스트와 diff에서 확인할 항목이다. 좋은 정책처럼 보여도 현재 합의와는 다른 판단이다.</a:t>
+              <a:t>구현과 테스트를 함께 맡긴 결과의 중복 결제 방지·새 주소는 저장된 실제 테스트와 diff에서 확인할 항목이다. 좋은 정책처럼 보여도 현재 합의와는 다른 판단이다.</a:t>
             </a:r>
           </a:p>
           <a:p>
@@ -1119,14 +1126,56 @@
             <a:pPr lvl="0"/>
             <a:r>
               <a:rPr lang="ko-KR" sz="1200"/>
-              <a:t>기존 정기배송 정의서와 상태·단가를 이어 쓴다. 다음 기간의 가격 정책이나 월별 청구를 새로 만들지 않는다.</a:t>
+              <a:t>수강생이 만든 실습 2·3·4의 최종 MD를 첫 프롬프트에 붙인다. 강사 예시 입력은 code/s05/exercise-conversation/input-s02.md·input-s03.md·input-s04.md다.</a:t>
             </a:r>
           </a:p>
           <a:p>
             <a:pPr lvl="0"/>
             <a:r>
               <a:rPr lang="ko-KR" sz="1200"/>
-              <a:t>결과물에 새 기능 목록 파일·추적표·별도 테스트 설계 문서를 추가 요구하지 않는다. 실제 테스트 코드는 후속 실행과 검증에서 연결할 수 있다.</a:t>
+              <a:t>②~④는 기본 문구만 입력하지 않는다. [앞선 질문에 대한 답]과 [추가 질문·수정 요청]을 함께 작성한다.</a:t>
+            </a:r>
+          </a:p>
+          <a:p>
+            <a:pPr lvl="0"/>
+            <a:r>
+              <a:rPr lang="ko-KR" sz="1200"/>
+              <a:t>실제 입력·응답은 code/s05/exercise-conversation/에 보존한다. ①~③은 Codex로, ④~⑤는 Claude Code로 실행했다. ⑤는 내용을 그대로 두고 문체와 표 모양만 고쳐 두 번 요청했고 첫 회차는 finalization-rounds/01/에 있다.</a:t>
+            </a:r>
+          </a:p>
+          <a:p>
+            <a:pPr lvl="0"/>
+            <a:r>
+              <a:rPr lang="ko-KR" sz="1200"/>
+              <a:t>첫 초안은 패키지마다 작업을 하나씩 둔 일곱 단위였다. ④에서 고객이 관찰할 결과로 다시 가르면 넷이 된다 — 분할의 기준을 묻는 자리다.</a:t>
+            </a:r>
+          </a:p>
+          <a:p>
+            <a:pPr lvl="0"/>
+            <a:r>
+              <a:rPr lang="ko-KR" sz="1200"/>
+              <a:t>④가 수용 예의 세 곳을 되돌렸다. 두 번째 시도가 없는 예에서 “추가 결제 0회”를 관찰할 수 없고, 결제 요청과 결과 확인을 한 횟수로 세면 새 청구가 없었는지 판정할 수 없고, 전제에 넣은 누적값은 관찰값이 아니다.</a:t>
+            </a:r>
+          </a:p>
+          <a:p>
+            <a:pPr lvl="0"/>
+            <a:r>
+              <a:rPr lang="ko-KR" sz="1200"/>
+              <a:t>앞 산출물에 되돌릴 것 — 반영: 신청일은 신청 절차를 시작한 날이고 첫 배송일 하한은 고지를 산출할 때 한 번 판정한다(요구사항 정의서), 결제 요청 식별 정보는 업무가 정한 값이고 제공자 형식으로 바꾸는 일은 연계가 맡는다(아키텍처의 첫 결제 계약).</a:t>
+            </a:r>
+          </a:p>
+          <a:p>
+            <a:pPr lvl="0"/>
+            <a:r>
+              <a:rPr lang="ko-KR" sz="1200"/>
+              <a:t>앞 산출물에 되돌릴 것 — 기록만: 결과 확인 불가를 결과확인필요에서 다시 반영하면 상태 기계에 없는 자기 전이가 된다. 전이를 더하지 않고 작업 명세의 단위 3에 경계를 적었다. 실패 확정 뒤 재결제 경로가 없다는 사실도 도메인 모델에 이미 있어 명세의 제외로만 남겼다.</a:t>
+            </a:r>
+          </a:p>
+          <a:p>
+            <a:pPr lvl="0"/>
+            <a:r>
+              <a:rPr lang="ko-KR" sz="1200"/>
+              <a:t>수강생의 답은 예의 개수와 단위의 이름이 다를 수 있다. 금지되는 결과를 숫자로 확인하는지와 미정을 지어내지 않았는지를 본다.</a:t>
             </a:r>
           </a:p>
         </p:txBody>
@@ -1248,7 +1297,7 @@
             <a:pPr lvl="0"/>
             <a:r>
               <a:rPr lang="ko-KR" sz="1200"/>
-              <a:t>입력은 "세션 02. 요구와 유저 스토리"의 요구사항 정의서, "세션 03. 도메인 모델"의 업무 의미, "세션 04. 아키텍처"의 의존 규칙이다.</a:t>
+              <a:t>입력은 "세션 02. 요구와 사용자 이야기"의 요구사항 정의서, "세션 03. 도메인 모델"의 업무 의미, "세션 04. 아키텍처"의 의존 규칙이다.</a:t>
             </a:r>
           </a:p>
           <a:p>
@@ -1316,14 +1365,28 @@
             <a:pPr lvl="0"/>
             <a:r>
               <a:rPr lang="ko-KR" sz="1200"/>
-              <a:t>점검 항목 1·2·3·5를 반영한 제출용 작업 명세서다. 미정 처리를 코드에서 추측하지 않도록 이번 구현의 경계를 대역 환경으로 명시했다.</a:t>
+              <a:t>code/s05/exercise-conversation/정기배송-최초신청-작업명세.md의 1·2·3절이다. 문장은 수정하지 않았고, 범위·제외의 목록만 가운뎃점으로 이어 한 항목씩 붙였다.</a:t>
             </a:r>
           </a:p>
           <a:p>
             <a:pPr lvl="0"/>
             <a:r>
               <a:rPr lang="ko-KR" sz="1200"/>
-              <a:t>“어떤 내용을 적어야 하는가”가 아니라 실제 업무 값·범위·담당·완료 조건을 설명한다.</a:t>
+              <a:t>원문 머리의 참조 세 줄은 이 장에서 생략했다 — 실습 2의 업무 규칙과 고지 항목, 실습 3의 상태 머신, 실습 4의 네 포트와 두 조건부 전이를 가리킨다.</a:t>
+            </a:r>
+          </a:p>
+          <a:p>
+            <a:pPr lvl="0"/>
+            <a:r>
+              <a:rPr lang="ko-KR" sz="1200"/>
+              <a:t>대표 값 한 벌이 뒤의 수용 예·작업 단위를 모두 관통한다. 값이 흩어지면 예끼리 어긋난다는 점을 짚는다.</a:t>
+            </a:r>
+          </a:p>
+          <a:p>
+            <a:pPr lvl="0"/>
+            <a:r>
+              <a:rPr lang="ko-KR" sz="1200"/>
+              <a:t>신청일 2027-10-28은 이 실습이 더한 교육용 값이다. 첫 배송일 하한을 판정할 기준이 필요해 ②에서 정했다.</a:t>
             </a:r>
           </a:p>
         </p:txBody>
@@ -1384,21 +1447,28 @@
             <a:pPr lvl="0"/>
             <a:r>
               <a:rPr lang="ko-KR" sz="1200"/>
-              <a:t>점검 항목 2·3의 완성 Given–When–Then 답안이다. 요약 표나 문형 설명으로 대체하지 않는다.</a:t>
+              <a:t>최종 MD 4절의 머리글과 예 1·2다. 예의 제목은 ### 예 N. 소제목에서 블록의 Scenario 줄로 옮겼고 Given–When–Then의 문장은 원문 그대로다.</a:t>
             </a:r>
           </a:p>
           <a:p>
             <a:pPr lvl="0"/>
             <a:r>
               <a:rPr lang="ko-KR" sz="1200"/>
-              <a:t>각 시나리오는 독립적인 전제에서 시작한다. 앞 시나리오의 실행 결과에 의존하지 않는다.</a:t>
+              <a:t>원문이 예마다 붙인 "잡는 오류" 줄은 슬라이드에서 뺐다. 예 1은 "종료일 포함, 회차 누락·추가, 일시불 고지, 고지 단계의 조기 결제", 예 2는 "부적합한 선택으로 금액을 산정하거나 결제를 시작하는 것"이다.</a:t>
             </a:r>
           </a:p>
           <a:p>
             <a:pPr lvl="0"/>
             <a:r>
               <a:rPr lang="ko-KR" sz="1200"/>
-              <a:t>표기상의 반복을 줄이되 재현에 필요한 단가·기간·주기·예정일·금액을 생략하지 않았다.</a:t>
+              <a:t>예 2 뒤의 "첫 배송일이 신청일에 3일을 더한 날보다 이른 경우도 결과가 같다"도 전문에 있다.</a:t>
+            </a:r>
+          </a:p>
+          <a:p>
+            <a:pPr lvl="0"/>
+            <a:r>
+              <a:rPr lang="ko-KR" sz="1200"/>
+              <a:t>금액 산정 0회가 예 2의 핵심이다. 부적합을 안내하면서 금액은 이미 계산해 버리는 구현이 흔하다.</a:t>
             </a:r>
           </a:p>
         </p:txBody>
@@ -1459,14 +1529,28 @@
             <a:pPr lvl="0"/>
             <a:r>
               <a:rPr lang="ko-KR" sz="1200"/>
-              <a:t>점검 항목 3·4·5를 충족하는 거절·재결제의 구체적 답이다. 통신 오류나 중복 승인이라는 다른 상황을 이 결과로 정의하지 않는다.</a:t>
+              <a:t>최종 MD 4절의 예 3·4다. 제목만 Scenario 줄로 옮겼고 문장은 원문 그대로다.</a:t>
             </a:r>
           </a:p>
           <a:p>
             <a:pPr lvl="0"/>
             <a:r>
               <a:rPr lang="ko-KR" sz="1200"/>
-              <a:t>강사는 거절 시 0개와 승인 뒤 총 7개를 대비해 설명한다. 수강생에게 같은 점검 질문을 다시 제시하지 않는다.</a:t>
+              <a:t>원문의 "잡는 오류" 줄 — 예 3은 "확정 시 재산정, 고지와 다른 계약 내용, 중복 계약, 일시불 청구", 예 4는 "실패한 신청의 계약 생성, 실패 결과의 오분류"다.</a:t>
+            </a:r>
+          </a:p>
+          <a:p>
+            <a:pPr lvl="0"/>
+            <a:r>
+              <a:rPr lang="ko-KR" sz="1200"/>
+              <a:t>금액 산정 1회(고지 단계)가 두 예에 모두 있다. 확정할 때 금액을 다시 부르면 고지한 값과 청구한 값이 갈라진다.</a:t>
+            </a:r>
+          </a:p>
+          <a:p>
+            <a:pPr lvl="0"/>
+            <a:r>
+              <a:rPr lang="ko-KR" sz="1200"/>
+              <a:t>예 4에 재결제 시도가 없는 이유를 묻는다. 신청미완료에서 나가는 전이가 없어 같은 신청의 재결제 경로 자체가 없다.</a:t>
             </a:r>
           </a:p>
         </p:txBody>
@@ -1527,14 +1611,28 @@
             <a:pPr lvl="0"/>
             <a:r>
               <a:rPr lang="ko-KR" sz="1200"/>
-              <a:t>점검 항목 6의 완성 작업 분할이다. 수강생에게 나누는 방법을 설명한 목록이 아니라 실제 구현할 단위와 관찰 결과다.</a:t>
+              <a:t>최종 MD 4절의 예 5·6이다. 제목만 Scenario 줄로 옮겼고 문장은 원문 그대로다.</a:t>
             </a:r>
           </a:p>
           <a:p>
             <a:pPr lvl="0"/>
             <a:r>
               <a:rPr lang="ko-KR" sz="1200"/>
-              <a:t>실습 6에는 이 명세서·수용 예·작업 단위를 그대로 입력한다.</a:t>
+              <a:t>원문의 "잡는 오류" 줄 — 예 5는 "미확정 결과를 성공·실패로 단정하는 것, 확인을 핑계로 다시 청구하는 것", 예 6은 "반복 전달로 인한 중복 청구·중복 계약·회차 중복"이다.</a:t>
+            </a:r>
+          </a:p>
+          <a:p>
+            <a:pPr lvl="0"/>
+            <a:r>
+              <a:rPr lang="ko-KR" sz="1200"/>
+              <a:t>예 5의 "결제 요청 1회(결과 확인과 따로 셈)"는 ④의 지적으로 고친 자리다. 두 동작을 한 횟수로 세면 새 청구 없이 확인했는지 판정할 수 없다.</a:t>
+            </a:r>
+          </a:p>
+          <a:p>
+            <a:pPr lvl="0"/>
+            <a:r>
+              <a:rPr lang="ko-KR" sz="1200"/>
+              <a:t>예 6의 전제도 ④에서 고쳤다. 누적값을 대역에 미리 넣으면 관찰한 값이 아니다.</a:t>
             </a:r>
           </a:p>
         </p:txBody>
@@ -1595,7 +1693,21 @@
             <a:pPr lvl="0"/>
             <a:r>
               <a:rPr lang="ko-KR" sz="1200"/>
-              <a:t>이번 실습에서 이미 반영한 결과와 보류한 결정을 보여 주는 답안이다. 보완 방법이나 점검 예제의 설명으로 대체하지 않는다.</a:t>
+              <a:t>최종 MD 5·6·7절이다. 단위의 항목 세 줄을 두 줄로 붙이고, 미정 표의 세 열을 한 줄씩 옮겼다. 문장은 바꾸지 않았다.</a:t>
+            </a:r>
+          </a:p>
+          <a:p>
+            <a:pPr lvl="0"/>
+            <a:r>
+              <a:rPr lang="ko-KR" sz="1200"/>
+              <a:t>네 단위가 패키지가 아니라 고객이 관찰할 결과로 갈린다. 초안의 일곱 단위(패키지마다 하나)와 비교해 보인다.</a:t>
+            </a:r>
+          </a:p>
+          <a:p>
+            <a:pPr lvl="0"/>
+            <a:r>
+              <a:rPr lang="ko-KR" sz="1200"/>
+              <a:t>미정을 남긴 것이 감점이 아니다. 확인할 담당과 그때까지 하지 않을 일이 적혀 있으면 다음 작업을 시작할 수 있다.</a:t>
             </a:r>
           </a:p>
         </p:txBody>
@@ -1656,7 +1768,7 @@
             <a:pPr lvl="0"/>
             <a:r>
               <a:rPr lang="ko-KR" sz="1200"/>
-              <a:t>"세션 02. 요구와 유저 스토리"에서 구분한 두 명세의 수명과 범위를 그대로 쓴다. 새로운 개발 단계나 새로운 전체 명세서를 만드는 것이 아니다.</a:t>
+              <a:t>"세션 02. 요구와 사용자 이야기"에서 구분한 두 명세의 수명과 범위를 그대로 쓴다. 새로운 개발 단계나 새로운 전체 명세서를 만드는 것이 아니다.</a:t>
             </a:r>
           </a:p>
           <a:p>
@@ -9390,7 +9502,7 @@
                           <a:ea typeface="맑은 고딕" panose="020B0503020000020004" pitchFamily="34" charset="-127"/>
                           <a:cs typeface="맑은 고딕"/>
                         </a:rPr>
-                        <a:t>A: 구현과 테스트 작성 요청</a:t>
+                        <a:t>구현과 테스트 작성 요청</a:t>
                       </a:r>
                     </a:p>
                   </a:txBody>
@@ -9460,7 +9572,7 @@
                           <a:ea typeface="맑은 고딕" panose="020B0503020000020004" pitchFamily="34" charset="-127"/>
                           <a:cs typeface="맑은 고딕"/>
                         </a:rPr>
-                        <a:t>B: 사람의 수용 테스트 제공</a:t>
+                        <a:t>사람의 수용 테스트 제공</a:t>
                       </a:r>
                     </a:p>
                   </a:txBody>
@@ -10410,7 +10522,7 @@
                 <a:latin typeface="맑은 고딕"/>
                 <a:ea typeface="맑은 고딕"/>
               </a:rPr>
-              <a:t>기록 조건</a:t>
+              <a:t>검토 결과</a:t>
             </a:r>
             <a:r>
               <a:rPr sz="1800" b="0">
@@ -10420,27 +10532,17 @@
                 <a:latin typeface="맑은 고딕"/>
                 <a:ea typeface="맑은 고딕"/>
               </a:rPr>
-              <a:t>은 2026-10-08, Claude Code 2.1.293과 </a:t>
-            </a:r>
-            <a:r>
-              <a:rPr sz="1800" b="0">
-                <a:solidFill>
-                  <a:srgbClr val="000000"/>
-                </a:solidFill>
-                <a:latin typeface="맑은 고딕"/>
-                <a:ea typeface="맑은 고딕"/>
-              </a:rPr>
-              <a:t>claude-opus-5-5</a:t>
-            </a:r>
-            <a:r>
-              <a:rPr sz="1800" b="0">
-                <a:solidFill>
-                  <a:srgbClr val="000000"/>
-                </a:solidFill>
-                <a:latin typeface="맑은 고딕"/>
-                <a:ea typeface="맑은 고딕"/>
-              </a:rPr>
-              <a:t>다. 각 조건을 한 번씩 실행한 기록이며 일반적인 우열을 증명하지 않는다.</a:t>
+              <a:t> —</a:t>
+            </a:r>
+            <a:r>
+              <a:rPr sz="1600" b="0">
+                <a:solidFill>
+                  <a:srgbClr val="000000"/>
+                </a:solidFill>
+                <a:latin typeface="맑은 고딕"/>
+                <a:ea typeface="맑은 고딕"/>
+              </a:rPr>
+              <a:t> 테스트까지 맡긴 쪽은 명세에 없는 중복 결제 방지 예외도 추가했다. 통과 여부와 별개로 새 기대값의 업무 근거를 확인해야 한다.</a:t>
             </a:r>
           </a:p>
           <a:p>
@@ -11552,7 +11654,7 @@
                 <a:latin typeface="맑은 고딕"/>
                 <a:ea typeface="맑은 고딕"/>
               </a:rPr>
-              <a:t>A 실행에서 사람이 검토할 내용</a:t>
+              <a:t>구현과 테스트를 함께 맡긴 결과의 검토</a:t>
             </a:r>
           </a:p>
         </p:txBody>
@@ -13309,34 +13411,24 @@
               <a:buNone/>
             </a:pPr>
             <a:r>
-              <a:rPr sz="1600" b="0">
-                <a:solidFill>
-                  <a:srgbClr val="000000"/>
-                </a:solidFill>
-                <a:latin typeface="맑은 고딕"/>
-                <a:ea typeface="맑은 고딕"/>
-              </a:rPr>
-              <a:t>정기배송의 앞 산출물을 LLM에 주고 </a:t>
-            </a:r>
-            <a:r>
-              <a:rPr sz="1600" b="1">
-                <a:solidFill>
-                  <a:srgbClr val="000000"/>
-                </a:solidFill>
-                <a:latin typeface="맑은 고딕"/>
-                <a:ea typeface="맑은 고딕"/>
-              </a:rPr>
-              <a:t>작업 명세·허용과 거절 예·작업 단위</a:t>
-            </a:r>
-            <a:r>
-              <a:rPr sz="1600" b="0">
-                <a:solidFill>
-                  <a:srgbClr val="000000"/>
-                </a:solidFill>
-                <a:latin typeface="맑은 고딕"/>
-                <a:ea typeface="맑은 고딕"/>
-              </a:rPr>
-              <a:t>를 만든 뒤, 기대값의 근거와 범위를 검토한다.</a:t>
+              <a:rPr sz="1200" b="1">
+                <a:solidFill>
+                  <a:srgbClr val="000000"/>
+                </a:solidFill>
+                <a:latin typeface="맑은 고딕"/>
+                <a:ea typeface="맑은 고딕"/>
+              </a:rPr>
+              <a:t>①로 시작해 답·질문·수정 요청을 주고받는다.</a:t>
+            </a:r>
+            <a:r>
+              <a:rPr sz="1200" b="0">
+                <a:solidFill>
+                  <a:srgbClr val="000000"/>
+                </a:solidFill>
+                <a:latin typeface="맑은 고딕"/>
+                <a:ea typeface="맑은 고딕"/>
+              </a:rPr>
+              <a:t> ②~④는 보완 예시다. ⑤로 MD를 만들고 필요하면 보완·재생성한다.</a:t>
             </a:r>
           </a:p>
           <a:p>
@@ -13352,85 +13444,374 @@
               <a:buChar char=""/>
             </a:pPr>
             <a:r>
-              <a:rPr sz="1600" b="1">
-                <a:solidFill>
-                  <a:srgbClr val="000000"/>
-                </a:solidFill>
-                <a:latin typeface="맑은 고딕"/>
-                <a:ea typeface="맑은 고딕"/>
-              </a:rPr>
-              <a:t>투입물</a:t>
-            </a:r>
-          </a:p>
-          <a:p>
-            <a:pPr lvl="2" marL="342900" indent="0">
+              <a:rPr sz="1200" b="1">
+                <a:solidFill>
+                  <a:srgbClr val="000000"/>
+                </a:solidFill>
+                <a:latin typeface="맑은 고딕"/>
+                <a:ea typeface="맑은 고딕"/>
+              </a:rPr>
+              <a:t>프롬프트 —</a:t>
+            </a:r>
+            <a:r>
+              <a:rPr sz="1000" b="1">
+                <a:solidFill>
+                  <a:srgbClr val="000000"/>
+                </a:solidFill>
+                <a:latin typeface="맑은 고딕"/>
+                <a:ea typeface="맑은 고딕"/>
+              </a:rPr>
+              <a:t> 요청사항 포함</a:t>
+            </a:r>
+          </a:p>
+          <a:p>
+            <a:pPr lvl="3" marL="981075" indent="-268288">
               <a:spcBef>
                 <a:spcPts val="300"/>
               </a:spcBef>
               <a:spcAft>
                 <a:spcPts val="300"/>
               </a:spcAft>
-              <a:buNone/>
+              <a:buFont typeface="+mj-ea"/>
+              <a:buAutoNum type="circleNumDbPlain" startAt="1"/>
             </a:pPr>
             <a:r>
-              <a:rPr sz="1600" b="0">
-                <a:solidFill>
-                  <a:srgbClr val="000000"/>
-                </a:solidFill>
-                <a:latin typeface="맑은 고딕"/>
-                <a:ea typeface="맑은 고딕"/>
-              </a:rPr>
-              <a:t>실습 2의 </a:t>
-            </a:r>
-            <a:r>
-              <a:rPr sz="1600" b="1">
-                <a:solidFill>
-                  <a:srgbClr val="000000"/>
-                </a:solidFill>
-                <a:latin typeface="맑은 고딕"/>
-                <a:ea typeface="맑은 고딕"/>
-              </a:rPr>
-              <a:t>요구사항 정의서</a:t>
-            </a:r>
-            <a:r>
-              <a:rPr sz="1600" b="0">
-                <a:solidFill>
-                  <a:srgbClr val="000000"/>
-                </a:solidFill>
-                <a:latin typeface="맑은 고딕"/>
-                <a:ea typeface="맑은 고딕"/>
-              </a:rPr>
-              <a:t>, 실습 3의 </a:t>
-            </a:r>
-            <a:r>
-              <a:rPr sz="1600" b="1">
-                <a:solidFill>
-                  <a:srgbClr val="000000"/>
-                </a:solidFill>
-                <a:latin typeface="맑은 고딕"/>
-                <a:ea typeface="맑은 고딕"/>
-              </a:rPr>
-              <a:t>도메인 모델</a:t>
-            </a:r>
-            <a:r>
-              <a:rPr sz="1600" b="0">
-                <a:solidFill>
-                  <a:srgbClr val="000000"/>
-                </a:solidFill>
-                <a:latin typeface="맑은 고딕"/>
-                <a:ea typeface="맑은 고딕"/>
-              </a:rPr>
-              <a:t>, 실습 4의 </a:t>
-            </a:r>
-            <a:r>
-              <a:rPr sz="1600" b="1">
-                <a:solidFill>
-                  <a:srgbClr val="000000"/>
-                </a:solidFill>
-                <a:latin typeface="맑은 고딕"/>
-                <a:ea typeface="맑은 고딕"/>
-              </a:rPr>
-              <a:t>의존 규칙·연동 규격</a:t>
+              <a:rPr sz="1000" b="0">
+                <a:solidFill>
+                  <a:srgbClr val="000000"/>
+                </a:solidFill>
+                <a:latin typeface="맑은 고딕"/>
+                <a:ea typeface="맑은 고딕"/>
+              </a:rPr>
+              <a:t>“첨부한 실습 2의 요구사항 정의서·실습 3의 도메인 모델·실습 4의 아키텍처를 바탕으로 </a:t>
+            </a:r>
+            <a:r>
+              <a:rPr sz="1000" b="1">
+                <a:solidFill>
+                  <a:srgbClr val="000000"/>
+                </a:solidFill>
+                <a:latin typeface="맑은 고딕"/>
+                <a:ea typeface="맑은 고딕"/>
+              </a:rPr>
+              <a:t>정기배송 최초 신청을 구현할 작업 명세서 초안</a:t>
+            </a:r>
+            <a:r>
+              <a:rPr sz="1000" b="0">
+                <a:solidFill>
+                  <a:srgbClr val="000000"/>
+                </a:solidFill>
+                <a:latin typeface="맑은 고딕"/>
+                <a:ea typeface="맑은 고딕"/>
+              </a:rPr>
+              <a:t>을 작성해라. 이번 작업에 포함할 범위, 제외할 것, 확인 전에는 구현하지 않을 미정을 구분하고, 명세를 확정하기 위해 내가 결정해야 할 사항은 질문해라. 구현 코드와 테스트 코드는 쓰지 마라.”</a:t>
+            </a:r>
+          </a:p>
+          <a:p>
+            <a:pPr lvl="3" marL="981075" indent="-268288">
+              <a:spcBef>
+                <a:spcPts val="300"/>
+              </a:spcBef>
+              <a:spcAft>
+                <a:spcPts val="300"/>
+              </a:spcAft>
+              <a:buFont typeface="+mj-ea"/>
+              <a:buAutoNum type="circleNumDbPlain" startAt="2"/>
+            </a:pPr>
+            <a:r>
+              <a:rPr sz="1000" b="0">
+                <a:solidFill>
+                  <a:srgbClr val="000000"/>
+                </a:solidFill>
+                <a:latin typeface="맑은 고딕"/>
+                <a:ea typeface="맑은 고딕"/>
+              </a:rPr>
+              <a:t>“아래 답과 수정 요청을 반영해 </a:t>
+            </a:r>
+            <a:r>
+              <a:rPr sz="1000" b="1">
+                <a:solidFill>
+                  <a:srgbClr val="000000"/>
+                </a:solidFill>
+                <a:latin typeface="맑은 고딕"/>
+                <a:ea typeface="맑은 고딕"/>
+              </a:rPr>
+              <a:t>작업 명세서를 확정</a:t>
+            </a:r>
+            <a:r>
+              <a:rPr sz="1000" b="0">
+                <a:solidFill>
+                  <a:srgbClr val="000000"/>
+                </a:solidFill>
+                <a:latin typeface="맑은 고딕"/>
+                <a:ea typeface="맑은 고딕"/>
+              </a:rPr>
+              <a:t>해라. 스토리, 이번 작업이 지킬 업무 규칙과 그 </a:t>
+            </a:r>
+            <a:r>
+              <a:rPr sz="1000" b="1">
+                <a:solidFill>
+                  <a:srgbClr val="000000"/>
+                </a:solidFill>
+                <a:latin typeface="맑은 고딕"/>
+                <a:ea typeface="맑은 고딕"/>
+              </a:rPr>
+              <a:t>대표 값</a:t>
+            </a:r>
+            <a:r>
+              <a:rPr sz="1000" b="0">
+                <a:solidFill>
+                  <a:srgbClr val="000000"/>
+                </a:solidFill>
+                <a:latin typeface="맑은 고딕"/>
+                <a:ea typeface="맑은 고딕"/>
+              </a:rPr>
+              <a:t>, 범위·제외, 미정과 확인할 담당, 참조할 앞 산출물을 적어라. 앞 산출물의 규칙을 옮겨 적지 말고 이번 작업에 필요한 것만 짚어라.”</a:t>
+            </a:r>
+          </a:p>
+          <a:p>
+            <a:pPr lvl="3" marL="981075" indent="-268288">
+              <a:spcBef>
+                <a:spcPts val="300"/>
+              </a:spcBef>
+              <a:spcAft>
+                <a:spcPts val="300"/>
+              </a:spcAft>
+              <a:buFont typeface="+mj-ea"/>
+              <a:buAutoNum type="circleNumDbPlain" startAt="3"/>
+            </a:pPr>
+            <a:r>
+              <a:rPr sz="1000" b="0">
+                <a:solidFill>
+                  <a:srgbClr val="000000"/>
+                </a:solidFill>
+                <a:latin typeface="맑은 고딕"/>
+                <a:ea typeface="맑은 고딕"/>
+              </a:rPr>
+              <a:t>“아래 답과 수정 요청을 반영해라. 확정한 범위의 수용 기준을 </a:t>
+            </a:r>
+            <a:r>
+              <a:rPr sz="1000" b="1">
+                <a:solidFill>
+                  <a:srgbClr val="000000"/>
+                </a:solidFill>
+                <a:latin typeface="맑은 고딕"/>
+                <a:ea typeface="맑은 고딕"/>
+              </a:rPr>
+              <a:t>Given–When–Then 예</a:t>
+            </a:r>
+            <a:r>
+              <a:rPr sz="1000" b="0">
+                <a:solidFill>
+                  <a:srgbClr val="000000"/>
+                </a:solidFill>
+                <a:latin typeface="맑은 고딕"/>
+                <a:ea typeface="맑은 고딕"/>
+              </a:rPr>
+              <a:t>로 써라. 허용되는 결과와 </a:t>
+            </a:r>
+            <a:r>
+              <a:rPr sz="1000" b="1">
+                <a:solidFill>
+                  <a:srgbClr val="000000"/>
+                </a:solidFill>
+                <a:latin typeface="맑은 고딕"/>
+                <a:ea typeface="맑은 고딕"/>
+              </a:rPr>
+              <a:t>금지되는 결과</a:t>
+            </a:r>
+            <a:r>
+              <a:rPr sz="1000" b="0">
+                <a:solidFill>
+                  <a:srgbClr val="000000"/>
+                </a:solidFill>
+                <a:latin typeface="맑은 고딕"/>
+                <a:ea typeface="맑은 고딕"/>
+              </a:rPr>
+              <a:t>를 함께 확인하고, 관찰할 상태·계약 수·결제 요청 횟수·안내 결과를 기대값으로 적어라. 근거가 없는 기대값은 지어내지 말고 질문으로 남겨라.”</a:t>
+            </a:r>
+          </a:p>
+          <a:p>
+            <a:pPr lvl="3" marL="981075" indent="-268288">
+              <a:spcBef>
+                <a:spcPts val="300"/>
+              </a:spcBef>
+              <a:spcAft>
+                <a:spcPts val="300"/>
+              </a:spcAft>
+              <a:buFont typeface="+mj-ea"/>
+              <a:buAutoNum type="circleNumDbPlain" startAt="4"/>
+            </a:pPr>
+            <a:r>
+              <a:rPr sz="1000" b="0">
+                <a:solidFill>
+                  <a:srgbClr val="000000"/>
+                </a:solidFill>
+                <a:latin typeface="맑은 고딕"/>
+                <a:ea typeface="맑은 고딕"/>
+              </a:rPr>
+              <a:t>“아래 답과 수정 요청을 반영해라. 구현을 </a:t>
+            </a:r>
+            <a:r>
+              <a:rPr sz="1000" b="1">
+                <a:solidFill>
+                  <a:srgbClr val="000000"/>
+                </a:solidFill>
+                <a:latin typeface="맑은 고딕"/>
+                <a:ea typeface="맑은 고딕"/>
+              </a:rPr>
+              <a:t>한 번에 검증할 작업 단위</a:t>
+            </a:r>
+            <a:r>
+              <a:rPr sz="1000" b="0">
+                <a:solidFill>
+                  <a:srgbClr val="000000"/>
+                </a:solidFill>
+                <a:latin typeface="맑은 고딕"/>
+                <a:ea typeface="맑은 고딕"/>
+              </a:rPr>
+              <a:t>로 나누고 단위마다 완료를 확인할 예를 짝지어라. 작업 명세·수용 예·작업 단위가 </a:t>
+            </a:r>
+            <a:r>
+              <a:rPr sz="1000" b="1">
+                <a:solidFill>
+                  <a:srgbClr val="000000"/>
+                </a:solidFill>
+                <a:latin typeface="맑은 고딕"/>
+                <a:ea typeface="맑은 고딕"/>
+              </a:rPr>
+              <a:t>도메인 모델의 상태와 전이</a:t>
+            </a:r>
+            <a:r>
+              <a:rPr sz="1000" b="0">
+                <a:solidFill>
+                  <a:srgbClr val="000000"/>
+                </a:solidFill>
+                <a:latin typeface="맑은 고딕"/>
+                <a:ea typeface="맑은 고딕"/>
+              </a:rPr>
+              <a:t>, </a:t>
+            </a:r>
+            <a:r>
+              <a:rPr sz="1000" b="1">
+                <a:solidFill>
+                  <a:srgbClr val="000000"/>
+                </a:solidFill>
+                <a:latin typeface="맑은 고딕"/>
+                <a:ea typeface="맑은 고딕"/>
+              </a:rPr>
+              <a:t>아키텍처의 포트와 의존 규칙</a:t>
+            </a:r>
+            <a:r>
+              <a:rPr sz="1000" b="0">
+                <a:solidFill>
+                  <a:srgbClr val="000000"/>
+                </a:solidFill>
+                <a:latin typeface="맑은 고딕"/>
+                <a:ea typeface="맑은 고딕"/>
+              </a:rPr>
+              <a:t>과 어긋나지 않는지 검토하고 어긋난 곳은 어떻게 고치는지 적어라.”</a:t>
+            </a:r>
+          </a:p>
+          <a:p>
+            <a:pPr lvl="3" marL="981075" indent="-268288">
+              <a:spcBef>
+                <a:spcPts val="300"/>
+              </a:spcBef>
+              <a:spcAft>
+                <a:spcPts val="300"/>
+              </a:spcAft>
+              <a:buFont typeface="+mj-ea"/>
+              <a:buAutoNum type="circleNumDbPlain" startAt="5"/>
+            </a:pPr>
+            <a:r>
+              <a:rPr sz="1000" b="0">
+                <a:solidFill>
+                  <a:srgbClr val="000000"/>
+                </a:solidFill>
+                <a:latin typeface="맑은 고딕"/>
+                <a:ea typeface="맑은 고딕"/>
+              </a:rPr>
+              <a:t>“지금까지 합의한 작업 명세와 수용 기준을 다음 실습에 사용할 </a:t>
+            </a:r>
+            <a:r>
+              <a:rPr sz="1000" b="1">
+                <a:solidFill>
+                  <a:srgbClr val="000000"/>
+                </a:solidFill>
+                <a:latin typeface="맑은 고딕"/>
+                <a:ea typeface="맑은 고딕"/>
+              </a:rPr>
+              <a:t>Markdown 파일</a:t>
+            </a:r>
+            <a:r>
+              <a:rPr sz="1000" b="0">
+                <a:solidFill>
+                  <a:srgbClr val="000000"/>
+                </a:solidFill>
+                <a:latin typeface="맑은 고딕"/>
+                <a:ea typeface="맑은 고딕"/>
+              </a:rPr>
+              <a:t>로 생성해라. 수강생이 함께 읽고 실습 6의 투입물로 쓸 </a:t>
+            </a:r>
+            <a:r>
+              <a:rPr sz="1000" b="1">
+                <a:solidFill>
+                  <a:srgbClr val="000000"/>
+                </a:solidFill>
+                <a:latin typeface="맑은 고딕"/>
+                <a:ea typeface="맑은 고딕"/>
+              </a:rPr>
+              <a:t>핵심만</a:t>
+            </a:r>
+            <a:r>
+              <a:rPr sz="1000" b="0">
+                <a:solidFill>
+                  <a:srgbClr val="000000"/>
+                </a:solidFill>
+                <a:latin typeface="맑은 고딕"/>
+                <a:ea typeface="맑은 고딕"/>
+              </a:rPr>
+              <a:t> 담고 </a:t>
+            </a:r>
+            <a:r>
+              <a:rPr sz="1000" b="1">
+                <a:solidFill>
+                  <a:srgbClr val="000000"/>
+                </a:solidFill>
+                <a:latin typeface="맑은 고딕"/>
+                <a:ea typeface="맑은 고딕"/>
+              </a:rPr>
+              <a:t>슬라이드 다섯 장 안</a:t>
+            </a:r>
+            <a:r>
+              <a:rPr sz="1000" b="0">
+                <a:solidFill>
+                  <a:srgbClr val="000000"/>
+                </a:solidFill>
+                <a:latin typeface="맑은 고딕"/>
+                <a:ea typeface="맑은 고딕"/>
+              </a:rPr>
+              <a:t>에 들어가게 줄여라. 스토리와 대표 값, 이번 작업이 지킬 업무 규칙, 범위·제외, </a:t>
+            </a:r>
+            <a:r>
+              <a:rPr sz="1000" b="1">
+                <a:solidFill>
+                  <a:srgbClr val="000000"/>
+                </a:solidFill>
+                <a:latin typeface="맑은 고딕"/>
+                <a:ea typeface="맑은 고딕"/>
+              </a:rPr>
+              <a:t>수용 예</a:t>
+            </a:r>
+            <a:r>
+              <a:rPr sz="1000" b="0">
+                <a:solidFill>
+                  <a:srgbClr val="000000"/>
+                </a:solidFill>
+                <a:latin typeface="맑은 고딕"/>
+                <a:ea typeface="맑은 고딕"/>
+              </a:rPr>
+              <a:t>, 작업 단위와 완료를 확인할 예·의존 순서, 남은 미정을 포함해라. 수용 예는 대화창에서 합의한 Given–When–Then을 그대로 넣어라. 앞 산출물의 업무 규칙·날짜 계산·상태 전이는 반복하지 말고 참조해라. 남은 미정은 제목과 한 줄 이유에 확인 담당을 붙여 모아라.”</a:t>
             </a:r>
           </a:p>
           <a:p>
@@ -13446,35 +13827,386 @@
               <a:buChar char=""/>
             </a:pPr>
             <a:r>
-              <a:rPr sz="1600" b="1">
-                <a:solidFill>
-                  <a:srgbClr val="000000"/>
-                </a:solidFill>
-                <a:latin typeface="맑은 고딕"/>
-                <a:ea typeface="맑은 고딕"/>
-              </a:rPr>
-              <a:t>프롬프트</a:t>
-            </a:r>
-          </a:p>
-          <a:p>
-            <a:pPr lvl="2" marL="342900" indent="0">
+              <a:rPr sz="1200" b="1">
+                <a:solidFill>
+                  <a:srgbClr val="000000"/>
+                </a:solidFill>
+                <a:latin typeface="맑은 고딕"/>
+                <a:ea typeface="맑은 고딕"/>
+              </a:rPr>
+              <a:t>점검 항목</a:t>
+            </a:r>
+          </a:p>
+          <a:p>
+            <a:pPr lvl="3" marL="1028700" indent="-304800">
               <a:spcBef>
                 <a:spcPts val="300"/>
               </a:spcBef>
               <a:spcAft>
                 <a:spcPts val="300"/>
               </a:spcAft>
-              <a:buNone/>
+              <a:buFont typeface="+mj-lt"/>
+              <a:buAutoNum type="arabicPeriod" startAt="1"/>
             </a:pPr>
             <a:r>
-              <a:rPr sz="1600" b="0">
-                <a:solidFill>
-                  <a:srgbClr val="000000"/>
-                </a:solidFill>
-                <a:latin typeface="맑은 고딕"/>
-                <a:ea typeface="맑은 고딕"/>
-              </a:rPr>
-              <a:t>“정기배송 신청의 작업 명세서를 작성하고 허용·거절 예를 Given–When–Then으로 표현하라. 검증 가능한 작업으로 나누고, 기대값의 근거가 없으면 질문으로 남겨라.”</a:t>
+              <a:rPr sz="1000" b="0">
+                <a:solidFill>
+                  <a:srgbClr val="000000"/>
+                </a:solidFill>
+                <a:latin typeface="맑은 고딕"/>
+                <a:ea typeface="맑은 고딕"/>
+              </a:rPr>
+              <a:t/>
+            </a:r>
+            <a:r>
+              <a:rPr sz="1000" b="1">
+                <a:solidFill>
+                  <a:srgbClr val="000000"/>
+                </a:solidFill>
+                <a:latin typeface="맑은 고딕"/>
+                <a:ea typeface="맑은 고딕"/>
+              </a:rPr>
+              <a:t>범위</a:t>
+            </a:r>
+            <a:r>
+              <a:rPr sz="1000" b="0">
+                <a:solidFill>
+                  <a:srgbClr val="000000"/>
+                </a:solidFill>
+                <a:latin typeface="맑은 고딕"/>
+                <a:ea typeface="맑은 고딕"/>
+              </a:rPr>
+              <a:t> —</a:t>
+            </a:r>
+            <a:r>
+              <a:rPr sz="800" b="0">
+                <a:solidFill>
+                  <a:srgbClr val="000000"/>
+                </a:solidFill>
+                <a:latin typeface="맑은 고딕"/>
+                <a:ea typeface="맑은 고딕"/>
+              </a:rPr>
+              <a:t> 신청할 때 결제하는 </a:t>
+            </a:r>
+            <a:r>
+              <a:rPr sz="800" b="1">
+                <a:solidFill>
+                  <a:srgbClr val="000000"/>
+                </a:solidFill>
+                <a:latin typeface="맑은 고딕"/>
+                <a:ea typeface="맑은 고딕"/>
+              </a:rPr>
+              <a:t>첫 회차</a:t>
+            </a:r>
+            <a:r>
+              <a:rPr sz="800" b="0">
+                <a:solidFill>
+                  <a:srgbClr val="000000"/>
+                </a:solidFill>
+                <a:latin typeface="맑은 고딕"/>
+                <a:ea typeface="맑은 고딕"/>
+              </a:rPr>
+              <a:t>까지가 이번 작업이고 이후 회차의 실제 결제는 제외되었는가?</a:t>
+            </a:r>
+          </a:p>
+          <a:p>
+            <a:pPr lvl="3" marL="1028700" indent="-304800">
+              <a:spcBef>
+                <a:spcPts val="300"/>
+              </a:spcBef>
+              <a:spcAft>
+                <a:spcPts val="300"/>
+              </a:spcAft>
+              <a:buFont typeface="+mj-lt"/>
+              <a:buAutoNum type="arabicPeriod" startAt="2"/>
+            </a:pPr>
+            <a:r>
+              <a:rPr sz="1000" b="0">
+                <a:solidFill>
+                  <a:srgbClr val="000000"/>
+                </a:solidFill>
+                <a:latin typeface="맑은 고딕"/>
+                <a:ea typeface="맑은 고딕"/>
+              </a:rPr>
+              <a:t/>
+            </a:r>
+            <a:r>
+              <a:rPr sz="1000" b="1">
+                <a:solidFill>
+                  <a:srgbClr val="000000"/>
+                </a:solidFill>
+                <a:latin typeface="맑은 고딕"/>
+                <a:ea typeface="맑은 고딕"/>
+              </a:rPr>
+              <a:t>금액</a:t>
+            </a:r>
+            <a:r>
+              <a:rPr sz="1000" b="0">
+                <a:solidFill>
+                  <a:srgbClr val="000000"/>
+                </a:solidFill>
+                <a:latin typeface="맑은 고딕"/>
+                <a:ea typeface="맑은 고딕"/>
+              </a:rPr>
+              <a:t> —</a:t>
+            </a:r>
+            <a:r>
+              <a:rPr sz="800" b="0">
+                <a:solidFill>
+                  <a:srgbClr val="000000"/>
+                </a:solidFill>
+                <a:latin typeface="맑은 고딕"/>
+                <a:ea typeface="맑은 고딕"/>
+              </a:rPr>
+              <a:t> 신청 때 확정한 회차 금액을 쓰고, 회차 수를 곱한 금액을 한 번에 청구하지 않는가?</a:t>
+            </a:r>
+          </a:p>
+          <a:p>
+            <a:pPr lvl="3" marL="1028700" indent="-304800">
+              <a:spcBef>
+                <a:spcPts val="300"/>
+              </a:spcBef>
+              <a:spcAft>
+                <a:spcPts val="300"/>
+              </a:spcAft>
+              <a:buFont typeface="+mj-lt"/>
+              <a:buAutoNum type="arabicPeriod" startAt="3"/>
+            </a:pPr>
+            <a:r>
+              <a:rPr sz="1000" b="0">
+                <a:solidFill>
+                  <a:srgbClr val="000000"/>
+                </a:solidFill>
+                <a:latin typeface="맑은 고딕"/>
+                <a:ea typeface="맑은 고딕"/>
+              </a:rPr>
+              <a:t/>
+            </a:r>
+            <a:r>
+              <a:rPr sz="1000" b="1">
+                <a:solidFill>
+                  <a:srgbClr val="000000"/>
+                </a:solidFill>
+                <a:latin typeface="맑은 고딕"/>
+                <a:ea typeface="맑은 고딕"/>
+              </a:rPr>
+              <a:t>결과</a:t>
+            </a:r>
+            <a:r>
+              <a:rPr sz="1000" b="0">
+                <a:solidFill>
+                  <a:srgbClr val="000000"/>
+                </a:solidFill>
+                <a:latin typeface="맑은 고딕"/>
+                <a:ea typeface="맑은 고딕"/>
+              </a:rPr>
+              <a:t> —</a:t>
+            </a:r>
+            <a:r>
+              <a:rPr sz="800" b="0">
+                <a:solidFill>
+                  <a:srgbClr val="000000"/>
+                </a:solidFill>
+                <a:latin typeface="맑은 고딕"/>
+                <a:ea typeface="맑은 고딕"/>
+              </a:rPr>
+              <a:t> 성공 확정·실패 확정·</a:t>
+            </a:r>
+            <a:r>
+              <a:rPr sz="800" b="1">
+                <a:solidFill>
+                  <a:srgbClr val="000000"/>
+                </a:solidFill>
+                <a:latin typeface="맑은 고딕"/>
+                <a:ea typeface="맑은 고딕"/>
+              </a:rPr>
+              <a:t>결과 확인 불가</a:t>
+            </a:r>
+            <a:r>
+              <a:rPr sz="800" b="0">
+                <a:solidFill>
+                  <a:srgbClr val="000000"/>
+                </a:solidFill>
+                <a:latin typeface="맑은 고딕"/>
+                <a:ea typeface="맑은 고딕"/>
+              </a:rPr>
+              <a:t>가 서로 다른 상태와 안내로 갈라지는가?</a:t>
+            </a:r>
+          </a:p>
+          <a:p>
+            <a:pPr lvl="3" marL="1028700" indent="-304800">
+              <a:spcBef>
+                <a:spcPts val="300"/>
+              </a:spcBef>
+              <a:spcAft>
+                <a:spcPts val="300"/>
+              </a:spcAft>
+              <a:buFont typeface="+mj-lt"/>
+              <a:buAutoNum type="arabicPeriod" startAt="4"/>
+            </a:pPr>
+            <a:r>
+              <a:rPr sz="1000" b="0">
+                <a:solidFill>
+                  <a:srgbClr val="000000"/>
+                </a:solidFill>
+                <a:latin typeface="맑은 고딕"/>
+                <a:ea typeface="맑은 고딕"/>
+              </a:rPr>
+              <a:t/>
+            </a:r>
+            <a:r>
+              <a:rPr sz="1000" b="1">
+                <a:solidFill>
+                  <a:srgbClr val="000000"/>
+                </a:solidFill>
+                <a:latin typeface="맑은 고딕"/>
+                <a:ea typeface="맑은 고딕"/>
+              </a:rPr>
+              <a:t>금지</a:t>
+            </a:r>
+            <a:r>
+              <a:rPr sz="1000" b="0">
+                <a:solidFill>
+                  <a:srgbClr val="000000"/>
+                </a:solidFill>
+                <a:latin typeface="맑은 고딕"/>
+                <a:ea typeface="맑은 고딕"/>
+              </a:rPr>
+              <a:t> —</a:t>
+            </a:r>
+            <a:r>
+              <a:rPr sz="800" b="0">
+                <a:solidFill>
+                  <a:srgbClr val="000000"/>
+                </a:solidFill>
+                <a:latin typeface="맑은 고딕"/>
+                <a:ea typeface="맑은 고딕"/>
+              </a:rPr>
+              <a:t> 예마다 </a:t>
+            </a:r>
+            <a:r>
+              <a:rPr sz="800" b="1">
+                <a:solidFill>
+                  <a:srgbClr val="000000"/>
+                </a:solidFill>
+                <a:latin typeface="맑은 고딕"/>
+                <a:ea typeface="맑은 고딕"/>
+              </a:rPr>
+              <a:t>계약 수와 결제 요청 횟수</a:t>
+            </a:r>
+            <a:r>
+              <a:rPr sz="800" b="0">
+                <a:solidFill>
+                  <a:srgbClr val="000000"/>
+                </a:solidFill>
+                <a:latin typeface="맑은 고딕"/>
+                <a:ea typeface="맑은 고딕"/>
+              </a:rPr>
+              <a:t>를 숫자로 확인해 잘못 생긴 계약과 청구를 잡는가?</a:t>
+            </a:r>
+          </a:p>
+          <a:p>
+            <a:pPr lvl="3" marL="1028700" indent="-304800">
+              <a:spcBef>
+                <a:spcPts val="300"/>
+              </a:spcBef>
+              <a:spcAft>
+                <a:spcPts val="300"/>
+              </a:spcAft>
+              <a:buFont typeface="+mj-lt"/>
+              <a:buAutoNum type="arabicPeriod" startAt="5"/>
+            </a:pPr>
+            <a:r>
+              <a:rPr sz="1000" b="0">
+                <a:solidFill>
+                  <a:srgbClr val="000000"/>
+                </a:solidFill>
+                <a:latin typeface="맑은 고딕"/>
+                <a:ea typeface="맑은 고딕"/>
+              </a:rPr>
+              <a:t/>
+            </a:r>
+            <a:r>
+              <a:rPr sz="1000" b="1">
+                <a:solidFill>
+                  <a:srgbClr val="000000"/>
+                </a:solidFill>
+                <a:latin typeface="맑은 고딕"/>
+                <a:ea typeface="맑은 고딕"/>
+              </a:rPr>
+              <a:t>상태</a:t>
+            </a:r>
+            <a:r>
+              <a:rPr sz="1000" b="0">
+                <a:solidFill>
+                  <a:srgbClr val="000000"/>
+                </a:solidFill>
+                <a:latin typeface="맑은 고딕"/>
+                <a:ea typeface="맑은 고딕"/>
+              </a:rPr>
+              <a:t> —</a:t>
+            </a:r>
+            <a:r>
+              <a:rPr sz="800" b="0">
+                <a:solidFill>
+                  <a:srgbClr val="000000"/>
+                </a:solidFill>
+                <a:latin typeface="맑은 고딕"/>
+                <a:ea typeface="맑은 고딕"/>
+              </a:rPr>
+              <a:t> 앞 산출물이 정한 상태와 전이만 쓰고 새 상태나 새 전이를 만들지 않았는가?</a:t>
+            </a:r>
+          </a:p>
+          <a:p>
+            <a:pPr lvl="3" marL="1028700" indent="-304800">
+              <a:spcBef>
+                <a:spcPts val="300"/>
+              </a:spcBef>
+              <a:spcAft>
+                <a:spcPts val="300"/>
+              </a:spcAft>
+              <a:buFont typeface="+mj-lt"/>
+              <a:buAutoNum type="arabicPeriod" startAt="6"/>
+            </a:pPr>
+            <a:r>
+              <a:rPr sz="1000" b="0">
+                <a:solidFill>
+                  <a:srgbClr val="000000"/>
+                </a:solidFill>
+                <a:latin typeface="맑은 고딕"/>
+                <a:ea typeface="맑은 고딕"/>
+              </a:rPr>
+              <a:t/>
+            </a:r>
+            <a:r>
+              <a:rPr sz="1000" b="1">
+                <a:solidFill>
+                  <a:srgbClr val="000000"/>
+                </a:solidFill>
+                <a:latin typeface="맑은 고딕"/>
+                <a:ea typeface="맑은 고딕"/>
+              </a:rPr>
+              <a:t>미정</a:t>
+            </a:r>
+            <a:r>
+              <a:rPr sz="1000" b="0">
+                <a:solidFill>
+                  <a:srgbClr val="000000"/>
+                </a:solidFill>
+                <a:latin typeface="맑은 고딕"/>
+                <a:ea typeface="맑은 고딕"/>
+              </a:rPr>
+              <a:t> —</a:t>
+            </a:r>
+            <a:r>
+              <a:rPr sz="800" b="0">
+                <a:solidFill>
+                  <a:srgbClr val="000000"/>
+                </a:solidFill>
+                <a:latin typeface="맑은 고딕"/>
+                <a:ea typeface="맑은 고딕"/>
+              </a:rPr>
+              <a:t> 중복 승인 방지·결과 확인의 시작처럼 확인해야 할 결정을 기대값으로 지어내지 않았는가?</a:t>
             </a:r>
           </a:p>
           <a:p>
@@ -13490,18 +14222,18 @@
               <a:buChar char=""/>
             </a:pPr>
             <a:r>
-              <a:rPr sz="1600" b="1">
-                <a:solidFill>
-                  <a:srgbClr val="000000"/>
-                </a:solidFill>
-                <a:latin typeface="맑은 고딕"/>
-                <a:ea typeface="맑은 고딕"/>
-              </a:rPr>
-              <a:t>점검 항목</a:t>
-            </a:r>
-          </a:p>
-          <a:p>
-            <a:pPr lvl="2" marL="607060" indent="-251460">
+              <a:rPr sz="1200" b="1">
+                <a:solidFill>
+                  <a:srgbClr val="000000"/>
+                </a:solidFill>
+                <a:latin typeface="맑은 고딕"/>
+                <a:ea typeface="맑은 고딕"/>
+              </a:rPr>
+              <a:t>결과물</a:t>
+            </a:r>
+          </a:p>
+          <a:p>
+            <a:pPr lvl="3" marL="723900" indent="0">
               <a:spcBef>
                 <a:spcPts val="300"/>
               </a:spcBef>
@@ -13511,353 +14243,24 @@
               <a:buNone/>
             </a:pPr>
             <a:r>
-              <a:rPr sz="1600" b="0">
-                <a:solidFill>
-                  <a:srgbClr val="000000"/>
-                </a:solidFill>
-                <a:latin typeface="맑은 고딕"/>
-                <a:ea typeface="맑은 고딕"/>
-              </a:rPr>
-              <a:t>1. </a:t>
-            </a:r>
-            <a:r>
-              <a:rPr sz="1600" b="1">
-                <a:solidFill>
-                  <a:srgbClr val="000000"/>
-                </a:solidFill>
-                <a:latin typeface="맑은 고딕"/>
-                <a:ea typeface="맑은 고딕"/>
-              </a:rPr>
-              <a:t>범위</a:t>
-            </a:r>
-            <a:r>
-              <a:rPr sz="1600" b="0">
-                <a:solidFill>
-                  <a:srgbClr val="000000"/>
-                </a:solidFill>
-                <a:latin typeface="맑은 고딕"/>
-                <a:ea typeface="맑은 고딕"/>
-              </a:rPr>
-              <a:t> —</a:t>
-            </a:r>
-            <a:r>
-              <a:rPr sz="1400" b="0">
-                <a:solidFill>
-                  <a:srgbClr val="000000"/>
-                </a:solidFill>
-                <a:latin typeface="맑은 고딕"/>
-                <a:ea typeface="맑은 고딕"/>
-              </a:rPr>
-              <a:t> 신청·일시불 결제·회차 생성과 제외할 기능이 구분되는가?</a:t>
-            </a:r>
-          </a:p>
-          <a:p>
-            <a:pPr lvl="2" marL="607060" indent="-251460">
-              <a:spcBef>
-                <a:spcPts val="300"/>
-              </a:spcBef>
-              <a:spcAft>
-                <a:spcPts val="300"/>
-              </a:spcAft>
-              <a:buNone/>
-            </a:pPr>
-            <a:r>
-              <a:rPr sz="1600" b="0">
-                <a:solidFill>
-                  <a:srgbClr val="000000"/>
-                </a:solidFill>
-                <a:latin typeface="맑은 고딕"/>
-                <a:ea typeface="맑은 고딕"/>
-              </a:rPr>
-              <a:t>2. </a:t>
-            </a:r>
-            <a:r>
-              <a:rPr sz="1600" b="1">
-                <a:solidFill>
-                  <a:srgbClr val="000000"/>
-                </a:solidFill>
-                <a:latin typeface="맑은 고딕"/>
-                <a:ea typeface="맑은 고딕"/>
-              </a:rPr>
-              <a:t>금액</a:t>
-            </a:r>
-            <a:r>
-              <a:rPr sz="1600" b="0">
-                <a:solidFill>
-                  <a:srgbClr val="000000"/>
-                </a:solidFill>
-                <a:latin typeface="맑은 고딕"/>
-                <a:ea typeface="맑은 고딕"/>
-              </a:rPr>
-              <a:t> —</a:t>
-            </a:r>
-            <a:r>
-              <a:rPr sz="1400" b="0">
-                <a:solidFill>
-                  <a:srgbClr val="000000"/>
-                </a:solidFill>
-                <a:latin typeface="맑은 고딕"/>
-                <a:ea typeface="맑은 고딕"/>
-              </a:rPr>
-              <a:t> 회차 금액 10,000원과 총 70,000원의 근거가 같은가?</a:t>
-            </a:r>
-          </a:p>
-          <a:p>
-            <a:pPr lvl="2" marL="607060" indent="-251460">
-              <a:spcBef>
-                <a:spcPts val="300"/>
-              </a:spcBef>
-              <a:spcAft>
-                <a:spcPts val="300"/>
-              </a:spcAft>
-              <a:buNone/>
-            </a:pPr>
-            <a:r>
-              <a:rPr sz="1600" b="0">
-                <a:solidFill>
-                  <a:srgbClr val="000000"/>
-                </a:solidFill>
-                <a:latin typeface="맑은 고딕"/>
-                <a:ea typeface="맑은 고딕"/>
-              </a:rPr>
-              <a:t>3. </a:t>
-            </a:r>
-            <a:r>
-              <a:rPr sz="1600" b="1">
-                <a:solidFill>
-                  <a:srgbClr val="000000"/>
-                </a:solidFill>
-                <a:latin typeface="맑은 고딕"/>
-                <a:ea typeface="맑은 고딕"/>
-              </a:rPr>
-              <a:t>상태</a:t>
-            </a:r>
-            <a:r>
-              <a:rPr sz="1600" b="0">
-                <a:solidFill>
-                  <a:srgbClr val="000000"/>
-                </a:solidFill>
-                <a:latin typeface="맑은 고딕"/>
-                <a:ea typeface="맑은 고딕"/>
-              </a:rPr>
-              <a:t> —</a:t>
-            </a:r>
-            <a:r>
-              <a:rPr sz="1400" b="0">
-                <a:solidFill>
-                  <a:srgbClr val="000000"/>
-                </a:solidFill>
-                <a:latin typeface="맑은 고딕"/>
-                <a:ea typeface="맑은 고딕"/>
-              </a:rPr>
-              <a:t> 승인 뒤 확정·7회 생성, 거절 뒤 결제 대기·0회를 확인하는가?</a:t>
-            </a:r>
-          </a:p>
-          <a:p>
-            <a:pPr lvl="2" marL="607060" indent="-251460">
-              <a:spcBef>
-                <a:spcPts val="300"/>
-              </a:spcBef>
-              <a:spcAft>
-                <a:spcPts val="300"/>
-              </a:spcAft>
-              <a:buNone/>
-            </a:pPr>
-            <a:r>
-              <a:rPr sz="1600" b="0">
-                <a:solidFill>
-                  <a:srgbClr val="000000"/>
-                </a:solidFill>
-                <a:latin typeface="맑은 고딕"/>
-                <a:ea typeface="맑은 고딕"/>
-              </a:rPr>
-              <a:t>4. </a:t>
-            </a:r>
-            <a:r>
-              <a:rPr sz="1600" b="1">
-                <a:solidFill>
-                  <a:srgbClr val="000000"/>
-                </a:solidFill>
-                <a:latin typeface="맑은 고딕"/>
-                <a:ea typeface="맑은 고딕"/>
-              </a:rPr>
-              <a:t>재결제</a:t>
-            </a:r>
-            <a:r>
-              <a:rPr sz="1600" b="0">
-                <a:solidFill>
-                  <a:srgbClr val="000000"/>
-                </a:solidFill>
-                <a:latin typeface="맑은 고딕"/>
-                <a:ea typeface="맑은 고딕"/>
-              </a:rPr>
-              <a:t> —</a:t>
-            </a:r>
-            <a:r>
-              <a:rPr sz="1400" b="0">
-                <a:solidFill>
-                  <a:srgbClr val="000000"/>
-                </a:solidFill>
-                <a:latin typeface="맑은 고딕"/>
-                <a:ea typeface="맑은 고딕"/>
-              </a:rPr>
-              <a:t> 같은 신청에서 다른 카드로 다시 결제하는 예가 있는가?</a:t>
-            </a:r>
-          </a:p>
-          <a:p>
-            <a:pPr lvl="2" marL="607060" indent="-251460">
-              <a:spcBef>
-                <a:spcPts val="300"/>
-              </a:spcBef>
-              <a:spcAft>
-                <a:spcPts val="300"/>
-              </a:spcAft>
-              <a:buNone/>
-            </a:pPr>
-            <a:r>
-              <a:rPr sz="1600" b="0">
-                <a:solidFill>
-                  <a:srgbClr val="000000"/>
-                </a:solidFill>
-                <a:latin typeface="맑은 고딕"/>
-                <a:ea typeface="맑은 고딕"/>
-              </a:rPr>
-              <a:t>5. </a:t>
-            </a:r>
-            <a:r>
-              <a:rPr sz="1600" b="1">
-                <a:solidFill>
-                  <a:srgbClr val="000000"/>
-                </a:solidFill>
-                <a:latin typeface="맑은 고딕"/>
-                <a:ea typeface="맑은 고딕"/>
-              </a:rPr>
-              <a:t>미정</a:t>
-            </a:r>
-            <a:r>
-              <a:rPr sz="1600" b="0">
-                <a:solidFill>
-                  <a:srgbClr val="000000"/>
-                </a:solidFill>
-                <a:latin typeface="맑은 고딕"/>
-                <a:ea typeface="맑은 고딕"/>
-              </a:rPr>
-              <a:t> —</a:t>
-            </a:r>
-            <a:r>
-              <a:rPr sz="1400" b="0">
-                <a:solidFill>
-                  <a:srgbClr val="000000"/>
-                </a:solidFill>
-                <a:latin typeface="맑은 고딕"/>
-                <a:ea typeface="맑은 고딕"/>
-              </a:rPr>
-              <a:t> 통신 오류·배송 요청 실패·환불을 추측으로 정하지 않았는가?</a:t>
-            </a:r>
-          </a:p>
-          <a:p>
-            <a:pPr lvl="2" marL="607060" indent="-251460">
-              <a:spcBef>
-                <a:spcPts val="300"/>
-              </a:spcBef>
-              <a:spcAft>
-                <a:spcPts val="300"/>
-              </a:spcAft>
-              <a:buNone/>
-            </a:pPr>
-            <a:r>
-              <a:rPr sz="1600" b="0">
-                <a:solidFill>
-                  <a:srgbClr val="000000"/>
-                </a:solidFill>
-                <a:latin typeface="맑은 고딕"/>
-                <a:ea typeface="맑은 고딕"/>
-              </a:rPr>
-              <a:t>6. </a:t>
-            </a:r>
-            <a:r>
-              <a:rPr sz="1600" b="1">
-                <a:solidFill>
-                  <a:srgbClr val="000000"/>
-                </a:solidFill>
-                <a:latin typeface="맑은 고딕"/>
-                <a:ea typeface="맑은 고딕"/>
-              </a:rPr>
-              <a:t>작업</a:t>
-            </a:r>
-            <a:r>
-              <a:rPr sz="1600" b="0">
-                <a:solidFill>
-                  <a:srgbClr val="000000"/>
-                </a:solidFill>
-                <a:latin typeface="맑은 고딕"/>
-                <a:ea typeface="맑은 고딕"/>
-              </a:rPr>
-              <a:t> —</a:t>
-            </a:r>
-            <a:r>
-              <a:rPr sz="1400" b="0">
-                <a:solidFill>
-                  <a:srgbClr val="000000"/>
-                </a:solidFill>
-                <a:latin typeface="맑은 고딕"/>
-                <a:ea typeface="맑은 고딕"/>
-              </a:rPr>
-              <a:t> 각 단위가 수용 예와 실행 가능한 완료 기준으로 끝나는가?</a:t>
-            </a:r>
-          </a:p>
-          <a:p>
-            <a:pPr lvl="2" marL="723900" indent="-368300">
-              <a:spcBef>
-                <a:spcPts val="300"/>
-              </a:spcBef>
-              <a:spcAft>
-                <a:spcPts val="300"/>
-              </a:spcAft>
-              <a:buSzPct val="90000"/>
-              <a:buFont typeface="Wingdings" pitchFamily="2" charset="2"/>
-              <a:buChar char=""/>
-            </a:pPr>
-            <a:r>
-              <a:rPr sz="1600" b="1">
-                <a:solidFill>
-                  <a:srgbClr val="000000"/>
-                </a:solidFill>
-                <a:latin typeface="맑은 고딕"/>
-                <a:ea typeface="맑은 고딕"/>
-              </a:rPr>
-              <a:t>결과물</a:t>
-            </a:r>
-          </a:p>
-          <a:p>
-            <a:pPr lvl="2" marL="342900" indent="0">
-              <a:spcBef>
-                <a:spcPts val="300"/>
-              </a:spcBef>
-              <a:spcAft>
-                <a:spcPts val="300"/>
-              </a:spcAft>
-              <a:buNone/>
-            </a:pPr>
-            <a:r>
-              <a:rPr sz="1600" b="1">
-                <a:solidFill>
-                  <a:srgbClr val="000000"/>
-                </a:solidFill>
-                <a:latin typeface="맑은 고딕"/>
-                <a:ea typeface="맑은 고딕"/>
-              </a:rPr>
-              <a:t>작업 명세서·허용과 거절 예·작업 단위</a:t>
-            </a:r>
-            <a:r>
-              <a:rPr sz="1600" b="0">
-                <a:solidFill>
-                  <a:srgbClr val="000000"/>
-                </a:solidFill>
-                <a:latin typeface="맑은 고딕"/>
-                <a:ea typeface="맑은 고딕"/>
-              </a:rPr>
-              <a:t>. 실습 6의 맥락 패키지 입력이다.</a:t>
+              <a:rPr sz="1000" b="1">
+                <a:solidFill>
+                  <a:srgbClr val="000000"/>
+                </a:solidFill>
+                <a:latin typeface="맑은 고딕"/>
+                <a:ea typeface="맑은 고딕"/>
+              </a:rPr>
+              <a:t>작업 명세서·수용 예·작업 단위를 담은 최종 MD 파일</a:t>
+            </a:r>
+            <a:r>
+              <a:rPr sz="1000" b="0">
+                <a:solidFill>
+                  <a:srgbClr val="000000"/>
+                </a:solidFill>
+                <a:latin typeface="맑은 고딕"/>
+                <a:ea typeface="맑은 고딕"/>
+              </a:rPr>
+              <a:t>. 마지막 합의를 확인하고 실습 6에 첨부한다.</a:t>
             </a:r>
           </a:p>
         </p:txBody>
@@ -14532,7 +14935,7 @@
                 <a:latin typeface="맑은 고딕"/>
                 <a:ea typeface="맑은 고딕"/>
               </a:rPr>
-              <a:t>유저 스토리에 </a:t>
+              <a:t>사용자 이야기에 </a:t>
             </a:r>
             <a:r>
               <a:rPr sz="1800" b="1">
@@ -14764,17 +15167,7 @@
                 <a:latin typeface="맑은 고딕"/>
                 <a:ea typeface="맑은 고딕"/>
               </a:rPr>
-              <a:t>작업 명세서 </a:t>
-            </a:r>
-            <a:r>
-              <a:rPr sz="1800" b="1">
-                <a:solidFill>
-                  <a:srgbClr val="000000"/>
-                </a:solidFill>
-                <a:latin typeface="맑은 고딕"/>
-                <a:ea typeface="맑은 고딕"/>
-              </a:rPr>
-              <a:t>(안)</a:t>
+              <a:t>작업 명세서</a:t>
             </a:r>
           </a:p>
           <a:p>
@@ -14922,8 +15315,8 @@
         </p:nvSpPr>
         <p:spPr>
           <a:xfrm>
-            <a:off x="233172" y="1616364"/>
-            <a:ext cx="4338828" cy="4696101"/>
+            <a:off x="233172" y="1404056"/>
+            <a:ext cx="4338828" cy="4908409"/>
           </a:xfrm>
         </p:spPr>
         <p:txBody>
@@ -14932,7 +15325,28 @@
           </a:bodyPr>
           <a:lstStyle/>
           <a:p>
-            <a:pPr lvl="2" marL="228600" indent="-182880">
+            <a:pPr marL="322580" indent="-139700">
+              <a:spcBef>
+                <a:spcPts val="300"/>
+              </a:spcBef>
+              <a:spcAft>
+                <a:spcPts val="300"/>
+              </a:spcAft>
+              <a:buNone/>
+            </a:pPr>
+            <a:r>
+              <a:rPr sz="1000" b="1">
+                <a:solidFill>
+                  <a:srgbClr val="000000"/>
+                </a:solidFill>
+                <a:latin typeface="맑은 고딕"/>
+                <a:ea typeface="맑은 고딕"/>
+              </a:rPr>
+              <a:t>1. 스토리와 대표 값</a:t>
+            </a:r>
+          </a:p>
+          <a:p>
+            <a:pPr lvl="2" marL="411480" indent="-137160">
               <a:spcBef>
                 <a:spcPts val="300"/>
               </a:spcBef>
@@ -14944,18 +15358,18 @@
               <a:buChar char=""/>
             </a:pPr>
             <a:r>
-              <a:rPr sz="1400" b="1">
-                <a:solidFill>
-                  <a:srgbClr val="000000"/>
-                </a:solidFill>
-                <a:latin typeface="맑은 고딕"/>
-                <a:ea typeface="맑은 고딕"/>
-              </a:rPr>
-              <a:t>입력과 업무 규칙</a:t>
-            </a:r>
-          </a:p>
-          <a:p>
-            <a:pPr lvl="2" marL="228600" indent="-182880">
+              <a:rPr sz="1000" b="0">
+                <a:solidFill>
+                  <a:srgbClr val="000000"/>
+                </a:solidFill>
+                <a:latin typeface="맑은 고딕"/>
+                <a:ea typeface="맑은 고딕"/>
+              </a:rPr>
+              <a:t>기존 회원으로서 반복 주문의 수고를 줄이고 싶다. 그래서 상품과 배송 조건을 고르고, 고지를 확인한 뒤 정기배송을 최초 신청한다. 첫 회차 결제 성공이 확인되어야 계약이 성립한다.</a:t>
+            </a:r>
+          </a:p>
+          <a:p>
+            <a:pPr lvl="2" marL="411480" indent="-137160">
               <a:spcBef>
                 <a:spcPts val="300"/>
               </a:spcBef>
@@ -14967,38 +15381,18 @@
               <a:buChar char=""/>
             </a:pPr>
             <a:r>
-              <a:rPr sz="1400" b="1">
-                <a:solidFill>
-                  <a:srgbClr val="000000"/>
-                </a:solidFill>
-                <a:latin typeface="맑은 고딕"/>
-                <a:ea typeface="맑은 고딕"/>
-              </a:rPr>
-              <a:t>신청 조건</a:t>
-            </a:r>
-            <a:r>
-              <a:rPr sz="1400" b="0">
-                <a:solidFill>
-                  <a:srgbClr val="000000"/>
-                </a:solidFill>
-                <a:latin typeface="맑은 고딕"/>
-                <a:ea typeface="맑은 고딕"/>
-              </a:rPr>
-              <a:t> —</a:t>
-            </a:r>
-            <a:r>
-              <a:rPr sz="1200" b="0">
-                <a:solidFill>
-                  <a:srgbClr val="000000"/>
-                </a:solidFill>
-                <a:latin typeface="맑은 고딕"/>
-                <a:ea typeface="맑은 고딕"/>
-              </a:rPr>
-              <a:t> 휴지 1묶음, 신청 시 판매가 10,000원, 첫 배송 11/3, 주기 14일, 기간 3개월.</a:t>
-            </a:r>
-          </a:p>
-          <a:p>
-            <a:pPr lvl="2" marL="228600" indent="-182880">
+              <a:rPr sz="1000" b="0">
+                <a:solidFill>
+                  <a:srgbClr val="000000"/>
+                </a:solidFill>
+                <a:latin typeface="맑은 고딕"/>
+                <a:ea typeface="맑은 고딕"/>
+              </a:rPr>
+              <a:t>상품·수량: 휴지 1묶음 1개</a:t>
+            </a:r>
+          </a:p>
+          <a:p>
+            <a:pPr lvl="2" marL="411480" indent="-137160">
               <a:spcBef>
                 <a:spcPts val="300"/>
               </a:spcBef>
@@ -15010,38 +15404,18 @@
               <a:buChar char=""/>
             </a:pPr>
             <a:r>
-              <a:rPr sz="1400" b="1">
-                <a:solidFill>
-                  <a:srgbClr val="000000"/>
-                </a:solidFill>
-                <a:latin typeface="맑은 고딕"/>
-                <a:ea typeface="맑은 고딕"/>
-              </a:rPr>
-              <a:t>금액</a:t>
-            </a:r>
-            <a:r>
-              <a:rPr sz="1400" b="0">
-                <a:solidFill>
-                  <a:srgbClr val="000000"/>
-                </a:solidFill>
-                <a:latin typeface="맑은 고딕"/>
-                <a:ea typeface="맑은 고딕"/>
-              </a:rPr>
-              <a:t> —</a:t>
-            </a:r>
-            <a:r>
-              <a:rPr sz="1200" b="0">
-                <a:solidFill>
-                  <a:srgbClr val="000000"/>
-                </a:solidFill>
-                <a:latin typeface="맑은 고딕"/>
-                <a:ea typeface="맑은 고딕"/>
-              </a:rPr>
-              <a:t> 단가를 신청 때 확정한다. 회차 금액 10,000원을 해당 약정 동안 유지한다.</a:t>
-            </a:r>
-          </a:p>
-          <a:p>
-            <a:pPr lvl="2" marL="228600" indent="-182880">
+              <a:rPr sz="1000" b="0">
+                <a:solidFill>
+                  <a:srgbClr val="000000"/>
+                </a:solidFill>
+                <a:latin typeface="맑은 고딕"/>
+                <a:ea typeface="맑은 고딕"/>
+              </a:rPr>
+              <a:t>신청일: 2027-10-28</a:t>
+            </a:r>
+          </a:p>
+          <a:p>
+            <a:pPr lvl="2" marL="411480" indent="-137160">
               <a:spcBef>
                 <a:spcPts val="300"/>
               </a:spcBef>
@@ -15053,38 +15427,18 @@
               <a:buChar char=""/>
             </a:pPr>
             <a:r>
-              <a:rPr sz="1400" b="1">
-                <a:solidFill>
-                  <a:srgbClr val="000000"/>
-                </a:solidFill>
-                <a:latin typeface="맑은 고딕"/>
-                <a:ea typeface="맑은 고딕"/>
-              </a:rPr>
-              <a:t>예정일</a:t>
-            </a:r>
-            <a:r>
-              <a:rPr sz="1400" b="0">
-                <a:solidFill>
-                  <a:srgbClr val="000000"/>
-                </a:solidFill>
-                <a:latin typeface="맑은 고딕"/>
-                <a:ea typeface="맑은 고딕"/>
-              </a:rPr>
-              <a:t> —</a:t>
-            </a:r>
-            <a:r>
-              <a:rPr sz="1200" b="0">
-                <a:solidFill>
-                  <a:srgbClr val="000000"/>
-                </a:solidFill>
-                <a:latin typeface="맑은 고딕"/>
-                <a:ea typeface="맑은 고딕"/>
-              </a:rPr>
-              <a:t> 만료 2/2 안의 11/3·11/17·12/1·12/15·12/29·1/12·1/26, 총 7회다.</a:t>
-            </a:r>
-          </a:p>
-          <a:p>
-            <a:pPr lvl="2" marL="228600" indent="-182880">
+              <a:rPr sz="1000" b="0">
+                <a:solidFill>
+                  <a:srgbClr val="000000"/>
+                </a:solidFill>
+                <a:latin typeface="맑은 고딕"/>
+                <a:ea typeface="맑은 고딕"/>
+              </a:rPr>
+              <a:t>첫 배송일: 2027-11-03</a:t>
+            </a:r>
+          </a:p>
+          <a:p>
+            <a:pPr lvl="2" marL="411480" indent="-137160">
               <a:spcBef>
                 <a:spcPts val="300"/>
               </a:spcBef>
@@ -15096,38 +15450,18 @@
               <a:buChar char=""/>
             </a:pPr>
             <a:r>
-              <a:rPr sz="1400" b="1">
-                <a:solidFill>
-                  <a:srgbClr val="000000"/>
-                </a:solidFill>
-                <a:latin typeface="맑은 고딕"/>
-                <a:ea typeface="맑은 고딕"/>
-              </a:rPr>
-              <a:t>결제 금액</a:t>
-            </a:r>
-            <a:r>
-              <a:rPr sz="1400" b="0">
-                <a:solidFill>
-                  <a:srgbClr val="000000"/>
-                </a:solidFill>
-                <a:latin typeface="맑은 고딕"/>
-                <a:ea typeface="맑은 고딕"/>
-              </a:rPr>
-              <a:t> —</a:t>
-            </a:r>
-            <a:r>
-              <a:rPr sz="1200" b="0">
-                <a:solidFill>
-                  <a:srgbClr val="000000"/>
-                </a:solidFill>
-                <a:latin typeface="맑은 고딕"/>
-                <a:ea typeface="맑은 고딕"/>
-              </a:rPr>
-              <a:t> 예정일 수로 계산한 70,000원을 일시불로 요청한다.</a:t>
-            </a:r>
-          </a:p>
-          <a:p>
-            <a:pPr lvl="2" marL="228600" indent="-182880">
+              <a:rPr sz="1000" b="0">
+                <a:solidFill>
+                  <a:srgbClr val="000000"/>
+                </a:solidFill>
+                <a:latin typeface="맑은 고딕"/>
+                <a:ea typeface="맑은 고딕"/>
+              </a:rPr>
+              <a:t>계약기간·배송 주기: 3개월·2주</a:t>
+            </a:r>
+          </a:p>
+          <a:p>
+            <a:pPr lvl="2" marL="411480" indent="-137160">
               <a:spcBef>
                 <a:spcPts val="300"/>
               </a:spcBef>
@@ -15139,38 +15473,28 @@
               <a:buChar char=""/>
             </a:pPr>
             <a:r>
-              <a:rPr sz="1400" b="1">
-                <a:solidFill>
-                  <a:srgbClr val="000000"/>
-                </a:solidFill>
-                <a:latin typeface="맑은 고딕"/>
-                <a:ea typeface="맑은 고딕"/>
-              </a:rPr>
-              <a:t>승인</a:t>
-            </a:r>
-            <a:r>
-              <a:rPr sz="1400" b="0">
-                <a:solidFill>
-                  <a:srgbClr val="000000"/>
-                </a:solidFill>
-                <a:latin typeface="맑은 고딕"/>
-                <a:ea typeface="맑은 고딕"/>
-              </a:rPr>
-              <a:t> —</a:t>
-            </a:r>
-            <a:r>
-              <a:rPr sz="1200" b="0">
-                <a:solidFill>
-                  <a:srgbClr val="000000"/>
-                </a:solidFill>
-                <a:latin typeface="맑은 고딕"/>
-                <a:ea typeface="맑은 고딕"/>
-              </a:rPr>
-              <a:t> 확정으로 바꾸고 예정 회차 7개를 생성한다.</a:t>
-            </a:r>
-          </a:p>
-          <a:p>
-            <a:pPr lvl="2" marL="228600" indent="-182880">
+              <a:rPr sz="1000" b="0">
+                <a:solidFill>
+                  <a:srgbClr val="000000"/>
+                </a:solidFill>
+                <a:latin typeface="맑은 고딕"/>
+                <a:ea typeface="맑은 고딕"/>
+              </a:rPr>
+              <a:t>계약 종료일: 2028-02-03</a:t>
+            </a:r>
+            <a:r>
+              <a:rPr sz="1000" b="0">
+                <a:solidFill>
+                  <a:srgbClr val="000000"/>
+                </a:solidFill>
+                <a:latin typeface="맑은 고딕"/>
+                <a:ea typeface="맑은 고딕"/>
+              </a:rPr>
+              <a:t>(제외)</a:t>
+            </a:r>
+          </a:p>
+          <a:p>
+            <a:pPr lvl="2" marL="411480" indent="-137160">
               <a:spcBef>
                 <a:spcPts val="300"/>
               </a:spcBef>
@@ -15182,34 +15506,180 @@
               <a:buChar char=""/>
             </a:pPr>
             <a:r>
-              <a:rPr sz="1400" b="1">
-                <a:solidFill>
-                  <a:srgbClr val="000000"/>
-                </a:solidFill>
-                <a:latin typeface="맑은 고딕"/>
-                <a:ea typeface="맑은 고딕"/>
-              </a:rPr>
-              <a:t>거절·재결제</a:t>
-            </a:r>
-            <a:r>
-              <a:rPr sz="1400" b="0">
-                <a:solidFill>
-                  <a:srgbClr val="000000"/>
-                </a:solidFill>
-                <a:latin typeface="맑은 고딕"/>
-                <a:ea typeface="맑은 고딕"/>
-              </a:rPr>
-              <a:t> —</a:t>
-            </a:r>
-            <a:r>
-              <a:rPr sz="1200" b="0">
-                <a:solidFill>
-                  <a:srgbClr val="000000"/>
-                </a:solidFill>
-                <a:latin typeface="맑은 고딕"/>
-                <a:ea typeface="맑은 고딕"/>
-              </a:rPr>
-              <a:t> 결제 대기·회차 0개를 유지하고 다른 카드로 같은 신청을 다시 결제한다.</a:t>
+              <a:rPr sz="1000" b="0">
+                <a:solidFill>
+                  <a:srgbClr val="000000"/>
+                </a:solidFill>
+                <a:latin typeface="맑은 고딕"/>
+                <a:ea typeface="맑은 고딕"/>
+              </a:rPr>
+              <a:t>예정 회차: 7개</a:t>
+            </a:r>
+          </a:p>
+          <a:p>
+            <a:pPr lvl="2" marL="411480" indent="-137160">
+              <a:spcBef>
+                <a:spcPts val="300"/>
+              </a:spcBef>
+              <a:spcAft>
+                <a:spcPts val="300"/>
+              </a:spcAft>
+              <a:buSzPct val="90000"/>
+              <a:buFont typeface="Wingdings" pitchFamily="2" charset="2"/>
+              <a:buChar char=""/>
+            </a:pPr>
+            <a:r>
+              <a:rPr sz="1000" b="0">
+                <a:solidFill>
+                  <a:srgbClr val="000000"/>
+                </a:solidFill>
+                <a:latin typeface="맑은 고딕"/>
+                <a:ea typeface="맑은 고딕"/>
+              </a:rPr>
+              <a:t>회차 결제금액: 10,000원</a:t>
+            </a:r>
+          </a:p>
+          <a:p>
+            <a:pPr lvl="2" marL="411480" indent="-137160">
+              <a:spcBef>
+                <a:spcPts val="300"/>
+              </a:spcBef>
+              <a:spcAft>
+                <a:spcPts val="300"/>
+              </a:spcAft>
+              <a:buSzPct val="90000"/>
+              <a:buFont typeface="Wingdings" pitchFamily="2" charset="2"/>
+              <a:buChar char=""/>
+            </a:pPr>
+            <a:r>
+              <a:rPr sz="1000" b="0">
+                <a:solidFill>
+                  <a:srgbClr val="000000"/>
+                </a:solidFill>
+                <a:latin typeface="맑은 고딕"/>
+                <a:ea typeface="맑은 고딕"/>
+              </a:rPr>
+              <a:t>신청 시 결제: 첫 회차 10,000원만</a:t>
+            </a:r>
+          </a:p>
+          <a:p>
+            <a:pPr marL="322580" indent="-139700">
+              <a:spcBef>
+                <a:spcPts val="300"/>
+              </a:spcBef>
+              <a:spcAft>
+                <a:spcPts val="300"/>
+              </a:spcAft>
+              <a:buNone/>
+            </a:pPr>
+            <a:r>
+              <a:rPr sz="1000" b="1">
+                <a:solidFill>
+                  <a:srgbClr val="000000"/>
+                </a:solidFill>
+                <a:latin typeface="맑은 고딕"/>
+                <a:ea typeface="맑은 고딕"/>
+              </a:rPr>
+              <a:t>2. 이번 작업이 지킬 업무 규칙</a:t>
+            </a:r>
+          </a:p>
+          <a:p>
+            <a:pPr lvl="2" marL="411480" indent="-137160">
+              <a:spcBef>
+                <a:spcPts val="300"/>
+              </a:spcBef>
+              <a:spcAft>
+                <a:spcPts val="300"/>
+              </a:spcAft>
+              <a:buSzPct val="90000"/>
+              <a:buFont typeface="Wingdings" pitchFamily="2" charset="2"/>
+              <a:buChar char=""/>
+            </a:pPr>
+            <a:r>
+              <a:rPr sz="1000" b="1">
+                <a:solidFill>
+                  <a:srgbClr val="000000"/>
+                </a:solidFill>
+                <a:latin typeface="맑은 고딕"/>
+                <a:ea typeface="맑은 고딕"/>
+              </a:rPr>
+              <a:t>날짜:</a:t>
+            </a:r>
+            <a:r>
+              <a:rPr sz="1000" b="0">
+                <a:solidFill>
+                  <a:srgbClr val="000000"/>
+                </a:solidFill>
+                <a:latin typeface="맑은 고딕"/>
+                <a:ea typeface="맑은 고딕"/>
+              </a:rPr>
+              <a:t> 신청일은 신청 절차를 시작한 날이다. 첫 배송일 하한은 Asia/Seoul 기준 달력 날짜로 고지를 산출할 때 판정하고, 그 결과를 확정 때까지 유지한다.</a:t>
+            </a:r>
+          </a:p>
+          <a:p>
+            <a:pPr lvl="2" marL="411480" indent="-137160">
+              <a:spcBef>
+                <a:spcPts val="300"/>
+              </a:spcBef>
+              <a:spcAft>
+                <a:spcPts val="300"/>
+              </a:spcAft>
+              <a:buSzPct val="90000"/>
+              <a:buFont typeface="Wingdings" pitchFamily="2" charset="2"/>
+              <a:buChar char=""/>
+            </a:pPr>
+            <a:r>
+              <a:rPr sz="1000" b="1">
+                <a:solidFill>
+                  <a:srgbClr val="000000"/>
+                </a:solidFill>
+                <a:latin typeface="맑은 고딕"/>
+                <a:ea typeface="맑은 고딕"/>
+              </a:rPr>
+              <a:t>고지와 확정:</a:t>
+            </a:r>
+            <a:r>
+              <a:rPr sz="1000" b="0">
+                <a:solidFill>
+                  <a:srgbClr val="000000"/>
+                </a:solidFill>
+                <a:latin typeface="맑은 고딕"/>
+                <a:ea typeface="맑은 고딕"/>
+              </a:rPr>
+              <a:t> 두 단계로 나눈다. 확정할 때는 선택 대상의 유효성·소유 관계만 다시 확인한다. 금액은 고지한 값을 쓰며 다시 산정하지 않는다.</a:t>
+            </a:r>
+          </a:p>
+          <a:p>
+            <a:pPr lvl="2" marL="411480" indent="-137160">
+              <a:spcBef>
+                <a:spcPts val="300"/>
+              </a:spcBef>
+              <a:spcAft>
+                <a:spcPts val="300"/>
+              </a:spcAft>
+              <a:buSzPct val="90000"/>
+              <a:buFont typeface="Wingdings" pitchFamily="2" charset="2"/>
+              <a:buChar char=""/>
+            </a:pPr>
+            <a:r>
+              <a:rPr sz="1000" b="1">
+                <a:solidFill>
+                  <a:srgbClr val="000000"/>
+                </a:solidFill>
+                <a:latin typeface="맑은 고딕"/>
+                <a:ea typeface="맑은 고딕"/>
+              </a:rPr>
+              <a:t>결제:</a:t>
+            </a:r>
+            <a:r>
+              <a:rPr sz="1000" b="0">
+                <a:solidFill>
+                  <a:srgbClr val="000000"/>
+                </a:solidFill>
+                <a:latin typeface="맑은 고딕"/>
+                <a:ea typeface="맑은 고딕"/>
+              </a:rPr>
+              <a:t> 신청할 때는 첫 회차만 결제한다. 7회분 일시불은 없다. 이후 회차의 결제 예정일은 고지만 하고 결제하지 않는다.</a:t>
             </a:r>
           </a:p>
         </p:txBody>
@@ -15233,7 +15703,7 @@
         <p:spPr>
           <a:xfrm>
             <a:off x="233172" y="960120"/>
-            <a:ext cx="8778240" cy="656244"/>
+            <a:ext cx="8778240" cy="443936"/>
           </a:xfrm>
         </p:spPr>
         <p:txBody>
@@ -15242,7 +15712,7 @@
           </a:bodyPr>
           <a:lstStyle/>
           <a:p>
-            <a:pPr marL="0" indent="0">
+            <a:pPr marL="182880" indent="0">
               <a:spcBef>
                 <a:spcPts val="300"/>
               </a:spcBef>
@@ -15252,34 +15722,14 @@
               <a:buNone/>
             </a:pPr>
             <a:r>
-              <a:rPr sz="1400" b="0">
-                <a:solidFill>
-                  <a:srgbClr val="000000"/>
-                </a:solidFill>
-                <a:latin typeface="맑은 고딕"/>
-                <a:ea typeface="맑은 고딕"/>
-              </a:rPr>
-              <a:t>고객은 생필품을 정해진 주기로 받기 위해 </a:t>
-            </a:r>
-            <a:r>
-              <a:rPr sz="1400" b="1">
-                <a:solidFill>
-                  <a:srgbClr val="000000"/>
-                </a:solidFill>
-                <a:latin typeface="맑은 고딕"/>
-                <a:ea typeface="맑은 고딕"/>
-              </a:rPr>
-              <a:t>정기배송을 신청하고 일시불로 결제하고 싶다</a:t>
-            </a:r>
-            <a:r>
-              <a:rPr sz="1400" b="0">
-                <a:solidFill>
-                  <a:srgbClr val="000000"/>
-                </a:solidFill>
-                <a:latin typeface="맑은 고딕"/>
-                <a:ea typeface="맑은 고딕"/>
-              </a:rPr>
-              <a:t>. 이번 작업은 대역 환경에서 신청·금액 계산·결제·회차 생성을 구현한다.</a:t>
+              <a:rPr sz="1000" b="0">
+                <a:solidFill>
+                  <a:srgbClr val="000000"/>
+                </a:solidFill>
+                <a:latin typeface="맑은 고딕"/>
+                <a:ea typeface="맑은 고딕"/>
+              </a:rPr>
+              <a:t>업무 규칙·날짜 계산·상태 전이는 앞 산출물을 따른다. 이 문서에는 이번 작업에 필요한 결정만 적는다.</a:t>
             </a:r>
           </a:p>
         </p:txBody>
@@ -15302,8 +15752,8 @@
         </p:nvSpPr>
         <p:spPr>
           <a:xfrm>
-            <a:off x="4572000" y="1616364"/>
-            <a:ext cx="4439412" cy="4696101"/>
+            <a:off x="4572000" y="1404056"/>
+            <a:ext cx="4439412" cy="4908409"/>
           </a:xfrm>
         </p:spPr>
         <p:txBody>
@@ -15312,7 +15762,7 @@
           </a:bodyPr>
           <a:lstStyle/>
           <a:p>
-            <a:pPr lvl="2" marL="228600" indent="-182880">
+            <a:pPr lvl="2" marL="411480" indent="-137160">
               <a:spcBef>
                 <a:spcPts val="300"/>
               </a:spcBef>
@@ -15324,18 +15774,28 @@
               <a:buChar char=""/>
             </a:pPr>
             <a:r>
-              <a:rPr sz="1400" b="1">
-                <a:solidFill>
-                  <a:srgbClr val="000000"/>
-                </a:solidFill>
-                <a:latin typeface="맑은 고딕"/>
-                <a:ea typeface="맑은 고딕"/>
-              </a:rPr>
-              <a:t>범위와 제외</a:t>
-            </a:r>
-          </a:p>
-          <a:p>
-            <a:pPr lvl="2" marL="228600" indent="-182880">
+              <a:rPr sz="1000" b="1">
+                <a:solidFill>
+                  <a:srgbClr val="000000"/>
+                </a:solidFill>
+                <a:latin typeface="맑은 고딕"/>
+                <a:ea typeface="맑은 고딕"/>
+              </a:rPr>
+              <a:t>결과:</a:t>
+            </a:r>
+            <a:r>
+              <a:rPr sz="1000" b="0">
+                <a:solidFill>
+                  <a:srgbClr val="000000"/>
+                </a:solidFill>
+                <a:latin typeface="맑은 고딕"/>
+                <a:ea typeface="맑은 고딕"/>
+              </a:rPr>
+              <a:t> 성공이 확인되면 고지한 일정·금액으로 계약 1건이 성립한다. 실패가 확정되면 계약을 만들지 않는다. 결과를 확인할 수 없거나 저장 전에 중단되면 결과 확인 필요로 안내한다.</a:t>
+            </a:r>
+          </a:p>
+          <a:p>
+            <a:pPr lvl="2" marL="411480" indent="-137160">
               <a:spcBef>
                 <a:spcPts val="300"/>
               </a:spcBef>
@@ -15347,38 +15807,28 @@
               <a:buChar char=""/>
             </a:pPr>
             <a:r>
-              <a:rPr sz="1400" b="1">
-                <a:solidFill>
-                  <a:srgbClr val="000000"/>
-                </a:solidFill>
-                <a:latin typeface="맑은 고딕"/>
-                <a:ea typeface="맑은 고딕"/>
-              </a:rPr>
-              <a:t>포함</a:t>
-            </a:r>
-            <a:r>
-              <a:rPr sz="1400" b="0">
-                <a:solidFill>
-                  <a:srgbClr val="000000"/>
-                </a:solidFill>
-                <a:latin typeface="맑은 고딕"/>
-                <a:ea typeface="맑은 고딕"/>
-              </a:rPr>
-              <a:t> —</a:t>
-            </a:r>
-            <a:r>
-              <a:rPr sz="1200" b="0">
-                <a:solidFill>
-                  <a:srgbClr val="000000"/>
-                </a:solidFill>
-                <a:latin typeface="맑은 고딕"/>
-                <a:ea typeface="맑은 고딕"/>
-              </a:rPr>
-              <a:t> 신청, 단가 확정, 예정일·금액 계산, 승인·거절, 재결제, 회차 생성.</a:t>
-            </a:r>
-          </a:p>
-          <a:p>
-            <a:pPr lvl="2" marL="228600" indent="-182880">
+              <a:rPr sz="1000" b="1">
+                <a:solidFill>
+                  <a:srgbClr val="000000"/>
+                </a:solidFill>
+                <a:latin typeface="맑은 고딕"/>
+                <a:ea typeface="맑은 고딕"/>
+              </a:rPr>
+              <a:t>동일 신청:</a:t>
+            </a:r>
+            <a:r>
+              <a:rPr sz="1000" b="0">
+                <a:solidFill>
+                  <a:srgbClr val="000000"/>
+                </a:solidFill>
+                <a:latin typeface="맑은 고딕"/>
+                <a:ea typeface="맑은 고딕"/>
+              </a:rPr>
+              <a:t> 신청 업무가 신청 식별자를 만들어 신청 저장 포트로 저장한다. 결제 시작 전이에 성공한 요청 하나만 결제를 부른다.</a:t>
+            </a:r>
+          </a:p>
+          <a:p>
+            <a:pPr lvl="2" marL="411480" indent="-137160">
               <a:spcBef>
                 <a:spcPts val="300"/>
               </a:spcBef>
@@ -15390,38 +15840,49 @@
               <a:buChar char=""/>
             </a:pPr>
             <a:r>
-              <a:rPr sz="1400" b="1">
-                <a:solidFill>
-                  <a:srgbClr val="000000"/>
-                </a:solidFill>
-                <a:latin typeface="맑은 고딕"/>
-                <a:ea typeface="맑은 고딕"/>
-              </a:rPr>
-              <a:t>제외</a:t>
-            </a:r>
-            <a:r>
-              <a:rPr sz="1400" b="0">
-                <a:solidFill>
-                  <a:srgbClr val="000000"/>
-                </a:solidFill>
-                <a:latin typeface="맑은 고딕"/>
-                <a:ea typeface="맑은 고딕"/>
-              </a:rPr>
-              <a:t> —</a:t>
-            </a:r>
-            <a:r>
-              <a:rPr sz="1200" b="0">
-                <a:solidFill>
-                  <a:srgbClr val="000000"/>
-                </a:solidFill>
-                <a:latin typeface="맑은 고딕"/>
-                <a:ea typeface="맑은 고딕"/>
-              </a:rPr>
-              <a:t> 실제 외부 API 연결, 월별 청구, 배송지 변경, 해지·환불, 다음 약정 가격 정책.</a:t>
-            </a:r>
-          </a:p>
-          <a:p>
-            <a:pPr lvl="2" marL="228600" indent="-182880">
+              <a:rPr sz="1000" b="1">
+                <a:solidFill>
+                  <a:srgbClr val="000000"/>
+                </a:solidFill>
+                <a:latin typeface="맑은 고딕"/>
+                <a:ea typeface="맑은 고딕"/>
+              </a:rPr>
+              <a:t>접근:</a:t>
+            </a:r>
+            <a:r>
+              <a:rPr sz="1000" b="0">
+                <a:solidFill>
+                  <a:srgbClr val="000000"/>
+                </a:solidFill>
+                <a:latin typeface="맑은 고딕"/>
+                <a:ea typeface="맑은 고딕"/>
+              </a:rPr>
+              <a:t> 회원은 본인의 배송지·결제수단·신청만 쓴다. 표시 형식은 기존 쇼핑몰 형식을 따른다.</a:t>
+            </a:r>
+          </a:p>
+          <a:p>
+            <a:pPr marL="322580" indent="-139700">
+              <a:spcBef>
+                <a:spcPts val="300"/>
+              </a:spcBef>
+              <a:spcAft>
+                <a:spcPts val="300"/>
+              </a:spcAft>
+              <a:buNone/>
+            </a:pPr>
+            <a:r>
+              <a:rPr sz="1000" b="1">
+                <a:solidFill>
+                  <a:srgbClr val="000000"/>
+                </a:solidFill>
+                <a:latin typeface="맑은 고딕"/>
+                <a:ea typeface="맑은 고딕"/>
+              </a:rPr>
+              <a:t>3. 범위와 제외</a:t>
+            </a:r>
+          </a:p>
+          <a:p>
+            <a:pPr lvl="2" marL="411480" indent="-137160">
               <a:spcBef>
                 <a:spcPts val="300"/>
               </a:spcBef>
@@ -15433,17 +15894,17 @@
               <a:buChar char=""/>
             </a:pPr>
             <a:r>
-              <a:rPr sz="1400" b="1">
-                <a:solidFill>
-                  <a:srgbClr val="000000"/>
-                </a:solidFill>
-                <a:latin typeface="맑은 고딕"/>
-                <a:ea typeface="맑은 고딕"/>
-              </a:rPr>
-              <a:t>미정</a:t>
-            </a:r>
-            <a:r>
-              <a:rPr sz="1400" b="0">
+              <a:rPr sz="1000" b="1">
+                <a:solidFill>
+                  <a:srgbClr val="000000"/>
+                </a:solidFill>
+                <a:latin typeface="맑은 고딕"/>
+                <a:ea typeface="맑은 고딕"/>
+              </a:rPr>
+              <a:t>범위</a:t>
+            </a:r>
+            <a:r>
+              <a:rPr sz="1000" b="0">
                 <a:solidFill>
                   <a:srgbClr val="000000"/>
                 </a:solidFill>
@@ -15453,18 +15914,18 @@
               <a:t> —</a:t>
             </a:r>
             <a:r>
-              <a:rPr sz="1200" b="0">
-                <a:solidFill>
-                  <a:srgbClr val="000000"/>
-                </a:solidFill>
-                <a:latin typeface="맑은 고딕"/>
-                <a:ea typeface="맑은 고딕"/>
-              </a:rPr>
-              <a:t> 통신 오류·중복 결제 결과·배송 접수 실패의 업무 처리. 담당자는 업무·연동 담당자이며 실제 연동 구현 전에 확정한다.</a:t>
-            </a:r>
-          </a:p>
-          <a:p>
-            <a:pPr lvl="2" marL="228600" indent="-182880">
+              <a:rPr sz="1000" b="0">
+                <a:solidFill>
+                  <a:srgbClr val="000000"/>
+                </a:solidFill>
+                <a:latin typeface="맑은 고딕"/>
+                <a:ea typeface="맑은 고딕"/>
+              </a:rPr>
+              <a:t> 신청 시작과 선택 검증 · 일정·금액 산정과 고지 정보 산출 · 확정 시 재확인과 첫 회차 결제 · 성공·실패·결과 확인 필요 처리와 저장 · 동일 신청 반복 전달에 대한 응답 · 결과 반영 업무 진입점의 자리</a:t>
+            </a:r>
+          </a:p>
+          <a:p>
+            <a:pPr lvl="2" marL="411480" indent="-137160">
               <a:spcBef>
                 <a:spcPts val="300"/>
               </a:spcBef>
@@ -15476,40 +15937,17 @@
               <a:buChar char=""/>
             </a:pPr>
             <a:r>
-              <a:rPr sz="1400" b="1">
-                <a:solidFill>
-                  <a:srgbClr val="000000"/>
-                </a:solidFill>
-                <a:latin typeface="맑은 고딕"/>
-                <a:ea typeface="맑은 고딕"/>
-              </a:rPr>
-              <a:t>참조·완료 조건</a:t>
-            </a:r>
-          </a:p>
-          <a:p>
-            <a:pPr lvl="2" marL="228600" indent="-182880">
-              <a:spcBef>
-                <a:spcPts val="300"/>
-              </a:spcBef>
-              <a:spcAft>
-                <a:spcPts val="300"/>
-              </a:spcAft>
-              <a:buSzPct val="90000"/>
-              <a:buFont typeface="Wingdings" pitchFamily="2" charset="2"/>
-              <a:buChar char=""/>
-            </a:pPr>
-            <a:r>
-              <a:rPr sz="1400" b="1">
-                <a:solidFill>
-                  <a:srgbClr val="000000"/>
-                </a:solidFill>
-                <a:latin typeface="맑은 고딕"/>
-                <a:ea typeface="맑은 고딕"/>
-              </a:rPr>
-              <a:t>참조</a:t>
-            </a:r>
-            <a:r>
-              <a:rPr sz="1400" b="0">
+              <a:rPr sz="1000" b="1">
+                <a:solidFill>
+                  <a:srgbClr val="000000"/>
+                </a:solidFill>
+                <a:latin typeface="맑은 고딕"/>
+                <a:ea typeface="맑은 고딕"/>
+              </a:rPr>
+              <a:t>제외</a:t>
+            </a:r>
+            <a:r>
+              <a:rPr sz="1000" b="0">
                 <a:solidFill>
                   <a:srgbClr val="000000"/>
                 </a:solidFill>
@@ -15519,57 +15957,34 @@
               <a:t> —</a:t>
             </a:r>
             <a:r>
-              <a:rPr sz="1200" b="0">
-                <a:solidFill>
-                  <a:srgbClr val="000000"/>
-                </a:solidFill>
-                <a:latin typeface="맑은 고딕"/>
-                <a:ea typeface="맑은 고딕"/>
-              </a:rPr>
-              <a:t> 실습 2 정의서, 실습 3의 용어·상태·회차 관계, 실습 4의 포트와 의존 규칙.</a:t>
-            </a:r>
-          </a:p>
-          <a:p>
-            <a:pPr lvl="2" marL="228600" indent="-182880">
-              <a:spcBef>
-                <a:spcPts val="300"/>
-              </a:spcBef>
-              <a:spcAft>
-                <a:spcPts val="300"/>
-              </a:spcAft>
-              <a:buSzPct val="90000"/>
-              <a:buFont typeface="Wingdings" pitchFamily="2" charset="2"/>
-              <a:buChar char=""/>
-            </a:pPr>
-            <a:r>
-              <a:rPr sz="1400" b="1">
-                <a:solidFill>
-                  <a:srgbClr val="000000"/>
-                </a:solidFill>
-                <a:latin typeface="맑은 고딕"/>
-                <a:ea typeface="맑은 고딕"/>
-              </a:rPr>
-              <a:t>완료</a:t>
-            </a:r>
-            <a:r>
-              <a:rPr sz="1400" b="0">
-                <a:solidFill>
-                  <a:srgbClr val="000000"/>
-                </a:solidFill>
-                <a:latin typeface="맑은 고딕"/>
-                <a:ea typeface="맑은 고딕"/>
-              </a:rPr>
-              <a:t> —</a:t>
-            </a:r>
-            <a:r>
-              <a:rPr sz="1200" b="0">
-                <a:solidFill>
-                  <a:srgbClr val="000000"/>
-                </a:solidFill>
-                <a:latin typeface="맑은 고딕"/>
-                <a:ea typeface="맑은 고딕"/>
-              </a:rPr>
-              <a:t> 아래 수용 예 4개와 각 작업의 검사가 통과하고, 업무가 연동·영속 구현을 의존하지 않는다.</a:t>
+              <a:rPr sz="1000" b="0">
+                <a:solidFill>
+                  <a:srgbClr val="000000"/>
+                </a:solidFill>
+                <a:latin typeface="맑은 고딕"/>
+                <a:ea typeface="맑은 고딕"/>
+              </a:rPr>
+              <a:t> 이후 회차의 실제 결제, 주문 생성·배송 운영, 첫 회차와 일반 주문의 연결 · 계약 변경·해지·자동 갱신, 배송 불가일 조정 · 실패가 확정된 같은 신청의 재결제 경로</a:t>
+            </a:r>
+            <a:r>
+              <a:rPr sz="1000" b="0">
+                <a:solidFill>
+                  <a:srgbClr val="000000"/>
+                </a:solidFill>
+                <a:latin typeface="맑은 고딕"/>
+                <a:ea typeface="맑은 고딕"/>
+              </a:rPr>
+              <a:t>(재신청은 별개의 신규 신청으로 시작)</a:t>
+            </a:r>
+            <a:r>
+              <a:rPr sz="1000" b="0">
+                <a:solidFill>
+                  <a:srgbClr val="000000"/>
+                </a:solidFill>
+                <a:latin typeface="맑은 고딕"/>
+                <a:ea typeface="맑은 고딕"/>
+              </a:rPr>
+              <a:t> · 결과 확인을 시작하는 콜백·폴링·재시도와 복구 운영 · 진입부 요청 형태, 새 보존·마스킹 정책, 별도 서비스·인프라</a:t>
             </a:r>
           </a:p>
         </p:txBody>
@@ -15639,17 +16054,7 @@
                 <a:latin typeface="맑은 고딕"/>
                 <a:ea typeface="맑은 고딕"/>
               </a:rPr>
-              <a:t>금액 보존과 승인 예 </a:t>
-            </a:r>
-            <a:r>
-              <a:rPr sz="1800" b="1">
-                <a:solidFill>
-                  <a:srgbClr val="000000"/>
-                </a:solidFill>
-                <a:latin typeface="맑은 고딕"/>
-                <a:ea typeface="맑은 고딕"/>
-              </a:rPr>
-              <a:t>(안)</a:t>
+              <a:t>고지와 선택 확인의 수용 예</a:t>
             </a:r>
           </a:p>
           <a:p>
@@ -15793,8 +16198,8 @@
         </p:nvSpPr>
         <p:spPr>
           <a:xfrm>
-            <a:off x="365760" y="1842998"/>
-            <a:ext cx="8412480" cy="1320800"/>
+            <a:off x="365760" y="2754313"/>
+            <a:ext cx="8412480" cy="1651000"/>
           </a:xfrm>
           <a:prstGeom prst="rect">
             <a:avLst/>
@@ -15827,7 +16232,7 @@
                 <a:latin typeface="Consolas"/>
                 <a:ea typeface="맑은 고딕"/>
               </a:rPr>
-              <a:t>Scenario: 신청 후 판매가가 바뀌어도 확정 금액으로 결제한다</a:t>
+              <a:t>Scenario: 예 1. 대표 조건 고지</a:t>
             </a:r>
           </a:p>
           <a:p>
@@ -15851,7 +16256,7 @@
                 <a:latin typeface="Consolas"/>
                 <a:ea typeface="맑은 고딕"/>
               </a:rPr>
-              <a:t>  Given 휴지 1묶음을 단가 10000원, 14일 주기, 11월 3일부터 3개월 신청했다</a:t>
+              <a:t>  Given 신청일 2027-10-28에 시작한 신청이 신청준비다</a:t>
             </a:r>
           </a:p>
           <a:p>
@@ -15875,7 +16280,7 @@
                 <a:latin typeface="Consolas"/>
                 <a:ea typeface="맑은 고딕"/>
               </a:rPr>
-              <a:t>    And 만료일은 2월 2일이며 기간 내 예정일은 7개다</a:t>
+              <a:t>    And 휴지 1묶음 1개, 첫 배송일 2027-11-03, 계약기간 3개월, 배송 주기 2주를 선택했다</a:t>
             </a:r>
           </a:p>
           <a:p>
@@ -15899,7 +16304,7 @@
                 <a:latin typeface="Consolas"/>
                 <a:ea typeface="맑은 고딕"/>
               </a:rPr>
-              <a:t>    And 신청 후 상품의 판매가가 변경되었다</a:t>
+              <a:t>    And 선택 대상이 모두 유효하고 본인 소유이며 기존 정책 금액은 10,000원이다</a:t>
             </a:r>
           </a:p>
           <a:p>
@@ -15923,7 +16328,7 @@
                 <a:latin typeface="Consolas"/>
                 <a:ea typeface="맑은 고딕"/>
               </a:rPr>
-              <a:t>  When 신청을 일시불로 결제한다</a:t>
+              <a:t>  When 회원이 고지 정보를 요청한다</a:t>
             </a:r>
           </a:p>
           <a:p>
@@ -15947,7 +16352,7 @@
                 <a:latin typeface="Consolas"/>
                 <a:ea typeface="맑은 고딕"/>
               </a:rPr>
-              <a:t>  Then 승인 요청 금액은 70000원이다</a:t>
+              <a:t>  Then 계약 종료일 2028-02-03(제외)과 예정 회차 7개가 고지된다</a:t>
             </a:r>
           </a:p>
           <a:p>
@@ -15971,7 +16376,55 @@
                 <a:latin typeface="Consolas"/>
                 <a:ea typeface="맑은 고딕"/>
               </a:rPr>
-              <a:t>    And 해당 약정의 회차 금액은 10000원이다</a:t>
+              <a:t>    And 회차 결제금액 10,000원, 신청 시 결제할 금액은 첫 회차 10,000원으로 고지된다</a:t>
+            </a:r>
+          </a:p>
+          <a:p>
+            <a:pPr marL="0" indent="0" algn="l">
+              <a:lnSpc>
+                <a:spcPts val="1150"/>
+              </a:lnSpc>
+              <a:spcBef>
+                <a:spcPts val="0"/>
+              </a:spcBef>
+              <a:spcAft>
+                <a:spcPts val="0"/>
+              </a:spcAft>
+              <a:buNone/>
+            </a:pPr>
+            <a:r>
+              <a:rPr sz="1000" b="0">
+                <a:solidFill>
+                  <a:srgbClr val="000000"/>
+                </a:solidFill>
+                <a:latin typeface="Consolas"/>
+                <a:ea typeface="맑은 고딕"/>
+              </a:rPr>
+              <a:t>    And 상태는 신청준비이고 계약 0건, 결제 요청 0회, 금액 산정 1회다</a:t>
+            </a:r>
+          </a:p>
+          <a:p>
+            <a:pPr marL="0" indent="0" algn="l">
+              <a:lnSpc>
+                <a:spcPts val="1150"/>
+              </a:lnSpc>
+              <a:spcBef>
+                <a:spcPts val="0"/>
+              </a:spcBef>
+              <a:spcAft>
+                <a:spcPts val="0"/>
+              </a:spcAft>
+              <a:buNone/>
+            </a:pPr>
+            <a:r>
+              <a:rPr sz="1000" b="0">
+                <a:solidFill>
+                  <a:srgbClr val="000000"/>
+                </a:solidFill>
+                <a:latin typeface="Consolas"/>
+                <a:ea typeface="맑은 고딕"/>
+              </a:rPr>
+              <a:t>    But 7회분 합계 청구나 고지 단계의 결제·계약이 있어서는 안 된다</a:t>
             </a:r>
           </a:p>
         </p:txBody>
@@ -15995,7 +16448,7 @@
         <p:spPr>
           <a:xfrm>
             <a:off x="365760" y="960120"/>
-            <a:ext cx="8412480" cy="781278"/>
+            <a:ext cx="8412480" cy="1692593"/>
           </a:xfrm>
         </p:spPr>
         <p:txBody>
@@ -16021,7 +16474,7 @@
                 <a:latin typeface="맑은 고딕"/>
                 <a:ea typeface="맑은 고딕"/>
               </a:rPr>
-              <a:t>신청 시 단가 보존과 승인 후 회차 생성</a:t>
+              <a:t>고지 단계</a:t>
             </a:r>
             <a:r>
               <a:rPr sz="1800" b="0">
@@ -16031,7 +16484,50 @@
                 <a:latin typeface="맑은 고딕"/>
                 <a:ea typeface="맑은 고딕"/>
               </a:rPr>
-              <a:t>을 다음 두 시나리오로 수용한다. 금액 계산을 위한 예정일 산정은 회차 생성과 구분한다.</a:t>
+              <a:t>에서는 일정과 금액을 확정해 보이되 계약과 결제는 아직 0이다. 부적합한 선택은 금액 산정까지 가지 않는다.</a:t>
+            </a:r>
+          </a:p>
+          <a:p>
+            <a:pPr lvl="2" marL="723900" indent="-368300">
+              <a:spcBef>
+                <a:spcPts val="600"/>
+              </a:spcBef>
+              <a:spcAft>
+                <a:spcPts val="600"/>
+              </a:spcAft>
+              <a:buSzPct val="90000"/>
+              <a:buFont typeface="Wingdings" pitchFamily="2" charset="2"/>
+              <a:buChar char=""/>
+            </a:pPr>
+            <a:r>
+              <a:rPr sz="1800" b="0">
+                <a:solidFill>
+                  <a:srgbClr val="000000"/>
+                </a:solidFill>
+                <a:latin typeface="맑은 고딕"/>
+                <a:ea typeface="맑은 고딕"/>
+              </a:rPr>
+              <a:t>각 예는 독립된 신청 절차에서 시작한다. 횟수는 그 예 안에서 </a:t>
+            </a:r>
+            <a:r>
+              <a:rPr sz="1800" b="1">
+                <a:solidFill>
+                  <a:srgbClr val="000000"/>
+                </a:solidFill>
+                <a:latin typeface="맑은 고딕"/>
+                <a:ea typeface="맑은 고딕"/>
+              </a:rPr>
+              <a:t>포트 대역</a:t>
+            </a:r>
+            <a:r>
+              <a:rPr sz="1800" b="0">
+                <a:solidFill>
+                  <a:srgbClr val="000000"/>
+                </a:solidFill>
+                <a:latin typeface="맑은 고딕"/>
+                <a:ea typeface="맑은 고딕"/>
+              </a:rPr>
+              <a:t>으로 센 누적값이다. 첫 결제 포트 대역은 결제 요청과 결과 확인을 따로 센다.</a:t>
             </a:r>
           </a:p>
         </p:txBody>
@@ -16050,7 +16546,7 @@
         </p:nvSpPr>
         <p:spPr>
           <a:xfrm>
-            <a:off x="365760" y="3273526"/>
+            <a:off x="365760" y="4515041"/>
             <a:ext cx="8412480" cy="1320800"/>
           </a:xfrm>
           <a:prstGeom prst="rect">
@@ -16084,7 +16580,7 @@
                 <a:latin typeface="Consolas"/>
                 <a:ea typeface="맑은 고딕"/>
               </a:rPr>
-              <a:t>Scenario: 승인되면 정기배송을 확정하고 예정 회차를 만든다</a:t>
+              <a:t>Scenario: 예 2. 본인 소유가 아닌 배송지</a:t>
             </a:r>
           </a:p>
           <a:p>
@@ -16108,7 +16604,7 @@
                 <a:latin typeface="Consolas"/>
                 <a:ea typeface="맑은 고딕"/>
               </a:rPr>
-              <a:t>  Given 휴지 1묶음, 단가 10000원, 14일 주기, 첫 배송 11/3, 만료 2/2의 신청</a:t>
+              <a:t>  Given 대표 값으로 시작한 신청이 신청준비다</a:t>
             </a:r>
           </a:p>
           <a:p>
@@ -16132,7 +16628,7 @@
                 <a:latin typeface="Consolas"/>
                 <a:ea typeface="맑은 고딕"/>
               </a:rPr>
-              <a:t>    And 결제 대기이며 회차는 0개다</a:t>
+              <a:t>    And 선택한 등록 배송지가 다른 회원 소유다</a:t>
             </a:r>
           </a:p>
           <a:p>
@@ -16156,7 +16652,7 @@
                 <a:latin typeface="Consolas"/>
                 <a:ea typeface="맑은 고딕"/>
               </a:rPr>
-              <a:t>  When 70000원 결제가 승인된다</a:t>
+              <a:t>  When 회원이 고지 정보를 요청한다</a:t>
             </a:r>
           </a:p>
           <a:p>
@@ -16180,7 +16676,7 @@
                 <a:latin typeface="Consolas"/>
                 <a:ea typeface="맑은 고딕"/>
               </a:rPr>
-              <a:t>  Then 정기배송은 확정이다</a:t>
+              <a:t>  Then 선택 내용 확인 요청을 안내하고 상태는 신청준비로 유지된다</a:t>
             </a:r>
           </a:p>
           <a:p>
@@ -16204,7 +16700,7 @@
                 <a:latin typeface="Consolas"/>
                 <a:ea typeface="맑은 고딕"/>
               </a:rPr>
-              <a:t>    And 예정 회차는 11/3, 11/17, 12/1, 12/15, 12/29, 1/12, 1/26의 7개다</a:t>
+              <a:t>    And 계약 0건, 결제 요청 0회, 금액 산정 0회다</a:t>
             </a:r>
           </a:p>
           <a:p>
@@ -16228,7 +16724,7 @@
                 <a:latin typeface="Consolas"/>
                 <a:ea typeface="맑은 고딕"/>
               </a:rPr>
-              <a:t>    And 각 회차 금액은 10000원이며 2월 9일 회차는 없다</a:t>
+              <a:t>    But 고지 정보 산출이나 결제가 진행되어서는 안 된다</a:t>
             </a:r>
           </a:p>
         </p:txBody>
@@ -16298,17 +16794,7 @@
                 <a:latin typeface="맑은 고딕"/>
                 <a:ea typeface="맑은 고딕"/>
               </a:rPr>
-              <a:t>거절과 재결제 예 </a:t>
-            </a:r>
-            <a:r>
-              <a:rPr sz="1800" b="1">
-                <a:solidFill>
-                  <a:srgbClr val="000000"/>
-                </a:solidFill>
-                <a:latin typeface="맑은 고딕"/>
-                <a:ea typeface="맑은 고딕"/>
-              </a:rPr>
-              <a:t>(안)</a:t>
+              <a:t>결제 결과의 수용 예</a:t>
             </a:r>
           </a:p>
           <a:p>
@@ -16453,7 +16939,7 @@
         <p:spPr>
           <a:xfrm>
             <a:off x="365760" y="1842998"/>
-            <a:ext cx="8412480" cy="990600"/>
+            <a:ext cx="8412480" cy="1651000"/>
           </a:xfrm>
           <a:prstGeom prst="rect">
             <a:avLst/>
@@ -16486,7 +16972,7 @@
                 <a:latin typeface="Consolas"/>
                 <a:ea typeface="맑은 고딕"/>
               </a:rPr>
-              <a:t>Scenario: 결제가 거절되면 신청을 유지하고 회차를 만들지 않는다</a:t>
+              <a:t>Scenario: 예 3. 첫 결제 성공 확정</a:t>
             </a:r>
           </a:p>
           <a:p>
@@ -16510,7 +16996,7 @@
                 <a:latin typeface="Consolas"/>
                 <a:ea typeface="맑은 고딕"/>
               </a:rPr>
-              <a:t>  Given 휴지 1묶음, 회차 10000원, 7회, 일시불 70000원의 결제 대기 신청</a:t>
+              <a:t>  Given 대표 값으로 고지를 받고 확인한 신청이 신청준비다</a:t>
             </a:r>
           </a:p>
           <a:p>
@@ -16534,7 +17020,7 @@
                 <a:latin typeface="Consolas"/>
                 <a:ea typeface="맑은 고딕"/>
               </a:rPr>
-              <a:t>    And 카드 X는 거절된다</a:t>
+              <a:t>    And 확정 시 선택 대상이 유효하고 본인 소유다</a:t>
             </a:r>
           </a:p>
           <a:p>
@@ -16558,7 +17044,7 @@
                 <a:latin typeface="Consolas"/>
                 <a:ea typeface="맑은 고딕"/>
               </a:rPr>
-              <a:t>  When 카드 X로 결제한다</a:t>
+              <a:t>    And 첫 결제 결과는 성공 확정이다</a:t>
             </a:r>
           </a:p>
           <a:p>
@@ -16582,7 +17068,103 @@
                 <a:latin typeface="Consolas"/>
                 <a:ea typeface="맑은 고딕"/>
               </a:rPr>
-              <a:t>  Then 같은 신청은 결제 대기이며 회차는 0개다</a:t>
+              <a:t>  When 회원이 신청을 확정한다</a:t>
+            </a:r>
+          </a:p>
+          <a:p>
+            <a:pPr marL="0" indent="0" algn="l">
+              <a:lnSpc>
+                <a:spcPts val="1150"/>
+              </a:lnSpc>
+              <a:spcBef>
+                <a:spcPts val="0"/>
+              </a:spcBef>
+              <a:spcAft>
+                <a:spcPts val="0"/>
+              </a:spcAft>
+              <a:buNone/>
+            </a:pPr>
+            <a:r>
+              <a:rPr sz="1000" b="0">
+                <a:solidFill>
+                  <a:srgbClr val="000000"/>
+                </a:solidFill>
+                <a:latin typeface="Consolas"/>
+                <a:ea typeface="맑은 고딕"/>
+              </a:rPr>
+              <a:t>  Then 신청 완료와 계약 성립을 안내하고 상태는 신청완료다</a:t>
+            </a:r>
+          </a:p>
+          <a:p>
+            <a:pPr marL="0" indent="0" algn="l">
+              <a:lnSpc>
+                <a:spcPts val="1150"/>
+              </a:lnSpc>
+              <a:spcBef>
+                <a:spcPts val="0"/>
+              </a:spcBef>
+              <a:spcAft>
+                <a:spcPts val="0"/>
+              </a:spcAft>
+              <a:buNone/>
+            </a:pPr>
+            <a:r>
+              <a:rPr sz="1000" b="0">
+                <a:solidFill>
+                  <a:srgbClr val="000000"/>
+                </a:solidFill>
+                <a:latin typeface="Consolas"/>
+                <a:ea typeface="맑은 고딕"/>
+              </a:rPr>
+              <a:t>    And 계약 1건에 종료일 2028-02-03, 예정 회차 7개, 회차 결제금액 10,000원이 확정된다</a:t>
+            </a:r>
+          </a:p>
+          <a:p>
+            <a:pPr marL="0" indent="0" algn="l">
+              <a:lnSpc>
+                <a:spcPts val="1150"/>
+              </a:lnSpc>
+              <a:spcBef>
+                <a:spcPts val="0"/>
+              </a:spcBef>
+              <a:spcAft>
+                <a:spcPts val="0"/>
+              </a:spcAft>
+              <a:buNone/>
+            </a:pPr>
+            <a:r>
+              <a:rPr sz="1000" b="0">
+                <a:solidFill>
+                  <a:srgbClr val="000000"/>
+                </a:solidFill>
+                <a:latin typeface="Consolas"/>
+                <a:ea typeface="맑은 고딕"/>
+              </a:rPr>
+              <a:t>    And 결제 요청 1회, 청구 금액 10,000원, 금액 산정 1회(고지 단계)다</a:t>
+            </a:r>
+          </a:p>
+          <a:p>
+            <a:pPr marL="0" indent="0" algn="l">
+              <a:lnSpc>
+                <a:spcPts val="1150"/>
+              </a:lnSpc>
+              <a:spcBef>
+                <a:spcPts val="0"/>
+              </a:spcBef>
+              <a:spcAft>
+                <a:spcPts val="0"/>
+              </a:spcAft>
+              <a:buNone/>
+            </a:pPr>
+            <a:r>
+              <a:rPr sz="1000" b="0">
+                <a:solidFill>
+                  <a:srgbClr val="000000"/>
+                </a:solidFill>
+                <a:latin typeface="Consolas"/>
+                <a:ea typeface="맑은 고딕"/>
+              </a:rPr>
+              <a:t>    But 확정 시 재산정, 계약 2건 이상, 7회분 청구가 있어서는 안 된다</a:t>
             </a:r>
           </a:p>
         </p:txBody>
@@ -16625,6 +17207,16 @@
               <a:buNone/>
             </a:pPr>
             <a:r>
+              <a:rPr sz="1800" b="1">
+                <a:solidFill>
+                  <a:srgbClr val="000000"/>
+                </a:solidFill>
+                <a:latin typeface="맑은 고딕"/>
+                <a:ea typeface="맑은 고딕"/>
+              </a:rPr>
+              <a:t>같은 전제에서 결과만 갈린다.</a:t>
+            </a:r>
+            <a:r>
               <a:rPr sz="1800" b="0">
                 <a:solidFill>
                   <a:srgbClr val="000000"/>
@@ -16632,27 +17224,7 @@
                 <a:latin typeface="맑은 고딕"/>
                 <a:ea typeface="맑은 고딕"/>
               </a:rPr>
-              <a:t>거절 뒤 </a:t>
-            </a:r>
-            <a:r>
-              <a:rPr sz="1800" b="1">
-                <a:solidFill>
-                  <a:srgbClr val="000000"/>
-                </a:solidFill>
-                <a:latin typeface="맑은 고딕"/>
-                <a:ea typeface="맑은 고딕"/>
-              </a:rPr>
-              <a:t>같은 신청을 유지</a:t>
-            </a:r>
-            <a:r>
-              <a:rPr sz="1800" b="0">
-                <a:solidFill>
-                  <a:srgbClr val="000000"/>
-                </a:solidFill>
-                <a:latin typeface="맑은 고딕"/>
-                <a:ea typeface="맑은 고딕"/>
-              </a:rPr>
-              <a:t>하고, 다른 카드의 승인으로 확정한다. 거절만으로 회차를 만들거나 신청을 종료하지 않는다.</a:t>
+              <a:t> 성공이 확인되면 계약 1건이 생기고, 실패가 확정되면 0건이며 두 경우 모두 결제 요청은 1회다.</a:t>
             </a:r>
           </a:p>
         </p:txBody>
@@ -16671,7 +17243,7 @@
         </p:nvSpPr>
         <p:spPr>
           <a:xfrm>
-            <a:off x="365760" y="2943326"/>
+            <a:off x="365760" y="3603726"/>
             <a:ext cx="8412480" cy="1485900"/>
           </a:xfrm>
           <a:prstGeom prst="rect">
@@ -16705,7 +17277,7 @@
                 <a:latin typeface="Consolas"/>
                 <a:ea typeface="맑은 고딕"/>
               </a:rPr>
-              <a:t>Scenario: 다른 카드로 같은 신청을 재결제한다</a:t>
+              <a:t>Scenario: 예 4. 첫 결제 실패 확정</a:t>
             </a:r>
           </a:p>
           <a:p>
@@ -16729,7 +17301,7 @@
                 <a:latin typeface="Consolas"/>
                 <a:ea typeface="맑은 고딕"/>
               </a:rPr>
-              <a:t>  Given 휴지 1묶음, 회차 10000원, 7회, 일시불 70000원의 신청</a:t>
+              <a:t>  Given 대표 값으로 고지를 받고 확인한 신청이 신청준비다</a:t>
             </a:r>
           </a:p>
           <a:p>
@@ -16753,7 +17325,7 @@
                 <a:latin typeface="Consolas"/>
                 <a:ea typeface="맑은 고딕"/>
               </a:rPr>
-              <a:t>    And 카드 X 결제가 거절되었다</a:t>
+              <a:t>    And 확정 시 선택 대상이 유효하고 본인 소유다</a:t>
             </a:r>
           </a:p>
           <a:p>
@@ -16777,7 +17349,7 @@
                 <a:latin typeface="Consolas"/>
                 <a:ea typeface="맑은 고딕"/>
               </a:rPr>
-              <a:t>    And 같은 신청은 결제 대기이며 회차는 0개다</a:t>
+              <a:t>    And 첫 결제 결과는 실패 확정이다</a:t>
             </a:r>
           </a:p>
           <a:p>
@@ -16801,7 +17373,7 @@
                 <a:latin typeface="Consolas"/>
                 <a:ea typeface="맑은 고딕"/>
               </a:rPr>
-              <a:t>    And 카드 Y는 승인된다</a:t>
+              <a:t>  When 회원이 신청을 확정한다</a:t>
             </a:r>
           </a:p>
           <a:p>
@@ -16825,7 +17397,7 @@
                 <a:latin typeface="Consolas"/>
                 <a:ea typeface="맑은 고딕"/>
               </a:rPr>
-              <a:t>  When 카드 Y로 같은 신청을 결제한다</a:t>
+              <a:t>  Then 신청 미완료를 안내하고 상태는 신청미완료다</a:t>
             </a:r>
           </a:p>
           <a:p>
@@ -16849,7 +17421,7 @@
                 <a:latin typeface="Consolas"/>
                 <a:ea typeface="맑은 고딕"/>
               </a:rPr>
-              <a:t>  Then 요청 금액은 70000원이고 같은 신청은 확정이다</a:t>
+              <a:t>    And 계약 0건, 결제 요청 1회, 금액 산정 1회(고지 단계)다</a:t>
             </a:r>
           </a:p>
           <a:p>
@@ -16873,7 +17445,7 @@
                 <a:latin typeface="Consolas"/>
                 <a:ea typeface="맑은 고딕"/>
               </a:rPr>
-              <a:t>    And 해당 기간의 예정 회차는 모두 합해 7개이며 회차 금액은 10000원이다</a:t>
+              <a:t>    But 신청 완료나 결과 확인 필요로 안내해서는 안 된다</a:t>
             </a:r>
           </a:p>
         </p:txBody>
@@ -16899,7 +17471,7 @@
         <p:cNvPr id="1" name="">
           <a:extLst>
             <a:ext uri="{FF2B5EF4-FFF2-40B4-BE49-F238E27FC236}">
-              <a16:creationId xmlns:a16="http://schemas.microsoft.com/office/drawing/2014/main" id="{8E4F1F13-426B-086B-7D8C-9A58A0F879DB}"/>
+              <a16:creationId xmlns:a16="http://schemas.microsoft.com/office/drawing/2014/main" id="{3C88D352-71B8-E3E1-FEC2-7A4B3A634A78}"/>
             </a:ext>
           </a:extLst>
         </p:cNvPr>
@@ -16919,7 +17491,7 @@
           <p:cNvPr id="2" name="제목 1">
             <a:extLst>
               <a:ext uri="{FF2B5EF4-FFF2-40B4-BE49-F238E27FC236}">
-                <a16:creationId xmlns:a16="http://schemas.microsoft.com/office/drawing/2014/main" id="{AA26A92D-924E-0575-9551-F8FD7BFD3FAD}"/>
+                <a16:creationId xmlns:a16="http://schemas.microsoft.com/office/drawing/2014/main" id="{6B867C48-2A31-3C59-F9AC-29CD4F069980}"/>
               </a:ext>
             </a:extLst>
           </p:cNvPr>
@@ -16943,17 +17515,7 @@
                 <a:latin typeface="맑은 고딕"/>
                 <a:ea typeface="맑은 고딕"/>
               </a:rPr>
-              <a:t>작업 단위 </a:t>
-            </a:r>
-            <a:r>
-              <a:rPr sz="1800" b="1">
-                <a:solidFill>
-                  <a:srgbClr val="000000"/>
-                </a:solidFill>
-                <a:latin typeface="맑은 고딕"/>
-                <a:ea typeface="맑은 고딕"/>
-              </a:rPr>
-              <a:t>(안)</a:t>
+              <a:t>미확정과 반복 전달의 수용 예</a:t>
             </a:r>
           </a:p>
           <a:p>
@@ -16975,7 +17537,7 @@
           <p:cNvPr id="3" name="슬라이드 번호 개체 틀 2">
             <a:extLst>
               <a:ext uri="{FF2B5EF4-FFF2-40B4-BE49-F238E27FC236}">
-                <a16:creationId xmlns:a16="http://schemas.microsoft.com/office/drawing/2014/main" id="{12CF30EE-4DFD-8063-56B8-B8689E76DFCA}"/>
+                <a16:creationId xmlns:a16="http://schemas.microsoft.com/office/drawing/2014/main" id="{7DA43EF7-1D4A-ECB9-A1FF-518C60DE99E6}"/>
               </a:ext>
             </a:extLst>
           </p:cNvPr>
@@ -17010,7 +17572,7 @@
           <p:cNvPr id="5" name="텍스트 개체 틀 4">
             <a:extLst>
               <a:ext uri="{FF2B5EF4-FFF2-40B4-BE49-F238E27FC236}">
-                <a16:creationId xmlns:a16="http://schemas.microsoft.com/office/drawing/2014/main" id="{D66274C8-E16F-5AEB-614B-D8D32DA3E8C6}"/>
+                <a16:creationId xmlns:a16="http://schemas.microsoft.com/office/drawing/2014/main" id="{522E744E-3182-EA63-E315-5167A8F7E1A4}"/>
               </a:ext>
             </a:extLst>
           </p:cNvPr>
@@ -17038,7 +17600,7 @@
           <p:cNvPr id="6" name="텍스트 개체 틀 5">
             <a:extLst>
               <a:ext uri="{FF2B5EF4-FFF2-40B4-BE49-F238E27FC236}">
-                <a16:creationId xmlns:a16="http://schemas.microsoft.com/office/drawing/2014/main" id="{A24E58E1-194B-A320-AEEE-24D08685BB67}"/>
+                <a16:creationId xmlns:a16="http://schemas.microsoft.com/office/drawing/2014/main" id="{6C32D74B-A4F7-BB0E-1C8C-BE9287C820A2}"/>
               </a:ext>
             </a:extLst>
           </p:cNvPr>
@@ -17063,7 +17625,7 @@
           <p:cNvPr id="7" name="텍스트 개체 틀 6">
             <a:extLst>
               <a:ext uri="{FF2B5EF4-FFF2-40B4-BE49-F238E27FC236}">
-                <a16:creationId xmlns:a16="http://schemas.microsoft.com/office/drawing/2014/main" id="{A219F420-613B-6234-45F6-0955A9A4505F}"/>
+                <a16:creationId xmlns:a16="http://schemas.microsoft.com/office/drawing/2014/main" id="{BCF57505-7D66-BE60-56CA-086F6E979841}"/>
               </a:ext>
             </a:extLst>
           </p:cNvPr>
@@ -17085,7 +17647,228 @@
       </p:sp>
       <p:sp>
         <p:nvSpPr>
-          <p:cNvPr id="8" name="내용 개체 틀 7">
+          <p:cNvPr id="31" name="Integrated content 31">
+            <a:extLst>
+              <a:ext uri="{FF2B5EF4-FFF2-40B4-BE49-F238E27FC236}">
+                <a16:creationId xmlns:a16="http://schemas.microsoft.com/office/drawing/2014/main" id="{8E264927-DE01-A85F-AD3D-A49DD8EAC71A}"/>
+              </a:ext>
+            </a:extLst>
+          </p:cNvPr>
+          <p:cNvSpPr txBox="1"/>
+          <p:nvPr/>
+        </p:nvSpPr>
+        <p:spPr>
+          <a:xfrm>
+            <a:off x="365760" y="1842998"/>
+            <a:ext cx="8412480" cy="1485900"/>
+          </a:xfrm>
+          <a:prstGeom prst="rect">
+            <a:avLst/>
+          </a:prstGeom>
+          <a:noFill/>
+        </p:spPr>
+        <p:txBody>
+          <a:bodyPr wrap="square" lIns="91440" tIns="0" rIns="91440" bIns="0" anchor="t">
+            <a:noAutofit/>
+          </a:bodyPr>
+          <a:lstStyle/>
+          <a:p>
+            <a:pPr marL="0" indent="0" algn="l">
+              <a:lnSpc>
+                <a:spcPts val="1150"/>
+              </a:lnSpc>
+              <a:spcBef>
+                <a:spcPts val="0"/>
+              </a:spcBef>
+              <a:spcAft>
+                <a:spcPts val="0"/>
+              </a:spcAft>
+              <a:buNone/>
+            </a:pPr>
+            <a:r>
+              <a:rPr sz="1000" b="0">
+                <a:solidFill>
+                  <a:srgbClr val="000000"/>
+                </a:solidFill>
+                <a:latin typeface="Consolas"/>
+                <a:ea typeface="맑은 고딕"/>
+              </a:rPr>
+              <a:t>Scenario: 예 5. 결제 결과 확인 불가</a:t>
+            </a:r>
+          </a:p>
+          <a:p>
+            <a:pPr marL="0" indent="0" algn="l">
+              <a:lnSpc>
+                <a:spcPts val="1150"/>
+              </a:lnSpc>
+              <a:spcBef>
+                <a:spcPts val="0"/>
+              </a:spcBef>
+              <a:spcAft>
+                <a:spcPts val="0"/>
+              </a:spcAft>
+              <a:buNone/>
+            </a:pPr>
+            <a:r>
+              <a:rPr sz="1000" b="0">
+                <a:solidFill>
+                  <a:srgbClr val="000000"/>
+                </a:solidFill>
+                <a:latin typeface="Consolas"/>
+                <a:ea typeface="맑은 고딕"/>
+              </a:rPr>
+              <a:t>  Given 대표 값으로 고지를 받고 확인한 신청이 신청준비다</a:t>
+            </a:r>
+          </a:p>
+          <a:p>
+            <a:pPr marL="0" indent="0" algn="l">
+              <a:lnSpc>
+                <a:spcPts val="1150"/>
+              </a:lnSpc>
+              <a:spcBef>
+                <a:spcPts val="0"/>
+              </a:spcBef>
+              <a:spcAft>
+                <a:spcPts val="0"/>
+              </a:spcAft>
+              <a:buNone/>
+            </a:pPr>
+            <a:r>
+              <a:rPr sz="1000" b="0">
+                <a:solidFill>
+                  <a:srgbClr val="000000"/>
+                </a:solidFill>
+                <a:latin typeface="Consolas"/>
+                <a:ea typeface="맑은 고딕"/>
+              </a:rPr>
+              <a:t>    And 확정 시 선택 대상이 유효하고 본인 소유다</a:t>
+            </a:r>
+          </a:p>
+          <a:p>
+            <a:pPr marL="0" indent="0" algn="l">
+              <a:lnSpc>
+                <a:spcPts val="1150"/>
+              </a:lnSpc>
+              <a:spcBef>
+                <a:spcPts val="0"/>
+              </a:spcBef>
+              <a:spcAft>
+                <a:spcPts val="0"/>
+              </a:spcAft>
+              <a:buNone/>
+            </a:pPr>
+            <a:r>
+              <a:rPr sz="1000" b="0">
+                <a:solidFill>
+                  <a:srgbClr val="000000"/>
+                </a:solidFill>
+                <a:latin typeface="Consolas"/>
+                <a:ea typeface="맑은 고딕"/>
+              </a:rPr>
+              <a:t>    And 첫 결제 결과를 확인할 수 없다</a:t>
+            </a:r>
+          </a:p>
+          <a:p>
+            <a:pPr marL="0" indent="0" algn="l">
+              <a:lnSpc>
+                <a:spcPts val="1150"/>
+              </a:lnSpc>
+              <a:spcBef>
+                <a:spcPts val="0"/>
+              </a:spcBef>
+              <a:spcAft>
+                <a:spcPts val="0"/>
+              </a:spcAft>
+              <a:buNone/>
+            </a:pPr>
+            <a:r>
+              <a:rPr sz="1000" b="0">
+                <a:solidFill>
+                  <a:srgbClr val="000000"/>
+                </a:solidFill>
+                <a:latin typeface="Consolas"/>
+                <a:ea typeface="맑은 고딕"/>
+              </a:rPr>
+              <a:t>  When 회원이 신청을 확정한다</a:t>
+            </a:r>
+          </a:p>
+          <a:p>
+            <a:pPr marL="0" indent="0" algn="l">
+              <a:lnSpc>
+                <a:spcPts val="1150"/>
+              </a:lnSpc>
+              <a:spcBef>
+                <a:spcPts val="0"/>
+              </a:spcBef>
+              <a:spcAft>
+                <a:spcPts val="0"/>
+              </a:spcAft>
+              <a:buNone/>
+            </a:pPr>
+            <a:r>
+              <a:rPr sz="1000" b="0">
+                <a:solidFill>
+                  <a:srgbClr val="000000"/>
+                </a:solidFill>
+                <a:latin typeface="Consolas"/>
+                <a:ea typeface="맑은 고딕"/>
+              </a:rPr>
+              <a:t>  Then 결과 확인 필요를 안내하고 상태는 결과확인필요다</a:t>
+            </a:r>
+          </a:p>
+          <a:p>
+            <a:pPr marL="0" indent="0" algn="l">
+              <a:lnSpc>
+                <a:spcPts val="1150"/>
+              </a:lnSpc>
+              <a:spcBef>
+                <a:spcPts val="0"/>
+              </a:spcBef>
+              <a:spcAft>
+                <a:spcPts val="0"/>
+              </a:spcAft>
+              <a:buNone/>
+            </a:pPr>
+            <a:r>
+              <a:rPr sz="1000" b="0">
+                <a:solidFill>
+                  <a:srgbClr val="000000"/>
+                </a:solidFill>
+                <a:latin typeface="Consolas"/>
+                <a:ea typeface="맑은 고딕"/>
+              </a:rPr>
+              <a:t>    And 계약 0건, 결제 요청 1회(결과 확인과 따로 셈), 금액 산정 1회(고지 단계)다</a:t>
+            </a:r>
+          </a:p>
+          <a:p>
+            <a:pPr marL="0" indent="0" algn="l">
+              <a:lnSpc>
+                <a:spcPts val="1150"/>
+              </a:lnSpc>
+              <a:spcBef>
+                <a:spcPts val="0"/>
+              </a:spcBef>
+              <a:spcAft>
+                <a:spcPts val="0"/>
+              </a:spcAft>
+              <a:buNone/>
+            </a:pPr>
+            <a:r>
+              <a:rPr sz="1000" b="0">
+                <a:solidFill>
+                  <a:srgbClr val="000000"/>
+                </a:solidFill>
+                <a:latin typeface="Consolas"/>
+                <a:ea typeface="맑은 고딕"/>
+              </a:rPr>
+              <a:t>    But 신청완료나 신청미완료로 처리하거나 새 결제를 요청해서는 안 된다</a:t>
+            </a:r>
+          </a:p>
+        </p:txBody>
+      </p:sp>
+      <p:sp>
+        <p:nvSpPr>
+          <p:cNvPr id="32" name="내용 개체 틀 7">
             <a:extLst>
               <a:ext uri="{FF2B5EF4-FFF2-40B4-BE49-F238E27FC236}">
                 <a16:creationId xmlns:a16="http://schemas.microsoft.com/office/drawing/2014/main" id="{BEBA2C4A-B0BF-F2E4-EA6E-614C99CBA184}"/>
@@ -17101,8 +17884,8 @@
         </p:nvSpPr>
         <p:spPr>
           <a:xfrm>
-            <a:off x="233172" y="1616364"/>
-            <a:ext cx="4338828" cy="4696101"/>
+            <a:off x="365760" y="960120"/>
+            <a:ext cx="8412480" cy="781278"/>
           </a:xfrm>
         </p:spPr>
         <p:txBody>
@@ -17111,538 +17894,255 @@
           </a:bodyPr>
           <a:lstStyle/>
           <a:p>
-            <a:pPr lvl="2" marL="228600" indent="-182880">
+            <a:pPr marL="0" indent="0">
               <a:spcBef>
-                <a:spcPts val="300"/>
+                <a:spcPts val="600"/>
               </a:spcBef>
               <a:spcAft>
-                <a:spcPts val="300"/>
+                <a:spcPts val="600"/>
               </a:spcAft>
-              <a:buSzPct val="90000"/>
-              <a:buFont typeface="Wingdings" pitchFamily="2" charset="2"/>
-              <a:buChar char=""/>
+              <a:buNone/>
             </a:pPr>
             <a:r>
-              <a:rPr sz="1400" b="1">
-                <a:solidFill>
-                  <a:srgbClr val="000000"/>
-                </a:solidFill>
-                <a:latin typeface="맑은 고딕"/>
-                <a:ea typeface="맑은 고딕"/>
-              </a:rPr>
-              <a:t>1. 신청과 단가 확정</a:t>
-            </a:r>
-          </a:p>
-          <a:p>
-            <a:pPr lvl="2" marL="228600" indent="-182880">
-              <a:spcBef>
-                <a:spcPts val="300"/>
-              </a:spcBef>
-              <a:spcAft>
-                <a:spcPts val="300"/>
-              </a:spcAft>
-              <a:buSzPct val="90000"/>
-              <a:buFont typeface="Wingdings" pitchFamily="2" charset="2"/>
-              <a:buChar char=""/>
-            </a:pPr>
-            <a:r>
-              <a:rPr sz="1400" b="1">
-                <a:solidFill>
-                  <a:srgbClr val="000000"/>
-                </a:solidFill>
-                <a:latin typeface="맑은 고딕"/>
-                <a:ea typeface="맑은 고딕"/>
-              </a:rPr>
-              <a:t>구현 결과</a:t>
-            </a:r>
-            <a:r>
-              <a:rPr sz="1400" b="0">
-                <a:solidFill>
-                  <a:srgbClr val="000000"/>
-                </a:solidFill>
-                <a:latin typeface="맑은 고딕"/>
-                <a:ea typeface="맑은 고딕"/>
-              </a:rPr>
-              <a:t> —</a:t>
-            </a:r>
-            <a:r>
-              <a:rPr sz="1200" b="0">
-                <a:solidFill>
-                  <a:srgbClr val="000000"/>
-                </a:solidFill>
-                <a:latin typeface="맑은 고딕"/>
-                <a:ea typeface="맑은 고딕"/>
-              </a:rPr>
-              <a:t> 결제 대기 신청이 생기고 휴지 1묶음의 단가가 10,000원으로 고정된다.</a:t>
-            </a:r>
-          </a:p>
-          <a:p>
-            <a:pPr lvl="2" marL="228600" indent="-182880">
-              <a:spcBef>
-                <a:spcPts val="300"/>
-              </a:spcBef>
-              <a:spcAft>
-                <a:spcPts val="300"/>
-              </a:spcAft>
-              <a:buSzPct val="90000"/>
-              <a:buFont typeface="Wingdings" pitchFamily="2" charset="2"/>
-              <a:buChar char=""/>
-            </a:pPr>
-            <a:r>
-              <a:rPr sz="1400" b="1">
-                <a:solidFill>
-                  <a:srgbClr val="000000"/>
-                </a:solidFill>
-                <a:latin typeface="맑은 고딕"/>
-                <a:ea typeface="맑은 고딕"/>
-              </a:rPr>
-              <a:t>완료 조건</a:t>
-            </a:r>
-            <a:r>
-              <a:rPr sz="1400" b="0">
-                <a:solidFill>
-                  <a:srgbClr val="000000"/>
-                </a:solidFill>
-                <a:latin typeface="맑은 고딕"/>
-                <a:ea typeface="맑은 고딕"/>
-              </a:rPr>
-              <a:t> —</a:t>
-            </a:r>
-            <a:r>
-              <a:rPr sz="1200" b="0">
-                <a:solidFill>
-                  <a:srgbClr val="000000"/>
-                </a:solidFill>
-                <a:latin typeface="맑은 고딕"/>
-                <a:ea typeface="맑은 고딕"/>
-              </a:rPr>
-              <a:t> 상품 판매가 변경 뒤에도 같은 신청의 회차 금액은 10,000원이다.</a:t>
-            </a:r>
-          </a:p>
-          <a:p>
-            <a:pPr lvl="2" marL="228600" indent="-182880">
-              <a:spcBef>
-                <a:spcPts val="300"/>
-              </a:spcBef>
-              <a:spcAft>
-                <a:spcPts val="300"/>
-              </a:spcAft>
-              <a:buSzPct val="90000"/>
-              <a:buFont typeface="Wingdings" pitchFamily="2" charset="2"/>
-              <a:buChar char=""/>
-            </a:pPr>
-            <a:r>
-              <a:rPr sz="1400" b="1">
-                <a:solidFill>
-                  <a:srgbClr val="000000"/>
-                </a:solidFill>
-                <a:latin typeface="맑은 고딕"/>
-                <a:ea typeface="맑은 고딕"/>
-              </a:rPr>
-              <a:t>2. 예정일과 금액 계산</a:t>
-            </a:r>
-          </a:p>
-          <a:p>
-            <a:pPr lvl="2" marL="228600" indent="-182880">
-              <a:spcBef>
-                <a:spcPts val="300"/>
-              </a:spcBef>
-              <a:spcAft>
-                <a:spcPts val="300"/>
-              </a:spcAft>
-              <a:buSzPct val="90000"/>
-              <a:buFont typeface="Wingdings" pitchFamily="2" charset="2"/>
-              <a:buChar char=""/>
-            </a:pPr>
-            <a:r>
-              <a:rPr sz="1400" b="1">
-                <a:solidFill>
-                  <a:srgbClr val="000000"/>
-                </a:solidFill>
-                <a:latin typeface="맑은 고딕"/>
-                <a:ea typeface="맑은 고딕"/>
-              </a:rPr>
-              <a:t>구현 결과</a:t>
-            </a:r>
-            <a:r>
-              <a:rPr sz="1400" b="0">
-                <a:solidFill>
-                  <a:srgbClr val="000000"/>
-                </a:solidFill>
-                <a:latin typeface="맑은 고딕"/>
-                <a:ea typeface="맑은 고딕"/>
-              </a:rPr>
-              <a:t> —</a:t>
-            </a:r>
-            <a:r>
-              <a:rPr sz="1200" b="0">
-                <a:solidFill>
-                  <a:srgbClr val="000000"/>
-                </a:solidFill>
-                <a:latin typeface="맑은 고딕"/>
-                <a:ea typeface="맑은 고딕"/>
-              </a:rPr>
-              <a:t> 첫 배송일부터 만료일까지 예정일을 계산한다. 아직 회차 객체는 만들지 않는다.</a:t>
-            </a:r>
-          </a:p>
-          <a:p>
-            <a:pPr lvl="2" marL="228600" indent="-182880">
-              <a:spcBef>
-                <a:spcPts val="300"/>
-              </a:spcBef>
-              <a:spcAft>
-                <a:spcPts val="300"/>
-              </a:spcAft>
-              <a:buSzPct val="90000"/>
-              <a:buFont typeface="Wingdings" pitchFamily="2" charset="2"/>
-              <a:buChar char=""/>
-            </a:pPr>
-            <a:r>
-              <a:rPr sz="1400" b="1">
-                <a:solidFill>
-                  <a:srgbClr val="000000"/>
-                </a:solidFill>
-                <a:latin typeface="맑은 고딕"/>
-                <a:ea typeface="맑은 고딕"/>
-              </a:rPr>
-              <a:t>완료 조건</a:t>
-            </a:r>
-            <a:r>
-              <a:rPr sz="1400" b="0">
-                <a:solidFill>
-                  <a:srgbClr val="000000"/>
-                </a:solidFill>
-                <a:latin typeface="맑은 고딕"/>
-                <a:ea typeface="맑은 고딕"/>
-              </a:rPr>
-              <a:t> —</a:t>
-            </a:r>
-            <a:r>
-              <a:rPr sz="1200" b="0">
-                <a:solidFill>
-                  <a:srgbClr val="000000"/>
-                </a:solidFill>
-                <a:latin typeface="맑은 고딕"/>
-                <a:ea typeface="맑은 고딕"/>
-              </a:rPr>
-              <a:t> 11/3부터 14일 간격의 지정된 7개 예정일, 일시불 70,000원, 회차 객체 0개다.</a:t>
+              <a:rPr sz="1800" b="1">
+                <a:solidFill>
+                  <a:srgbClr val="000000"/>
+                </a:solidFill>
+                <a:latin typeface="맑은 고딕"/>
+                <a:ea typeface="맑은 고딕"/>
+              </a:rPr>
+              <a:t>확정할 수 없는 결과는 실패가 아니다.</a:t>
+            </a:r>
+            <a:r>
+              <a:rPr sz="1800" b="0">
+                <a:solidFill>
+                  <a:srgbClr val="000000"/>
+                </a:solidFill>
+                <a:latin typeface="맑은 고딕"/>
+                <a:ea typeface="맑은 고딕"/>
+              </a:rPr>
+              <a:t> 반복 전달도 상태를 바꾸지 않으며, 두 예 모두 청구가 늘지 않는지를 숫자로 확인한다.</a:t>
             </a:r>
           </a:p>
         </p:txBody>
       </p:sp>
       <p:sp>
         <p:nvSpPr>
-          <p:cNvPr id="9" name="내용 개체 틀 7">
+          <p:cNvPr id="33" name="Integrated content 31">
             <a:extLst>
               <a:ext uri="{FF2B5EF4-FFF2-40B4-BE49-F238E27FC236}">
-                <a16:creationId xmlns:a16="http://schemas.microsoft.com/office/drawing/2014/main" id="{BEBA2C4A-B0BF-F2E4-EA6E-614C99CBA184}"/>
+                <a16:creationId xmlns:a16="http://schemas.microsoft.com/office/drawing/2014/main" id="{8E264927-DE01-A85F-AD3D-A49DD8EAC71A}"/>
               </a:ext>
             </a:extLst>
           </p:cNvPr>
-          <p:cNvSpPr>
-            <a:spLocks noGrp="1"/>
-          </p:cNvSpPr>
-          <p:nvPr>
-            <p:ph idx="1"/>
-          </p:nvPr>
+          <p:cNvSpPr txBox="1"/>
+          <p:nvPr/>
         </p:nvSpPr>
         <p:spPr>
           <a:xfrm>
-            <a:off x="233172" y="960120"/>
-            <a:ext cx="8778240" cy="656244"/>
+            <a:off x="365760" y="3438626"/>
+            <a:ext cx="8412480" cy="1485900"/>
           </a:xfrm>
+          <a:prstGeom prst="rect">
+            <a:avLst/>
+          </a:prstGeom>
+          <a:noFill/>
         </p:spPr>
         <p:txBody>
-          <a:bodyPr>
-            <a:normAutofit/>
+          <a:bodyPr wrap="square" lIns="91440" tIns="0" rIns="91440" bIns="0" anchor="t">
+            <a:noAutofit/>
           </a:bodyPr>
           <a:lstStyle/>
           <a:p>
-            <a:pPr marL="0" indent="0">
+            <a:pPr marL="0" indent="0" algn="l">
+              <a:lnSpc>
+                <a:spcPts val="1150"/>
+              </a:lnSpc>
               <a:spcBef>
-                <a:spcPts val="300"/>
+                <a:spcPts val="0"/>
               </a:spcBef>
               <a:spcAft>
-                <a:spcPts val="300"/>
+                <a:spcPts val="0"/>
               </a:spcAft>
               <a:buNone/>
             </a:pPr>
             <a:r>
-              <a:rPr sz="1400" b="0">
-                <a:solidFill>
-                  <a:srgbClr val="000000"/>
-                </a:solidFill>
-                <a:latin typeface="맑은 고딕"/>
-                <a:ea typeface="맑은 고딕"/>
-              </a:rPr>
-              <a:t>신청 기능을 다음 네 단위로 구현한다. </a:t>
-            </a:r>
-            <a:r>
-              <a:rPr sz="1400" b="1">
-                <a:solidFill>
-                  <a:srgbClr val="000000"/>
-                </a:solidFill>
-                <a:latin typeface="맑은 고딕"/>
-                <a:ea typeface="맑은 고딕"/>
-              </a:rPr>
-              <a:t>각 단위의 관찰 결과가 완료 조건</a:t>
-            </a:r>
-            <a:r>
-              <a:rPr sz="1400" b="0">
-                <a:solidFill>
-                  <a:srgbClr val="000000"/>
-                </a:solidFill>
-                <a:latin typeface="맑은 고딕"/>
-                <a:ea typeface="맑은 고딕"/>
-              </a:rPr>
-              <a:t>이며 공통 코드 변경 뒤에는 앞 단위의 수용 예도 유지한다.</a:t>
-            </a:r>
-          </a:p>
-        </p:txBody>
-      </p:sp>
-      <p:sp>
-        <p:nvSpPr>
-          <p:cNvPr id="10" name="내용 개체 틀 7">
-            <a:extLst>
-              <a:ext uri="{FF2B5EF4-FFF2-40B4-BE49-F238E27FC236}">
-                <a16:creationId xmlns:a16="http://schemas.microsoft.com/office/drawing/2014/main" id="{BEBA2C4A-B0BF-F2E4-EA6E-614C99CBA184}"/>
-              </a:ext>
-            </a:extLst>
-          </p:cNvPr>
-          <p:cNvSpPr>
-            <a:spLocks noGrp="1"/>
-          </p:cNvSpPr>
-          <p:nvPr>
-            <p:ph idx="1"/>
-          </p:nvPr>
-        </p:nvSpPr>
-        <p:spPr>
-          <a:xfrm>
-            <a:off x="4572000" y="1616364"/>
-            <a:ext cx="4439412" cy="4696101"/>
-          </a:xfrm>
-        </p:spPr>
-        <p:txBody>
-          <a:bodyPr>
-            <a:normAutofit/>
-          </a:bodyPr>
-          <a:lstStyle/>
-          <a:p>
-            <a:pPr lvl="2" marL="228600" indent="-182880">
+              <a:rPr sz="1000" b="0">
+                <a:solidFill>
+                  <a:srgbClr val="000000"/>
+                </a:solidFill>
+                <a:latin typeface="Consolas"/>
+                <a:ea typeface="맑은 고딕"/>
+              </a:rPr>
+              <a:t>Scenario: 예 6. 동일 신청의 반복 전달</a:t>
+            </a:r>
+          </a:p>
+          <a:p>
+            <a:pPr marL="0" indent="0" algn="l">
+              <a:lnSpc>
+                <a:spcPts val="1150"/>
+              </a:lnSpc>
               <a:spcBef>
-                <a:spcPts val="300"/>
+                <a:spcPts val="0"/>
               </a:spcBef>
               <a:spcAft>
-                <a:spcPts val="300"/>
+                <a:spcPts val="0"/>
               </a:spcAft>
-              <a:buSzPct val="90000"/>
-              <a:buFont typeface="Wingdings" pitchFamily="2" charset="2"/>
-              <a:buChar char=""/>
+              <a:buNone/>
             </a:pPr>
             <a:r>
-              <a:rPr sz="1400" b="1">
-                <a:solidFill>
-                  <a:srgbClr val="000000"/>
-                </a:solidFill>
-                <a:latin typeface="맑은 고딕"/>
-                <a:ea typeface="맑은 고딕"/>
-              </a:rPr>
-              <a:t>3. 승인과 회차 생성</a:t>
-            </a:r>
-          </a:p>
-          <a:p>
-            <a:pPr lvl="2" marL="228600" indent="-182880">
+              <a:rPr sz="1000" b="0">
+                <a:solidFill>
+                  <a:srgbClr val="000000"/>
+                </a:solidFill>
+                <a:latin typeface="Consolas"/>
+                <a:ea typeface="맑은 고딕"/>
+              </a:rPr>
+              <a:t>  Given 같은 예 안에서 대표 값으로 고지와 확정을 거쳐 첫 결제 성공이 확정되었다</a:t>
+            </a:r>
+          </a:p>
+          <a:p>
+            <a:pPr marL="0" indent="0" algn="l">
+              <a:lnSpc>
+                <a:spcPts val="1150"/>
+              </a:lnSpc>
               <a:spcBef>
-                <a:spcPts val="300"/>
+                <a:spcPts val="0"/>
               </a:spcBef>
               <a:spcAft>
-                <a:spcPts val="300"/>
+                <a:spcPts val="0"/>
               </a:spcAft>
-              <a:buSzPct val="90000"/>
-              <a:buFont typeface="Wingdings" pitchFamily="2" charset="2"/>
-              <a:buChar char=""/>
+              <a:buNone/>
             </a:pPr>
             <a:r>
-              <a:rPr sz="1400" b="1">
-                <a:solidFill>
-                  <a:srgbClr val="000000"/>
-                </a:solidFill>
-                <a:latin typeface="맑은 고딕"/>
-                <a:ea typeface="맑은 고딕"/>
-              </a:rPr>
-              <a:t>구현 결과</a:t>
-            </a:r>
-            <a:r>
-              <a:rPr sz="1400" b="0">
-                <a:solidFill>
-                  <a:srgbClr val="000000"/>
-                </a:solidFill>
-                <a:latin typeface="맑은 고딕"/>
-                <a:ea typeface="맑은 고딕"/>
-              </a:rPr>
-              <a:t> —</a:t>
-            </a:r>
-            <a:r>
-              <a:rPr sz="1200" b="0">
-                <a:solidFill>
-                  <a:srgbClr val="000000"/>
-                </a:solidFill>
-                <a:latin typeface="맑은 고딕"/>
-                <a:ea typeface="맑은 고딕"/>
-              </a:rPr>
-              <a:t> 결제 대기 신청의 승인을 반영한다.</a:t>
-            </a:r>
-          </a:p>
-          <a:p>
-            <a:pPr lvl="2" marL="228600" indent="-182880">
+              <a:rPr sz="1000" b="0">
+                <a:solidFill>
+                  <a:srgbClr val="000000"/>
+                </a:solidFill>
+                <a:latin typeface="Consolas"/>
+                <a:ea typeface="맑은 고딕"/>
+              </a:rPr>
+              <a:t>    And 상태는 신청완료다</a:t>
+            </a:r>
+          </a:p>
+          <a:p>
+            <a:pPr marL="0" indent="0" algn="l">
+              <a:lnSpc>
+                <a:spcPts val="1150"/>
+              </a:lnSpc>
               <a:spcBef>
-                <a:spcPts val="300"/>
+                <a:spcPts val="0"/>
               </a:spcBef>
               <a:spcAft>
-                <a:spcPts val="300"/>
+                <a:spcPts val="0"/>
               </a:spcAft>
-              <a:buSzPct val="90000"/>
-              <a:buFont typeface="Wingdings" pitchFamily="2" charset="2"/>
-              <a:buChar char=""/>
+              <a:buNone/>
             </a:pPr>
             <a:r>
-              <a:rPr sz="1400" b="1">
-                <a:solidFill>
-                  <a:srgbClr val="000000"/>
-                </a:solidFill>
-                <a:latin typeface="맑은 고딕"/>
-                <a:ea typeface="맑은 고딕"/>
-              </a:rPr>
-              <a:t>완료 조건</a:t>
-            </a:r>
-            <a:r>
-              <a:rPr sz="1400" b="0">
-                <a:solidFill>
-                  <a:srgbClr val="000000"/>
-                </a:solidFill>
-                <a:latin typeface="맑은 고딕"/>
-                <a:ea typeface="맑은 고딕"/>
-              </a:rPr>
-              <a:t> —</a:t>
-            </a:r>
-            <a:r>
-              <a:rPr sz="1200" b="0">
-                <a:solidFill>
-                  <a:srgbClr val="000000"/>
-                </a:solidFill>
-                <a:latin typeface="맑은 고딕"/>
-                <a:ea typeface="맑은 고딕"/>
-              </a:rPr>
-              <a:t> 확정, 지정 예정일의 회차 7개, 각 회차 금액 10,000원. 만료일 뒤 회차는 없다.</a:t>
-            </a:r>
-          </a:p>
-          <a:p>
-            <a:pPr lvl="2" marL="228600" indent="-182880">
+              <a:rPr sz="1000" b="0">
+                <a:solidFill>
+                  <a:srgbClr val="000000"/>
+                </a:solidFill>
+                <a:latin typeface="Consolas"/>
+                <a:ea typeface="맑은 고딕"/>
+              </a:rPr>
+              <a:t>  When 같은 신청 식별자의 확정 요청이 다시 전달된다</a:t>
+            </a:r>
+          </a:p>
+          <a:p>
+            <a:pPr marL="0" indent="0" algn="l">
+              <a:lnSpc>
+                <a:spcPts val="1150"/>
+              </a:lnSpc>
               <a:spcBef>
-                <a:spcPts val="300"/>
+                <a:spcPts val="0"/>
               </a:spcBef>
               <a:spcAft>
-                <a:spcPts val="300"/>
+                <a:spcPts val="0"/>
               </a:spcAft>
-              <a:buSzPct val="90000"/>
-              <a:buFont typeface="Wingdings" pitchFamily="2" charset="2"/>
-              <a:buChar char=""/>
+              <a:buNone/>
             </a:pPr>
             <a:r>
-              <a:rPr sz="1400" b="1">
-                <a:solidFill>
-                  <a:srgbClr val="000000"/>
-                </a:solidFill>
-                <a:latin typeface="맑은 고딕"/>
-                <a:ea typeface="맑은 고딕"/>
-              </a:rPr>
-              <a:t>4. 거절과 재결제</a:t>
-            </a:r>
-          </a:p>
-          <a:p>
-            <a:pPr lvl="2" marL="228600" indent="-182880">
+              <a:rPr sz="1000" b="0">
+                <a:solidFill>
+                  <a:srgbClr val="000000"/>
+                </a:solidFill>
+                <a:latin typeface="Consolas"/>
+                <a:ea typeface="맑은 고딕"/>
+              </a:rPr>
+              <a:t>  Then 저장된 신청 완료와 계약 결과를 안내하고 상태는 신청완료로 유지된다</a:t>
+            </a:r>
+          </a:p>
+          <a:p>
+            <a:pPr marL="0" indent="0" algn="l">
+              <a:lnSpc>
+                <a:spcPts val="1150"/>
+              </a:lnSpc>
               <a:spcBef>
-                <a:spcPts val="300"/>
+                <a:spcPts val="0"/>
               </a:spcBef>
               <a:spcAft>
-                <a:spcPts val="300"/>
+                <a:spcPts val="0"/>
               </a:spcAft>
-              <a:buSzPct val="90000"/>
-              <a:buFont typeface="Wingdings" pitchFamily="2" charset="2"/>
-              <a:buChar char=""/>
+              <a:buNone/>
             </a:pPr>
             <a:r>
-              <a:rPr sz="1400" b="1">
-                <a:solidFill>
-                  <a:srgbClr val="000000"/>
-                </a:solidFill>
-                <a:latin typeface="맑은 고딕"/>
-                <a:ea typeface="맑은 고딕"/>
-              </a:rPr>
-              <a:t>구현 결과</a:t>
-            </a:r>
-            <a:r>
-              <a:rPr sz="1400" b="0">
-                <a:solidFill>
-                  <a:srgbClr val="000000"/>
-                </a:solidFill>
-                <a:latin typeface="맑은 고딕"/>
-                <a:ea typeface="맑은 고딕"/>
-              </a:rPr>
-              <a:t> —</a:t>
-            </a:r>
-            <a:r>
-              <a:rPr sz="1200" b="0">
-                <a:solidFill>
-                  <a:srgbClr val="000000"/>
-                </a:solidFill>
-                <a:latin typeface="맑은 고딕"/>
-                <a:ea typeface="맑은 고딕"/>
-              </a:rPr>
-              <a:t> 거절 뒤 같은 신청에 다른 카드를 사용할 수 있다.</a:t>
-            </a:r>
-          </a:p>
-          <a:p>
-            <a:pPr lvl="2" marL="228600" indent="-182880">
+              <a:rPr sz="1000" b="0">
+                <a:solidFill>
+                  <a:srgbClr val="000000"/>
+                </a:solidFill>
+                <a:latin typeface="Consolas"/>
+                <a:ea typeface="맑은 고딕"/>
+              </a:rPr>
+              <a:t>    And 반복 전달 동안 늘어난 것이 없어 계약·결제 요청·금액 산정의 누적이 각각 1이다</a:t>
+            </a:r>
+          </a:p>
+          <a:p>
+            <a:pPr marL="0" indent="0" algn="l">
+              <a:lnSpc>
+                <a:spcPts val="1150"/>
+              </a:lnSpc>
               <a:spcBef>
-                <a:spcPts val="300"/>
+                <a:spcPts val="0"/>
               </a:spcBef>
               <a:spcAft>
-                <a:spcPts val="300"/>
+                <a:spcPts val="0"/>
               </a:spcAft>
-              <a:buSzPct val="90000"/>
-              <a:buFont typeface="Wingdings" pitchFamily="2" charset="2"/>
-              <a:buChar char=""/>
+              <a:buNone/>
             </a:pPr>
             <a:r>
-              <a:rPr sz="1400" b="1">
-                <a:solidFill>
-                  <a:srgbClr val="000000"/>
-                </a:solidFill>
-                <a:latin typeface="맑은 고딕"/>
-                <a:ea typeface="맑은 고딕"/>
-              </a:rPr>
-              <a:t>완료 조건</a:t>
-            </a:r>
-            <a:r>
-              <a:rPr sz="1400" b="0">
-                <a:solidFill>
-                  <a:srgbClr val="000000"/>
-                </a:solidFill>
-                <a:latin typeface="맑은 고딕"/>
-                <a:ea typeface="맑은 고딕"/>
-              </a:rPr>
-              <a:t> —</a:t>
-            </a:r>
-            <a:r>
-              <a:rPr sz="1200" b="0">
-                <a:solidFill>
-                  <a:srgbClr val="000000"/>
-                </a:solidFill>
-                <a:latin typeface="맑은 고딕"/>
-                <a:ea typeface="맑은 고딕"/>
-              </a:rPr>
-              <a:t> 카드 X 거절 뒤 결제 대기·0개, 카드 Y 승인 뒤 같은 신청이 확정·총 7개다.</a:t>
+              <a:rPr sz="1000" b="0">
+                <a:solidFill>
+                  <a:srgbClr val="000000"/>
+                </a:solidFill>
+                <a:latin typeface="Consolas"/>
+                <a:ea typeface="맑은 고딕"/>
+              </a:rPr>
+              <a:t>    And 예정 회차는 7개로 유지된다</a:t>
+            </a:r>
+          </a:p>
+          <a:p>
+            <a:pPr marL="0" indent="0" algn="l">
+              <a:lnSpc>
+                <a:spcPts val="1150"/>
+              </a:lnSpc>
+              <a:spcBef>
+                <a:spcPts val="0"/>
+              </a:spcBef>
+              <a:spcAft>
+                <a:spcPts val="0"/>
+              </a:spcAft>
+              <a:buNone/>
+            </a:pPr>
+            <a:r>
+              <a:rPr sz="1000" b="0">
+                <a:solidFill>
+                  <a:srgbClr val="000000"/>
+                </a:solidFill>
+                <a:latin typeface="Consolas"/>
+                <a:ea typeface="맑은 고딕"/>
+              </a:rPr>
+              <a:t>    But 추가 청구, 추가 계약, 회차 추가, 재산정이 있어서는 안 된다</a:t>
             </a:r>
           </a:p>
         </p:txBody>
@@ -17650,7 +18150,7 @@
     </p:spTree>
     <p:extLst>
       <p:ext uri="{BB962C8B-B14F-4D97-AF65-F5344CB8AC3E}">
-        <p14:creationId xmlns:p14="http://schemas.microsoft.com/office/powerpoint/2010/main" val="3555436673"/>
+        <p14:creationId xmlns:p14="http://schemas.microsoft.com/office/powerpoint/2010/main" val="3773351522"/>
       </p:ext>
     </p:extLst>
   </p:cSld>
@@ -17712,17 +18212,7 @@
                 <a:latin typeface="맑은 고딕"/>
                 <a:ea typeface="맑은 고딕"/>
               </a:rPr>
-              <a:t>보완 </a:t>
-            </a:r>
-            <a:r>
-              <a:rPr sz="1800" b="1">
-                <a:solidFill>
-                  <a:srgbClr val="000000"/>
-                </a:solidFill>
-                <a:latin typeface="맑은 고딕"/>
-                <a:ea typeface="맑은 고딕"/>
-              </a:rPr>
-              <a:t>(안)</a:t>
+              <a:t>작업 단위와 남은 미정</a:t>
             </a:r>
           </a:p>
           <a:p>
@@ -17870,8 +18360,8 @@
         </p:nvSpPr>
         <p:spPr>
           <a:xfrm>
-            <a:off x="233172" y="1414318"/>
-            <a:ext cx="4338828" cy="4898147"/>
+            <a:off x="233172" y="960120"/>
+            <a:ext cx="4338828" cy="5352345"/>
           </a:xfrm>
         </p:spPr>
         <p:txBody>
@@ -17880,7 +18370,28 @@
           </a:bodyPr>
           <a:lstStyle/>
           <a:p>
-            <a:pPr lvl="2" marL="228600" indent="-182880">
+            <a:pPr marL="182880" indent="0">
+              <a:spcBef>
+                <a:spcPts val="300"/>
+              </a:spcBef>
+              <a:spcAft>
+                <a:spcPts val="300"/>
+              </a:spcAft>
+              <a:buNone/>
+            </a:pPr>
+            <a:r>
+              <a:rPr sz="1000" b="1">
+                <a:solidFill>
+                  <a:srgbClr val="000000"/>
+                </a:solidFill>
+                <a:latin typeface="맑은 고딕"/>
+                <a:ea typeface="맑은 고딕"/>
+              </a:rPr>
+              <a:t>단위 1. 신청 전 고지</a:t>
+            </a:r>
+          </a:p>
+          <a:p>
+            <a:pPr lvl="2" marL="411480" indent="-137160">
               <a:spcBef>
                 <a:spcPts val="300"/>
               </a:spcBef>
@@ -17892,18 +18403,28 @@
               <a:buChar char=""/>
             </a:pPr>
             <a:r>
-              <a:rPr sz="1400" b="1">
-                <a:solidFill>
-                  <a:srgbClr val="000000"/>
-                </a:solidFill>
-                <a:latin typeface="맑은 고딕"/>
-                <a:ea typeface="맑은 고딕"/>
-              </a:rPr>
-              <a:t>요구사항 정의서에 반영한 문장</a:t>
-            </a:r>
-          </a:p>
-          <a:p>
-            <a:pPr lvl="3" marL="457200" indent="-182880">
+              <a:rPr sz="1000" b="1">
+                <a:solidFill>
+                  <a:srgbClr val="000000"/>
+                </a:solidFill>
+                <a:latin typeface="맑은 고딕"/>
+                <a:ea typeface="맑은 고딕"/>
+              </a:rPr>
+              <a:t>구현할 결과:</a:t>
+            </a:r>
+            <a:r>
+              <a:rPr sz="1000" b="0">
+                <a:solidFill>
+                  <a:srgbClr val="000000"/>
+                </a:solidFill>
+                <a:latin typeface="맑은 고딕"/>
+                <a:ea typeface="맑은 고딕"/>
+              </a:rPr>
+              <a:t> 유효한 선택이면 일정·금액·첫 회차 결제 조건을 고지한다. 부적합하면 확인 요청만 안내한다. 신청 식별자는 신청 업무가 만든다.</a:t>
+            </a:r>
+          </a:p>
+          <a:p>
+            <a:pPr lvl="2" marL="411480" indent="-137160">
               <a:spcBef>
                 <a:spcPts val="300"/>
               </a:spcBef>
@@ -17912,27 +18433,17 @@
               </a:spcAft>
               <a:buSzPct val="90000"/>
               <a:buFont typeface="Wingdings" pitchFamily="2" charset="2"/>
-              <a:buChar char=""/>
+              <a:buChar char=""/>
             </a:pPr>
             <a:r>
-              <a:rPr sz="1200" b="1">
-                <a:solidFill>
-                  <a:srgbClr val="000000"/>
-                </a:solidFill>
-                <a:latin typeface="맑은 고딕"/>
-                <a:ea typeface="맑은 고딕"/>
-              </a:rPr>
-              <a:t>계산</a:t>
-            </a:r>
-            <a:r>
-              <a:rPr sz="1200" b="0">
-                <a:solidFill>
-                  <a:srgbClr val="000000"/>
-                </a:solidFill>
-                <a:latin typeface="맑은 고딕"/>
-                <a:ea typeface="맑은 고딕"/>
-              </a:rPr>
-              <a:t> —</a:t>
+              <a:rPr sz="1000" b="1">
+                <a:solidFill>
+                  <a:srgbClr val="000000"/>
+                </a:solidFill>
+                <a:latin typeface="맑은 고딕"/>
+                <a:ea typeface="맑은 고딕"/>
+              </a:rPr>
+              <a:t>완료 확인 예:</a:t>
             </a:r>
             <a:r>
               <a:rPr sz="1000" b="0">
@@ -17942,11 +18453,52 @@
                 <a:latin typeface="맑은 고딕"/>
                 <a:ea typeface="맑은 고딕"/>
               </a:rPr>
-              <a:t> “결제 전 예정일 7개로 70,000원을 산정하지만 회차는 생성하지 않는다.”</a:t>
-            </a:r>
-          </a:p>
-          <a:p>
-            <a:pPr lvl="3" marL="457200" indent="-182880">
+              <a:t> 예 1, 예 2 · </a:t>
+            </a:r>
+            <a:r>
+              <a:rPr sz="1000" b="1">
+                <a:solidFill>
+                  <a:srgbClr val="000000"/>
+                </a:solidFill>
+                <a:latin typeface="맑은 고딕"/>
+                <a:ea typeface="맑은 고딕"/>
+              </a:rPr>
+              <a:t>쓰는 포트:</a:t>
+            </a:r>
+            <a:r>
+              <a:rPr sz="1000" b="0">
+                <a:solidFill>
+                  <a:srgbClr val="000000"/>
+                </a:solidFill>
+                <a:latin typeface="맑은 고딕"/>
+                <a:ea typeface="맑은 고딕"/>
+              </a:rPr>
+              <a:t> 선택 확인, 금액 산정, 신청 저장</a:t>
+            </a:r>
+          </a:p>
+          <a:p>
+            <a:pPr marL="182880" indent="0">
+              <a:spcBef>
+                <a:spcPts val="300"/>
+              </a:spcBef>
+              <a:spcAft>
+                <a:spcPts val="300"/>
+              </a:spcAft>
+              <a:buNone/>
+            </a:pPr>
+            <a:r>
+              <a:rPr sz="1000" b="1">
+                <a:solidFill>
+                  <a:srgbClr val="000000"/>
+                </a:solidFill>
+                <a:latin typeface="맑은 고딕"/>
+                <a:ea typeface="맑은 고딕"/>
+              </a:rPr>
+              <a:t>단위 2. 확정과 결과 확정</a:t>
+            </a:r>
+          </a:p>
+          <a:p>
+            <a:pPr lvl="2" marL="411480" indent="-137160">
               <a:spcBef>
                 <a:spcPts val="300"/>
               </a:spcBef>
@@ -17955,27 +18507,17 @@
               </a:spcAft>
               <a:buSzPct val="90000"/>
               <a:buFont typeface="Wingdings" pitchFamily="2" charset="2"/>
-              <a:buChar char=""/>
+              <a:buChar char=""/>
             </a:pPr>
             <a:r>
-              <a:rPr sz="1200" b="1">
-                <a:solidFill>
-                  <a:srgbClr val="000000"/>
-                </a:solidFill>
-                <a:latin typeface="맑은 고딕"/>
-                <a:ea typeface="맑은 고딕"/>
-              </a:rPr>
-              <a:t>재결제</a:t>
-            </a:r>
-            <a:r>
-              <a:rPr sz="1200" b="0">
-                <a:solidFill>
-                  <a:srgbClr val="000000"/>
-                </a:solidFill>
-                <a:latin typeface="맑은 고딕"/>
-                <a:ea typeface="맑은 고딕"/>
-              </a:rPr>
-              <a:t> —</a:t>
+              <a:rPr sz="1000" b="1">
+                <a:solidFill>
+                  <a:srgbClr val="000000"/>
+                </a:solidFill>
+                <a:latin typeface="맑은 고딕"/>
+                <a:ea typeface="맑은 고딕"/>
+              </a:rPr>
+              <a:t>구현할 결과:</a:t>
             </a:r>
             <a:r>
               <a:rPr sz="1000" b="0">
@@ -17985,7 +18527,344 @@
                 <a:latin typeface="맑은 고딕"/>
                 <a:ea typeface="맑은 고딕"/>
               </a:rPr>
-              <a:t> “거절 뒤 같은 신청은 회차 0개이며 다른 카드 승인 후 총 7개가 된다.”</a:t>
+              <a:t> 확정하면 유효성·소유 관계만 다시 확인하고 첫 회차만 결제한다. 성공이면 완료와 계약, 실패면 미완료다. 결제 요청 식별 정보는 업무가 정한 값이다. 제공자 형식으로 바꾸는 일은 쇼핑몰 연계가 맡는다.</a:t>
+            </a:r>
+          </a:p>
+          <a:p>
+            <a:pPr lvl="2" marL="411480" indent="-137160">
+              <a:spcBef>
+                <a:spcPts val="300"/>
+              </a:spcBef>
+              <a:spcAft>
+                <a:spcPts val="300"/>
+              </a:spcAft>
+              <a:buSzPct val="90000"/>
+              <a:buFont typeface="Wingdings" pitchFamily="2" charset="2"/>
+              <a:buChar char=""/>
+            </a:pPr>
+            <a:r>
+              <a:rPr sz="1000" b="1">
+                <a:solidFill>
+                  <a:srgbClr val="000000"/>
+                </a:solidFill>
+                <a:latin typeface="맑은 고딕"/>
+                <a:ea typeface="맑은 고딕"/>
+              </a:rPr>
+              <a:t>완료 확인 예:</a:t>
+            </a:r>
+            <a:r>
+              <a:rPr sz="1000" b="0">
+                <a:solidFill>
+                  <a:srgbClr val="000000"/>
+                </a:solidFill>
+                <a:latin typeface="맑은 고딕"/>
+                <a:ea typeface="맑은 고딕"/>
+              </a:rPr>
+              <a:t> 예 3, 예 4 · </a:t>
+            </a:r>
+            <a:r>
+              <a:rPr sz="1000" b="1">
+                <a:solidFill>
+                  <a:srgbClr val="000000"/>
+                </a:solidFill>
+                <a:latin typeface="맑은 고딕"/>
+                <a:ea typeface="맑은 고딕"/>
+              </a:rPr>
+              <a:t>쓰는 포트:</a:t>
+            </a:r>
+            <a:r>
+              <a:rPr sz="1000" b="0">
+                <a:solidFill>
+                  <a:srgbClr val="000000"/>
+                </a:solidFill>
+                <a:latin typeface="맑은 고딕"/>
+                <a:ea typeface="맑은 고딕"/>
+              </a:rPr>
+              <a:t> 선택 확인, 첫 결제, 신청 저장</a:t>
+            </a:r>
+            <a:r>
+              <a:rPr sz="1000" b="0">
+                <a:solidFill>
+                  <a:srgbClr val="000000"/>
+                </a:solidFill>
+                <a:latin typeface="맑은 고딕"/>
+                <a:ea typeface="맑은 고딕"/>
+              </a:rPr>
+              <a:t>(결제 시작·결과 반영)</a:t>
+            </a:r>
+          </a:p>
+          <a:p>
+            <a:pPr marL="182880" indent="0">
+              <a:spcBef>
+                <a:spcPts val="300"/>
+              </a:spcBef>
+              <a:spcAft>
+                <a:spcPts val="300"/>
+              </a:spcAft>
+              <a:buNone/>
+            </a:pPr>
+            <a:r>
+              <a:rPr sz="1000" b="1">
+                <a:solidFill>
+                  <a:srgbClr val="000000"/>
+                </a:solidFill>
+                <a:latin typeface="맑은 고딕"/>
+                <a:ea typeface="맑은 고딕"/>
+              </a:rPr>
+              <a:t>단위 3. 결과 미확정 안내</a:t>
+            </a:r>
+          </a:p>
+          <a:p>
+            <a:pPr lvl="2" marL="411480" indent="-137160">
+              <a:spcBef>
+                <a:spcPts val="300"/>
+              </a:spcBef>
+              <a:spcAft>
+                <a:spcPts val="300"/>
+              </a:spcAft>
+              <a:buSzPct val="90000"/>
+              <a:buFont typeface="Wingdings" pitchFamily="2" charset="2"/>
+              <a:buChar char=""/>
+            </a:pPr>
+            <a:r>
+              <a:rPr sz="1000" b="1">
+                <a:solidFill>
+                  <a:srgbClr val="000000"/>
+                </a:solidFill>
+                <a:latin typeface="맑은 고딕"/>
+                <a:ea typeface="맑은 고딕"/>
+              </a:rPr>
+              <a:t>구현할 결과:</a:t>
+            </a:r>
+            <a:r>
+              <a:rPr sz="1000" b="0">
+                <a:solidFill>
+                  <a:srgbClr val="000000"/>
+                </a:solidFill>
+                <a:latin typeface="맑은 고딕"/>
+                <a:ea typeface="맑은 고딕"/>
+              </a:rPr>
+              <a:t> 결과를 확인할 수 없으면 결과 확인 필요로 안내한다. 결과 확인 불가는 </a:t>
+            </a:r>
+            <a:r>
+              <a:rPr sz="1000" b="0">
+                <a:solidFill>
+                  <a:srgbClr val="000000"/>
+                </a:solidFill>
+                <a:latin typeface="맑은 고딕"/>
+                <a:ea typeface="맑은 고딕"/>
+              </a:rPr>
+              <a:t>첫결제결과확인중</a:t>
+            </a:r>
+            <a:r>
+              <a:rPr sz="1000" b="0">
+                <a:solidFill>
+                  <a:srgbClr val="000000"/>
+                </a:solidFill>
+                <a:latin typeface="맑은 고딕"/>
+                <a:ea typeface="맑은 고딕"/>
+              </a:rPr>
+              <a:t>에서만 반영한다. </a:t>
+            </a:r>
+            <a:r>
+              <a:rPr sz="1000" b="0">
+                <a:solidFill>
+                  <a:srgbClr val="000000"/>
+                </a:solidFill>
+                <a:latin typeface="맑은 고딕"/>
+                <a:ea typeface="맑은 고딕"/>
+              </a:rPr>
+              <a:t>결과확인필요</a:t>
+            </a:r>
+            <a:r>
+              <a:rPr sz="1000" b="0">
+                <a:solidFill>
+                  <a:srgbClr val="000000"/>
+                </a:solidFill>
+                <a:latin typeface="맑은 고딕"/>
+                <a:ea typeface="맑은 고딕"/>
+              </a:rPr>
+              <a:t>에서는 성공·실패만 반영한다. 결과 반영 진입점은 자리까지만 둔다.</a:t>
+            </a:r>
+          </a:p>
+          <a:p>
+            <a:pPr lvl="2" marL="411480" indent="-137160">
+              <a:spcBef>
+                <a:spcPts val="300"/>
+              </a:spcBef>
+              <a:spcAft>
+                <a:spcPts val="300"/>
+              </a:spcAft>
+              <a:buSzPct val="90000"/>
+              <a:buFont typeface="Wingdings" pitchFamily="2" charset="2"/>
+              <a:buChar char=""/>
+            </a:pPr>
+            <a:r>
+              <a:rPr sz="1000" b="1">
+                <a:solidFill>
+                  <a:srgbClr val="000000"/>
+                </a:solidFill>
+                <a:latin typeface="맑은 고딕"/>
+                <a:ea typeface="맑은 고딕"/>
+              </a:rPr>
+              <a:t>완료 확인 예:</a:t>
+            </a:r>
+            <a:r>
+              <a:rPr sz="1000" b="0">
+                <a:solidFill>
+                  <a:srgbClr val="000000"/>
+                </a:solidFill>
+                <a:latin typeface="맑은 고딕"/>
+                <a:ea typeface="맑은 고딕"/>
+              </a:rPr>
+              <a:t> 예 5 · </a:t>
+            </a:r>
+            <a:r>
+              <a:rPr sz="1000" b="1">
+                <a:solidFill>
+                  <a:srgbClr val="000000"/>
+                </a:solidFill>
+                <a:latin typeface="맑은 고딕"/>
+                <a:ea typeface="맑은 고딕"/>
+              </a:rPr>
+              <a:t>쓰는 포트:</a:t>
+            </a:r>
+            <a:r>
+              <a:rPr sz="1000" b="0">
+                <a:solidFill>
+                  <a:srgbClr val="000000"/>
+                </a:solidFill>
+                <a:latin typeface="맑은 고딕"/>
+                <a:ea typeface="맑은 고딕"/>
+              </a:rPr>
+              <a:t> 첫 결제, 신청 저장</a:t>
+            </a:r>
+            <a:r>
+              <a:rPr sz="1000" b="0">
+                <a:solidFill>
+                  <a:srgbClr val="000000"/>
+                </a:solidFill>
+                <a:latin typeface="맑은 고딕"/>
+                <a:ea typeface="맑은 고딕"/>
+              </a:rPr>
+              <a:t>(결제 시작·결과 반영)</a:t>
+            </a:r>
+          </a:p>
+          <a:p>
+            <a:pPr marL="182880" indent="0">
+              <a:spcBef>
+                <a:spcPts val="300"/>
+              </a:spcBef>
+              <a:spcAft>
+                <a:spcPts val="300"/>
+              </a:spcAft>
+              <a:buNone/>
+            </a:pPr>
+            <a:r>
+              <a:rPr sz="1000" b="1">
+                <a:solidFill>
+                  <a:srgbClr val="000000"/>
+                </a:solidFill>
+                <a:latin typeface="맑은 고딕"/>
+                <a:ea typeface="맑은 고딕"/>
+              </a:rPr>
+              <a:t>단위 4. 반복 전달 응답</a:t>
+            </a:r>
+          </a:p>
+          <a:p>
+            <a:pPr lvl="2" marL="411480" indent="-137160">
+              <a:spcBef>
+                <a:spcPts val="300"/>
+              </a:spcBef>
+              <a:spcAft>
+                <a:spcPts val="300"/>
+              </a:spcAft>
+              <a:buSzPct val="90000"/>
+              <a:buFont typeface="Wingdings" pitchFamily="2" charset="2"/>
+              <a:buChar char=""/>
+            </a:pPr>
+            <a:r>
+              <a:rPr sz="1000" b="1">
+                <a:solidFill>
+                  <a:srgbClr val="000000"/>
+                </a:solidFill>
+                <a:latin typeface="맑은 고딕"/>
+                <a:ea typeface="맑은 고딕"/>
+              </a:rPr>
+              <a:t>구현할 결과:</a:t>
+            </a:r>
+            <a:r>
+              <a:rPr sz="1000" b="0">
+                <a:solidFill>
+                  <a:srgbClr val="000000"/>
+                </a:solidFill>
+                <a:latin typeface="맑은 고딕"/>
+                <a:ea typeface="맑은 고딕"/>
+              </a:rPr>
+              <a:t> 같은 신청이 다시 오면 저장된 결과만 안내한다. 결제 시작 전이가 거부되므로 결제와 금액 산정은 부르지 않는다.</a:t>
+            </a:r>
+          </a:p>
+          <a:p>
+            <a:pPr lvl="2" marL="411480" indent="-137160">
+              <a:spcBef>
+                <a:spcPts val="300"/>
+              </a:spcBef>
+              <a:spcAft>
+                <a:spcPts val="300"/>
+              </a:spcAft>
+              <a:buSzPct val="90000"/>
+              <a:buFont typeface="Wingdings" pitchFamily="2" charset="2"/>
+              <a:buChar char=""/>
+            </a:pPr>
+            <a:r>
+              <a:rPr sz="1000" b="1">
+                <a:solidFill>
+                  <a:srgbClr val="000000"/>
+                </a:solidFill>
+                <a:latin typeface="맑은 고딕"/>
+                <a:ea typeface="맑은 고딕"/>
+              </a:rPr>
+              <a:t>완료 확인 예:</a:t>
+            </a:r>
+            <a:r>
+              <a:rPr sz="1000" b="0">
+                <a:solidFill>
+                  <a:srgbClr val="000000"/>
+                </a:solidFill>
+                <a:latin typeface="맑은 고딕"/>
+                <a:ea typeface="맑은 고딕"/>
+              </a:rPr>
+              <a:t> 예 6 · </a:t>
+            </a:r>
+            <a:r>
+              <a:rPr sz="1000" b="1">
+                <a:solidFill>
+                  <a:srgbClr val="000000"/>
+                </a:solidFill>
+                <a:latin typeface="맑은 고딕"/>
+                <a:ea typeface="맑은 고딕"/>
+              </a:rPr>
+              <a:t>쓰는 포트:</a:t>
+            </a:r>
+            <a:r>
+              <a:rPr sz="1000" b="0">
+                <a:solidFill>
+                  <a:srgbClr val="000000"/>
+                </a:solidFill>
+                <a:latin typeface="맑은 고딕"/>
+                <a:ea typeface="맑은 고딕"/>
+              </a:rPr>
+              <a:t> 신청 저장</a:t>
+            </a:r>
+            <a:r>
+              <a:rPr sz="1000" b="0">
+                <a:solidFill>
+                  <a:srgbClr val="000000"/>
+                </a:solidFill>
+                <a:latin typeface="맑은 고딕"/>
+                <a:ea typeface="맑은 고딕"/>
+              </a:rPr>
+              <a:t>(조회·결제 시작 거부)</a:t>
             </a:r>
           </a:p>
         </p:txBody>
@@ -18008,8 +18887,8 @@
         </p:nvSpPr>
         <p:spPr>
           <a:xfrm>
-            <a:off x="233172" y="960120"/>
-            <a:ext cx="8778240" cy="454198"/>
+            <a:off x="4572000" y="960120"/>
+            <a:ext cx="4439412" cy="5352345"/>
           </a:xfrm>
         </p:spPr>
         <p:txBody>
@@ -18018,7 +18897,7 @@
           </a:bodyPr>
           <a:lstStyle/>
           <a:p>
-            <a:pPr marL="0" indent="0">
+            <a:pPr marL="182880" indent="0">
               <a:spcBef>
                 <a:spcPts val="300"/>
               </a:spcBef>
@@ -18028,67 +18907,18 @@
               <a:buNone/>
             </a:pPr>
             <a:r>
-              <a:rPr sz="1400" b="0">
-                <a:solidFill>
-                  <a:srgbClr val="000000"/>
-                </a:solidFill>
-                <a:latin typeface="맑은 고딕"/>
-                <a:ea typeface="맑은 고딕"/>
-              </a:rPr>
-              <a:t>작업의 수용 예를 확정하면서 </a:t>
-            </a:r>
-            <a:r>
-              <a:rPr sz="1400" b="1">
-                <a:solidFill>
-                  <a:srgbClr val="000000"/>
-                </a:solidFill>
-                <a:latin typeface="맑은 고딕"/>
-                <a:ea typeface="맑은 고딕"/>
-              </a:rPr>
-              <a:t>예정일 계산과 회차 생성의 시점</a:t>
-            </a:r>
-            <a:r>
-              <a:rPr sz="1400" b="0">
-                <a:solidFill>
-                  <a:srgbClr val="000000"/>
-                </a:solidFill>
-                <a:latin typeface="맑은 고딕"/>
-                <a:ea typeface="맑은 고딕"/>
-              </a:rPr>
-              <a:t>을 정의서·모델에 명시했다.</a:t>
-            </a:r>
-          </a:p>
-        </p:txBody>
-      </p:sp>
-      <p:sp>
-        <p:nvSpPr>
-          <p:cNvPr id="10" name="내용 개체 틀 7">
-            <a:extLst>
-              <a:ext uri="{FF2B5EF4-FFF2-40B4-BE49-F238E27FC236}">
-                <a16:creationId xmlns:a16="http://schemas.microsoft.com/office/drawing/2014/main" id="{BEBA2C4A-B0BF-F2E4-EA6E-614C99CBA184}"/>
-              </a:ext>
-            </a:extLst>
-          </p:cNvPr>
-          <p:cNvSpPr>
-            <a:spLocks noGrp="1"/>
-          </p:cNvSpPr>
-          <p:nvPr>
-            <p:ph idx="1"/>
-          </p:nvPr>
-        </p:nvSpPr>
-        <p:spPr>
-          <a:xfrm>
-            <a:off x="4572000" y="1414318"/>
-            <a:ext cx="4439412" cy="4898147"/>
-          </a:xfrm>
-        </p:spPr>
-        <p:txBody>
-          <a:bodyPr>
-            <a:normAutofit/>
-          </a:bodyPr>
-          <a:lstStyle/>
-          <a:p>
-            <a:pPr lvl="2" marL="228600" indent="-182880">
+              <a:rPr sz="1000" b="1">
+                <a:solidFill>
+                  <a:srgbClr val="000000"/>
+                </a:solidFill>
+                <a:latin typeface="맑은 고딕"/>
+                <a:ea typeface="맑은 고딕"/>
+              </a:rPr>
+              <a:t>의존 순서와 별도 검사</a:t>
+            </a:r>
+          </a:p>
+          <a:p>
+            <a:pPr lvl="2" marL="411480" indent="-137160">
               <a:spcBef>
                 <a:spcPts val="300"/>
               </a:spcBef>
@@ -18100,47 +18930,14 @@
               <a:buChar char=""/>
             </a:pPr>
             <a:r>
-              <a:rPr sz="1400" b="1">
-                <a:solidFill>
-                  <a:srgbClr val="000000"/>
-                </a:solidFill>
-                <a:latin typeface="맑은 고딕"/>
-                <a:ea typeface="맑은 고딕"/>
-              </a:rPr>
-              <a:t>도메인 모델·아키텍처의 확정 결과</a:t>
-            </a:r>
-          </a:p>
-          <a:p>
-            <a:pPr lvl="3" marL="457200" indent="-182880">
-              <a:spcBef>
-                <a:spcPts val="300"/>
-              </a:spcBef>
-              <a:spcAft>
-                <a:spcPts val="300"/>
-              </a:spcAft>
-              <a:buSzPct val="90000"/>
-              <a:buFont typeface="Wingdings" pitchFamily="2" charset="2"/>
-              <a:buChar char=""/>
-            </a:pPr>
-            <a:r>
-              <a:rPr sz="1200" b="1">
-                <a:solidFill>
-                  <a:srgbClr val="000000"/>
-                </a:solidFill>
-                <a:latin typeface="맑은 고딕"/>
-                <a:ea typeface="맑은 고딕"/>
-              </a:rPr>
-              <a:t>상태·관계</a:t>
-            </a:r>
-            <a:r>
-              <a:rPr sz="1200" b="0">
-                <a:solidFill>
-                  <a:srgbClr val="000000"/>
-                </a:solidFill>
-                <a:latin typeface="맑은 고딕"/>
-                <a:ea typeface="맑은 고딕"/>
-              </a:rPr>
-              <a:t> —</a:t>
+              <a:rPr sz="1000" b="1">
+                <a:solidFill>
+                  <a:srgbClr val="000000"/>
+                </a:solidFill>
+                <a:latin typeface="맑은 고딕"/>
+                <a:ea typeface="맑은 고딕"/>
+              </a:rPr>
+              <a:t>의존 순서:</a:t>
             </a:r>
             <a:r>
               <a:rPr sz="1000" b="0">
@@ -18150,54 +18947,11 @@
                 <a:latin typeface="맑은 고딕"/>
                 <a:ea typeface="맑은 고딕"/>
               </a:rPr>
-              <a:t> 결제 대기 자기 전이, 승인 후 확정과 회차 생성, 회차 다중성 0..*를 유지했다.</a:t>
-            </a:r>
-          </a:p>
-          <a:p>
-            <a:pPr lvl="3" marL="457200" indent="-182880">
-              <a:spcBef>
-                <a:spcPts val="300"/>
-              </a:spcBef>
-              <a:spcAft>
-                <a:spcPts val="300"/>
-              </a:spcAft>
-              <a:buSzPct val="90000"/>
-              <a:buFont typeface="Wingdings" pitchFamily="2" charset="2"/>
-              <a:buChar char=""/>
-            </a:pPr>
-            <a:r>
-              <a:rPr sz="1200" b="1">
-                <a:solidFill>
-                  <a:srgbClr val="000000"/>
-                </a:solidFill>
-                <a:latin typeface="맑은 고딕"/>
-                <a:ea typeface="맑은 고딕"/>
-              </a:rPr>
-              <a:t>경계</a:t>
-            </a:r>
-            <a:r>
-              <a:rPr sz="1200" b="0">
-                <a:solidFill>
-                  <a:srgbClr val="000000"/>
-                </a:solidFill>
-                <a:latin typeface="맑은 고딕"/>
-                <a:ea typeface="맑은 고딕"/>
-              </a:rPr>
-              <a:t> —</a:t>
-            </a:r>
-            <a:r>
-              <a:rPr sz="1000" b="0">
-                <a:solidFill>
-                  <a:srgbClr val="000000"/>
-                </a:solidFill>
-                <a:latin typeface="맑은 고딕"/>
-                <a:ea typeface="맑은 고딕"/>
-              </a:rPr>
-              <a:t> 실제 외부 호출 대신 포트를 대역으로 연결한다. 통신 오류를 결제 거절에 포함하지 않는다.</a:t>
-            </a:r>
-          </a:p>
-          <a:p>
-            <a:pPr lvl="2" marL="228600" indent="-182880">
+              <a:t> 1 → 2 → 3·4 순서이며 3과 4는 서로 의존하지 않는다. 일정 계산, 상태 전이, 신청 저장 포트, 결제 응답 변환처럼 여러 단위가 함께 쓰는 코드를 바꾸면 앞 단위의 예까지 다시 실행한다.</a:t>
+            </a:r>
+          </a:p>
+          <a:p>
+            <a:pPr lvl="2" marL="411480" indent="-137160">
               <a:spcBef>
                 <a:spcPts val="300"/>
               </a:spcBef>
@@ -18209,18 +18963,28 @@
               <a:buChar char=""/>
             </a:pPr>
             <a:r>
-              <a:rPr sz="1400" b="1">
-                <a:solidFill>
-                  <a:srgbClr val="000000"/>
-                </a:solidFill>
-                <a:latin typeface="맑은 고딕"/>
-                <a:ea typeface="맑은 고딕"/>
-              </a:rPr>
-              <a:t>※ 현행화 기준</a:t>
-            </a:r>
-          </a:p>
-          <a:p>
-            <a:pPr lvl="3" marL="457200" indent="-182880">
+              <a:rPr sz="1000" b="1">
+                <a:solidFill>
+                  <a:srgbClr val="000000"/>
+                </a:solidFill>
+                <a:latin typeface="맑은 고딕"/>
+                <a:ea typeface="맑은 고딕"/>
+              </a:rPr>
+              <a:t>구조:</a:t>
+            </a:r>
+            <a:r>
+              <a:rPr sz="1000" b="0">
+                <a:solidFill>
+                  <a:srgbClr val="000000"/>
+                </a:solidFill>
+                <a:latin typeface="맑은 고딕"/>
+                <a:ea typeface="맑은 고딕"/>
+              </a:rPr>
+              <a:t> 네 단위를 모두 마친 뒤 정적 의존 검사로 실습 4의 허용·금지 의존과 순환이 없는지 확인한다.</a:t>
+            </a:r>
+          </a:p>
+          <a:p>
+            <a:pPr lvl="2" marL="411480" indent="-137160">
               <a:spcBef>
                 <a:spcPts val="300"/>
               </a:spcBef>
@@ -18229,27 +18993,17 @@
               </a:spcAft>
               <a:buSzPct val="90000"/>
               <a:buFont typeface="Wingdings" pitchFamily="2" charset="2"/>
-              <a:buChar char=""/>
+              <a:buChar char=""/>
             </a:pPr>
             <a:r>
-              <a:rPr sz="1200" b="1">
-                <a:solidFill>
-                  <a:srgbClr val="000000"/>
-                </a:solidFill>
-                <a:latin typeface="맑은 고딕"/>
-                <a:ea typeface="맑은 고딕"/>
-              </a:rPr>
-              <a:t>반영</a:t>
-            </a:r>
-            <a:r>
-              <a:rPr sz="1200" b="0">
-                <a:solidFill>
-                  <a:srgbClr val="000000"/>
-                </a:solidFill>
-                <a:latin typeface="맑은 고딕"/>
-                <a:ea typeface="맑은 고딕"/>
-              </a:rPr>
-              <a:t> —</a:t>
+              <a:rPr sz="1000" b="1">
+                <a:solidFill>
+                  <a:srgbClr val="000000"/>
+                </a:solidFill>
+                <a:latin typeface="맑은 고딕"/>
+                <a:ea typeface="맑은 고딕"/>
+              </a:rPr>
+              <a:t>성능:</a:t>
             </a:r>
             <a:r>
               <a:rPr sz="1000" b="0">
@@ -18259,11 +19013,32 @@
                 <a:latin typeface="맑은 고딕"/>
                 <a:ea typeface="맑은 고딕"/>
               </a:rPr>
-              <a:t> 확정 문장·수용 예·검증 가능한 작업 단위를 다음 맥락 패키지에 포함했다.</a:t>
-            </a:r>
-          </a:p>
-          <a:p>
-            <a:pPr lvl="3" marL="457200" indent="-182880">
+              <a:t> 실습 2의 품질 요구사항은 연계 환경에서 실측한 결과로만 판정한다. 대역 검증으로 충족을 선언하지 않는다.</a:t>
+            </a:r>
+          </a:p>
+          <a:p>
+            <a:pPr marL="182880" indent="0">
+              <a:spcBef>
+                <a:spcPts val="300"/>
+              </a:spcBef>
+              <a:spcAft>
+                <a:spcPts val="300"/>
+              </a:spcAft>
+              <a:buNone/>
+            </a:pPr>
+            <a:r>
+              <a:rPr sz="1000" b="1">
+                <a:solidFill>
+                  <a:srgbClr val="000000"/>
+                </a:solidFill>
+                <a:latin typeface="맑은 고딕"/>
+                <a:ea typeface="맑은 고딕"/>
+              </a:rPr>
+              <a:t>남은 미정</a:t>
+            </a:r>
+          </a:p>
+          <a:p>
+            <a:pPr lvl="2" marL="411480" indent="-137160">
               <a:spcBef>
                 <a:spcPts val="300"/>
               </a:spcBef>
@@ -18272,29 +19047,9 @@
               </a:spcAft>
               <a:buSzPct val="90000"/>
               <a:buFont typeface="Wingdings" pitchFamily="2" charset="2"/>
-              <a:buChar char=""/>
+              <a:buChar char=""/>
             </a:pPr>
             <a:r>
-              <a:rPr sz="1200" b="1">
-                <a:solidFill>
-                  <a:srgbClr val="000000"/>
-                </a:solidFill>
-                <a:latin typeface="맑은 고딕"/>
-                <a:ea typeface="맑은 고딕"/>
-              </a:rPr>
-              <a:t>기록만</a:t>
-            </a:r>
-            <a:r>
-              <a:rPr sz="1200" b="0">
-                <a:solidFill>
-                  <a:srgbClr val="000000"/>
-                </a:solidFill>
-                <a:latin typeface="맑은 고딕"/>
-                <a:ea typeface="맑은 고딕"/>
-              </a:rPr>
-              <a:t> —</a:t>
-            </a:r>
-            <a:r>
               <a:rPr sz="1000" b="0">
                 <a:solidFill>
                   <a:srgbClr val="000000"/>
@@ -18302,7 +19057,199 @@
                 <a:latin typeface="맑은 고딕"/>
                 <a:ea typeface="맑은 고딕"/>
               </a:rPr>
-              <a:t> 미정 장애 처리는 담당·확인 시점과 함께 보류했고 자동 환불 같은 추측은 제외했다.</a:t>
+              <a:t>결제 제공자의 멱등·조회·오류 규격 —</a:t>
+            </a:r>
+            <a:r>
+              <a:rPr sz="1000" b="0">
+                <a:solidFill>
+                  <a:srgbClr val="000000"/>
+                </a:solidFill>
+                <a:latin typeface="맑은 고딕"/>
+                <a:ea typeface="맑은 고딕"/>
+              </a:rPr>
+              <a:t> 확인되기 전에는 실제 결제 연동을 완료로 볼 수 없다</a:t>
+            </a:r>
+            <a:r>
+              <a:rPr sz="1000" b="0">
+                <a:solidFill>
+                  <a:srgbClr val="000000"/>
+                </a:solidFill>
+                <a:latin typeface="맑은 고딕"/>
+                <a:ea typeface="맑은 고딕"/>
+              </a:rPr>
+              <a:t>(연동)</a:t>
+            </a:r>
+          </a:p>
+          <a:p>
+            <a:pPr lvl="2" marL="411480" indent="-137160">
+              <a:spcBef>
+                <a:spcPts val="300"/>
+              </a:spcBef>
+              <a:spcAft>
+                <a:spcPts val="300"/>
+              </a:spcAft>
+              <a:buSzPct val="90000"/>
+              <a:buFont typeface="Wingdings" pitchFamily="2" charset="2"/>
+              <a:buChar char=""/>
+            </a:pPr>
+            <a:r>
+              <a:rPr sz="1000" b="0">
+                <a:solidFill>
+                  <a:srgbClr val="000000"/>
+                </a:solidFill>
+                <a:latin typeface="맑은 고딕"/>
+                <a:ea typeface="맑은 고딕"/>
+              </a:rPr>
+              <a:t>영속성 기반의 조건부 전이·원자적 반영·고유 제약 —</a:t>
+            </a:r>
+            <a:r>
+              <a:rPr sz="1000" b="0">
+                <a:solidFill>
+                  <a:srgbClr val="000000"/>
+                </a:solidFill>
+                <a:latin typeface="맑은 고딕"/>
+                <a:ea typeface="맑은 고딕"/>
+              </a:rPr>
+              <a:t> 동시 경쟁과 원자성은 대역으로 입증할 수 없다</a:t>
+            </a:r>
+            <a:r>
+              <a:rPr sz="1000" b="0">
+                <a:solidFill>
+                  <a:srgbClr val="000000"/>
+                </a:solidFill>
+                <a:latin typeface="맑은 고딕"/>
+                <a:ea typeface="맑은 고딕"/>
+              </a:rPr>
+              <a:t>(저장)</a:t>
+            </a:r>
+          </a:p>
+          <a:p>
+            <a:pPr lvl="2" marL="411480" indent="-137160">
+              <a:spcBef>
+                <a:spcPts val="300"/>
+              </a:spcBef>
+              <a:spcAft>
+                <a:spcPts val="300"/>
+              </a:spcAft>
+              <a:buSzPct val="90000"/>
+              <a:buFont typeface="Wingdings" pitchFamily="2" charset="2"/>
+              <a:buChar char=""/>
+            </a:pPr>
+            <a:r>
+              <a:rPr sz="1000" b="0">
+                <a:solidFill>
+                  <a:srgbClr val="000000"/>
+                </a:solidFill>
+                <a:latin typeface="맑은 고딕"/>
+                <a:ea typeface="맑은 고딕"/>
+              </a:rPr>
+              <a:t>신청 식별자 전달 방식과 DB 제약 구현 —</a:t>
+            </a:r>
+            <a:r>
+              <a:rPr sz="1000" b="0">
+                <a:solidFill>
+                  <a:srgbClr val="000000"/>
+                </a:solidFill>
+                <a:latin typeface="맑은 고딕"/>
+                <a:ea typeface="맑은 고딕"/>
+              </a:rPr>
+              <a:t> 업무 계약만 정했다</a:t>
+            </a:r>
+            <a:r>
+              <a:rPr sz="1000" b="0">
+                <a:solidFill>
+                  <a:srgbClr val="000000"/>
+                </a:solidFill>
+                <a:latin typeface="맑은 고딕"/>
+                <a:ea typeface="맑은 고딕"/>
+              </a:rPr>
+              <a:t>(업무·저장)</a:t>
+            </a:r>
+          </a:p>
+          <a:p>
+            <a:pPr lvl="2" marL="411480" indent="-137160">
+              <a:spcBef>
+                <a:spcPts val="300"/>
+              </a:spcBef>
+              <a:spcAft>
+                <a:spcPts val="300"/>
+              </a:spcAft>
+              <a:buSzPct val="90000"/>
+              <a:buFont typeface="Wingdings" pitchFamily="2" charset="2"/>
+              <a:buChar char=""/>
+            </a:pPr>
+            <a:r>
+              <a:rPr sz="1000" b="0">
+                <a:solidFill>
+                  <a:srgbClr val="000000"/>
+                </a:solidFill>
+                <a:latin typeface="맑은 고딕"/>
+                <a:ea typeface="맑은 고딕"/>
+              </a:rPr>
+              <a:t>기존 기준 신청일의 취득 —</a:t>
+            </a:r>
+            <a:r>
+              <a:rPr sz="1000" b="0">
+                <a:solidFill>
+                  <a:srgbClr val="000000"/>
+                </a:solidFill>
+                <a:latin typeface="맑은 고딕"/>
+                <a:ea typeface="맑은 고딕"/>
+              </a:rPr>
+              <a:t> 대표 신청일은 대역이 주는 값이다</a:t>
+            </a:r>
+            <a:r>
+              <a:rPr sz="1000" b="0">
+                <a:solidFill>
+                  <a:srgbClr val="000000"/>
+                </a:solidFill>
+                <a:latin typeface="맑은 고딕"/>
+                <a:ea typeface="맑은 고딕"/>
+              </a:rPr>
+              <a:t>(연동)</a:t>
+            </a:r>
+          </a:p>
+          <a:p>
+            <a:pPr lvl="2" marL="411480" indent="-137160">
+              <a:spcBef>
+                <a:spcPts val="300"/>
+              </a:spcBef>
+              <a:spcAft>
+                <a:spcPts val="300"/>
+              </a:spcAft>
+              <a:buSzPct val="90000"/>
+              <a:buFont typeface="Wingdings" pitchFamily="2" charset="2"/>
+              <a:buChar char=""/>
+            </a:pPr>
+            <a:r>
+              <a:rPr sz="1000" b="0">
+                <a:solidFill>
+                  <a:srgbClr val="000000"/>
+                </a:solidFill>
+                <a:latin typeface="맑은 고딕"/>
+                <a:ea typeface="맑은 고딕"/>
+              </a:rPr>
+              <a:t>결과 확인의 시작 주체·저장 전 중단 시 복구·신청준비 유효기간 —</a:t>
+            </a:r>
+            <a:r>
+              <a:rPr sz="1000" b="0">
+                <a:solidFill>
+                  <a:srgbClr val="000000"/>
+                </a:solidFill>
+                <a:latin typeface="맑은 고딕"/>
+                <a:ea typeface="맑은 고딕"/>
+              </a:rPr>
+              <a:t> 실습 4의 미결 사항으로 유지한다</a:t>
+            </a:r>
+            <a:r>
+              <a:rPr sz="1000" b="0">
+                <a:solidFill>
+                  <a:srgbClr val="000000"/>
+                </a:solidFill>
+                <a:latin typeface="맑은 고딕"/>
+                <a:ea typeface="맑은 고딕"/>
+              </a:rPr>
+              <a:t>(업무)</a:t>
             </a:r>
           </a:p>
         </p:txBody>
@@ -20063,6 +21010,178 @@
             </a:r>
           </a:p>
           <a:p>
+            <a:pPr lvl="3" marL="457200" indent="-182880">
+              <a:spcBef>
+                <a:spcPts val="300"/>
+              </a:spcBef>
+              <a:spcAft>
+                <a:spcPts val="300"/>
+              </a:spcAft>
+              <a:buSzPct val="90000"/>
+              <a:buFont typeface="Wingdings" pitchFamily="2" charset="2"/>
+              <a:buChar char=""/>
+            </a:pPr>
+            <a:r>
+              <a:rPr sz="1200" b="1">
+                <a:solidFill>
+                  <a:srgbClr val="000000"/>
+                </a:solidFill>
+                <a:latin typeface="맑은 고딕"/>
+                <a:ea typeface="맑은 고딕"/>
+              </a:rPr>
+              <a:t>금액</a:t>
+            </a:r>
+            <a:r>
+              <a:rPr sz="1200" b="0">
+                <a:solidFill>
+                  <a:srgbClr val="000000"/>
+                </a:solidFill>
+                <a:latin typeface="맑은 고딕"/>
+                <a:ea typeface="맑은 고딕"/>
+              </a:rPr>
+              <a:t> —</a:t>
+            </a:r>
+            <a:r>
+              <a:rPr sz="1000" b="0">
+                <a:solidFill>
+                  <a:srgbClr val="000000"/>
+                </a:solidFill>
+                <a:latin typeface="맑은 고딕"/>
+                <a:ea typeface="맑은 고딕"/>
+              </a:rPr>
+              <a:t> 주문이 생길 때의 판매가를 항목 단가로 확정한다. 펜 2개 × 1,000원 = 2,000원.</a:t>
+            </a:r>
+          </a:p>
+          <a:p>
+            <a:pPr lvl="3" marL="457200" indent="-182880">
+              <a:spcBef>
+                <a:spcPts val="300"/>
+              </a:spcBef>
+              <a:spcAft>
+                <a:spcPts val="300"/>
+              </a:spcAft>
+              <a:buSzPct val="90000"/>
+              <a:buFont typeface="Wingdings" pitchFamily="2" charset="2"/>
+              <a:buChar char=""/>
+            </a:pPr>
+            <a:r>
+              <a:rPr sz="1200" b="1">
+                <a:solidFill>
+                  <a:srgbClr val="000000"/>
+                </a:solidFill>
+                <a:latin typeface="맑은 고딕"/>
+                <a:ea typeface="맑은 고딕"/>
+              </a:rPr>
+              <a:t>가격 변경</a:t>
+            </a:r>
+            <a:r>
+              <a:rPr sz="1200" b="0">
+                <a:solidFill>
+                  <a:srgbClr val="000000"/>
+                </a:solidFill>
+                <a:latin typeface="맑은 고딕"/>
+                <a:ea typeface="맑은 고딕"/>
+              </a:rPr>
+              <a:t> —</a:t>
+            </a:r>
+            <a:r>
+              <a:rPr sz="1000" b="0">
+                <a:solidFill>
+                  <a:srgbClr val="000000"/>
+                </a:solidFill>
+                <a:latin typeface="맑은 고딕"/>
+                <a:ea typeface="맑은 고딕"/>
+              </a:rPr>
+              <a:t> 결제 직전 판매가가 1,200원이 되어도 기존 주문은 2,000원으로 결제한다.</a:t>
+            </a:r>
+          </a:p>
+          <a:p>
+            <a:pPr lvl="3" marL="457200" indent="-182880">
+              <a:spcBef>
+                <a:spcPts val="300"/>
+              </a:spcBef>
+              <a:spcAft>
+                <a:spcPts val="300"/>
+              </a:spcAft>
+              <a:buSzPct val="90000"/>
+              <a:buFont typeface="Wingdings" pitchFamily="2" charset="2"/>
+              <a:buChar char=""/>
+            </a:pPr>
+            <a:r>
+              <a:rPr sz="1200" b="1">
+                <a:solidFill>
+                  <a:srgbClr val="000000"/>
+                </a:solidFill>
+                <a:latin typeface="맑은 고딕"/>
+                <a:ea typeface="맑은 고딕"/>
+              </a:rPr>
+              <a:t>승인</a:t>
+            </a:r>
+            <a:r>
+              <a:rPr sz="1200" b="0">
+                <a:solidFill>
+                  <a:srgbClr val="000000"/>
+                </a:solidFill>
+                <a:latin typeface="맑은 고딕"/>
+                <a:ea typeface="맑은 고딕"/>
+              </a:rPr>
+              <a:t> —</a:t>
+            </a:r>
+            <a:r>
+              <a:rPr sz="1000" b="0">
+                <a:solidFill>
+                  <a:srgbClr val="000000"/>
+                </a:solidFill>
+                <a:latin typeface="맑은 고딕"/>
+                <a:ea typeface="맑은 고딕"/>
+              </a:rPr>
+              <a:t> 결제완료로 바꾼 뒤 서울로 배송을 1회 요청한다.</a:t>
+            </a:r>
+          </a:p>
+          <a:p>
+            <a:pPr lvl="3" marL="457200" indent="-182880">
+              <a:spcBef>
+                <a:spcPts val="300"/>
+              </a:spcBef>
+              <a:spcAft>
+                <a:spcPts val="300"/>
+              </a:spcAft>
+              <a:buSzPct val="90000"/>
+              <a:buFont typeface="Wingdings" pitchFamily="2" charset="2"/>
+              <a:buChar char=""/>
+            </a:pPr>
+            <a:r>
+              <a:rPr sz="1200" b="1">
+                <a:solidFill>
+                  <a:srgbClr val="000000"/>
+                </a:solidFill>
+                <a:latin typeface="맑은 고딕"/>
+                <a:ea typeface="맑은 고딕"/>
+              </a:rPr>
+              <a:t>거절</a:t>
+            </a:r>
+            <a:r>
+              <a:rPr sz="1200" b="0">
+                <a:solidFill>
+                  <a:srgbClr val="000000"/>
+                </a:solidFill>
+                <a:latin typeface="맑은 고딕"/>
+                <a:ea typeface="맑은 고딕"/>
+              </a:rPr>
+              <a:t> —</a:t>
+            </a:r>
+            <a:r>
+              <a:rPr sz="1000" b="0">
+                <a:solidFill>
+                  <a:srgbClr val="000000"/>
+                </a:solidFill>
+                <a:latin typeface="맑은 고딕"/>
+                <a:ea typeface="맑은 고딕"/>
+              </a:rPr>
+              <a:t> 결제대기를 유지하고 배송을 요청하지 않는다. 다른 카드로 다시 결제할 수 있다.</a:t>
+            </a:r>
+          </a:p>
+          <a:p>
             <a:pPr lvl="2" marL="228600" indent="-182880">
               <a:spcBef>
                 <a:spcPts val="300"/>
@@ -20082,10 +21201,33 @@
                 <a:latin typeface="맑은 고딕"/>
                 <a:ea typeface="맑은 고딕"/>
               </a:rPr>
-              <a:t>금액</a:t>
-            </a:r>
-            <a:r>
-              <a:rPr sz="1400" b="0">
+              <a:t>범위</a:t>
+            </a:r>
+          </a:p>
+          <a:p>
+            <a:pPr lvl="3" marL="457200" indent="-182880">
+              <a:spcBef>
+                <a:spcPts val="300"/>
+              </a:spcBef>
+              <a:spcAft>
+                <a:spcPts val="300"/>
+              </a:spcAft>
+              <a:buSzPct val="90000"/>
+              <a:buFont typeface="Wingdings" pitchFamily="2" charset="2"/>
+              <a:buChar char=""/>
+            </a:pPr>
+            <a:r>
+              <a:rPr sz="1200" b="1">
+                <a:solidFill>
+                  <a:srgbClr val="000000"/>
+                </a:solidFill>
+                <a:latin typeface="맑은 고딕"/>
+                <a:ea typeface="맑은 고딕"/>
+              </a:rPr>
+              <a:t>포함</a:t>
+            </a:r>
+            <a:r>
+              <a:rPr sz="1200" b="0">
                 <a:solidFill>
                   <a:srgbClr val="000000"/>
                 </a:solidFill>
@@ -20095,6 +21237,39 @@
               <a:t> —</a:t>
             </a:r>
             <a:r>
+              <a:rPr sz="1000" b="0">
+                <a:solidFill>
+                  <a:srgbClr val="000000"/>
+                </a:solidFill>
+                <a:latin typeface="맑은 고딕"/>
+                <a:ea typeface="맑은 고딕"/>
+              </a:rPr>
+              <a:t> 배송지 지정 때 주문 생성·금액 확정, 결제 승인 요청, 결과 반영, 승인 후 배송 요청.</a:t>
+            </a:r>
+          </a:p>
+          <a:p>
+            <a:pPr lvl="3" marL="457200" indent="-182880">
+              <a:spcBef>
+                <a:spcPts val="300"/>
+              </a:spcBef>
+              <a:spcAft>
+                <a:spcPts val="300"/>
+              </a:spcAft>
+              <a:buSzPct val="90000"/>
+              <a:buFont typeface="Wingdings" pitchFamily="2" charset="2"/>
+              <a:buChar char=""/>
+            </a:pPr>
+            <a:r>
+              <a:rPr sz="1200" b="1">
+                <a:solidFill>
+                  <a:srgbClr val="000000"/>
+                </a:solidFill>
+                <a:latin typeface="맑은 고딕"/>
+                <a:ea typeface="맑은 고딕"/>
+              </a:rPr>
+              <a:t>제외</a:t>
+            </a:r>
+            <a:r>
               <a:rPr sz="1200" b="0">
                 <a:solidFill>
                   <a:srgbClr val="000000"/>
@@ -20102,7 +21277,17 @@
                 <a:latin typeface="맑은 고딕"/>
                 <a:ea typeface="맑은 고딕"/>
               </a:rPr>
-              <a:t> 주문이 생길 때의 판매가를 항목 단가로 확정한다. 펜 2개 × 1,000원 = 2,000원.</a:t>
+              <a:t> —</a:t>
+            </a:r>
+            <a:r>
+              <a:rPr sz="1000" b="0">
+                <a:solidFill>
+                  <a:srgbClr val="000000"/>
+                </a:solidFill>
+                <a:latin typeface="맑은 고딕"/>
+                <a:ea typeface="맑은 고딕"/>
+              </a:rPr>
+              <a:t> 상품 탐색·장바구니, 취소·환불, 할인·배송비, 재고, 배송 이후 처리.</a:t>
             </a:r>
           </a:p>
           <a:p>
@@ -20125,10 +21310,33 @@
                 <a:latin typeface="맑은 고딕"/>
                 <a:ea typeface="맑은 고딕"/>
               </a:rPr>
-              <a:t>가격 변경</a:t>
-            </a:r>
-            <a:r>
-              <a:rPr sz="1400" b="0">
+              <a:t>미정</a:t>
+            </a:r>
+          </a:p>
+          <a:p>
+            <a:pPr lvl="3" marL="457200" indent="-182880">
+              <a:spcBef>
+                <a:spcPts val="300"/>
+              </a:spcBef>
+              <a:spcAft>
+                <a:spcPts val="300"/>
+              </a:spcAft>
+              <a:buSzPct val="90000"/>
+              <a:buFont typeface="Wingdings" pitchFamily="2" charset="2"/>
+              <a:buChar char=""/>
+            </a:pPr>
+            <a:r>
+              <a:rPr sz="1200" b="1">
+                <a:solidFill>
+                  <a:srgbClr val="000000"/>
+                </a:solidFill>
+                <a:latin typeface="맑은 고딕"/>
+                <a:ea typeface="맑은 고딕"/>
+              </a:rPr>
+              <a:t>배송 요청 실패</a:t>
+            </a:r>
+            <a:r>
+              <a:rPr sz="1200" b="0">
                 <a:solidFill>
                   <a:srgbClr val="000000"/>
                 </a:solidFill>
@@ -20138,14 +21346,14 @@
               <a:t> —</a:t>
             </a:r>
             <a:r>
-              <a:rPr sz="1200" b="0">
-                <a:solidFill>
-                  <a:srgbClr val="000000"/>
-                </a:solidFill>
-                <a:latin typeface="맑은 고딕"/>
-                <a:ea typeface="맑은 고딕"/>
-              </a:rPr>
-              <a:t> 결제 직전 판매가가 1,200원이 되어도 기존 주문은 2,000원으로 결제한다.</a:t>
+              <a:rPr sz="1000" b="0">
+                <a:solidFill>
+                  <a:srgbClr val="000000"/>
+                </a:solidFill>
+                <a:latin typeface="맑은 고딕"/>
+                <a:ea typeface="맑은 고딕"/>
+              </a:rPr>
+              <a:t> 승인된 결제와 주문을 어떻게 처리할지 업무 담당자에게 확인한다. 이번 구현은 이 정책을 정하지 않는다.</a:t>
             </a:r>
           </a:p>
           <a:p>
@@ -20168,31 +21376,11 @@
                 <a:latin typeface="맑은 고딕"/>
                 <a:ea typeface="맑은 고딕"/>
               </a:rPr>
-              <a:t>승인</a:t>
-            </a:r>
-            <a:r>
-              <a:rPr sz="1400" b="0">
-                <a:solidFill>
-                  <a:srgbClr val="000000"/>
-                </a:solidFill>
-                <a:latin typeface="맑은 고딕"/>
-                <a:ea typeface="맑은 고딕"/>
-              </a:rPr>
-              <a:t> —</a:t>
-            </a:r>
-            <a:r>
-              <a:rPr sz="1200" b="0">
-                <a:solidFill>
-                  <a:srgbClr val="000000"/>
-                </a:solidFill>
-                <a:latin typeface="맑은 고딕"/>
-                <a:ea typeface="맑은 고딕"/>
-              </a:rPr>
-              <a:t> 결제완료로 바꾼 뒤 서울로 배송을 1회 요청한다.</a:t>
-            </a:r>
-          </a:p>
-          <a:p>
-            <a:pPr lvl="2" marL="228600" indent="-182880">
+              <a:t>참조</a:t>
+            </a:r>
+          </a:p>
+          <a:p>
+            <a:pPr lvl="3" marL="457200" indent="-182880">
               <a:spcBef>
                 <a:spcPts val="300"/>
               </a:spcBef>
@@ -20201,20 +21389,20 @@
               </a:spcAft>
               <a:buSzPct val="90000"/>
               <a:buFont typeface="Wingdings" pitchFamily="2" charset="2"/>
-              <a:buChar char=""/>
+              <a:buChar char=""/>
             </a:pPr>
             <a:r>
-              <a:rPr sz="1400" b="1">
-                <a:solidFill>
-                  <a:srgbClr val="000000"/>
-                </a:solidFill>
-                <a:latin typeface="맑은 고딕"/>
-                <a:ea typeface="맑은 고딕"/>
-              </a:rPr>
-              <a:t>거절</a:t>
-            </a:r>
-            <a:r>
-              <a:rPr sz="1400" b="0">
+              <a:rPr sz="1200" b="1">
+                <a:solidFill>
+                  <a:srgbClr val="000000"/>
+                </a:solidFill>
+                <a:latin typeface="맑은 고딕"/>
+                <a:ea typeface="맑은 고딕"/>
+              </a:rPr>
+              <a:t>요구사항 정의서</a:t>
+            </a:r>
+            <a:r>
+              <a:rPr sz="1200" b="0">
                 <a:solidFill>
                   <a:srgbClr val="000000"/>
                 </a:solidFill>
@@ -20224,18 +21412,18 @@
               <a:t> —</a:t>
             </a:r>
             <a:r>
-              <a:rPr sz="1200" b="0">
-                <a:solidFill>
-                  <a:srgbClr val="000000"/>
-                </a:solidFill>
-                <a:latin typeface="맑은 고딕"/>
-                <a:ea typeface="맑은 고딕"/>
-              </a:rPr>
-              <a:t> 결제대기를 유지하고 배송을 요청하지 않는다. 다른 카드로 다시 결제할 수 있다.</a:t>
-            </a:r>
-          </a:p>
-          <a:p>
-            <a:pPr lvl="2" marL="228600" indent="-182880">
+              <a:rPr sz="1000" b="0">
+                <a:solidFill>
+                  <a:srgbClr val="000000"/>
+                </a:solidFill>
+                <a:latin typeface="맑은 고딕"/>
+                <a:ea typeface="맑은 고딕"/>
+              </a:rPr>
+              <a:t> 금액·배송 요청·결제 거절의 업무 규칙.</a:t>
+            </a:r>
+          </a:p>
+          <a:p>
+            <a:pPr lvl="3" marL="457200" indent="-182880">
               <a:spcBef>
                 <a:spcPts val="300"/>
               </a:spcBef>
@@ -20244,21 +21432,41 @@
               </a:spcAft>
               <a:buSzPct val="90000"/>
               <a:buFont typeface="Wingdings" pitchFamily="2" charset="2"/>
-              <a:buChar char=""/>
+              <a:buChar char=""/>
             </a:pPr>
             <a:r>
-              <a:rPr sz="1400" b="1">
-                <a:solidFill>
-                  <a:srgbClr val="000000"/>
-                </a:solidFill>
-                <a:latin typeface="맑은 고딕"/>
-                <a:ea typeface="맑은 고딕"/>
-              </a:rPr>
-              <a:t>범위</a:t>
-            </a:r>
-          </a:p>
-          <a:p>
-            <a:pPr lvl="2" marL="228600" indent="-182880">
+              <a:rPr sz="1200" b="1">
+                <a:solidFill>
+                  <a:srgbClr val="000000"/>
+                </a:solidFill>
+                <a:latin typeface="맑은 고딕"/>
+                <a:ea typeface="맑은 고딕"/>
+              </a:rPr>
+              <a:t>도메인 모델</a:t>
+            </a:r>
+            <a:r>
+              <a:rPr sz="1200" b="0">
+                <a:solidFill>
+                  <a:srgbClr val="000000"/>
+                </a:solidFill>
+                <a:latin typeface="맑은 고딕"/>
+                <a:ea typeface="맑은 고딕"/>
+              </a:rPr>
+              <a:t> —</a:t>
+            </a:r>
+            <a:r>
+              <a:rPr sz="1000" b="0">
+                <a:solidFill>
+                  <a:srgbClr val="000000"/>
+                </a:solidFill>
+                <a:latin typeface="맑은 고딕"/>
+                <a:ea typeface="맑은 고딕"/>
+              </a:rPr>
+              <a:t> 단가·주문 총액의 의미, 결제대기 자기 전이.</a:t>
+            </a:r>
+          </a:p>
+          <a:p>
+            <a:pPr lvl="3" marL="457200" indent="-182880">
               <a:spcBef>
                 <a:spcPts val="300"/>
               </a:spcBef>
@@ -20267,20 +21475,20 @@
               </a:spcAft>
               <a:buSzPct val="90000"/>
               <a:buFont typeface="Wingdings" pitchFamily="2" charset="2"/>
-              <a:buChar char=""/>
+              <a:buChar char=""/>
             </a:pPr>
             <a:r>
-              <a:rPr sz="1400" b="1">
-                <a:solidFill>
-                  <a:srgbClr val="000000"/>
-                </a:solidFill>
-                <a:latin typeface="맑은 고딕"/>
-                <a:ea typeface="맑은 고딕"/>
-              </a:rPr>
-              <a:t>포함</a:t>
-            </a:r>
-            <a:r>
-              <a:rPr sz="1400" b="0">
+              <a:rPr sz="1200" b="1">
+                <a:solidFill>
+                  <a:srgbClr val="000000"/>
+                </a:solidFill>
+                <a:latin typeface="맑은 고딕"/>
+                <a:ea typeface="맑은 고딕"/>
+              </a:rPr>
+              <a:t>아키텍처</a:t>
+            </a:r>
+            <a:r>
+              <a:rPr sz="1200" b="0">
                 <a:solidFill>
                   <a:srgbClr val="000000"/>
                 </a:solidFill>
@@ -20290,14 +21498,14 @@
               <a:t> —</a:t>
             </a:r>
             <a:r>
-              <a:rPr sz="1200" b="0">
-                <a:solidFill>
-                  <a:srgbClr val="000000"/>
-                </a:solidFill>
-                <a:latin typeface="맑은 고딕"/>
-                <a:ea typeface="맑은 고딕"/>
-              </a:rPr>
-              <a:t> 배송지 지정 때 주문 생성·금액 확정, 결제 승인 요청, 결과 반영, 승인 후 배송 요청.</a:t>
+              <a:rPr sz="1000" b="0">
+                <a:solidFill>
+                  <a:srgbClr val="000000"/>
+                </a:solidFill>
+                <a:latin typeface="맑은 고딕"/>
+                <a:ea typeface="맑은 고딕"/>
+              </a:rPr>
+              <a:t> 업무는 연동·영속 구현에 의존하지 않는다.</a:t>
             </a:r>
           </a:p>
         </p:txBody>
@@ -20368,296 +21576,6 @@
                 <a:ea typeface="맑은 고딕"/>
               </a:rPr>
               <a:t>. 이번 작업은 배송지 지정부터 결제 결과와 배송 요청까지다.</a:t>
-            </a:r>
-          </a:p>
-        </p:txBody>
-      </p:sp>
-      <p:sp>
-        <p:nvSpPr>
-          <p:cNvPr id="10" name="내용 개체 틀 7">
-            <a:extLst>
-              <a:ext uri="{FF2B5EF4-FFF2-40B4-BE49-F238E27FC236}">
-                <a16:creationId xmlns:a16="http://schemas.microsoft.com/office/drawing/2014/main" id="{BEBA2C4A-B0BF-F2E4-EA6E-614C99CBA184}"/>
-              </a:ext>
-            </a:extLst>
-          </p:cNvPr>
-          <p:cNvSpPr>
-            <a:spLocks noGrp="1"/>
-          </p:cNvSpPr>
-          <p:nvPr>
-            <p:ph idx="1"/>
-          </p:nvPr>
-        </p:nvSpPr>
-        <p:spPr>
-          <a:xfrm>
-            <a:off x="4572000" y="1414318"/>
-            <a:ext cx="4439412" cy="4898147"/>
-          </a:xfrm>
-        </p:spPr>
-        <p:txBody>
-          <a:bodyPr>
-            <a:normAutofit/>
-          </a:bodyPr>
-          <a:lstStyle/>
-          <a:p>
-            <a:pPr lvl="2" marL="228600" indent="-182880">
-              <a:spcBef>
-                <a:spcPts val="300"/>
-              </a:spcBef>
-              <a:spcAft>
-                <a:spcPts val="300"/>
-              </a:spcAft>
-              <a:buSzPct val="90000"/>
-              <a:buFont typeface="Wingdings" pitchFamily="2" charset="2"/>
-              <a:buChar char=""/>
-            </a:pPr>
-            <a:r>
-              <a:rPr sz="1400" b="1">
-                <a:solidFill>
-                  <a:srgbClr val="000000"/>
-                </a:solidFill>
-                <a:latin typeface="맑은 고딕"/>
-                <a:ea typeface="맑은 고딕"/>
-              </a:rPr>
-              <a:t>제외</a:t>
-            </a:r>
-            <a:r>
-              <a:rPr sz="1400" b="0">
-                <a:solidFill>
-                  <a:srgbClr val="000000"/>
-                </a:solidFill>
-                <a:latin typeface="맑은 고딕"/>
-                <a:ea typeface="맑은 고딕"/>
-              </a:rPr>
-              <a:t> —</a:t>
-            </a:r>
-            <a:r>
-              <a:rPr sz="1200" b="0">
-                <a:solidFill>
-                  <a:srgbClr val="000000"/>
-                </a:solidFill>
-                <a:latin typeface="맑은 고딕"/>
-                <a:ea typeface="맑은 고딕"/>
-              </a:rPr>
-              <a:t> 상품 탐색·장바구니, 취소·환불, 할인·배송비, 재고, 배송 이후 처리.</a:t>
-            </a:r>
-          </a:p>
-          <a:p>
-            <a:pPr lvl="2" marL="228600" indent="-182880">
-              <a:spcBef>
-                <a:spcPts val="300"/>
-              </a:spcBef>
-              <a:spcAft>
-                <a:spcPts val="300"/>
-              </a:spcAft>
-              <a:buSzPct val="90000"/>
-              <a:buFont typeface="Wingdings" pitchFamily="2" charset="2"/>
-              <a:buChar char=""/>
-            </a:pPr>
-            <a:r>
-              <a:rPr sz="1400" b="1">
-                <a:solidFill>
-                  <a:srgbClr val="000000"/>
-                </a:solidFill>
-                <a:latin typeface="맑은 고딕"/>
-                <a:ea typeface="맑은 고딕"/>
-              </a:rPr>
-              <a:t>미정</a:t>
-            </a:r>
-          </a:p>
-          <a:p>
-            <a:pPr lvl="2" marL="228600" indent="-182880">
-              <a:spcBef>
-                <a:spcPts val="300"/>
-              </a:spcBef>
-              <a:spcAft>
-                <a:spcPts val="300"/>
-              </a:spcAft>
-              <a:buSzPct val="90000"/>
-              <a:buFont typeface="Wingdings" pitchFamily="2" charset="2"/>
-              <a:buChar char=""/>
-            </a:pPr>
-            <a:r>
-              <a:rPr sz="1400" b="1">
-                <a:solidFill>
-                  <a:srgbClr val="000000"/>
-                </a:solidFill>
-                <a:latin typeface="맑은 고딕"/>
-                <a:ea typeface="맑은 고딕"/>
-              </a:rPr>
-              <a:t>배송 요청 실패</a:t>
-            </a:r>
-            <a:r>
-              <a:rPr sz="1400" b="0">
-                <a:solidFill>
-                  <a:srgbClr val="000000"/>
-                </a:solidFill>
-                <a:latin typeface="맑은 고딕"/>
-                <a:ea typeface="맑은 고딕"/>
-              </a:rPr>
-              <a:t> —</a:t>
-            </a:r>
-            <a:r>
-              <a:rPr sz="1200" b="0">
-                <a:solidFill>
-                  <a:srgbClr val="000000"/>
-                </a:solidFill>
-                <a:latin typeface="맑은 고딕"/>
-                <a:ea typeface="맑은 고딕"/>
-              </a:rPr>
-              <a:t> 승인된 결제와 주문을 어떻게 처리할지 업무 담당자에게 확인한다. 이번 구현은 이 정책을 정하지 않는다.</a:t>
-            </a:r>
-          </a:p>
-          <a:p>
-            <a:pPr lvl="2" marL="228600" indent="-182880">
-              <a:spcBef>
-                <a:spcPts val="300"/>
-              </a:spcBef>
-              <a:spcAft>
-                <a:spcPts val="300"/>
-              </a:spcAft>
-              <a:buSzPct val="90000"/>
-              <a:buFont typeface="Wingdings" pitchFamily="2" charset="2"/>
-              <a:buChar char=""/>
-            </a:pPr>
-            <a:r>
-              <a:rPr sz="1400" b="1">
-                <a:solidFill>
-                  <a:srgbClr val="000000"/>
-                </a:solidFill>
-                <a:latin typeface="맑은 고딕"/>
-                <a:ea typeface="맑은 고딕"/>
-              </a:rPr>
-              <a:t>참조</a:t>
-            </a:r>
-          </a:p>
-          <a:p>
-            <a:pPr lvl="2" marL="228600" indent="-182880">
-              <a:spcBef>
-                <a:spcPts val="300"/>
-              </a:spcBef>
-              <a:spcAft>
-                <a:spcPts val="300"/>
-              </a:spcAft>
-              <a:buSzPct val="90000"/>
-              <a:buFont typeface="Wingdings" pitchFamily="2" charset="2"/>
-              <a:buChar char=""/>
-            </a:pPr>
-            <a:r>
-              <a:rPr sz="1400" b="1">
-                <a:solidFill>
-                  <a:srgbClr val="000000"/>
-                </a:solidFill>
-                <a:latin typeface="맑은 고딕"/>
-                <a:ea typeface="맑은 고딕"/>
-              </a:rPr>
-              <a:t>요구사항 정의서</a:t>
-            </a:r>
-            <a:r>
-              <a:rPr sz="1400" b="0">
-                <a:solidFill>
-                  <a:srgbClr val="000000"/>
-                </a:solidFill>
-                <a:latin typeface="맑은 고딕"/>
-                <a:ea typeface="맑은 고딕"/>
-              </a:rPr>
-              <a:t> —</a:t>
-            </a:r>
-            <a:r>
-              <a:rPr sz="1200" b="0">
-                <a:solidFill>
-                  <a:srgbClr val="000000"/>
-                </a:solidFill>
-                <a:latin typeface="맑은 고딕"/>
-                <a:ea typeface="맑은 고딕"/>
-              </a:rPr>
-              <a:t> 금액·배송 요청·결제 거절의 업무 규칙.</a:t>
-            </a:r>
-          </a:p>
-          <a:p>
-            <a:pPr lvl="2" marL="228600" indent="-182880">
-              <a:spcBef>
-                <a:spcPts val="300"/>
-              </a:spcBef>
-              <a:spcAft>
-                <a:spcPts val="300"/>
-              </a:spcAft>
-              <a:buSzPct val="90000"/>
-              <a:buFont typeface="Wingdings" pitchFamily="2" charset="2"/>
-              <a:buChar char=""/>
-            </a:pPr>
-            <a:r>
-              <a:rPr sz="1400" b="1">
-                <a:solidFill>
-                  <a:srgbClr val="000000"/>
-                </a:solidFill>
-                <a:latin typeface="맑은 고딕"/>
-                <a:ea typeface="맑은 고딕"/>
-              </a:rPr>
-              <a:t>도메인 모델</a:t>
-            </a:r>
-            <a:r>
-              <a:rPr sz="1400" b="0">
-                <a:solidFill>
-                  <a:srgbClr val="000000"/>
-                </a:solidFill>
-                <a:latin typeface="맑은 고딕"/>
-                <a:ea typeface="맑은 고딕"/>
-              </a:rPr>
-              <a:t> —</a:t>
-            </a:r>
-            <a:r>
-              <a:rPr sz="1200" b="0">
-                <a:solidFill>
-                  <a:srgbClr val="000000"/>
-                </a:solidFill>
-                <a:latin typeface="맑은 고딕"/>
-                <a:ea typeface="맑은 고딕"/>
-              </a:rPr>
-              <a:t> 단가·주문 총액의 의미, 결제대기 자기 전이.</a:t>
-            </a:r>
-          </a:p>
-          <a:p>
-            <a:pPr lvl="2" marL="228600" indent="-182880">
-              <a:spcBef>
-                <a:spcPts val="300"/>
-              </a:spcBef>
-              <a:spcAft>
-                <a:spcPts val="300"/>
-              </a:spcAft>
-              <a:buSzPct val="90000"/>
-              <a:buFont typeface="Wingdings" pitchFamily="2" charset="2"/>
-              <a:buChar char=""/>
-            </a:pPr>
-            <a:r>
-              <a:rPr sz="1400" b="1">
-                <a:solidFill>
-                  <a:srgbClr val="000000"/>
-                </a:solidFill>
-                <a:latin typeface="맑은 고딕"/>
-                <a:ea typeface="맑은 고딕"/>
-              </a:rPr>
-              <a:t>아키텍처</a:t>
-            </a:r>
-            <a:r>
-              <a:rPr sz="1400" b="0">
-                <a:solidFill>
-                  <a:srgbClr val="000000"/>
-                </a:solidFill>
-                <a:latin typeface="맑은 고딕"/>
-                <a:ea typeface="맑은 고딕"/>
-              </a:rPr>
-              <a:t> —</a:t>
-            </a:r>
-            <a:r>
-              <a:rPr sz="1200" b="0">
-                <a:solidFill>
-                  <a:srgbClr val="000000"/>
-                </a:solidFill>
-                <a:latin typeface="맑은 고딕"/>
-                <a:ea typeface="맑은 고딕"/>
-              </a:rPr>
-              <a:t> 업무는 연동·영속 구현에 의존하지 않는다.</a:t>
             </a:r>
           </a:p>
         </p:txBody>

--- a/courses/ai-native/sessions/s05.pptx
+++ b/courses/ai-native/sessions/s05.pptx
@@ -40,6 +40,7 @@
     <p:sldId id="285" r:id="javaLecture30"/>
     <p:sldId id="286" r:id="javaLecture31"/>
     <p:sldId id="287" r:id="javaLecture32"/>
+    <p:sldId id="288" r:id="javaLecture33"/>
   </p:sldIdLst>
   <p:sldSz cx="9144000" cy="6858000" type="screen4x3"/>
   <p:notesSz cx="6858000" cy="9144000"/>
@@ -1522,6 +1523,13 @@
               <a:t>실제 초안이 요구 범위에 따라 결제대기·결제완료만 그린 것은 누락 오류가 아니다. 배송 생애주기를 추가할 때는 추가 범위와 근거를 사람이 명시한다. 결과물의 장수나 상태 수로 품질을 판단하지 않는다.</a:t>
             </a:r>
           </a:p>
+          <a:p>
+            <a:pPr lvl="0"/>
+            <a:r>
+              <a:rPr lang="ko-KR" sz="1200"/>
+              <a:t>구문이 맞는 도식의 의미가 어긋날 수 있다는 근거는 "세션 04. 정적 모델"의 「09. 모델을 만들 때 사람과 AI」의 「초안을 판단할 근거」에 있다. 상태와 전이가 늘어 도식이 커질 때 특히 그러므로, 판정은 도식이 아니라 전이와 금지된 순서의 목록으로 한다.</a:t>
+            </a:r>
+          </a:p>
         </p:txBody>
       </p:sp>
     </p:spTree>
@@ -1784,68 +1792,35 @@
             <a:pPr lvl="0"/>
             <a:r>
               <a:rPr lang="ko-KR" sz="1200"/>
-              <a:t>실제 최종 응답의 문서 제목·도입과 「상태 기계」 전문이다. 앞 별첨부터 마지막 별첨까지 합하면 원본 응답 전체다. 원본은 code/s05/exercise-conversation/order/주문한다-동적모델.md이며 문장·도식·원래 강조를 편집하지 않았다. 제목 단계와 도식 제목 표식을 Session Source 형식으로 바꾸고, 사용자 배치 요청으로 Mermaid에 direction LR 한 줄만 더해 상태를 가로로 놓았다.</a:t>
-            </a:r>
-          </a:p>
-        </p:txBody>
-      </p:sp>
-    </p:spTree>
-  </p:cSld>
-  <p:clrMapOvr>
-    <a:masterClrMapping/>
-  </p:clrMapOvr>
-</p:notes>
-</file>
-
-<file path=ppt/notesSlides/notesSlide29.xml><?xml version="1.0" encoding="utf-8"?>
-<p:notes xmlns:a="http://schemas.openxmlformats.org/drawingml/2006/main" xmlns:r="http://schemas.openxmlformats.org/officeDocument/2006/relationships" xmlns:p="http://schemas.openxmlformats.org/presentationml/2006/main">
-  <p:cSld>
-    <p:spTree>
-      <p:nvGrpSpPr>
-        <p:cNvPr id="1" name=""/>
-        <p:cNvGrpSpPr/>
-        <p:nvPr/>
-      </p:nvGrpSpPr>
-      <p:grpSpPr>
-        <a:xfrm>
-          <a:off x="0" y="0"/>
-          <a:ext cx="0" cy="0"/>
-          <a:chOff x="0" y="0"/>
-          <a:chExt cx="0" cy="0"/>
-        </a:xfrm>
-      </p:grpSpPr>
-      <p:sp>
-        <p:nvSpPr>
-          <p:cNvPr id="2" name="슬라이드 이미지 개체 틀"/>
-          <p:cNvSpPr/>
-          <p:nvPr>
-            <p:ph type="sldImg" idx="2"/>
-          </p:nvPr>
-        </p:nvSpPr>
-        <p:spPr/>
-        <p:txBody>
-          <a:bodyPr/>
-          <a:lstStyle/>
-          <a:p/>
-        </p:txBody>
-      </p:sp>
-      <p:sp>
-        <p:nvSpPr>
-          <p:cNvPr id="3" name="슬라이드 노트 개체 틀"/>
-          <p:cNvSpPr/>
-          <p:nvPr>
-            <p:ph type="body" idx="3"/>
-          </p:nvPr>
-        </p:nvSpPr>
-        <p:spPr/>
-        <p:txBody>
-          <a:bodyPr/>
-          <a:lstStyle/>
+              <a:t>실제 최종 응답의 전문이다. 원본은 code/s05/exercise-conversation/order/주문한다-동적모델.md이며 문장·도식·목록·원래 강조를 편집하지 않았다. 제목 단계와 도식 제목 표식을 Session Source 형식으로 바꾸고, 사용자 배치 요청으로 Mermaid에 direction LR 한 줄만 더해 상태를 가로로 놓았다.</a:t>
+            </a:r>
+          </a:p>
           <a:p>
             <a:pPr lvl="0"/>
             <a:r>
               <a:rPr lang="ko-KR" sz="1200"/>
-              <a:t>실제 최종 응답의 「전이 목록」 전문이다. 표 제목 표식만 더했고 행·값·문장은 편집하지 않았다. 첫 ⑤의 다섯 열 표는 칸마다 문장이 들어가 행을 훑어 읽을 수 없었다 — 그 응답은 finalization-rounds/01에 보존했다.</a:t>
+              <a:t>표와 도식에는 제목 표식만 더했고 행·값·문장과 도식 원본은 편집하지 않았다. 「규칙의 대표 예」는 네 예의 전제·사건·결과와 유지되는 값을 예마다 한 줄씩 읽는다.</a:t>
+            </a:r>
+          </a:p>
+          <a:p>
+            <a:pPr lvl="0"/>
+            <a:r>
+              <a:rPr lang="ko-KR" sz="1200"/>
+              <a:t>첫 ⑤의 다섯 열 표는 칸마다 문장이 들어가 행을 훑어 읽을 수 없었다 — 그 응답은 finalization-rounds/01에 보존했다.</a:t>
+            </a:r>
+          </a:p>
+          <a:p>
+            <a:pPr lvl="0"/>
+            <a:r>
+              <a:rPr lang="ko-KR" sz="1200"/>
+              <a:t>정상 승인 시퀀스의 마지막 세 줄은 ④에서 사람이 지적해 고친 자리다 — 통지 주체를 확정한 결과 화살표와 주문 시스템의 자기 전이 화살표를 지운 근거가 응답 안에 남아 있다.</a:t>
+            </a:r>
+          </a:p>
+          <a:p>
+            <a:pPr lvl="0"/>
+            <a:r>
+              <a:rPr lang="ko-KR" sz="1200"/>
+              <a:t>미정 목록의 다섯째 줄은 ④에서 도구가 되물은 질문을 사람이 미정으로 확정한 결과다.</a:t>
             </a:r>
           </a:p>
         </p:txBody>
@@ -1907,189 +1882,6 @@
             <a:r>
               <a:rPr lang="ko-KR" sz="1200"/>
               <a:t>"세션 04. 정적 모델"의 「02. 도메인 모델이 명시하는 것」에서 합의한 용례를 이어 받는다. 동적 모델을 새로운 독립 도메인 모델이나 설계의 동의어로 설명하지 않는다.</a:t>
-            </a:r>
-          </a:p>
-        </p:txBody>
-      </p:sp>
-    </p:spTree>
-  </p:cSld>
-  <p:clrMapOvr>
-    <a:masterClrMapping/>
-  </p:clrMapOvr>
-</p:notes>
-</file>
-
-<file path=ppt/notesSlides/notesSlide30.xml><?xml version="1.0" encoding="utf-8"?>
-<p:notes xmlns:a="http://schemas.openxmlformats.org/drawingml/2006/main" xmlns:r="http://schemas.openxmlformats.org/officeDocument/2006/relationships" xmlns:p="http://schemas.openxmlformats.org/presentationml/2006/main">
-  <p:cSld>
-    <p:spTree>
-      <p:nvGrpSpPr>
-        <p:cNvPr id="1" name=""/>
-        <p:cNvGrpSpPr/>
-        <p:nvPr/>
-      </p:nvGrpSpPr>
-      <p:grpSpPr>
-        <a:xfrm>
-          <a:off x="0" y="0"/>
-          <a:ext cx="0" cy="0"/>
-          <a:chOff x="0" y="0"/>
-          <a:chExt cx="0" cy="0"/>
-        </a:xfrm>
-      </p:grpSpPr>
-      <p:sp>
-        <p:nvSpPr>
-          <p:cNvPr id="2" name="슬라이드 이미지 개체 틀"/>
-          <p:cNvSpPr/>
-          <p:nvPr>
-            <p:ph type="sldImg" idx="2"/>
-          </p:nvPr>
-        </p:nvSpPr>
-        <p:spPr/>
-        <p:txBody>
-          <a:bodyPr/>
-          <a:lstStyle/>
-          <a:p/>
-        </p:txBody>
-      </p:sp>
-      <p:sp>
-        <p:nvSpPr>
-          <p:cNvPr id="3" name="슬라이드 노트 개체 틀"/>
-          <p:cNvSpPr/>
-          <p:nvPr>
-            <p:ph type="body" idx="3"/>
-          </p:nvPr>
-        </p:nvSpPr>
-        <p:spPr/>
-        <p:txBody>
-          <a:bodyPr/>
-          <a:lstStyle/>
-          <a:p>
-            <a:pPr lvl="0"/>
-            <a:r>
-              <a:rPr lang="ko-KR" sz="1200"/>
-              <a:t>실제 최종 응답의 「정상 승인 시퀀스」 전문이다. 도식 제목 표식만 Session Source 형식으로 변환했다. 마지막 세 줄은 ④에서 사람이 지적해 고친 자리다 — 통지 주체를 확정한 결과 화살표와 주문 시스템의 자기 전이 화살표를 지운 근거가 응답 안에 남아 있다.</a:t>
-            </a:r>
-          </a:p>
-        </p:txBody>
-      </p:sp>
-    </p:spTree>
-  </p:cSld>
-  <p:clrMapOvr>
-    <a:masterClrMapping/>
-  </p:clrMapOvr>
-</p:notes>
-</file>
-
-<file path=ppt/notesSlides/notesSlide31.xml><?xml version="1.0" encoding="utf-8"?>
-<p:notes xmlns:a="http://schemas.openxmlformats.org/drawingml/2006/main" xmlns:r="http://schemas.openxmlformats.org/officeDocument/2006/relationships" xmlns:p="http://schemas.openxmlformats.org/presentationml/2006/main">
-  <p:cSld>
-    <p:spTree>
-      <p:nvGrpSpPr>
-        <p:cNvPr id="1" name=""/>
-        <p:cNvGrpSpPr/>
-        <p:nvPr/>
-      </p:nvGrpSpPr>
-      <p:grpSpPr>
-        <a:xfrm>
-          <a:off x="0" y="0"/>
-          <a:ext cx="0" cy="0"/>
-          <a:chOff x="0" y="0"/>
-          <a:chExt cx="0" cy="0"/>
-        </a:xfrm>
-      </p:grpSpPr>
-      <p:sp>
-        <p:nvSpPr>
-          <p:cNvPr id="2" name="슬라이드 이미지 개체 틀"/>
-          <p:cNvSpPr/>
-          <p:nvPr>
-            <p:ph type="sldImg" idx="2"/>
-          </p:nvPr>
-        </p:nvSpPr>
-        <p:spPr/>
-        <p:txBody>
-          <a:bodyPr/>
-          <a:lstStyle/>
-          <a:p/>
-        </p:txBody>
-      </p:sp>
-      <p:sp>
-        <p:nvSpPr>
-          <p:cNvPr id="3" name="슬라이드 노트 개체 틀"/>
-          <p:cNvSpPr/>
-          <p:nvPr>
-            <p:ph type="body" idx="3"/>
-          </p:nvPr>
-        </p:nvSpPr>
-        <p:spPr/>
-        <p:txBody>
-          <a:bodyPr/>
-          <a:lstStyle/>
-          <a:p>
-            <a:pPr lvl="0"/>
-            <a:r>
-              <a:rPr lang="ko-KR" sz="1200"/>
-              <a:t>실제 최종 응답의 「규칙의 대표 예」 전문이다. 네 예의 전제·사건·결과와 유지되는 값을 예마다 한 줄씩 읽는다. 원본은 code/s05/exercise-conversation/order/주문한다-동적모델.md다.</a:t>
-            </a:r>
-          </a:p>
-        </p:txBody>
-      </p:sp>
-    </p:spTree>
-  </p:cSld>
-  <p:clrMapOvr>
-    <a:masterClrMapping/>
-  </p:clrMapOvr>
-</p:notes>
-</file>
-
-<file path=ppt/notesSlides/notesSlide32.xml><?xml version="1.0" encoding="utf-8"?>
-<p:notes xmlns:a="http://schemas.openxmlformats.org/drawingml/2006/main" xmlns:r="http://schemas.openxmlformats.org/officeDocument/2006/relationships" xmlns:p="http://schemas.openxmlformats.org/presentationml/2006/main">
-  <p:cSld>
-    <p:spTree>
-      <p:nvGrpSpPr>
-        <p:cNvPr id="1" name=""/>
-        <p:cNvGrpSpPr/>
-        <p:nvPr/>
-      </p:nvGrpSpPr>
-      <p:grpSpPr>
-        <a:xfrm>
-          <a:off x="0" y="0"/>
-          <a:ext cx="0" cy="0"/>
-          <a:chOff x="0" y="0"/>
-          <a:chExt cx="0" cy="0"/>
-        </a:xfrm>
-      </p:grpSpPr>
-      <p:sp>
-        <p:nvSpPr>
-          <p:cNvPr id="2" name="슬라이드 이미지 개체 틀"/>
-          <p:cNvSpPr/>
-          <p:nvPr>
-            <p:ph type="sldImg" idx="2"/>
-          </p:nvPr>
-        </p:nvSpPr>
-        <p:spPr/>
-        <p:txBody>
-          <a:bodyPr/>
-          <a:lstStyle/>
-          <a:p/>
-        </p:txBody>
-      </p:sp>
-      <p:sp>
-        <p:nvSpPr>
-          <p:cNvPr id="3" name="슬라이드 노트 개체 틀"/>
-          <p:cNvSpPr/>
-          <p:nvPr>
-            <p:ph type="body" idx="3"/>
-          </p:nvPr>
-        </p:nvSpPr>
-        <p:spPr/>
-        <p:txBody>
-          <a:bodyPr/>
-          <a:lstStyle/>
-          <a:p>
-            <a:pPr lvl="0"/>
-            <a:r>
-              <a:rPr lang="ko-KR" sz="1200"/>
-              <a:t>실제 최종 응답의 마지막 절 전문이다. 앞 별첨부터 여기까지 합하면 원본 응답 전체다. 원본은 code/s05/exercise-conversation/order/주문한다-동적모델.md이며 문장·목록·원래 강조를 편집하지 않았다. 미정 목록의 다섯째 줄은 ④에서 도구가 되물은 질문을 사람이 미정으로 확정한 결과다.</a:t>
             </a:r>
           </a:p>
         </p:txBody>
@@ -19358,7 +19150,17 @@
                 <a:latin typeface="맑은 고딕"/>
                 <a:ea typeface="맑은 고딕"/>
               </a:rPr>
-              <a:t>“주문한다” 동적 업무 모델</a:t>
+              <a:t>“주문한다” 동적 업무 모델 </a:t>
+            </a:r>
+            <a:r>
+              <a:rPr sz="2000" b="1">
+                <a:solidFill>
+                  <a:srgbClr val="000000"/>
+                </a:solidFill>
+                <a:latin typeface="맑은 고딕"/>
+                <a:ea typeface="맑은 고딕"/>
+              </a:rPr>
+              <a:t>(1/6)</a:t>
             </a:r>
           </a:p>
           <a:p>
@@ -19504,35 +19306,10 @@
             <p:ph idx="1"/>
           </p:nvPr>
         </p:nvSpPr>
-        <p:spPr/>
-        <p:txBody>
-          <a:bodyPr>
-            <a:normAutofit/>
-          </a:bodyPr>
-          <a:lstStyle/>
-          <a:p/>
-        </p:txBody>
-      </p:sp>
-      <p:sp>
-        <p:nvSpPr>
-          <p:cNvPr id="9" name="내용 개체 틀 7">
-            <a:extLst>
-              <a:ext uri="{FF2B5EF4-FFF2-40B4-BE49-F238E27FC236}">
-                <a16:creationId xmlns:a16="http://schemas.microsoft.com/office/drawing/2014/main" id="{BEBA2C4A-B0BF-F2E4-EA6E-614C99CBA184}"/>
-              </a:ext>
-            </a:extLst>
-          </p:cNvPr>
-          <p:cNvSpPr>
-            <a:spLocks noGrp="1"/>
-          </p:cNvSpPr>
-          <p:nvPr>
-            <p:ph idx="1"/>
-          </p:nvPr>
-        </p:nvSpPr>
         <p:spPr>
           <a:xfrm>
             <a:off x="365760" y="960120"/>
-            <a:ext cx="8412480" cy="1397000"/>
+            <a:ext cx="8412480" cy="2514600"/>
           </a:xfrm>
         </p:spPr>
         <p:txBody>
@@ -19680,179 +19457,32 @@
               <a:t>대표 예는 모두 같은 주문 A를 쓴다. 주문 A는 펜 2개, 확정 단가 1,000원, 총액 2,000원, 배송지 서울이다. "주문 A"는 예를 들기 위해 붙인 이름이며, 주문 번호 형식은 정하지 않는다.</a:t>
             </a:r>
           </a:p>
-        </p:txBody>
-      </p:sp>
-      <p:sp>
-        <p:nvSpPr>
-          <p:cNvPr id="10" name="내용 개체 틀 7">
-            <a:extLst>
-              <a:ext uri="{FF2B5EF4-FFF2-40B4-BE49-F238E27FC236}">
-                <a16:creationId xmlns:a16="http://schemas.microsoft.com/office/drawing/2014/main" id="{BEBA2C4A-B0BF-F2E4-EA6E-614C99CBA184}"/>
-              </a:ext>
-            </a:extLst>
-          </p:cNvPr>
-          <p:cNvSpPr>
-            <a:spLocks noGrp="1"/>
-          </p:cNvSpPr>
-          <p:nvPr>
-            <p:ph idx="1"/>
-          </p:nvPr>
-        </p:nvSpPr>
-        <p:spPr>
-          <a:xfrm>
-            <a:off x="365760" y="4143712"/>
-            <a:ext cx="8412480" cy="783167"/>
-          </a:xfrm>
-        </p:spPr>
-        <p:txBody>
-          <a:bodyPr>
-            <a:normAutofit/>
-          </a:bodyPr>
-          <a:lstStyle/>
-          <a:p>
-            <a:pPr lvl="2" marL="411480" indent="-137160">
+          <a:p>
+            <a:pPr marL="182880" indent="0">
               <a:spcBef>
                 <a:spcPts val="300"/>
               </a:spcBef>
               <a:spcAft>
                 <a:spcPts val="300"/>
               </a:spcAft>
-              <a:buSzPct val="90000"/>
-              <a:buFont typeface="Wingdings" pitchFamily="2" charset="2"/>
-              <a:buChar char=""/>
+              <a:buNone/>
             </a:pPr>
             <a:r>
-              <a:rPr sz="1000" b="0">
-                <a:solidFill>
-                  <a:srgbClr val="000000"/>
-                </a:solidFill>
-                <a:latin typeface="맑은 고딕"/>
-                <a:ea typeface="맑은 고딕"/>
-              </a:rPr>
-              <a:t>결제대기</a:t>
-            </a:r>
-            <a:r>
-              <a:rPr sz="1000" b="0">
-                <a:solidFill>
-                  <a:srgbClr val="000000"/>
-                </a:solidFill>
-                <a:latin typeface="맑은 고딕"/>
-                <a:ea typeface="맑은 고딕"/>
-              </a:rPr>
-              <a:t>와 </a:t>
-            </a:r>
-            <a:r>
-              <a:rPr sz="1000" b="0">
-                <a:solidFill>
-                  <a:srgbClr val="000000"/>
-                </a:solidFill>
-                <a:latin typeface="맑은 고딕"/>
-                <a:ea typeface="맑은 고딕"/>
-              </a:rPr>
-              <a:t>결제완료</a:t>
-            </a:r>
-            <a:r>
-              <a:rPr sz="1000" b="0">
-                <a:solidFill>
-                  <a:srgbClr val="000000"/>
-                </a:solidFill>
-                <a:latin typeface="맑은 고딕"/>
-                <a:ea typeface="맑은 고딕"/>
-              </a:rPr>
-              <a:t>는 실습 3의 요구 범위이고, </a:t>
-            </a:r>
-            <a:r>
-              <a:rPr sz="1000" b="0">
-                <a:solidFill>
-                  <a:srgbClr val="000000"/>
-                </a:solidFill>
-                <a:latin typeface="맑은 고딕"/>
-                <a:ea typeface="맑은 고딕"/>
-              </a:rPr>
-              <a:t>배송중</a:t>
-            </a:r>
-            <a:r>
-              <a:rPr sz="1000" b="0">
-                <a:solidFill>
-                  <a:srgbClr val="000000"/>
-                </a:solidFill>
-                <a:latin typeface="맑은 고딕"/>
-                <a:ea typeface="맑은 고딕"/>
-              </a:rPr>
-              <a:t>과 </a:t>
-            </a:r>
-            <a:r>
-              <a:rPr sz="1000" b="0">
-                <a:solidFill>
-                  <a:srgbClr val="000000"/>
-                </a:solidFill>
-                <a:latin typeface="맑은 고딕"/>
-                <a:ea typeface="맑은 고딕"/>
-              </a:rPr>
-              <a:t>배송완료</a:t>
-            </a:r>
-            <a:r>
-              <a:rPr sz="1000" b="0">
-                <a:solidFill>
-                  <a:srgbClr val="000000"/>
-                </a:solidFill>
-                <a:latin typeface="맑은 고딕"/>
-                <a:ea typeface="맑은 고딕"/>
-              </a:rPr>
-              <a:t>는 생애주기 참고 범위다.</a:t>
-            </a:r>
-          </a:p>
-          <a:p>
-            <a:pPr lvl="2" marL="411480" indent="-137160">
-              <a:spcBef>
-                <a:spcPts val="300"/>
-              </a:spcBef>
-              <a:spcAft>
-                <a:spcPts val="300"/>
-              </a:spcAft>
-              <a:buSzPct val="90000"/>
-              <a:buFont typeface="Wingdings" pitchFamily="2" charset="2"/>
-              <a:buChar char=""/>
-            </a:pPr>
-            <a:r>
-              <a:rPr sz="1000" b="0">
-                <a:solidFill>
-                  <a:srgbClr val="000000"/>
-                </a:solidFill>
-                <a:latin typeface="맑은 고딕"/>
-                <a:ea typeface="맑은 고딕"/>
-              </a:rPr>
-              <a:t>배송 요청은 카드 승인 완료 사건에 대한 반응이다. 배송 요청 자체는 상태 전이가 아니다.</a:t>
-            </a:r>
-          </a:p>
-          <a:p>
-            <a:pPr lvl="2" marL="411480" indent="-137160">
-              <a:spcBef>
-                <a:spcPts val="300"/>
-              </a:spcBef>
-              <a:spcAft>
-                <a:spcPts val="300"/>
-              </a:spcAft>
-              <a:buSzPct val="90000"/>
-              <a:buFont typeface="Wingdings" pitchFamily="2" charset="2"/>
-              <a:buChar char=""/>
-            </a:pPr>
-            <a:r>
-              <a:rPr sz="1000" b="0">
-                <a:solidFill>
-                  <a:srgbClr val="000000"/>
-                </a:solidFill>
-                <a:latin typeface="맑은 고딕"/>
-                <a:ea typeface="맑은 고딕"/>
-              </a:rPr>
-              <a:t>결제 응답을 확정할 수 없는 경우는 전이로 그리지 않는다. 승인이나 거절로 간주하지 않는다는 규칙만 정해졌고, 그 뒤의 처리는 정하지 않았다.</a:t>
+              <a:rPr sz="1000" b="1">
+                <a:solidFill>
+                  <a:srgbClr val="000000"/>
+                </a:solidFill>
+                <a:latin typeface="맑은 고딕"/>
+                <a:ea typeface="맑은 고딕"/>
+              </a:rPr>
+              <a:t>상태 기계</a:t>
             </a:r>
           </a:p>
         </p:txBody>
       </p:sp>
       <p:sp>
         <p:nvSpPr>
-          <p:cNvPr id="11" name="TextBox 12">
+          <p:cNvPr id="9" name="TextBox 12">
             <a:extLst>
               <a:ext uri="{FF2B5EF4-FFF2-40B4-BE49-F238E27FC236}">
                 <a16:creationId xmlns:a16="http://schemas.microsoft.com/office/drawing/2014/main" id="{654EDDB4-901F-3D48-A715-17D163E8A7AC}"/>
@@ -19864,7 +19494,7 @@
         </p:nvSpPr>
         <p:spPr>
           <a:xfrm>
-            <a:off x="365760" y="2658872"/>
+            <a:off x="365760" y="2664193"/>
             <a:ext cx="8412480" cy="201168"/>
           </a:xfrm>
           <a:prstGeom prst="rect">
@@ -19894,7 +19524,7 @@
       </p:sp>
       <p:pic>
         <p:nvPicPr>
-          <p:cNvPr id="12" name="mermaid Diagram 1"/>
+          <p:cNvPr id="10" name="mermaid Diagram 1"/>
           <p:cNvPicPr>
             <a:picLocks noChangeAspect="1"/>
           </p:cNvPicPr>
@@ -19908,7 +19538,7 @@
         </p:blipFill>
         <p:spPr>
           <a:xfrm>
-            <a:off x="498016" y="2896616"/>
+            <a:off x="498016" y="2901937"/>
             <a:ext cx="8147968" cy="1018496"/>
           </a:xfrm>
           <a:prstGeom prst="rect">
@@ -19981,7 +19611,17 @@
                 <a:latin typeface="맑은 고딕"/>
                 <a:ea typeface="맑은 고딕"/>
               </a:rPr>
-              <a:t>전이 목록</a:t>
+              <a:t>“주문한다” 동적 업무 모델 </a:t>
+            </a:r>
+            <a:r>
+              <a:rPr sz="2000" b="1">
+                <a:solidFill>
+                  <a:srgbClr val="000000"/>
+                </a:solidFill>
+                <a:latin typeface="맑은 고딕"/>
+                <a:ea typeface="맑은 고딕"/>
+              </a:rPr>
+              <a:t>(2/6)</a:t>
             </a:r>
           </a:p>
           <a:p>
@@ -20097,7 +19737,7 @@
           </p:nvPr>
         </p:nvGraphicFramePr>
         <p:xfrm>
-          <a:off x="1762316" y="1258570"/>
+          <a:off x="1762316" y="2531392"/>
           <a:ext cx="5605780" cy="3873500"/>
         </p:xfrm>
         <a:graphic>
@@ -21522,8 +21162,8 @@
         </p:nvSpPr>
         <p:spPr>
           <a:xfrm>
-            <a:off x="1033239" y="5678424"/>
-            <a:ext cx="6528540" cy="795528"/>
+            <a:off x="365760" y="960120"/>
+            <a:ext cx="8412480" cy="1171180"/>
           </a:xfrm>
           <a:prstGeom prst="rect">
             <a:avLst/>
@@ -21536,7 +21176,164 @@
           </a:bodyPr>
           <a:lstStyle/>
           <a:p>
-            <a:endParaRPr/>
+            <a:pPr lvl="2" marL="411480" indent="-137160">
+              <a:spcBef>
+                <a:spcPts val="300"/>
+              </a:spcBef>
+              <a:spcAft>
+                <a:spcPts val="300"/>
+              </a:spcAft>
+              <a:buSzPct val="90000"/>
+              <a:buFont typeface="Wingdings" pitchFamily="2" charset="2"/>
+              <a:buChar char=""/>
+            </a:pPr>
+            <a:r>
+              <a:rPr sz="1000" b="0">
+                <a:solidFill>
+                  <a:srgbClr val="000000"/>
+                </a:solidFill>
+                <a:latin typeface="맑은 고딕"/>
+                <a:ea typeface="맑은 고딕"/>
+              </a:rPr>
+              <a:t>결제대기</a:t>
+            </a:r>
+            <a:r>
+              <a:rPr sz="1000" b="0">
+                <a:solidFill>
+                  <a:srgbClr val="000000"/>
+                </a:solidFill>
+                <a:latin typeface="맑은 고딕"/>
+                <a:ea typeface="맑은 고딕"/>
+              </a:rPr>
+              <a:t>와 </a:t>
+            </a:r>
+            <a:r>
+              <a:rPr sz="1000" b="0">
+                <a:solidFill>
+                  <a:srgbClr val="000000"/>
+                </a:solidFill>
+                <a:latin typeface="맑은 고딕"/>
+                <a:ea typeface="맑은 고딕"/>
+              </a:rPr>
+              <a:t>결제완료</a:t>
+            </a:r>
+            <a:r>
+              <a:rPr sz="1000" b="0">
+                <a:solidFill>
+                  <a:srgbClr val="000000"/>
+                </a:solidFill>
+                <a:latin typeface="맑은 고딕"/>
+                <a:ea typeface="맑은 고딕"/>
+              </a:rPr>
+              <a:t>는 실습 3의 요구 범위이고, </a:t>
+            </a:r>
+            <a:r>
+              <a:rPr sz="1000" b="0">
+                <a:solidFill>
+                  <a:srgbClr val="000000"/>
+                </a:solidFill>
+                <a:latin typeface="맑은 고딕"/>
+                <a:ea typeface="맑은 고딕"/>
+              </a:rPr>
+              <a:t>배송중</a:t>
+            </a:r>
+            <a:r>
+              <a:rPr sz="1000" b="0">
+                <a:solidFill>
+                  <a:srgbClr val="000000"/>
+                </a:solidFill>
+                <a:latin typeface="맑은 고딕"/>
+                <a:ea typeface="맑은 고딕"/>
+              </a:rPr>
+              <a:t>과 </a:t>
+            </a:r>
+            <a:r>
+              <a:rPr sz="1000" b="0">
+                <a:solidFill>
+                  <a:srgbClr val="000000"/>
+                </a:solidFill>
+                <a:latin typeface="맑은 고딕"/>
+                <a:ea typeface="맑은 고딕"/>
+              </a:rPr>
+              <a:t>배송완료</a:t>
+            </a:r>
+            <a:r>
+              <a:rPr sz="1000" b="0">
+                <a:solidFill>
+                  <a:srgbClr val="000000"/>
+                </a:solidFill>
+                <a:latin typeface="맑은 고딕"/>
+                <a:ea typeface="맑은 고딕"/>
+              </a:rPr>
+              <a:t>는 생애주기 참고 범위다.</a:t>
+            </a:r>
+          </a:p>
+          <a:p>
+            <a:pPr lvl="2" marL="411480" indent="-137160">
+              <a:spcBef>
+                <a:spcPts val="300"/>
+              </a:spcBef>
+              <a:spcAft>
+                <a:spcPts val="300"/>
+              </a:spcAft>
+              <a:buSzPct val="90000"/>
+              <a:buFont typeface="Wingdings" pitchFamily="2" charset="2"/>
+              <a:buChar char=""/>
+            </a:pPr>
+            <a:r>
+              <a:rPr sz="1000" b="0">
+                <a:solidFill>
+                  <a:srgbClr val="000000"/>
+                </a:solidFill>
+                <a:latin typeface="맑은 고딕"/>
+                <a:ea typeface="맑은 고딕"/>
+              </a:rPr>
+              <a:t>배송 요청은 카드 승인 완료 사건에 대한 반응이다. 배송 요청 자체는 상태 전이가 아니다.</a:t>
+            </a:r>
+          </a:p>
+          <a:p>
+            <a:pPr lvl="2" marL="411480" indent="-137160">
+              <a:spcBef>
+                <a:spcPts val="300"/>
+              </a:spcBef>
+              <a:spcAft>
+                <a:spcPts val="300"/>
+              </a:spcAft>
+              <a:buSzPct val="90000"/>
+              <a:buFont typeface="Wingdings" pitchFamily="2" charset="2"/>
+              <a:buChar char=""/>
+            </a:pPr>
+            <a:r>
+              <a:rPr sz="1000" b="0">
+                <a:solidFill>
+                  <a:srgbClr val="000000"/>
+                </a:solidFill>
+                <a:latin typeface="맑은 고딕"/>
+                <a:ea typeface="맑은 고딕"/>
+              </a:rPr>
+              <a:t>결제 응답을 확정할 수 없는 경우는 전이로 그리지 않는다. 승인이나 거절로 간주하지 않는다는 규칙만 정해졌고, 그 뒤의 처리는 정하지 않았다.</a:t>
+            </a:r>
+          </a:p>
+          <a:p>
+            <a:pPr marL="182880" indent="0">
+              <a:spcBef>
+                <a:spcPts val="300"/>
+              </a:spcBef>
+              <a:spcAft>
+                <a:spcPts val="300"/>
+              </a:spcAft>
+              <a:buNone/>
+            </a:pPr>
+            <a:r>
+              <a:rPr sz="1000" b="1">
+                <a:solidFill>
+                  <a:srgbClr val="000000"/>
+                </a:solidFill>
+                <a:latin typeface="맑은 고딕"/>
+                <a:ea typeface="맑은 고딕"/>
+              </a:rPr>
+              <a:t>전이 목록</a:t>
+            </a:r>
           </a:p>
         </p:txBody>
       </p:sp>
@@ -21619,7 +21416,7 @@
         </p:nvSpPr>
         <p:spPr>
           <a:xfrm>
-            <a:off x="365760" y="960120"/>
+            <a:off x="365760" y="2232942"/>
             <a:ext cx="8412480" cy="222250"/>
           </a:xfrm>
           <a:prstGeom prst="rect">
@@ -21650,347 +21447,6 @@
                 <a:ea typeface="맑은 고딕"/>
               </a:rPr>
               <a:t>전이 목록</a:t>
-            </a:r>
-          </a:p>
-        </p:txBody>
-      </p:sp>
-      <p:sp>
-        <p:nvSpPr>
-          <p:cNvPr id="15" name="TextBox 12">
-            <a:extLst>
-              <a:ext uri="{FF2B5EF4-FFF2-40B4-BE49-F238E27FC236}">
-                <a16:creationId xmlns:a16="http://schemas.microsoft.com/office/drawing/2014/main" id="{654EDDB4-901F-3D48-A715-17D163E8A7AC}"/>
-              </a:ext>
-            </a:extLst>
-          </p:cNvPr>
-          <p:cNvSpPr txBox="1"/>
-          <p:nvPr/>
-        </p:nvSpPr>
-        <p:spPr>
-          <a:xfrm>
-            <a:off x="365760" y="3215170"/>
-            <a:ext cx="8412480" cy="2264833"/>
-          </a:xfrm>
-          <a:prstGeom prst="rect">
-            <a:avLst/>
-          </a:prstGeom>
-          <a:noFill/>
-        </p:spPr>
-        <p:txBody>
-          <a:bodyPr wrap="square">
-            <a:spAutoFit/>
-          </a:bodyPr>
-          <a:lstStyle/>
-          <a:p>
-            <a:pPr marL="182880" indent="0">
-              <a:spcBef>
-                <a:spcPts val="300"/>
-              </a:spcBef>
-              <a:spcAft>
-                <a:spcPts val="300"/>
-              </a:spcAft>
-              <a:buNone/>
-            </a:pPr>
-            <a:r>
-              <a:rPr sz="1000" b="0">
-                <a:solidFill>
-                  <a:srgbClr val="000000"/>
-                </a:solidFill>
-                <a:latin typeface="맑은 고딕"/>
-                <a:ea typeface="맑은 고딕"/>
-              </a:rPr>
-              <a:t>상태 코드: 결제대기 </a:t>
-            </a:r>
-            <a:r>
-              <a:rPr sz="1000" b="0">
-                <a:solidFill>
-                  <a:srgbClr val="000000"/>
-                </a:solidFill>
-                <a:latin typeface="맑은 고딕"/>
-                <a:ea typeface="맑은 고딕"/>
-              </a:rPr>
-              <a:t>PENDING_PAYMENT</a:t>
-            </a:r>
-            <a:r>
-              <a:rPr sz="1000" b="0">
-                <a:solidFill>
-                  <a:srgbClr val="000000"/>
-                </a:solidFill>
-                <a:latin typeface="맑은 고딕"/>
-                <a:ea typeface="맑은 고딕"/>
-              </a:rPr>
-              <a:t>, 결제완료 </a:t>
-            </a:r>
-            <a:r>
-              <a:rPr sz="1000" b="0">
-                <a:solidFill>
-                  <a:srgbClr val="000000"/>
-                </a:solidFill>
-                <a:latin typeface="맑은 고딕"/>
-                <a:ea typeface="맑은 고딕"/>
-              </a:rPr>
-              <a:t>PAID</a:t>
-            </a:r>
-            <a:r>
-              <a:rPr sz="1000" b="0">
-                <a:solidFill>
-                  <a:srgbClr val="000000"/>
-                </a:solidFill>
-                <a:latin typeface="맑은 고딕"/>
-                <a:ea typeface="맑은 고딕"/>
-              </a:rPr>
-              <a:t>, 배송중 </a:t>
-            </a:r>
-            <a:r>
-              <a:rPr sz="1000" b="0">
-                <a:solidFill>
-                  <a:srgbClr val="000000"/>
-                </a:solidFill>
-                <a:latin typeface="맑은 고딕"/>
-                <a:ea typeface="맑은 고딕"/>
-              </a:rPr>
-              <a:t>IN_DELIVERY</a:t>
-            </a:r>
-            <a:r>
-              <a:rPr sz="1000" b="0">
-                <a:solidFill>
-                  <a:srgbClr val="000000"/>
-                </a:solidFill>
-                <a:latin typeface="맑은 고딕"/>
-                <a:ea typeface="맑은 고딕"/>
-              </a:rPr>
-              <a:t>, 배송완료 </a:t>
-            </a:r>
-            <a:r>
-              <a:rPr sz="1000" b="0">
-                <a:solidFill>
-                  <a:srgbClr val="000000"/>
-                </a:solidFill>
-                <a:latin typeface="맑은 고딕"/>
-                <a:ea typeface="맑은 고딕"/>
-              </a:rPr>
-              <a:t>DELIVERED</a:t>
-            </a:r>
-          </a:p>
-          <a:p>
-            <a:pPr lvl="2" marL="411480" indent="-137160">
-              <a:spcBef>
-                <a:spcPts val="300"/>
-              </a:spcBef>
-              <a:spcAft>
-                <a:spcPts val="300"/>
-              </a:spcAft>
-              <a:buSzPct val="90000"/>
-              <a:buFont typeface="Wingdings" pitchFamily="2" charset="2"/>
-              <a:buChar char=""/>
-            </a:pPr>
-            <a:r>
-              <a:rPr sz="1000" b="0">
-                <a:solidFill>
-                  <a:srgbClr val="000000"/>
-                </a:solidFill>
-                <a:latin typeface="맑은 고딕"/>
-                <a:ea typeface="맑은 고딕"/>
-              </a:rPr>
-              <a:t>사건별 반응은 다음과 같다.</a:t>
-            </a:r>
-          </a:p>
-          <a:p>
-            <a:pPr lvl="2" marL="411480" indent="-137160">
-              <a:spcBef>
-                <a:spcPts val="300"/>
-              </a:spcBef>
-              <a:spcAft>
-                <a:spcPts val="300"/>
-              </a:spcAft>
-              <a:buSzPct val="90000"/>
-              <a:buFont typeface="Wingdings" pitchFamily="2" charset="2"/>
-              <a:buChar char=""/>
-            </a:pPr>
-            <a:r>
-              <a:rPr sz="1000" b="1">
-                <a:solidFill>
-                  <a:srgbClr val="000000"/>
-                </a:solidFill>
-                <a:latin typeface="맑은 고딕"/>
-                <a:ea typeface="맑은 고딕"/>
-              </a:rPr>
-              <a:t>배송지 지정:</a:t>
-            </a:r>
-            <a:r>
-              <a:rPr sz="1000" b="0">
-                <a:solidFill>
-                  <a:srgbClr val="000000"/>
-                </a:solidFill>
-                <a:latin typeface="맑은 고딕"/>
-                <a:ea typeface="맑은 고딕"/>
-              </a:rPr>
-              <a:t> 주문 A 생성. 펜 2개·단가 1,000원·총액 2,000원·서울 확정</a:t>
-            </a:r>
-          </a:p>
-          <a:p>
-            <a:pPr lvl="2" marL="411480" indent="-137160">
-              <a:spcBef>
-                <a:spcPts val="300"/>
-              </a:spcBef>
-              <a:spcAft>
-                <a:spcPts val="300"/>
-              </a:spcAft>
-              <a:buSzPct val="90000"/>
-              <a:buFont typeface="Wingdings" pitchFamily="2" charset="2"/>
-              <a:buChar char=""/>
-            </a:pPr>
-            <a:r>
-              <a:rPr sz="1000" b="1">
-                <a:solidFill>
-                  <a:srgbClr val="000000"/>
-                </a:solidFill>
-                <a:latin typeface="맑은 고딕"/>
-                <a:ea typeface="맑은 고딕"/>
-              </a:rPr>
-              <a:t>카드 승인 완료:</a:t>
-            </a:r>
-            <a:r>
-              <a:rPr sz="1000" b="0">
-                <a:solidFill>
-                  <a:srgbClr val="000000"/>
-                </a:solidFill>
-                <a:latin typeface="맑은 고딕"/>
-                <a:ea typeface="맑은 고딕"/>
-              </a:rPr>
-              <a:t> 서울로 배송 요청 1회 발생</a:t>
-            </a:r>
-          </a:p>
-          <a:p>
-            <a:pPr lvl="2" marL="411480" indent="-137160">
-              <a:spcBef>
-                <a:spcPts val="300"/>
-              </a:spcBef>
-              <a:spcAft>
-                <a:spcPts val="300"/>
-              </a:spcAft>
-              <a:buSzPct val="90000"/>
-              <a:buFont typeface="Wingdings" pitchFamily="2" charset="2"/>
-              <a:buChar char=""/>
-            </a:pPr>
-            <a:r>
-              <a:rPr sz="1000" b="1">
-                <a:solidFill>
-                  <a:srgbClr val="000000"/>
-                </a:solidFill>
-                <a:latin typeface="맑은 고딕"/>
-                <a:ea typeface="맑은 고딕"/>
-              </a:rPr>
-              <a:t>카드 승인 거절:</a:t>
-            </a:r>
-            <a:r>
-              <a:rPr sz="1000" b="0">
-                <a:solidFill>
-                  <a:srgbClr val="000000"/>
-                </a:solidFill>
-                <a:latin typeface="맑은 고딕"/>
-                <a:ea typeface="맑은 고딕"/>
-              </a:rPr>
-              <a:t> 배송 요청 없음. 같은 주문 A 유지</a:t>
-            </a:r>
-          </a:p>
-          <a:p>
-            <a:pPr lvl="2" marL="411480" indent="-137160">
-              <a:spcBef>
-                <a:spcPts val="300"/>
-              </a:spcBef>
-              <a:spcAft>
-                <a:spcPts val="300"/>
-              </a:spcAft>
-              <a:buSzPct val="90000"/>
-              <a:buFont typeface="Wingdings" pitchFamily="2" charset="2"/>
-              <a:buChar char=""/>
-            </a:pPr>
-            <a:r>
-              <a:rPr sz="1000" b="1">
-                <a:solidFill>
-                  <a:srgbClr val="000000"/>
-                </a:solidFill>
-                <a:latin typeface="맑은 고딕"/>
-                <a:ea typeface="맑은 고딕"/>
-              </a:rPr>
-              <a:t>배송 시작 통보, 배송 완료 통보:</a:t>
-            </a:r>
-            <a:r>
-              <a:rPr sz="1000" b="0">
-                <a:solidFill>
-                  <a:srgbClr val="000000"/>
-                </a:solidFill>
-                <a:latin typeface="맑은 고딕"/>
-                <a:ea typeface="맑은 고딕"/>
-              </a:rPr>
-              <a:t> 정한 반응 없음</a:t>
-            </a:r>
-          </a:p>
-          <a:p>
-            <a:pPr lvl="2" marL="411480" indent="-137160">
-              <a:spcBef>
-                <a:spcPts val="300"/>
-              </a:spcBef>
-              <a:spcAft>
-                <a:spcPts val="300"/>
-              </a:spcAft>
-              <a:buSzPct val="90000"/>
-              <a:buFont typeface="Wingdings" pitchFamily="2" charset="2"/>
-              <a:buChar char=""/>
-            </a:pPr>
-            <a:r>
-              <a:rPr sz="1000" b="0">
-                <a:solidFill>
-                  <a:srgbClr val="000000"/>
-                </a:solidFill>
-                <a:latin typeface="맑은 고딕"/>
-                <a:ea typeface="맑은 고딕"/>
-              </a:rPr>
-              <a:t>거절 뒤의 재결제가 승인되는 경우에 새로운 전이가 생기지는 않는다. 같은 주문 A에 둘째 행</a:t>
-            </a:r>
-            <a:r>
-              <a:rPr sz="1000" b="0">
-                <a:solidFill>
-                  <a:srgbClr val="000000"/>
-                </a:solidFill>
-                <a:latin typeface="맑은 고딕"/>
-                <a:ea typeface="맑은 고딕"/>
-              </a:rPr>
-              <a:t>(카드 승인 완료)</a:t>
-            </a:r>
-            <a:r>
-              <a:rPr sz="1000" b="0">
-                <a:solidFill>
-                  <a:srgbClr val="000000"/>
-                </a:solidFill>
-                <a:latin typeface="맑은 고딕"/>
-                <a:ea typeface="맑은 고딕"/>
-              </a:rPr>
-              <a:t>이 적용된다.</a:t>
-            </a:r>
-          </a:p>
-          <a:p>
-            <a:pPr lvl="2" marL="411480" indent="-137160">
-              <a:spcBef>
-                <a:spcPts val="300"/>
-              </a:spcBef>
-              <a:spcAft>
-                <a:spcPts val="300"/>
-              </a:spcAft>
-              <a:buSzPct val="90000"/>
-              <a:buFont typeface="Wingdings" pitchFamily="2" charset="2"/>
-              <a:buChar char=""/>
-            </a:pPr>
-            <a:r>
-              <a:rPr sz="1000" b="0">
-                <a:solidFill>
-                  <a:srgbClr val="000000"/>
-                </a:solidFill>
-                <a:latin typeface="맑은 고딕"/>
-                <a:ea typeface="맑은 고딕"/>
-              </a:rPr>
-              <a:t>"배송 요청 1회"는 배송 요청이라는 업무 사건이 한 번 일어난다는 뜻이다. 그 사건을 어디에 어떻게 남기는지, 운영상 중복을 막거나 다시 시도하는 기준은 정하지 않는다.</a:t>
             </a:r>
           </a:p>
         </p:txBody>
@@ -23032,7 +22488,17 @@
                 <a:latin typeface="맑은 고딕"/>
                 <a:ea typeface="맑은 고딕"/>
               </a:rPr>
-              <a:t>정상 승인 시퀀스</a:t>
+              <a:t>“주문한다” 동적 업무 모델 </a:t>
+            </a:r>
+            <a:r>
+              <a:rPr sz="2000" b="1">
+                <a:solidFill>
+                  <a:srgbClr val="000000"/>
+                </a:solidFill>
+                <a:latin typeface="맑은 고딕"/>
+                <a:ea typeface="맑은 고딕"/>
+              </a:rPr>
+              <a:t>(3/6)</a:t>
             </a:r>
           </a:p>
           <a:p>
@@ -23178,35 +22644,10 @@
             <p:ph idx="1"/>
           </p:nvPr>
         </p:nvSpPr>
-        <p:spPr/>
-        <p:txBody>
-          <a:bodyPr>
-            <a:normAutofit/>
-          </a:bodyPr>
-          <a:lstStyle/>
-          <a:p/>
-        </p:txBody>
-      </p:sp>
-      <p:sp>
-        <p:nvSpPr>
-          <p:cNvPr id="9" name="내용 개체 틀 7">
-            <a:extLst>
-              <a:ext uri="{FF2B5EF4-FFF2-40B4-BE49-F238E27FC236}">
-                <a16:creationId xmlns:a16="http://schemas.microsoft.com/office/drawing/2014/main" id="{BEBA2C4A-B0BF-F2E4-EA6E-614C99CBA184}"/>
-              </a:ext>
-            </a:extLst>
-          </p:cNvPr>
-          <p:cNvSpPr>
-            <a:spLocks noGrp="1"/>
-          </p:cNvSpPr>
-          <p:nvPr>
-            <p:ph idx="1"/>
-          </p:nvPr>
-        </p:nvSpPr>
         <p:spPr>
           <a:xfrm>
-            <a:off x="365760" y="3699802"/>
-            <a:ext cx="8412480" cy="2349500"/>
+            <a:off x="365760" y="960120"/>
+            <a:ext cx="8412480" cy="2514600"/>
           </a:xfrm>
         </p:spPr>
         <p:txBody>
@@ -23214,151 +22655,6 @@
             <a:normAutofit/>
           </a:bodyPr>
           <a:lstStyle/>
-          <a:p>
-            <a:pPr lvl="2" marL="551180" indent="-139700">
-              <a:spcBef>
-                <a:spcPts val="300"/>
-              </a:spcBef>
-              <a:spcAft>
-                <a:spcPts val="300"/>
-              </a:spcAft>
-              <a:buNone/>
-            </a:pPr>
-            <a:r>
-              <a:rPr sz="1000" b="0">
-                <a:solidFill>
-                  <a:srgbClr val="000000"/>
-                </a:solidFill>
-                <a:latin typeface="맑은 고딕"/>
-                <a:ea typeface="맑은 고딕"/>
-              </a:rPr>
-              <a:t>1. 고객이 </a:t>
-            </a:r>
-            <a:r>
-              <a:rPr sz="1000" b="0">
-                <a:solidFill>
-                  <a:srgbClr val="000000"/>
-                </a:solidFill>
-                <a:latin typeface="맑은 고딕"/>
-                <a:ea typeface="맑은 고딕"/>
-              </a:rPr>
-              <a:t>결제대기</a:t>
-            </a:r>
-            <a:r>
-              <a:rPr sz="1000" b="0">
-                <a:solidFill>
-                  <a:srgbClr val="000000"/>
-                </a:solidFill>
-                <a:latin typeface="맑은 고딕"/>
-                <a:ea typeface="맑은 고딕"/>
-              </a:rPr>
-              <a:t>인 주문 A의 카드 결제를 요청한다.</a:t>
-            </a:r>
-          </a:p>
-          <a:p>
-            <a:pPr lvl="2" marL="551180" indent="-139700">
-              <a:spcBef>
-                <a:spcPts val="300"/>
-              </a:spcBef>
-              <a:spcAft>
-                <a:spcPts val="300"/>
-              </a:spcAft>
-              <a:buNone/>
-            </a:pPr>
-            <a:r>
-              <a:rPr sz="1000" b="0">
-                <a:solidFill>
-                  <a:srgbClr val="000000"/>
-                </a:solidFill>
-                <a:latin typeface="맑은 고딕"/>
-                <a:ea typeface="맑은 고딕"/>
-              </a:rPr>
-              <a:t>2. 주문 시스템이 확정 총액 2,000원으로 카드 승인을 요청한다.</a:t>
-            </a:r>
-          </a:p>
-          <a:p>
-            <a:pPr lvl="2" marL="551180" indent="-139700">
-              <a:spcBef>
-                <a:spcPts val="300"/>
-              </a:spcBef>
-              <a:spcAft>
-                <a:spcPts val="300"/>
-              </a:spcAft>
-              <a:buNone/>
-            </a:pPr>
-            <a:r>
-              <a:rPr sz="1000" b="0">
-                <a:solidFill>
-                  <a:srgbClr val="000000"/>
-                </a:solidFill>
-                <a:latin typeface="맑은 고딕"/>
-                <a:ea typeface="맑은 고딕"/>
-              </a:rPr>
-              <a:t>3. 카드 승인 완료가 주문 시스템에 전달된다.</a:t>
-            </a:r>
-          </a:p>
-          <a:p>
-            <a:pPr lvl="2" marL="551180" indent="-139700">
-              <a:spcBef>
-                <a:spcPts val="300"/>
-              </a:spcBef>
-              <a:spcAft>
-                <a:spcPts val="300"/>
-              </a:spcAft>
-              <a:buNone/>
-            </a:pPr>
-            <a:r>
-              <a:rPr sz="1000" b="0">
-                <a:solidFill>
-                  <a:srgbClr val="000000"/>
-                </a:solidFill>
-                <a:latin typeface="맑은 고딕"/>
-                <a:ea typeface="맑은 고딕"/>
-              </a:rPr>
-              <a:t>4. 이 사건에 대한 반응으로 주문 A가 </a:t>
-            </a:r>
-            <a:r>
-              <a:rPr sz="1000" b="0">
-                <a:solidFill>
-                  <a:srgbClr val="000000"/>
-                </a:solidFill>
-                <a:latin typeface="맑은 고딕"/>
-                <a:ea typeface="맑은 고딕"/>
-              </a:rPr>
-              <a:t>결제완료</a:t>
-            </a:r>
-            <a:r>
-              <a:rPr sz="1000" b="0">
-                <a:solidFill>
-                  <a:srgbClr val="000000"/>
-                </a:solidFill>
-                <a:latin typeface="맑은 고딕"/>
-                <a:ea typeface="맑은 고딕"/>
-              </a:rPr>
-              <a:t>가 되고, 서울로 배송 요청이 한 번 일어난다.</a:t>
-            </a:r>
-          </a:p>
-          <a:p>
-            <a:pPr marL="182880" indent="0">
-              <a:spcBef>
-                <a:spcPts val="300"/>
-              </a:spcBef>
-              <a:spcAft>
-                <a:spcPts val="300"/>
-              </a:spcAft>
-              <a:buNone/>
-            </a:pPr>
-            <a:r>
-              <a:rPr sz="1000" b="0">
-                <a:solidFill>
-                  <a:srgbClr val="000000"/>
-                </a:solidFill>
-                <a:latin typeface="맑은 고딕"/>
-                <a:ea typeface="맑은 고딕"/>
-              </a:rPr>
-              <a:t>도식에는 참여자 사이에 오가는 업무 사건만 그렸다.</a:t>
-            </a:r>
-          </a:p>
           <a:p>
             <a:pPr lvl="2" marL="411480" indent="-137160">
               <a:spcBef>
@@ -23379,7 +22675,77 @@
                 <a:latin typeface="맑은 고딕"/>
                 <a:ea typeface="맑은 고딕"/>
               </a:rPr>
-              <a:t>화살표는 사건이 일어나는 순서만 나타낸다. 실선이라고 동기 호출을 뜻하지는 않으며, 동기·비동기 전달 방식은 정하지 않는다.</a:t>
+              <a:t>상태 코드: 결제대기 </a:t>
+            </a:r>
+            <a:r>
+              <a:rPr sz="1000" b="0">
+                <a:solidFill>
+                  <a:srgbClr val="000000"/>
+                </a:solidFill>
+                <a:latin typeface="맑은 고딕"/>
+                <a:ea typeface="맑은 고딕"/>
+              </a:rPr>
+              <a:t>PENDING_PAYMENT</a:t>
+            </a:r>
+            <a:r>
+              <a:rPr sz="1000" b="0">
+                <a:solidFill>
+                  <a:srgbClr val="000000"/>
+                </a:solidFill>
+                <a:latin typeface="맑은 고딕"/>
+                <a:ea typeface="맑은 고딕"/>
+              </a:rPr>
+              <a:t>, 결제완료 </a:t>
+            </a:r>
+            <a:r>
+              <a:rPr sz="1000" b="0">
+                <a:solidFill>
+                  <a:srgbClr val="000000"/>
+                </a:solidFill>
+                <a:latin typeface="맑은 고딕"/>
+                <a:ea typeface="맑은 고딕"/>
+              </a:rPr>
+              <a:t>PAID</a:t>
+            </a:r>
+            <a:r>
+              <a:rPr sz="1000" b="0">
+                <a:solidFill>
+                  <a:srgbClr val="000000"/>
+                </a:solidFill>
+                <a:latin typeface="맑은 고딕"/>
+                <a:ea typeface="맑은 고딕"/>
+              </a:rPr>
+              <a:t>, 배송중 </a:t>
+            </a:r>
+            <a:r>
+              <a:rPr sz="1000" b="0">
+                <a:solidFill>
+                  <a:srgbClr val="000000"/>
+                </a:solidFill>
+                <a:latin typeface="맑은 고딕"/>
+                <a:ea typeface="맑은 고딕"/>
+              </a:rPr>
+              <a:t>IN_DELIVERY</a:t>
+            </a:r>
+            <a:r>
+              <a:rPr sz="1000" b="0">
+                <a:solidFill>
+                  <a:srgbClr val="000000"/>
+                </a:solidFill>
+                <a:latin typeface="맑은 고딕"/>
+                <a:ea typeface="맑은 고딕"/>
+              </a:rPr>
+              <a:t>, 배송완료 </a:t>
+            </a:r>
+            <a:r>
+              <a:rPr sz="1000" b="0">
+                <a:solidFill>
+                  <a:srgbClr val="000000"/>
+                </a:solidFill>
+                <a:latin typeface="맑은 고딕"/>
+                <a:ea typeface="맑은 고딕"/>
+              </a:rPr>
+              <a:t>DELIVERED</a:t>
             </a:r>
           </a:p>
           <a:p>
@@ -23402,7 +22768,7 @@
                 <a:latin typeface="맑은 고딕"/>
                 <a:ea typeface="맑은 고딕"/>
               </a:rPr>
-              <a:t>상태 변화는 상태 기계와 전이 목록에서 다룬다.</a:t>
+              <a:t>사건별 반응은 다음과 같다.</a:t>
             </a:r>
           </a:p>
           <a:p>
@@ -23418,6 +22784,16 @@
               <a:buChar char=""/>
             </a:pPr>
             <a:r>
+              <a:rPr sz="1000" b="1">
+                <a:solidFill>
+                  <a:srgbClr val="000000"/>
+                </a:solidFill>
+                <a:latin typeface="맑은 고딕"/>
+                <a:ea typeface="맑은 고딕"/>
+              </a:rPr>
+              <a:t>배송지 지정:</a:t>
+            </a:r>
+            <a:r>
               <a:rPr sz="1000" b="0">
                 <a:solidFill>
                   <a:srgbClr val="000000"/>
@@ -23425,7 +22801,7 @@
                 <a:latin typeface="맑은 고딕"/>
                 <a:ea typeface="맑은 고딕"/>
               </a:rPr>
-              <a:t>고객은 이후 주문 A의 결제완료 결과를 확인한다. 확인 경로, 별도 통지 여부, 통지 주체는 정하지 않았으므로 도식에 넣지 않았다.</a:t>
+              <a:t> 주문 A 생성. 펜 2개·단가 1,000원·총액 2,000원·서울 확정</a:t>
             </a:r>
           </a:p>
           <a:p>
@@ -23441,6 +22817,16 @@
               <a:buChar char=""/>
             </a:pPr>
             <a:r>
+              <a:rPr sz="1000" b="1">
+                <a:solidFill>
+                  <a:srgbClr val="000000"/>
+                </a:solidFill>
+                <a:latin typeface="맑은 고딕"/>
+                <a:ea typeface="맑은 고딕"/>
+              </a:rPr>
+              <a:t>카드 승인 완료:</a:t>
+            </a:r>
+            <a:r>
               <a:rPr sz="1000" b="0">
                 <a:solidFill>
                   <a:srgbClr val="000000"/>
@@ -23448,14 +22834,167 @@
                 <a:latin typeface="맑은 고딕"/>
                 <a:ea typeface="맑은 고딕"/>
               </a:rPr>
-              <a:t>배송 시작·완료 통보는 생애주기 참고 범위이므로 이 장면에 넣지 않았다.</a:t>
+              <a:t> 서울로 배송 요청 1회 발생</a:t>
+            </a:r>
+          </a:p>
+          <a:p>
+            <a:pPr lvl="2" marL="411480" indent="-137160">
+              <a:spcBef>
+                <a:spcPts val="300"/>
+              </a:spcBef>
+              <a:spcAft>
+                <a:spcPts val="300"/>
+              </a:spcAft>
+              <a:buSzPct val="90000"/>
+              <a:buFont typeface="Wingdings" pitchFamily="2" charset="2"/>
+              <a:buChar char=""/>
+            </a:pPr>
+            <a:r>
+              <a:rPr sz="1000" b="1">
+                <a:solidFill>
+                  <a:srgbClr val="000000"/>
+                </a:solidFill>
+                <a:latin typeface="맑은 고딕"/>
+                <a:ea typeface="맑은 고딕"/>
+              </a:rPr>
+              <a:t>카드 승인 거절:</a:t>
+            </a:r>
+            <a:r>
+              <a:rPr sz="1000" b="0">
+                <a:solidFill>
+                  <a:srgbClr val="000000"/>
+                </a:solidFill>
+                <a:latin typeface="맑은 고딕"/>
+                <a:ea typeface="맑은 고딕"/>
+              </a:rPr>
+              <a:t> 배송 요청 없음. 같은 주문 A 유지</a:t>
+            </a:r>
+          </a:p>
+          <a:p>
+            <a:pPr lvl="2" marL="411480" indent="-137160">
+              <a:spcBef>
+                <a:spcPts val="300"/>
+              </a:spcBef>
+              <a:spcAft>
+                <a:spcPts val="300"/>
+              </a:spcAft>
+              <a:buSzPct val="90000"/>
+              <a:buFont typeface="Wingdings" pitchFamily="2" charset="2"/>
+              <a:buChar char=""/>
+            </a:pPr>
+            <a:r>
+              <a:rPr sz="1000" b="1">
+                <a:solidFill>
+                  <a:srgbClr val="000000"/>
+                </a:solidFill>
+                <a:latin typeface="맑은 고딕"/>
+                <a:ea typeface="맑은 고딕"/>
+              </a:rPr>
+              <a:t>배송 시작 통보, 배송 완료 통보:</a:t>
+            </a:r>
+            <a:r>
+              <a:rPr sz="1000" b="0">
+                <a:solidFill>
+                  <a:srgbClr val="000000"/>
+                </a:solidFill>
+                <a:latin typeface="맑은 고딕"/>
+                <a:ea typeface="맑은 고딕"/>
+              </a:rPr>
+              <a:t> 정한 반응 없음</a:t>
+            </a:r>
+          </a:p>
+          <a:p>
+            <a:pPr lvl="2" marL="411480" indent="-137160">
+              <a:spcBef>
+                <a:spcPts val="300"/>
+              </a:spcBef>
+              <a:spcAft>
+                <a:spcPts val="300"/>
+              </a:spcAft>
+              <a:buSzPct val="90000"/>
+              <a:buFont typeface="Wingdings" pitchFamily="2" charset="2"/>
+              <a:buChar char=""/>
+            </a:pPr>
+            <a:r>
+              <a:rPr sz="1000" b="0">
+                <a:solidFill>
+                  <a:srgbClr val="000000"/>
+                </a:solidFill>
+                <a:latin typeface="맑은 고딕"/>
+                <a:ea typeface="맑은 고딕"/>
+              </a:rPr>
+              <a:t>거절 뒤의 재결제가 승인되는 경우에 새로운 전이가 생기지는 않는다. 같은 주문 A에 둘째 행</a:t>
+            </a:r>
+            <a:r>
+              <a:rPr sz="1000" b="0">
+                <a:solidFill>
+                  <a:srgbClr val="000000"/>
+                </a:solidFill>
+                <a:latin typeface="맑은 고딕"/>
+                <a:ea typeface="맑은 고딕"/>
+              </a:rPr>
+              <a:t>(카드 승인 완료)</a:t>
+            </a:r>
+            <a:r>
+              <a:rPr sz="1000" b="0">
+                <a:solidFill>
+                  <a:srgbClr val="000000"/>
+                </a:solidFill>
+                <a:latin typeface="맑은 고딕"/>
+                <a:ea typeface="맑은 고딕"/>
+              </a:rPr>
+              <a:t>이 적용된다.</a:t>
+            </a:r>
+          </a:p>
+          <a:p>
+            <a:pPr lvl="2" marL="411480" indent="-137160">
+              <a:spcBef>
+                <a:spcPts val="300"/>
+              </a:spcBef>
+              <a:spcAft>
+                <a:spcPts val="300"/>
+              </a:spcAft>
+              <a:buSzPct val="90000"/>
+              <a:buFont typeface="Wingdings" pitchFamily="2" charset="2"/>
+              <a:buChar char=""/>
+            </a:pPr>
+            <a:r>
+              <a:rPr sz="1000" b="0">
+                <a:solidFill>
+                  <a:srgbClr val="000000"/>
+                </a:solidFill>
+                <a:latin typeface="맑은 고딕"/>
+                <a:ea typeface="맑은 고딕"/>
+              </a:rPr>
+              <a:t>"배송 요청 1회"는 배송 요청이라는 업무 사건이 한 번 일어난다는 뜻이다. 그 사건을 어디에 어떻게 남기는지, 운영상 중복을 막거나 다시 시도하는 기준은 정하지 않는다.</a:t>
+            </a:r>
+          </a:p>
+          <a:p>
+            <a:pPr marL="182880" indent="0">
+              <a:spcBef>
+                <a:spcPts val="300"/>
+              </a:spcBef>
+              <a:spcAft>
+                <a:spcPts val="300"/>
+              </a:spcAft>
+              <a:buNone/>
+            </a:pPr>
+            <a:r>
+              <a:rPr sz="1000" b="1">
+                <a:solidFill>
+                  <a:srgbClr val="000000"/>
+                </a:solidFill>
+                <a:latin typeface="맑은 고딕"/>
+                <a:ea typeface="맑은 고딕"/>
+              </a:rPr>
+              <a:t>정상 승인 시퀀스</a:t>
             </a:r>
           </a:p>
         </p:txBody>
       </p:sp>
       <p:sp>
         <p:nvSpPr>
-          <p:cNvPr id="10" name="TextBox 12">
+          <p:cNvPr id="9" name="TextBox 12">
             <a:extLst>
               <a:ext uri="{FF2B5EF4-FFF2-40B4-BE49-F238E27FC236}">
                 <a16:creationId xmlns:a16="http://schemas.microsoft.com/office/drawing/2014/main" id="{654EDDB4-901F-3D48-A715-17D163E8A7AC}"/>
@@ -23467,7 +23006,7 @@
         </p:nvSpPr>
         <p:spPr>
           <a:xfrm>
-            <a:off x="365760" y="1033272"/>
+            <a:off x="365760" y="3296623"/>
             <a:ext cx="8412480" cy="201168"/>
           </a:xfrm>
           <a:prstGeom prst="rect">
@@ -23497,7 +23036,7 @@
       </p:sp>
       <p:pic>
         <p:nvPicPr>
-          <p:cNvPr id="11" name="mermaid Diagram 2"/>
+          <p:cNvPr id="10" name="mermaid Diagram 2"/>
           <p:cNvPicPr>
             <a:picLocks noChangeAspect="1"/>
           </p:cNvPicPr>
@@ -23511,8 +23050,8 @@
         </p:blipFill>
         <p:spPr>
           <a:xfrm>
-            <a:off x="1008062" y="1271016"/>
-            <a:ext cx="7127875" cy="2200186"/>
+            <a:off x="877094" y="3534367"/>
+            <a:ext cx="7389812" cy="2205633"/>
           </a:xfrm>
           <a:prstGeom prst="rect">
             <a:avLst/>
@@ -23584,7 +23123,17 @@
                 <a:latin typeface="맑은 고딕"/>
                 <a:ea typeface="맑은 고딕"/>
               </a:rPr>
-              <a:t>규칙의 대표 예</a:t>
+              <a:t>“주문한다” 동적 업무 모델 </a:t>
+            </a:r>
+            <a:r>
+              <a:rPr sz="2000" b="1">
+                <a:solidFill>
+                  <a:srgbClr val="000000"/>
+                </a:solidFill>
+                <a:latin typeface="맑은 고딕"/>
+                <a:ea typeface="맑은 고딕"/>
+              </a:rPr>
+              <a:t>(4/6)</a:t>
             </a:r>
           </a:p>
           <a:p>
@@ -23730,19 +23279,14 @@
             <p:ph idx="1"/>
           </p:nvPr>
         </p:nvSpPr>
-        <p:spPr>
-          <a:xfrm>
-            <a:off x="233172" y="1404056"/>
-            <a:ext cx="4338828" cy="4908409"/>
-          </a:xfrm>
-        </p:spPr>
+        <p:spPr/>
         <p:txBody>
           <a:bodyPr>
             <a:normAutofit/>
           </a:bodyPr>
           <a:lstStyle/>
           <a:p>
-            <a:pPr marL="322580" indent="-139700">
+            <a:pPr lvl="2" marL="551180" indent="-139700">
               <a:spcBef>
                 <a:spcPts val="300"/>
               </a:spcBef>
@@ -23752,14 +23296,117 @@
               <a:buNone/>
             </a:pPr>
             <a:r>
-              <a:rPr sz="1000" b="1">
-                <a:solidFill>
-                  <a:srgbClr val="000000"/>
-                </a:solidFill>
-                <a:latin typeface="맑은 고딕"/>
-                <a:ea typeface="맑은 고딕"/>
-              </a:rPr>
-              <a:t>1. 승인</a:t>
+              <a:rPr sz="1000" b="0">
+                <a:solidFill>
+                  <a:srgbClr val="000000"/>
+                </a:solidFill>
+                <a:latin typeface="맑은 고딕"/>
+                <a:ea typeface="맑은 고딕"/>
+              </a:rPr>
+              <a:t>1. 고객이 </a:t>
+            </a:r>
+            <a:r>
+              <a:rPr sz="1000" b="0">
+                <a:solidFill>
+                  <a:srgbClr val="000000"/>
+                </a:solidFill>
+                <a:latin typeface="맑은 고딕"/>
+                <a:ea typeface="맑은 고딕"/>
+              </a:rPr>
+              <a:t>결제대기</a:t>
+            </a:r>
+            <a:r>
+              <a:rPr sz="1000" b="0">
+                <a:solidFill>
+                  <a:srgbClr val="000000"/>
+                </a:solidFill>
+                <a:latin typeface="맑은 고딕"/>
+                <a:ea typeface="맑은 고딕"/>
+              </a:rPr>
+              <a:t>인 주문 A의 카드 결제를 요청한다.</a:t>
+            </a:r>
+          </a:p>
+          <a:p>
+            <a:pPr lvl="2" marL="551180" indent="-139700">
+              <a:spcBef>
+                <a:spcPts val="300"/>
+              </a:spcBef>
+              <a:spcAft>
+                <a:spcPts val="300"/>
+              </a:spcAft>
+              <a:buNone/>
+            </a:pPr>
+            <a:r>
+              <a:rPr sz="1000" b="0">
+                <a:solidFill>
+                  <a:srgbClr val="000000"/>
+                </a:solidFill>
+                <a:latin typeface="맑은 고딕"/>
+                <a:ea typeface="맑은 고딕"/>
+              </a:rPr>
+              <a:t>2. 주문 시스템이 확정 총액 2,000원으로 카드 승인을 요청한다.</a:t>
+            </a:r>
+          </a:p>
+          <a:p>
+            <a:pPr lvl="2" marL="551180" indent="-139700">
+              <a:spcBef>
+                <a:spcPts val="300"/>
+              </a:spcBef>
+              <a:spcAft>
+                <a:spcPts val="300"/>
+              </a:spcAft>
+              <a:buNone/>
+            </a:pPr>
+            <a:r>
+              <a:rPr sz="1000" b="0">
+                <a:solidFill>
+                  <a:srgbClr val="000000"/>
+                </a:solidFill>
+                <a:latin typeface="맑은 고딕"/>
+                <a:ea typeface="맑은 고딕"/>
+              </a:rPr>
+              <a:t>3. 카드 승인 완료가 주문 시스템에 전달된다.</a:t>
+            </a:r>
+          </a:p>
+          <a:p>
+            <a:pPr lvl="2" marL="551180" indent="-139700">
+              <a:spcBef>
+                <a:spcPts val="300"/>
+              </a:spcBef>
+              <a:spcAft>
+                <a:spcPts val="300"/>
+              </a:spcAft>
+              <a:buNone/>
+            </a:pPr>
+            <a:r>
+              <a:rPr sz="1000" b="0">
+                <a:solidFill>
+                  <a:srgbClr val="000000"/>
+                </a:solidFill>
+                <a:latin typeface="맑은 고딕"/>
+                <a:ea typeface="맑은 고딕"/>
+              </a:rPr>
+              <a:t>4. 이 사건에 대한 반응으로 주문 A가 </a:t>
+            </a:r>
+            <a:r>
+              <a:rPr sz="1000" b="0">
+                <a:solidFill>
+                  <a:srgbClr val="000000"/>
+                </a:solidFill>
+                <a:latin typeface="맑은 고딕"/>
+                <a:ea typeface="맑은 고딕"/>
+              </a:rPr>
+              <a:t>결제완료</a:t>
+            </a:r>
+            <a:r>
+              <a:rPr sz="1000" b="0">
+                <a:solidFill>
+                  <a:srgbClr val="000000"/>
+                </a:solidFill>
+                <a:latin typeface="맑은 고딕"/>
+                <a:ea typeface="맑은 고딕"/>
+              </a:rPr>
+              <a:t>가 되고, 서울로 배송 요청이 한 번 일어난다.</a:t>
             </a:r>
           </a:p>
           <a:p>
@@ -23775,16 +23422,6 @@
               <a:buChar char=""/>
             </a:pPr>
             <a:r>
-              <a:rPr sz="1000" b="1">
-                <a:solidFill>
-                  <a:srgbClr val="000000"/>
-                </a:solidFill>
-                <a:latin typeface="맑은 고딕"/>
-                <a:ea typeface="맑은 고딕"/>
-              </a:rPr>
-              <a:t>전제:</a:t>
-            </a:r>
-            <a:r>
               <a:rPr sz="1000" b="0">
                 <a:solidFill>
                   <a:srgbClr val="000000"/>
@@ -23792,17 +23429,7 @@
                 <a:latin typeface="맑은 고딕"/>
                 <a:ea typeface="맑은 고딕"/>
               </a:rPr>
-              <a:t> 주문 A, </a:t>
-            </a:r>
-            <a:r>
-              <a:rPr sz="1000" b="0">
-                <a:solidFill>
-                  <a:srgbClr val="000000"/>
-                </a:solidFill>
-                <a:latin typeface="맑은 고딕"/>
-                <a:ea typeface="맑은 고딕"/>
-              </a:rPr>
-              <a:t>결제대기</a:t>
+              <a:t>도식에는 참여자 사이에 오가는 업무 사건만 그렸다.</a:t>
             </a:r>
           </a:p>
           <a:p>
@@ -23818,16 +23445,6 @@
               <a:buChar char=""/>
             </a:pPr>
             <a:r>
-              <a:rPr sz="1000" b="1">
-                <a:solidFill>
-                  <a:srgbClr val="000000"/>
-                </a:solidFill>
-                <a:latin typeface="맑은 고딕"/>
-                <a:ea typeface="맑은 고딕"/>
-              </a:rPr>
-              <a:t>사건:</a:t>
-            </a:r>
-            <a:r>
               <a:rPr sz="1000" b="0">
                 <a:solidFill>
                   <a:srgbClr val="000000"/>
@@ -23835,7 +23452,7 @@
                 <a:latin typeface="맑은 고딕"/>
                 <a:ea typeface="맑은 고딕"/>
               </a:rPr>
-              <a:t> 카드 Y에 2,000원 승인 요청 → 승인 완료</a:t>
+              <a:t>화살표는 사건이 일어나는 순서만 나타낸다. 실선이라고 동기 호출을 뜻하지는 않으며, 동기·비동기 전달 방식은 정하지 않는다.</a:t>
             </a:r>
           </a:p>
           <a:p>
@@ -23851,16 +23468,6 @@
               <a:buChar char=""/>
             </a:pPr>
             <a:r>
-              <a:rPr sz="1000" b="1">
-                <a:solidFill>
-                  <a:srgbClr val="000000"/>
-                </a:solidFill>
-                <a:latin typeface="맑은 고딕"/>
-                <a:ea typeface="맑은 고딕"/>
-              </a:rPr>
-              <a:t>결과:</a:t>
-            </a:r>
-            <a:r>
               <a:rPr sz="1000" b="0">
                 <a:solidFill>
                   <a:srgbClr val="000000"/>
@@ -23868,27 +23475,7 @@
                 <a:latin typeface="맑은 고딕"/>
                 <a:ea typeface="맑은 고딕"/>
               </a:rPr>
-              <a:t> </a:t>
-            </a:r>
-            <a:r>
-              <a:rPr sz="1000" b="0">
-                <a:solidFill>
-                  <a:srgbClr val="000000"/>
-                </a:solidFill>
-                <a:latin typeface="맑은 고딕"/>
-                <a:ea typeface="맑은 고딕"/>
-              </a:rPr>
-              <a:t>결제완료</a:t>
-            </a:r>
-            <a:r>
-              <a:rPr sz="1000" b="0">
-                <a:solidFill>
-                  <a:srgbClr val="000000"/>
-                </a:solidFill>
-                <a:latin typeface="맑은 고딕"/>
-                <a:ea typeface="맑은 고딕"/>
-              </a:rPr>
-              <a:t>, 서울로 배송 요청 1회</a:t>
+              <a:t>상태 변화는 상태 기계와 전이 목록에서 다룬다.</a:t>
             </a:r>
           </a:p>
           <a:p>
@@ -23904,16 +23491,6 @@
               <a:buChar char=""/>
             </a:pPr>
             <a:r>
-              <a:rPr sz="1000" b="1">
-                <a:solidFill>
-                  <a:srgbClr val="000000"/>
-                </a:solidFill>
-                <a:latin typeface="맑은 고딕"/>
-                <a:ea typeface="맑은 고딕"/>
-              </a:rPr>
-              <a:t>유지되는 값:</a:t>
-            </a:r>
-            <a:r>
               <a:rPr sz="1000" b="0">
                 <a:solidFill>
                   <a:srgbClr val="000000"/>
@@ -23921,28 +23498,7 @@
                 <a:latin typeface="맑은 고딕"/>
                 <a:ea typeface="맑은 고딕"/>
               </a:rPr>
-              <a:t> 주문 A · 펜 2개 · 확정 단가 1,000원 · 총액 2,000원 · 서울</a:t>
-            </a:r>
-          </a:p>
-          <a:p>
-            <a:pPr marL="322580" indent="-139700">
-              <a:spcBef>
-                <a:spcPts val="300"/>
-              </a:spcBef>
-              <a:spcAft>
-                <a:spcPts val="300"/>
-              </a:spcAft>
-              <a:buNone/>
-            </a:pPr>
-            <a:r>
-              <a:rPr sz="1000" b="1">
-                <a:solidFill>
-                  <a:srgbClr val="000000"/>
-                </a:solidFill>
-                <a:latin typeface="맑은 고딕"/>
-                <a:ea typeface="맑은 고딕"/>
-              </a:rPr>
-              <a:t>2. 판매가 변경 뒤 승인</a:t>
+              <a:t>고객은 이후 주문 A의 결제완료 결과를 확인한다. 확인 경로, 별도 통지 여부, 통지 주체는 정하지 않았으므로 도식에 넣지 않았다.</a:t>
             </a:r>
           </a:p>
           <a:p>
@@ -23958,6 +23514,27 @@
               <a:buChar char=""/>
             </a:pPr>
             <a:r>
+              <a:rPr sz="1000" b="0">
+                <a:solidFill>
+                  <a:srgbClr val="000000"/>
+                </a:solidFill>
+                <a:latin typeface="맑은 고딕"/>
+                <a:ea typeface="맑은 고딕"/>
+              </a:rPr>
+              <a:t>배송 시작·완료 통보는 생애주기 참고 범위이므로 이 장면에 넣지 않았다.</a:t>
+            </a:r>
+          </a:p>
+          <a:p>
+            <a:pPr marL="182880" indent="0">
+              <a:spcBef>
+                <a:spcPts val="300"/>
+              </a:spcBef>
+              <a:spcAft>
+                <a:spcPts val="300"/>
+              </a:spcAft>
+              <a:buNone/>
+            </a:pPr>
+            <a:r>
               <a:rPr sz="1000" b="1">
                 <a:solidFill>
                   <a:srgbClr val="000000"/>
@@ -23965,37 +23542,7 @@
                 <a:latin typeface="맑은 고딕"/>
                 <a:ea typeface="맑은 고딕"/>
               </a:rPr>
-              <a:t>전제:</a:t>
-            </a:r>
-            <a:r>
-              <a:rPr sz="1000" b="0">
-                <a:solidFill>
-                  <a:srgbClr val="000000"/>
-                </a:solidFill>
-                <a:latin typeface="맑은 고딕"/>
-                <a:ea typeface="맑은 고딕"/>
-              </a:rPr>
-              <a:t> 주문 A, </a:t>
-            </a:r>
-            <a:r>
-              <a:rPr sz="1000" b="0">
-                <a:solidFill>
-                  <a:srgbClr val="000000"/>
-                </a:solidFill>
-                <a:latin typeface="맑은 고딕"/>
-                <a:ea typeface="맑은 고딕"/>
-              </a:rPr>
-              <a:t>결제대기</a:t>
-            </a:r>
-            <a:r>
-              <a:rPr sz="1000" b="0">
-                <a:solidFill>
-                  <a:srgbClr val="000000"/>
-                </a:solidFill>
-                <a:latin typeface="맑은 고딕"/>
-                <a:ea typeface="맑은 고딕"/>
-              </a:rPr>
-              <a:t>, 현재 판매가 개당 1,200원</a:t>
+              <a:t>규칙의 대표 예</a:t>
             </a:r>
           </a:p>
           <a:p>
@@ -24011,6 +23558,27 @@
               <a:buChar char=""/>
             </a:pPr>
             <a:r>
+              <a:rPr sz="1000" b="0">
+                <a:solidFill>
+                  <a:srgbClr val="000000"/>
+                </a:solidFill>
+                <a:latin typeface="맑은 고딕"/>
+                <a:ea typeface="맑은 고딕"/>
+              </a:rPr>
+              <a:t>네 예 모두 주문 A의 식별, 펜 2개, 확정 단가 1,000원, 총액 2,000원, 배송지 서울이 바뀌지 않는다. 예마다 「유지되는 값」 줄에서 확인할 수 있다.</a:t>
+            </a:r>
+          </a:p>
+          <a:p>
+            <a:pPr marL="322580" indent="-139700">
+              <a:spcBef>
+                <a:spcPts val="300"/>
+              </a:spcBef>
+              <a:spcAft>
+                <a:spcPts val="300"/>
+              </a:spcAft>
+              <a:buNone/>
+            </a:pPr>
+            <a:r>
               <a:rPr sz="1000" b="1">
                 <a:solidFill>
                   <a:srgbClr val="000000"/>
@@ -24018,17 +23586,7 @@
                 <a:latin typeface="맑은 고딕"/>
                 <a:ea typeface="맑은 고딕"/>
               </a:rPr>
-              <a:t>사건:</a:t>
-            </a:r>
-            <a:r>
-              <a:rPr sz="1000" b="0">
-                <a:solidFill>
-                  <a:srgbClr val="000000"/>
-                </a:solidFill>
-                <a:latin typeface="맑은 고딕"/>
-                <a:ea typeface="맑은 고딕"/>
-              </a:rPr>
-              <a:t> 카드 Y에 2,000원 승인 요청 → 승인 완료</a:t>
+              <a:t>1. 승인</a:t>
             </a:r>
           </a:p>
           <a:p>
@@ -24051,7 +23609,7 @@
                 <a:latin typeface="맑은 고딕"/>
                 <a:ea typeface="맑은 고딕"/>
               </a:rPr>
-              <a:t>결과:</a:t>
+              <a:t>전제:</a:t>
             </a:r>
             <a:r>
               <a:rPr sz="1000" b="0">
@@ -24061,7 +23619,7 @@
                 <a:latin typeface="맑은 고딕"/>
                 <a:ea typeface="맑은 고딕"/>
               </a:rPr>
-              <a:t> 승인 요청 금액 2,000원, </a:t>
+              <a:t> 주문 A, </a:t>
             </a:r>
             <a:r>
               <a:rPr sz="1000" b="0">
@@ -24071,17 +23629,7 @@
                 <a:latin typeface="맑은 고딕"/>
                 <a:ea typeface="맑은 고딕"/>
               </a:rPr>
-              <a:t>결제완료</a:t>
-            </a:r>
-            <a:r>
-              <a:rPr sz="1000" b="0">
-                <a:solidFill>
-                  <a:srgbClr val="000000"/>
-                </a:solidFill>
-                <a:latin typeface="맑은 고딕"/>
-                <a:ea typeface="맑은 고딕"/>
-              </a:rPr>
-              <a:t>, 배송 요청 1회</a:t>
+              <a:t>결제대기</a:t>
             </a:r>
           </a:p>
           <a:p>
@@ -24104,7 +23652,7 @@
                 <a:latin typeface="맑은 고딕"/>
                 <a:ea typeface="맑은 고딕"/>
               </a:rPr>
-              <a:t>유지되는 값:</a:t>
+              <a:t>사건:</a:t>
             </a:r>
             <a:r>
               <a:rPr sz="1000" b="0">
@@ -24114,48 +23662,7 @@
                 <a:latin typeface="맑은 고딕"/>
                 <a:ea typeface="맑은 고딕"/>
               </a:rPr>
-              <a:t> 주문 A · 펜 2개 · 확정 단가 1,000원</a:t>
-            </a:r>
-            <a:r>
-              <a:rPr sz="1000" b="0">
-                <a:solidFill>
-                  <a:srgbClr val="000000"/>
-                </a:solidFill>
-                <a:latin typeface="맑은 고딕"/>
-                <a:ea typeface="맑은 고딕"/>
-              </a:rPr>
-              <a:t>(현재 판매가와 무관)</a:t>
-            </a:r>
-            <a:r>
-              <a:rPr sz="1000" b="0">
-                <a:solidFill>
-                  <a:srgbClr val="000000"/>
-                </a:solidFill>
-                <a:latin typeface="맑은 고딕"/>
-                <a:ea typeface="맑은 고딕"/>
-              </a:rPr>
-              <a:t> · 총액 2,000원 · 서울</a:t>
-            </a:r>
-          </a:p>
-          <a:p>
-            <a:pPr marL="322580" indent="-139700">
-              <a:spcBef>
-                <a:spcPts val="300"/>
-              </a:spcBef>
-              <a:spcAft>
-                <a:spcPts val="300"/>
-              </a:spcAft>
-              <a:buNone/>
-            </a:pPr>
-            <a:r>
-              <a:rPr sz="1000" b="1">
-                <a:solidFill>
-                  <a:srgbClr val="000000"/>
-                </a:solidFill>
-                <a:latin typeface="맑은 고딕"/>
-                <a:ea typeface="맑은 고딕"/>
-              </a:rPr>
-              <a:t>3. 거절</a:t>
+              <a:t> 카드 Y에 2,000원 승인 요청 → 승인 완료</a:t>
             </a:r>
           </a:p>
           <a:p>
@@ -24178,7 +23685,7 @@
                 <a:latin typeface="맑은 고딕"/>
                 <a:ea typeface="맑은 고딕"/>
               </a:rPr>
-              <a:t>전제:</a:t>
+              <a:t>결과:</a:t>
             </a:r>
             <a:r>
               <a:rPr sz="1000" b="0">
@@ -24188,7 +23695,7 @@
                 <a:latin typeface="맑은 고딕"/>
                 <a:ea typeface="맑은 고딕"/>
               </a:rPr>
-              <a:t> 주문 A, </a:t>
+              <a:t> </a:t>
             </a:r>
             <a:r>
               <a:rPr sz="1000" b="0">
@@ -24198,7 +23705,17 @@
                 <a:latin typeface="맑은 고딕"/>
                 <a:ea typeface="맑은 고딕"/>
               </a:rPr>
-              <a:t>결제대기</a:t>
+              <a:t>결제완료</a:t>
+            </a:r>
+            <a:r>
+              <a:rPr sz="1000" b="0">
+                <a:solidFill>
+                  <a:srgbClr val="000000"/>
+                </a:solidFill>
+                <a:latin typeface="맑은 고딕"/>
+                <a:ea typeface="맑은 고딕"/>
+              </a:rPr>
+              <a:t>, 서울로 배송 요청 1회</a:t>
             </a:r>
           </a:p>
           <a:p>
@@ -24221,7 +23738,7 @@
                 <a:latin typeface="맑은 고딕"/>
                 <a:ea typeface="맑은 고딕"/>
               </a:rPr>
-              <a:t>사건:</a:t>
+              <a:t>유지되는 값:</a:t>
             </a:r>
             <a:r>
               <a:rPr sz="1000" b="0">
@@ -24231,7 +23748,28 @@
                 <a:latin typeface="맑은 고딕"/>
                 <a:ea typeface="맑은 고딕"/>
               </a:rPr>
-              <a:t> 카드 X에 2,000원 승인 요청 → 거절</a:t>
+              <a:t> 주문 A · 펜 2개 · 확정 단가 1,000원 · 총액 2,000원 · 서울</a:t>
+            </a:r>
+          </a:p>
+          <a:p>
+            <a:pPr marL="322580" indent="-139700">
+              <a:spcBef>
+                <a:spcPts val="300"/>
+              </a:spcBef>
+              <a:spcAft>
+                <a:spcPts val="300"/>
+              </a:spcAft>
+              <a:buNone/>
+            </a:pPr>
+            <a:r>
+              <a:rPr sz="1000" b="1">
+                <a:solidFill>
+                  <a:srgbClr val="000000"/>
+                </a:solidFill>
+                <a:latin typeface="맑은 고딕"/>
+                <a:ea typeface="맑은 고딕"/>
+              </a:rPr>
+              <a:t>2. 판매가 변경 뒤 승인</a:t>
             </a:r>
           </a:p>
           <a:p>
@@ -24254,7 +23792,7 @@
                 <a:latin typeface="맑은 고딕"/>
                 <a:ea typeface="맑은 고딕"/>
               </a:rPr>
-              <a:t>결과:</a:t>
+              <a:t>전제:</a:t>
             </a:r>
             <a:r>
               <a:rPr sz="1000" b="0">
@@ -24264,7 +23802,7 @@
                 <a:latin typeface="맑은 고딕"/>
                 <a:ea typeface="맑은 고딕"/>
               </a:rPr>
-              <a:t> </a:t>
+              <a:t> 주문 A, </a:t>
             </a:r>
             <a:r>
               <a:rPr sz="1000" b="0">
@@ -24284,7 +23822,7 @@
                 <a:latin typeface="맑은 고딕"/>
                 <a:ea typeface="맑은 고딕"/>
               </a:rPr>
-              <a:t> 자기 전이, 배송 요청 0회, 다른 카드로 재결제 가능</a:t>
+              <a:t>, 현재 판매가 개당 1,200원</a:t>
             </a:r>
           </a:p>
           <a:p>
@@ -24307,7 +23845,7 @@
                 <a:latin typeface="맑은 고딕"/>
                 <a:ea typeface="맑은 고딕"/>
               </a:rPr>
-              <a:t>유지되는 값:</a:t>
+              <a:t>사건:</a:t>
             </a:r>
             <a:r>
               <a:rPr sz="1000" b="0">
@@ -24317,107 +23855,7 @@
                 <a:latin typeface="맑은 고딕"/>
                 <a:ea typeface="맑은 고딕"/>
               </a:rPr>
-              <a:t> 주문 A · 펜 2개 · 확정 단가 1,000원 · 총액 2,000원 · 서울</a:t>
-            </a:r>
-          </a:p>
-        </p:txBody>
-      </p:sp>
-      <p:sp>
-        <p:nvSpPr>
-          <p:cNvPr id="9" name="내용 개체 틀 7">
-            <a:extLst>
-              <a:ext uri="{FF2B5EF4-FFF2-40B4-BE49-F238E27FC236}">
-                <a16:creationId xmlns:a16="http://schemas.microsoft.com/office/drawing/2014/main" id="{BEBA2C4A-B0BF-F2E4-EA6E-614C99CBA184}"/>
-              </a:ext>
-            </a:extLst>
-          </p:cNvPr>
-          <p:cNvSpPr>
-            <a:spLocks noGrp="1"/>
-          </p:cNvSpPr>
-          <p:nvPr>
-            <p:ph idx="1"/>
-          </p:nvPr>
-        </p:nvSpPr>
-        <p:spPr>
-          <a:xfrm>
-            <a:off x="233172" y="960120"/>
-            <a:ext cx="8778240" cy="443936"/>
-          </a:xfrm>
-        </p:spPr>
-        <p:txBody>
-          <a:bodyPr>
-            <a:normAutofit/>
-          </a:bodyPr>
-          <a:lstStyle/>
-          <a:p>
-            <a:pPr marL="182880" indent="0">
-              <a:spcBef>
-                <a:spcPts val="300"/>
-              </a:spcBef>
-              <a:spcAft>
-                <a:spcPts val="300"/>
-              </a:spcAft>
-              <a:buNone/>
-            </a:pPr>
-            <a:r>
-              <a:rPr sz="1000" b="0">
-                <a:solidFill>
-                  <a:srgbClr val="000000"/>
-                </a:solidFill>
-                <a:latin typeface="맑은 고딕"/>
-                <a:ea typeface="맑은 고딕"/>
-              </a:rPr>
-              <a:t>네 예 모두 주문 A의 식별, 펜 2개, 확정 단가 1,000원, 총액 2,000원, 배송지 서울이 바뀌지 않는다. 예마다 「유지되는 값」 줄에서 확인할 수 있다.</a:t>
-            </a:r>
-          </a:p>
-        </p:txBody>
-      </p:sp>
-      <p:sp>
-        <p:nvSpPr>
-          <p:cNvPr id="10" name="내용 개체 틀 7">
-            <a:extLst>
-              <a:ext uri="{FF2B5EF4-FFF2-40B4-BE49-F238E27FC236}">
-                <a16:creationId xmlns:a16="http://schemas.microsoft.com/office/drawing/2014/main" id="{BEBA2C4A-B0BF-F2E4-EA6E-614C99CBA184}"/>
-              </a:ext>
-            </a:extLst>
-          </p:cNvPr>
-          <p:cNvSpPr>
-            <a:spLocks noGrp="1"/>
-          </p:cNvSpPr>
-          <p:nvPr>
-            <p:ph idx="1"/>
-          </p:nvPr>
-        </p:nvSpPr>
-        <p:spPr>
-          <a:xfrm>
-            <a:off x="4572000" y="1404056"/>
-            <a:ext cx="4439412" cy="4908409"/>
-          </a:xfrm>
-        </p:spPr>
-        <p:txBody>
-          <a:bodyPr>
-            <a:normAutofit/>
-          </a:bodyPr>
-          <a:lstStyle/>
-          <a:p>
-            <a:pPr marL="322580" indent="-139700">
-              <a:spcBef>
-                <a:spcPts val="300"/>
-              </a:spcBef>
-              <a:spcAft>
-                <a:spcPts val="300"/>
-              </a:spcAft>
-              <a:buNone/>
-            </a:pPr>
-            <a:r>
-              <a:rPr sz="1000" b="1">
-                <a:solidFill>
-                  <a:srgbClr val="000000"/>
-                </a:solidFill>
-                <a:latin typeface="맑은 고딕"/>
-                <a:ea typeface="맑은 고딕"/>
-              </a:rPr>
-              <a:t>4. 거절 뒤 재결제</a:t>
+              <a:t> 카드 Y에 2,000원 승인 요청 → 승인 완료</a:t>
             </a:r>
           </a:p>
           <a:p>
@@ -24440,7 +23878,7 @@
                 <a:latin typeface="맑은 고딕"/>
                 <a:ea typeface="맑은 고딕"/>
               </a:rPr>
-              <a:t>전제:</a:t>
+              <a:t>결과:</a:t>
             </a:r>
             <a:r>
               <a:rPr sz="1000" b="0">
@@ -24450,7 +23888,7 @@
                 <a:latin typeface="맑은 고딕"/>
                 <a:ea typeface="맑은 고딕"/>
               </a:rPr>
-              <a:t> 카드 X가 거절된 주문 A, </a:t>
+              <a:t> 승인 요청 금액 2,000원, </a:t>
             </a:r>
             <a:r>
               <a:rPr sz="1000" b="0">
@@ -24460,7 +23898,7 @@
                 <a:latin typeface="맑은 고딕"/>
                 <a:ea typeface="맑은 고딕"/>
               </a:rPr>
-              <a:t>결제대기</a:t>
+              <a:t>결제완료</a:t>
             </a:r>
             <a:r>
               <a:rPr sz="1000" b="0">
@@ -24470,126 +23908,7 @@
                 <a:latin typeface="맑은 고딕"/>
                 <a:ea typeface="맑은 고딕"/>
               </a:rPr>
-              <a:t>, 배송 요청 0회</a:t>
-            </a:r>
-          </a:p>
-          <a:p>
-            <a:pPr lvl="2" marL="411480" indent="-137160">
-              <a:spcBef>
-                <a:spcPts val="300"/>
-              </a:spcBef>
-              <a:spcAft>
-                <a:spcPts val="300"/>
-              </a:spcAft>
-              <a:buSzPct val="90000"/>
-              <a:buFont typeface="Wingdings" pitchFamily="2" charset="2"/>
-              <a:buChar char=""/>
-            </a:pPr>
-            <a:r>
-              <a:rPr sz="1000" b="1">
-                <a:solidFill>
-                  <a:srgbClr val="000000"/>
-                </a:solidFill>
-                <a:latin typeface="맑은 고딕"/>
-                <a:ea typeface="맑은 고딕"/>
-              </a:rPr>
-              <a:t>사건:</a:t>
-            </a:r>
-            <a:r>
-              <a:rPr sz="1000" b="0">
-                <a:solidFill>
-                  <a:srgbClr val="000000"/>
-                </a:solidFill>
-                <a:latin typeface="맑은 고딕"/>
-                <a:ea typeface="맑은 고딕"/>
-              </a:rPr>
-              <a:t> 같은 주문 A를 카드 Y에 2,000원으로 다시 승인 요청 → 승인 완료</a:t>
-            </a:r>
-          </a:p>
-          <a:p>
-            <a:pPr lvl="2" marL="411480" indent="-137160">
-              <a:spcBef>
-                <a:spcPts val="300"/>
-              </a:spcBef>
-              <a:spcAft>
-                <a:spcPts val="300"/>
-              </a:spcAft>
-              <a:buSzPct val="90000"/>
-              <a:buFont typeface="Wingdings" pitchFamily="2" charset="2"/>
-              <a:buChar char=""/>
-            </a:pPr>
-            <a:r>
-              <a:rPr sz="1000" b="1">
-                <a:solidFill>
-                  <a:srgbClr val="000000"/>
-                </a:solidFill>
-                <a:latin typeface="맑은 고딕"/>
-                <a:ea typeface="맑은 고딕"/>
-              </a:rPr>
-              <a:t>결과:</a:t>
-            </a:r>
-            <a:r>
-              <a:rPr sz="1000" b="0">
-                <a:solidFill>
-                  <a:srgbClr val="000000"/>
-                </a:solidFill>
-                <a:latin typeface="맑은 고딕"/>
-                <a:ea typeface="맑은 고딕"/>
-              </a:rPr>
-              <a:t> 새 주문 없음, 주문 A가 </a:t>
-            </a:r>
-            <a:r>
-              <a:rPr sz="1000" b="0">
-                <a:solidFill>
-                  <a:srgbClr val="000000"/>
-                </a:solidFill>
-                <a:latin typeface="맑은 고딕"/>
-                <a:ea typeface="맑은 고딕"/>
-              </a:rPr>
-              <a:t>결제완료</a:t>
-            </a:r>
-            <a:r>
-              <a:rPr sz="1000" b="0">
-                <a:solidFill>
-                  <a:srgbClr val="000000"/>
-                </a:solidFill>
-                <a:latin typeface="맑은 고딕"/>
-                <a:ea typeface="맑은 고딕"/>
-              </a:rPr>
-              <a:t>, 카드 X 거절부터 카드 Y 승인까지 배송 요청 총 1회</a:t>
-            </a:r>
-          </a:p>
-          <a:p>
-            <a:pPr lvl="2" marL="411480" indent="-137160">
-              <a:spcBef>
-                <a:spcPts val="300"/>
-              </a:spcBef>
-              <a:spcAft>
-                <a:spcPts val="300"/>
-              </a:spcAft>
-              <a:buSzPct val="90000"/>
-              <a:buFont typeface="Wingdings" pitchFamily="2" charset="2"/>
-              <a:buChar char=""/>
-            </a:pPr>
-            <a:r>
-              <a:rPr sz="1000" b="1">
-                <a:solidFill>
-                  <a:srgbClr val="000000"/>
-                </a:solidFill>
-                <a:latin typeface="맑은 고딕"/>
-                <a:ea typeface="맑은 고딕"/>
-              </a:rPr>
-              <a:t>유지되는 값:</a:t>
-            </a:r>
-            <a:r>
-              <a:rPr sz="1000" b="0">
-                <a:solidFill>
-                  <a:srgbClr val="000000"/>
-                </a:solidFill>
-                <a:latin typeface="맑은 고딕"/>
-                <a:ea typeface="맑은 고딕"/>
-              </a:rPr>
-              <a:t> 주문 A · 펜 2개 · 확정 단가 1,000원 · 총액 2,000원 · 서울</a:t>
+              <a:t>, 배송 요청 1회</a:t>
             </a:r>
           </a:p>
         </p:txBody>
@@ -24659,7 +23978,17 @@
                 <a:latin typeface="맑은 고딕"/>
                 <a:ea typeface="맑은 고딕"/>
               </a:rPr>
-              <a:t>금지·참고 조건·미정·범위 밖</a:t>
+              <a:t>“주문한다” 동적 업무 모델 </a:t>
+            </a:r>
+            <a:r>
+              <a:rPr sz="2000" b="1">
+                <a:solidFill>
+                  <a:srgbClr val="000000"/>
+                </a:solidFill>
+                <a:latin typeface="맑은 고딕"/>
+                <a:ea typeface="맑은 고딕"/>
+              </a:rPr>
+              <a:t>(5/6)</a:t>
             </a:r>
           </a:p>
           <a:p>
@@ -24805,38 +24134,12 @@
             <p:ph idx="1"/>
           </p:nvPr>
         </p:nvSpPr>
-        <p:spPr>
-          <a:xfrm>
-            <a:off x="233172" y="960120"/>
-            <a:ext cx="4338828" cy="5352345"/>
-          </a:xfrm>
-        </p:spPr>
+        <p:spPr/>
         <p:txBody>
           <a:bodyPr>
             <a:normAutofit/>
           </a:bodyPr>
           <a:lstStyle/>
-          <a:p>
-            <a:pPr marL="182880" indent="0">
-              <a:spcBef>
-                <a:spcPts val="300"/>
-              </a:spcBef>
-              <a:spcAft>
-                <a:spcPts val="300"/>
-              </a:spcAft>
-              <a:buNone/>
-            </a:pPr>
-            <a:r>
-              <a:rPr sz="1000" b="1">
-                <a:solidFill>
-                  <a:srgbClr val="000000"/>
-                </a:solidFill>
-                <a:latin typeface="맑은 고딕"/>
-                <a:ea typeface="맑은 고딕"/>
-              </a:rPr>
-              <a:t>확정된 요구에 근거한 금지</a:t>
-            </a:r>
-          </a:p>
           <a:p>
             <a:pPr lvl="2" marL="411480" indent="-137160">
               <a:spcBef>
@@ -24850,6 +24153,16 @@
               <a:buChar char=""/>
             </a:pPr>
             <a:r>
+              <a:rPr sz="1000" b="1">
+                <a:solidFill>
+                  <a:srgbClr val="000000"/>
+                </a:solidFill>
+                <a:latin typeface="맑은 고딕"/>
+                <a:ea typeface="맑은 고딕"/>
+              </a:rPr>
+              <a:t>유지되는 값:</a:t>
+            </a:r>
+            <a:r>
               <a:rPr sz="1000" b="0">
                 <a:solidFill>
                   <a:srgbClr val="000000"/>
@@ -24857,7 +24170,7 @@
                 <a:latin typeface="맑은 고딕"/>
                 <a:ea typeface="맑은 고딕"/>
               </a:rPr>
-              <a:t>카드 승인 완료 없이 </a:t>
+              <a:t> 주문 A · 펜 2개 · 확정 단가 1,000원</a:t>
             </a:r>
             <a:r>
               <a:rPr sz="1000" b="0">
@@ -24867,7 +24180,7 @@
                 <a:latin typeface="맑은 고딕"/>
                 <a:ea typeface="맑은 고딕"/>
               </a:rPr>
-              <a:t>결제대기</a:t>
+              <a:t>(현재 판매가와 무관)</a:t>
             </a:r>
             <a:r>
               <a:rPr sz="1000" b="0">
@@ -24877,27 +24190,28 @@
                 <a:latin typeface="맑은 고딕"/>
                 <a:ea typeface="맑은 고딕"/>
               </a:rPr>
-              <a:t>에서 </a:t>
-            </a:r>
-            <a:r>
-              <a:rPr sz="1000" b="0">
-                <a:solidFill>
-                  <a:srgbClr val="000000"/>
-                </a:solidFill>
-                <a:latin typeface="맑은 고딕"/>
-                <a:ea typeface="맑은 고딕"/>
-              </a:rPr>
-              <a:t>결제완료</a:t>
-            </a:r>
-            <a:r>
-              <a:rPr sz="1000" b="0">
-                <a:solidFill>
-                  <a:srgbClr val="000000"/>
-                </a:solidFill>
-                <a:latin typeface="맑은 고딕"/>
-                <a:ea typeface="맑은 고딕"/>
-              </a:rPr>
-              <a:t>로 전이할 수 없다.</a:t>
+              <a:t> · 총액 2,000원 · 서울</a:t>
+            </a:r>
+          </a:p>
+          <a:p>
+            <a:pPr marL="322580" indent="-139700">
+              <a:spcBef>
+                <a:spcPts val="300"/>
+              </a:spcBef>
+              <a:spcAft>
+                <a:spcPts val="300"/>
+              </a:spcAft>
+              <a:buNone/>
+            </a:pPr>
+            <a:r>
+              <a:rPr sz="1000" b="1">
+                <a:solidFill>
+                  <a:srgbClr val="000000"/>
+                </a:solidFill>
+                <a:latin typeface="맑은 고딕"/>
+                <a:ea typeface="맑은 고딕"/>
+              </a:rPr>
+              <a:t>3. 거절</a:t>
             </a:r>
           </a:p>
           <a:p>
@@ -24913,6 +24227,16 @@
               <a:buChar char=""/>
             </a:pPr>
             <a:r>
+              <a:rPr sz="1000" b="1">
+                <a:solidFill>
+                  <a:srgbClr val="000000"/>
+                </a:solidFill>
+                <a:latin typeface="맑은 고딕"/>
+                <a:ea typeface="맑은 고딕"/>
+              </a:rPr>
+              <a:t>전제:</a:t>
+            </a:r>
+            <a:r>
               <a:rPr sz="1000" b="0">
                 <a:solidFill>
                   <a:srgbClr val="000000"/>
@@ -24920,7 +24244,7 @@
                 <a:latin typeface="맑은 고딕"/>
                 <a:ea typeface="맑은 고딕"/>
               </a:rPr>
-              <a:t>카드 승인이 거절되면 </a:t>
+              <a:t> 주문 A, </a:t>
             </a:r>
             <a:r>
               <a:rPr sz="1000" b="0">
@@ -24930,17 +24254,7 @@
                 <a:latin typeface="맑은 고딕"/>
                 <a:ea typeface="맑은 고딕"/>
               </a:rPr>
-              <a:t>결제완료</a:t>
-            </a:r>
-            <a:r>
-              <a:rPr sz="1000" b="0">
-                <a:solidFill>
-                  <a:srgbClr val="000000"/>
-                </a:solidFill>
-                <a:latin typeface="맑은 고딕"/>
-                <a:ea typeface="맑은 고딕"/>
-              </a:rPr>
-              <a:t>로 전이할 수 없다.</a:t>
+              <a:t>결제대기</a:t>
             </a:r>
           </a:p>
           <a:p>
@@ -24956,6 +24270,16 @@
               <a:buChar char=""/>
             </a:pPr>
             <a:r>
+              <a:rPr sz="1000" b="1">
+                <a:solidFill>
+                  <a:srgbClr val="000000"/>
+                </a:solidFill>
+                <a:latin typeface="맑은 고딕"/>
+                <a:ea typeface="맑은 고딕"/>
+              </a:rPr>
+              <a:t>사건:</a:t>
+            </a:r>
+            <a:r>
               <a:rPr sz="1000" b="0">
                 <a:solidFill>
                   <a:srgbClr val="000000"/>
@@ -24963,7 +24287,7 @@
                 <a:latin typeface="맑은 고딕"/>
                 <a:ea typeface="맑은 고딕"/>
               </a:rPr>
-              <a:t>결제 응답을 확정할 수 없으면 승인 완료로도, 거절로도 간주할 수 없다.</a:t>
+              <a:t> 카드 X에 2,000원 승인 요청 → 거절</a:t>
             </a:r>
           </a:p>
           <a:p>
@@ -24979,6 +24303,16 @@
               <a:buChar char=""/>
             </a:pPr>
             <a:r>
+              <a:rPr sz="1000" b="1">
+                <a:solidFill>
+                  <a:srgbClr val="000000"/>
+                </a:solidFill>
+                <a:latin typeface="맑은 고딕"/>
+                <a:ea typeface="맑은 고딕"/>
+              </a:rPr>
+              <a:t>결과:</a:t>
+            </a:r>
+            <a:r>
               <a:rPr sz="1000" b="0">
                 <a:solidFill>
                   <a:srgbClr val="000000"/>
@@ -24986,7 +24320,27 @@
                 <a:latin typeface="맑은 고딕"/>
                 <a:ea typeface="맑은 고딕"/>
               </a:rPr>
-              <a:t>카드 승인이 완료되기 전에는 배송을 요청할 수 없다. 거절되면 배송을 요청하지 않는다.</a:t>
+              <a:t> </a:t>
+            </a:r>
+            <a:r>
+              <a:rPr sz="1000" b="0">
+                <a:solidFill>
+                  <a:srgbClr val="000000"/>
+                </a:solidFill>
+                <a:latin typeface="맑은 고딕"/>
+                <a:ea typeface="맑은 고딕"/>
+              </a:rPr>
+              <a:t>결제대기</a:t>
+            </a:r>
+            <a:r>
+              <a:rPr sz="1000" b="0">
+                <a:solidFill>
+                  <a:srgbClr val="000000"/>
+                </a:solidFill>
+                <a:latin typeface="맑은 고딕"/>
+                <a:ea typeface="맑은 고딕"/>
+              </a:rPr>
+              <a:t> 자기 전이, 배송 요청 0회, 다른 카드로 재결제 가능</a:t>
             </a:r>
           </a:p>
           <a:p>
@@ -25002,6 +24356,16 @@
               <a:buChar char=""/>
             </a:pPr>
             <a:r>
+              <a:rPr sz="1000" b="1">
+                <a:solidFill>
+                  <a:srgbClr val="000000"/>
+                </a:solidFill>
+                <a:latin typeface="맑은 고딕"/>
+                <a:ea typeface="맑은 고딕"/>
+              </a:rPr>
+              <a:t>유지되는 값:</a:t>
+            </a:r>
+            <a:r>
               <a:rPr sz="1000" b="0">
                 <a:solidFill>
                   <a:srgbClr val="000000"/>
@@ -25009,17 +24373,28 @@
                 <a:latin typeface="맑은 고딕"/>
                 <a:ea typeface="맑은 고딕"/>
               </a:rPr>
-              <a:t>결제대기</a:t>
-            </a:r>
-            <a:r>
-              <a:rPr sz="1000" b="0">
-                <a:solidFill>
-                  <a:srgbClr val="000000"/>
-                </a:solidFill>
-                <a:latin typeface="맑은 고딕"/>
-                <a:ea typeface="맑은 고딕"/>
-              </a:rPr>
-              <a:t> 주문의 상품, 수량, 배송지는 바꿀 수 없다. 주문 생성 뒤 판매가가 바뀌어도 확정 단가, 총액, 승인 요청 금액은 바뀌지 않는다.</a:t>
+              <a:t> 주문 A · 펜 2개 · 확정 단가 1,000원 · 총액 2,000원 · 서울</a:t>
+            </a:r>
+          </a:p>
+          <a:p>
+            <a:pPr marL="322580" indent="-139700">
+              <a:spcBef>
+                <a:spcPts val="300"/>
+              </a:spcBef>
+              <a:spcAft>
+                <a:spcPts val="300"/>
+              </a:spcAft>
+              <a:buNone/>
+            </a:pPr>
+            <a:r>
+              <a:rPr sz="1000" b="1">
+                <a:solidFill>
+                  <a:srgbClr val="000000"/>
+                </a:solidFill>
+                <a:latin typeface="맑은 고딕"/>
+                <a:ea typeface="맑은 고딕"/>
+              </a:rPr>
+              <a:t>4. 거절 뒤 재결제</a:t>
             </a:r>
           </a:p>
           <a:p>
@@ -25035,6 +24410,16 @@
               <a:buChar char=""/>
             </a:pPr>
             <a:r>
+              <a:rPr sz="1000" b="1">
+                <a:solidFill>
+                  <a:srgbClr val="000000"/>
+                </a:solidFill>
+                <a:latin typeface="맑은 고딕"/>
+                <a:ea typeface="맑은 고딕"/>
+              </a:rPr>
+              <a:t>전제:</a:t>
+            </a:r>
+            <a:r>
               <a:rPr sz="1000" b="0">
                 <a:solidFill>
                   <a:srgbClr val="000000"/>
@@ -25042,40 +24427,8 @@
                 <a:latin typeface="맑은 고딕"/>
                 <a:ea typeface="맑은 고딕"/>
               </a:rPr>
-              <a:t>거절 뒤의 재결제를 새 주문으로 대신할 수 없다.</a:t>
-            </a:r>
-          </a:p>
-          <a:p>
-            <a:pPr marL="182880" indent="0">
-              <a:spcBef>
-                <a:spcPts val="300"/>
-              </a:spcBef>
-              <a:spcAft>
-                <a:spcPts val="300"/>
-              </a:spcAft>
-              <a:buNone/>
-            </a:pPr>
-            <a:r>
-              <a:rPr sz="1000" b="1">
-                <a:solidFill>
-                  <a:srgbClr val="000000"/>
-                </a:solidFill>
-                <a:latin typeface="맑은 고딕"/>
-                <a:ea typeface="맑은 고딕"/>
-              </a:rPr>
-              <a:t>생애주기 참고 범위의 전이 조건</a:t>
-            </a:r>
-          </a:p>
-          <a:p>
-            <a:pPr marL="182880" indent="0">
-              <a:spcBef>
-                <a:spcPts val="300"/>
-              </a:spcBef>
-              <a:spcAft>
-                <a:spcPts val="300"/>
-              </a:spcAft>
-              <a:buNone/>
-            </a:pPr>
+              <a:t> 카드 X가 거절된 주문 A, </a:t>
+            </a:r>
             <a:r>
               <a:rPr sz="1000" b="0">
                 <a:solidFill>
@@ -25084,7 +24437,17 @@
                 <a:latin typeface="맑은 고딕"/>
                 <a:ea typeface="맑은 고딕"/>
               </a:rPr>
-              <a:t>아래는 이번 모델에서 합의한 참고 조건이며, 실습 3의 요구나 수용 기준이 아니다.</a:t>
+              <a:t>결제대기</a:t>
+            </a:r>
+            <a:r>
+              <a:rPr sz="1000" b="0">
+                <a:solidFill>
+                  <a:srgbClr val="000000"/>
+                </a:solidFill>
+                <a:latin typeface="맑은 고딕"/>
+                <a:ea typeface="맑은 고딕"/>
+              </a:rPr>
+              <a:t>, 배송 요청 0회</a:t>
             </a:r>
           </a:p>
           <a:p>
@@ -25100,6 +24463,16 @@
               <a:buChar char=""/>
             </a:pPr>
             <a:r>
+              <a:rPr sz="1000" b="1">
+                <a:solidFill>
+                  <a:srgbClr val="000000"/>
+                </a:solidFill>
+                <a:latin typeface="맑은 고딕"/>
+                <a:ea typeface="맑은 고딕"/>
+              </a:rPr>
+              <a:t>사건:</a:t>
+            </a:r>
+            <a:r>
               <a:rPr sz="1000" b="0">
                 <a:solidFill>
                   <a:srgbClr val="000000"/>
@@ -25107,67 +24480,7 @@
                 <a:latin typeface="맑은 고딕"/>
                 <a:ea typeface="맑은 고딕"/>
               </a:rPr>
-              <a:t>배송 요청만으로는 </a:t>
-            </a:r>
-            <a:r>
-              <a:rPr sz="1000" b="0">
-                <a:solidFill>
-                  <a:srgbClr val="000000"/>
-                </a:solidFill>
-                <a:latin typeface="맑은 고딕"/>
-                <a:ea typeface="맑은 고딕"/>
-              </a:rPr>
-              <a:t>배송중</a:t>
-            </a:r>
-            <a:r>
-              <a:rPr sz="1000" b="0">
-                <a:solidFill>
-                  <a:srgbClr val="000000"/>
-                </a:solidFill>
-                <a:latin typeface="맑은 고딕"/>
-                <a:ea typeface="맑은 고딕"/>
-              </a:rPr>
-              <a:t>이 되지 않는다. </a:t>
-            </a:r>
-            <a:r>
-              <a:rPr sz="1000" b="0">
-                <a:solidFill>
-                  <a:srgbClr val="000000"/>
-                </a:solidFill>
-                <a:latin typeface="맑은 고딕"/>
-                <a:ea typeface="맑은 고딕"/>
-              </a:rPr>
-              <a:t>결제완료</a:t>
-            </a:r>
-            <a:r>
-              <a:rPr sz="1000" b="0">
-                <a:solidFill>
-                  <a:srgbClr val="000000"/>
-                </a:solidFill>
-                <a:latin typeface="맑은 고딕"/>
-                <a:ea typeface="맑은 고딕"/>
-              </a:rPr>
-              <a:t>에서 </a:t>
-            </a:r>
-            <a:r>
-              <a:rPr sz="1000" b="0">
-                <a:solidFill>
-                  <a:srgbClr val="000000"/>
-                </a:solidFill>
-                <a:latin typeface="맑은 고딕"/>
-                <a:ea typeface="맑은 고딕"/>
-              </a:rPr>
-              <a:t>배송중</a:t>
-            </a:r>
-            <a:r>
-              <a:rPr sz="1000" b="0">
-                <a:solidFill>
-                  <a:srgbClr val="000000"/>
-                </a:solidFill>
-                <a:latin typeface="맑은 고딕"/>
-                <a:ea typeface="맑은 고딕"/>
-              </a:rPr>
-              <a:t>으로 가려면 배송 시작 통보가 있어야 한다.</a:t>
+              <a:t> 같은 주문 A를 카드 Y에 2,000원으로 다시 승인 요청 → 승인 완료</a:t>
             </a:r>
           </a:p>
           <a:p>
@@ -25183,6 +24496,16 @@
               <a:buChar char=""/>
             </a:pPr>
             <a:r>
+              <a:rPr sz="1000" b="1">
+                <a:solidFill>
+                  <a:srgbClr val="000000"/>
+                </a:solidFill>
+                <a:latin typeface="맑은 고딕"/>
+                <a:ea typeface="맑은 고딕"/>
+              </a:rPr>
+              <a:t>결과:</a:t>
+            </a:r>
+            <a:r>
               <a:rPr sz="1000" b="0">
                 <a:solidFill>
                   <a:srgbClr val="000000"/>
@@ -25190,7 +24513,7 @@
                 <a:latin typeface="맑은 고딕"/>
                 <a:ea typeface="맑은 고딕"/>
               </a:rPr>
-              <a:t>배송중</a:t>
+              <a:t> 새 주문 없음, 주문 A가 </a:t>
             </a:r>
             <a:r>
               <a:rPr sz="1000" b="0">
@@ -25200,7 +24523,7 @@
                 <a:latin typeface="맑은 고딕"/>
                 <a:ea typeface="맑은 고딕"/>
               </a:rPr>
-              <a:t>에서 </a:t>
+              <a:t>결제완료</a:t>
             </a:r>
             <a:r>
               <a:rPr sz="1000" b="0">
@@ -25210,17 +24533,7 @@
                 <a:latin typeface="맑은 고딕"/>
                 <a:ea typeface="맑은 고딕"/>
               </a:rPr>
-              <a:t>배송완료</a:t>
-            </a:r>
-            <a:r>
-              <a:rPr sz="1000" b="0">
-                <a:solidFill>
-                  <a:srgbClr val="000000"/>
-                </a:solidFill>
-                <a:latin typeface="맑은 고딕"/>
-                <a:ea typeface="맑은 고딕"/>
-              </a:rPr>
-              <a:t>로 가려면 배송 완료 통보가 있어야 한다.</a:t>
+              <a:t>, 카드 X 거절부터 카드 Y 승인까지 배송 요청 총 1회</a:t>
             </a:r>
           </a:p>
           <a:p>
@@ -25236,6 +24549,16 @@
               <a:buChar char=""/>
             </a:pPr>
             <a:r>
+              <a:rPr sz="1000" b="1">
+                <a:solidFill>
+                  <a:srgbClr val="000000"/>
+                </a:solidFill>
+                <a:latin typeface="맑은 고딕"/>
+                <a:ea typeface="맑은 고딕"/>
+              </a:rPr>
+              <a:t>유지되는 값:</a:t>
+            </a:r>
+            <a:r>
               <a:rPr sz="1000" b="0">
                 <a:solidFill>
                   <a:srgbClr val="000000"/>
@@ -25243,7 +24566,7 @@
                 <a:latin typeface="맑은 고딕"/>
                 <a:ea typeface="맑은 고딕"/>
               </a:rPr>
-              <a:t>통보가 오지 않거나 늦는 경우처럼 배송 진행 중의 다른 경우는 다루지 않는다.</a:t>
+              <a:t> 주문 A · 펜 2개 · 확정 단가 1,000원 · 총액 2,000원 · 서울</a:t>
             </a:r>
           </a:p>
           <a:p>
@@ -25264,7 +24587,28 @@
                 <a:latin typeface="맑은 고딕"/>
                 <a:ea typeface="맑은 고딕"/>
               </a:rPr>
-              <a:t>결정하지 않고 남겨 두는 정책</a:t>
+              <a:t>금지·참고 조건·미정·범위 밖</a:t>
+            </a:r>
+          </a:p>
+          <a:p>
+            <a:pPr marL="182880" indent="0">
+              <a:spcBef>
+                <a:spcPts val="300"/>
+              </a:spcBef>
+              <a:spcAft>
+                <a:spcPts val="300"/>
+              </a:spcAft>
+              <a:buNone/>
+            </a:pPr>
+            <a:r>
+              <a:rPr sz="1000" b="1">
+                <a:solidFill>
+                  <a:srgbClr val="000000"/>
+                </a:solidFill>
+                <a:latin typeface="맑은 고딕"/>
+                <a:ea typeface="맑은 고딕"/>
+              </a:rPr>
+              <a:t>확정된 요구에 근거한 금지</a:t>
             </a:r>
           </a:p>
           <a:p>
@@ -25287,7 +24631,47 @@
                 <a:latin typeface="맑은 고딕"/>
                 <a:ea typeface="맑은 고딕"/>
               </a:rPr>
-              <a:t>결제대기 기한과 만료 처리</a:t>
+              <a:t>카드 승인 완료 없이 </a:t>
+            </a:r>
+            <a:r>
+              <a:rPr sz="1000" b="0">
+                <a:solidFill>
+                  <a:srgbClr val="000000"/>
+                </a:solidFill>
+                <a:latin typeface="맑은 고딕"/>
+                <a:ea typeface="맑은 고딕"/>
+              </a:rPr>
+              <a:t>결제대기</a:t>
+            </a:r>
+            <a:r>
+              <a:rPr sz="1000" b="0">
+                <a:solidFill>
+                  <a:srgbClr val="000000"/>
+                </a:solidFill>
+                <a:latin typeface="맑은 고딕"/>
+                <a:ea typeface="맑은 고딕"/>
+              </a:rPr>
+              <a:t>에서 </a:t>
+            </a:r>
+            <a:r>
+              <a:rPr sz="1000" b="0">
+                <a:solidFill>
+                  <a:srgbClr val="000000"/>
+                </a:solidFill>
+                <a:latin typeface="맑은 고딕"/>
+                <a:ea typeface="맑은 고딕"/>
+              </a:rPr>
+              <a:t>결제완료</a:t>
+            </a:r>
+            <a:r>
+              <a:rPr sz="1000" b="0">
+                <a:solidFill>
+                  <a:srgbClr val="000000"/>
+                </a:solidFill>
+                <a:latin typeface="맑은 고딕"/>
+                <a:ea typeface="맑은 고딕"/>
+              </a:rPr>
+              <a:t>로 전이할 수 없다.</a:t>
             </a:r>
           </a:p>
           <a:p>
@@ -25310,7 +24694,27 @@
                 <a:latin typeface="맑은 고딕"/>
                 <a:ea typeface="맑은 고딕"/>
               </a:rPr>
-              <a:t>결제 응답을 확정할 수 없을 때의 후속 처리와 재결제 허용 여부</a:t>
+              <a:t>카드 승인이 거절되면 </a:t>
+            </a:r>
+            <a:r>
+              <a:rPr sz="1000" b="0">
+                <a:solidFill>
+                  <a:srgbClr val="000000"/>
+                </a:solidFill>
+                <a:latin typeface="맑은 고딕"/>
+                <a:ea typeface="맑은 고딕"/>
+              </a:rPr>
+              <a:t>결제완료</a:t>
+            </a:r>
+            <a:r>
+              <a:rPr sz="1000" b="0">
+                <a:solidFill>
+                  <a:srgbClr val="000000"/>
+                </a:solidFill>
+                <a:latin typeface="맑은 고딕"/>
+                <a:ea typeface="맑은 고딕"/>
+              </a:rPr>
+              <a:t>로 전이할 수 없다.</a:t>
             </a:r>
           </a:p>
           <a:p>
@@ -25333,7 +24737,7 @@
                 <a:latin typeface="맑은 고딕"/>
                 <a:ea typeface="맑은 고딕"/>
               </a:rPr>
-              <a:t>재고 판단 시점과 승인 전·후 재고 부족 시 처리</a:t>
+              <a:t>결제 응답을 확정할 수 없으면 승인 완료로도, 거절로도 간주할 수 없다.</a:t>
             </a:r>
           </a:p>
           <a:p>
@@ -25356,14 +24760,275 @@
                 <a:latin typeface="맑은 고딕"/>
                 <a:ea typeface="맑은 고딕"/>
               </a:rPr>
-              <a:t>회원·비회원 여부와 본인 확인 방법</a:t>
+              <a:t>카드 승인이 완료되기 전에는 배송을 요청할 수 없다. 거절되면 배송을 요청하지 않는다.</a:t>
+            </a:r>
+          </a:p>
+          <a:p>
+            <a:pPr lvl="2" marL="411480" indent="-137160">
+              <a:spcBef>
+                <a:spcPts val="300"/>
+              </a:spcBef>
+              <a:spcAft>
+                <a:spcPts val="300"/>
+              </a:spcAft>
+              <a:buSzPct val="90000"/>
+              <a:buFont typeface="Wingdings" pitchFamily="2" charset="2"/>
+              <a:buChar char=""/>
+            </a:pPr>
+            <a:r>
+              <a:rPr sz="1000" b="0">
+                <a:solidFill>
+                  <a:srgbClr val="000000"/>
+                </a:solidFill>
+                <a:latin typeface="맑은 고딕"/>
+                <a:ea typeface="맑은 고딕"/>
+              </a:rPr>
+              <a:t>결제대기</a:t>
+            </a:r>
+            <a:r>
+              <a:rPr sz="1000" b="0">
+                <a:solidFill>
+                  <a:srgbClr val="000000"/>
+                </a:solidFill>
+                <a:latin typeface="맑은 고딕"/>
+                <a:ea typeface="맑은 고딕"/>
+              </a:rPr>
+              <a:t> 주문의 상품, 수량, 배송지는 바꿀 수 없다. 주문 생성 뒤 판매가가 바뀌어도 확정 단가, 총액, 승인 요청 금액은 바뀌지 않는다.</a:t>
+            </a:r>
+          </a:p>
+          <a:p>
+            <a:pPr lvl="2" marL="411480" indent="-137160">
+              <a:spcBef>
+                <a:spcPts val="300"/>
+              </a:spcBef>
+              <a:spcAft>
+                <a:spcPts val="300"/>
+              </a:spcAft>
+              <a:buSzPct val="90000"/>
+              <a:buFont typeface="Wingdings" pitchFamily="2" charset="2"/>
+              <a:buChar char=""/>
+            </a:pPr>
+            <a:r>
+              <a:rPr sz="1000" b="0">
+                <a:solidFill>
+                  <a:srgbClr val="000000"/>
+                </a:solidFill>
+                <a:latin typeface="맑은 고딕"/>
+                <a:ea typeface="맑은 고딕"/>
+              </a:rPr>
+              <a:t>거절 뒤의 재결제를 새 주문으로 대신할 수 없다.</a:t>
+            </a:r>
+          </a:p>
+        </p:txBody>
+      </p:sp>
+    </p:spTree>
+    <p:extLst>
+      <p:ext uri="{BB962C8B-B14F-4D97-AF65-F5344CB8AC3E}">
+        <p14:creationId xmlns:p14="http://schemas.microsoft.com/office/powerpoint/2010/main" val="3555436673"/>
+      </p:ext>
+    </p:extLst>
+  </p:cSld>
+  <p:clrMapOvr>
+    <a:masterClrMapping/>
+  </p:clrMapOvr>
+</p:sld>
+</file>
+
+<file path=ppt/slides/slide33.xml><?xml version="1.0" encoding="utf-8"?>
+<p:sld xmlns:a="http://schemas.openxmlformats.org/drawingml/2006/main" xmlns:r="http://schemas.openxmlformats.org/officeDocument/2006/relationships" xmlns:p="http://schemas.openxmlformats.org/presentationml/2006/main">
+  <p:cSld>
+    <p:spTree>
+      <p:nvGrpSpPr>
+        <p:cNvPr id="1" name="">
+          <a:extLst>
+            <a:ext uri="{FF2B5EF4-FFF2-40B4-BE49-F238E27FC236}">
+              <a16:creationId xmlns:a16="http://schemas.microsoft.com/office/drawing/2014/main" id="{8E4F1F13-426B-086B-7D8C-9A58A0F879DB}"/>
+            </a:ext>
+          </a:extLst>
+        </p:cNvPr>
+        <p:cNvGrpSpPr/>
+        <p:nvPr/>
+      </p:nvGrpSpPr>
+      <p:grpSpPr>
+        <a:xfrm>
+          <a:off x="0" y="0"/>
+          <a:ext cx="0" cy="0"/>
+          <a:chOff x="0" y="0"/>
+          <a:chExt cx="0" cy="0"/>
+        </a:xfrm>
+      </p:grpSpPr>
+      <p:sp>
+        <p:nvSpPr>
+          <p:cNvPr id="2" name="제목 1">
+            <a:extLst>
+              <a:ext uri="{FF2B5EF4-FFF2-40B4-BE49-F238E27FC236}">
+                <a16:creationId xmlns:a16="http://schemas.microsoft.com/office/drawing/2014/main" id="{AA26A92D-924E-0575-9551-F8FD7BFD3FAD}"/>
+              </a:ext>
+            </a:extLst>
+          </p:cNvPr>
+          <p:cNvSpPr>
+            <a:spLocks noGrp="1"/>
+          </p:cNvSpPr>
+          <p:nvPr>
+            <p:ph type="title"/>
+          </p:nvPr>
+        </p:nvSpPr>
+        <p:spPr/>
+        <p:txBody>
+          <a:bodyPr/>
+          <a:lstStyle/>
+          <a:p>
+            <a:r>
+              <a:rPr sz="2400" b="1">
+                <a:solidFill>
+                  <a:srgbClr val="000000"/>
+                </a:solidFill>
+                <a:latin typeface="맑은 고딕"/>
+                <a:ea typeface="맑은 고딕"/>
+              </a:rPr>
+              <a:t>“주문한다” 동적 업무 모델 </a:t>
+            </a:r>
+            <a:r>
+              <a:rPr sz="2000" b="1">
+                <a:solidFill>
+                  <a:srgbClr val="000000"/>
+                </a:solidFill>
+                <a:latin typeface="맑은 고딕"/>
+                <a:ea typeface="맑은 고딕"/>
+              </a:rPr>
+              <a:t>(6/6)</a:t>
+            </a:r>
+          </a:p>
+          <a:p>
+            <a:r>
+              <a:rPr sz="1100" b="1">
+                <a:solidFill>
+                  <a:srgbClr val="000000"/>
+                </a:solidFill>
+                <a:latin typeface="맑은 고딕"/>
+                <a:ea typeface="맑은 고딕"/>
+              </a:rPr>
+              <a:t>별첨. 실습 답</a:t>
             </a:r>
           </a:p>
         </p:txBody>
       </p:sp>
       <p:sp>
         <p:nvSpPr>
-          <p:cNvPr id="9" name="내용 개체 틀 7">
+          <p:cNvPr id="3" name="슬라이드 번호 개체 틀 2">
+            <a:extLst>
+              <a:ext uri="{FF2B5EF4-FFF2-40B4-BE49-F238E27FC236}">
+                <a16:creationId xmlns:a16="http://schemas.microsoft.com/office/drawing/2014/main" id="{12CF30EE-4DFD-8063-56B8-B8689E76DFCA}"/>
+              </a:ext>
+            </a:extLst>
+          </p:cNvPr>
+          <p:cNvSpPr>
+            <a:spLocks noGrp="1"/>
+          </p:cNvSpPr>
+          <p:nvPr>
+            <p:ph type="sldNum" sz="quarter" idx="10"/>
+          </p:nvPr>
+        </p:nvSpPr>
+        <p:spPr/>
+        <p:txBody>
+          <a:bodyPr/>
+          <a:lstStyle/>
+          <a:p>
+            <a:pPr>
+              <a:defRPr/>
+            </a:pPr>
+            <a:r>
+              <a:rPr lang="en-US" altLang="ko-KR">
+                <a:solidFill>
+                  <a:prstClr val="black"/>
+                </a:solidFill>
+              </a:rPr>
+              <a:t>- 33 -</a:t>
+            </a:r>
+          </a:p>
+        </p:txBody>
+      </p:sp>
+      <p:sp>
+        <p:nvSpPr>
+          <p:cNvPr id="5" name="텍스트 개체 틀 4">
+            <a:extLst>
+              <a:ext uri="{FF2B5EF4-FFF2-40B4-BE49-F238E27FC236}">
+                <a16:creationId xmlns:a16="http://schemas.microsoft.com/office/drawing/2014/main" id="{D66274C8-E16F-5AEB-614B-D8D32DA3E8C6}"/>
+              </a:ext>
+            </a:extLst>
+          </p:cNvPr>
+          <p:cNvSpPr>
+            <a:spLocks noGrp="1"/>
+          </p:cNvSpPr>
+          <p:nvPr>
+            <p:ph type="body" sz="quarter" idx="11"/>
+          </p:nvPr>
+        </p:nvSpPr>
+        <p:spPr/>
+        <p:txBody>
+          <a:bodyPr/>
+          <a:lstStyle/>
+          <a:p>
+            <a:r>
+              <a:rPr kumimoji="1" lang="en-US" altLang="ko-KR" sz="1400" dirty="0" err="1"/>
+              <a:t>별첨: 05. 동적 모델</a:t>
+            </a:r>
+          </a:p>
+        </p:txBody>
+      </p:sp>
+      <p:sp>
+        <p:nvSpPr>
+          <p:cNvPr id="6" name="텍스트 개체 틀 5">
+            <a:extLst>
+              <a:ext uri="{FF2B5EF4-FFF2-40B4-BE49-F238E27FC236}">
+                <a16:creationId xmlns:a16="http://schemas.microsoft.com/office/drawing/2014/main" id="{A24E58E1-194B-A320-AEEE-24D08685BB67}"/>
+              </a:ext>
+            </a:extLst>
+          </p:cNvPr>
+          <p:cNvSpPr>
+            <a:spLocks noGrp="1"/>
+          </p:cNvSpPr>
+          <p:nvPr>
+            <p:ph type="body" sz="quarter" idx="12"/>
+          </p:nvPr>
+        </p:nvSpPr>
+        <p:spPr/>
+        <p:txBody>
+          <a:bodyPr/>
+          <a:lstStyle/>
+          <a:p>
+            <a:endParaRPr kumimoji="1" lang="ko-KR" altLang="en-US" dirty="0"/>
+          </a:p>
+        </p:txBody>
+      </p:sp>
+      <p:sp>
+        <p:nvSpPr>
+          <p:cNvPr id="7" name="텍스트 개체 틀 6">
+            <a:extLst>
+              <a:ext uri="{FF2B5EF4-FFF2-40B4-BE49-F238E27FC236}">
+                <a16:creationId xmlns:a16="http://schemas.microsoft.com/office/drawing/2014/main" id="{A219F420-613B-6234-45F6-0955A9A4505F}"/>
+              </a:ext>
+            </a:extLst>
+          </p:cNvPr>
+          <p:cNvSpPr>
+            <a:spLocks noGrp="1"/>
+          </p:cNvSpPr>
+          <p:nvPr>
+            <p:ph type="body" sz="quarter" idx="13"/>
+          </p:nvPr>
+        </p:nvSpPr>
+        <p:spPr/>
+        <p:txBody>
+          <a:bodyPr/>
+          <a:lstStyle/>
+          <a:p>
+            <a:endParaRPr kumimoji="1" lang="en-US" altLang="ko-KR" dirty="0"/>
+          </a:p>
+        </p:txBody>
+      </p:sp>
+      <p:sp>
+        <p:nvSpPr>
+          <p:cNvPr id="8" name="내용 개체 틀 7">
             <a:extLst>
               <a:ext uri="{FF2B5EF4-FFF2-40B4-BE49-F238E27FC236}">
                 <a16:creationId xmlns:a16="http://schemas.microsoft.com/office/drawing/2014/main" id="{BEBA2C4A-B0BF-F2E4-EA6E-614C99CBA184}"/>
@@ -25377,17 +25042,328 @@
             <p:ph idx="1"/>
           </p:nvPr>
         </p:nvSpPr>
-        <p:spPr>
-          <a:xfrm>
-            <a:off x="4572000" y="960120"/>
-            <a:ext cx="4439412" cy="5352345"/>
-          </a:xfrm>
-        </p:spPr>
+        <p:spPr/>
         <p:txBody>
           <a:bodyPr>
             <a:normAutofit/>
           </a:bodyPr>
           <a:lstStyle/>
+          <a:p>
+            <a:pPr marL="182880" indent="0">
+              <a:spcBef>
+                <a:spcPts val="300"/>
+              </a:spcBef>
+              <a:spcAft>
+                <a:spcPts val="300"/>
+              </a:spcAft>
+              <a:buNone/>
+            </a:pPr>
+            <a:r>
+              <a:rPr sz="1000" b="1">
+                <a:solidFill>
+                  <a:srgbClr val="000000"/>
+                </a:solidFill>
+                <a:latin typeface="맑은 고딕"/>
+                <a:ea typeface="맑은 고딕"/>
+              </a:rPr>
+              <a:t>생애주기 참고 범위의 전이 조건</a:t>
+            </a:r>
+          </a:p>
+          <a:p>
+            <a:pPr lvl="2" marL="411480" indent="-137160">
+              <a:spcBef>
+                <a:spcPts val="300"/>
+              </a:spcBef>
+              <a:spcAft>
+                <a:spcPts val="300"/>
+              </a:spcAft>
+              <a:buSzPct val="90000"/>
+              <a:buFont typeface="Wingdings" pitchFamily="2" charset="2"/>
+              <a:buChar char=""/>
+            </a:pPr>
+            <a:r>
+              <a:rPr sz="1000" b="0">
+                <a:solidFill>
+                  <a:srgbClr val="000000"/>
+                </a:solidFill>
+                <a:latin typeface="맑은 고딕"/>
+                <a:ea typeface="맑은 고딕"/>
+              </a:rPr>
+              <a:t>아래는 이번 모델에서 합의한 참고 조건이며, 실습 3의 요구나 수용 기준이 아니다.</a:t>
+            </a:r>
+          </a:p>
+          <a:p>
+            <a:pPr lvl="2" marL="411480" indent="-137160">
+              <a:spcBef>
+                <a:spcPts val="300"/>
+              </a:spcBef>
+              <a:spcAft>
+                <a:spcPts val="300"/>
+              </a:spcAft>
+              <a:buSzPct val="90000"/>
+              <a:buFont typeface="Wingdings" pitchFamily="2" charset="2"/>
+              <a:buChar char=""/>
+            </a:pPr>
+            <a:r>
+              <a:rPr sz="1000" b="0">
+                <a:solidFill>
+                  <a:srgbClr val="000000"/>
+                </a:solidFill>
+                <a:latin typeface="맑은 고딕"/>
+                <a:ea typeface="맑은 고딕"/>
+              </a:rPr>
+              <a:t>배송 요청만으로는 </a:t>
+            </a:r>
+            <a:r>
+              <a:rPr sz="1000" b="0">
+                <a:solidFill>
+                  <a:srgbClr val="000000"/>
+                </a:solidFill>
+                <a:latin typeface="맑은 고딕"/>
+                <a:ea typeface="맑은 고딕"/>
+              </a:rPr>
+              <a:t>배송중</a:t>
+            </a:r>
+            <a:r>
+              <a:rPr sz="1000" b="0">
+                <a:solidFill>
+                  <a:srgbClr val="000000"/>
+                </a:solidFill>
+                <a:latin typeface="맑은 고딕"/>
+                <a:ea typeface="맑은 고딕"/>
+              </a:rPr>
+              <a:t>이 되지 않는다. </a:t>
+            </a:r>
+            <a:r>
+              <a:rPr sz="1000" b="0">
+                <a:solidFill>
+                  <a:srgbClr val="000000"/>
+                </a:solidFill>
+                <a:latin typeface="맑은 고딕"/>
+                <a:ea typeface="맑은 고딕"/>
+              </a:rPr>
+              <a:t>결제완료</a:t>
+            </a:r>
+            <a:r>
+              <a:rPr sz="1000" b="0">
+                <a:solidFill>
+                  <a:srgbClr val="000000"/>
+                </a:solidFill>
+                <a:latin typeface="맑은 고딕"/>
+                <a:ea typeface="맑은 고딕"/>
+              </a:rPr>
+              <a:t>에서 </a:t>
+            </a:r>
+            <a:r>
+              <a:rPr sz="1000" b="0">
+                <a:solidFill>
+                  <a:srgbClr val="000000"/>
+                </a:solidFill>
+                <a:latin typeface="맑은 고딕"/>
+                <a:ea typeface="맑은 고딕"/>
+              </a:rPr>
+              <a:t>배송중</a:t>
+            </a:r>
+            <a:r>
+              <a:rPr sz="1000" b="0">
+                <a:solidFill>
+                  <a:srgbClr val="000000"/>
+                </a:solidFill>
+                <a:latin typeface="맑은 고딕"/>
+                <a:ea typeface="맑은 고딕"/>
+              </a:rPr>
+              <a:t>으로 가려면 배송 시작 통보가 있어야 한다.</a:t>
+            </a:r>
+          </a:p>
+          <a:p>
+            <a:pPr lvl="2" marL="411480" indent="-137160">
+              <a:spcBef>
+                <a:spcPts val="300"/>
+              </a:spcBef>
+              <a:spcAft>
+                <a:spcPts val="300"/>
+              </a:spcAft>
+              <a:buSzPct val="90000"/>
+              <a:buFont typeface="Wingdings" pitchFamily="2" charset="2"/>
+              <a:buChar char=""/>
+            </a:pPr>
+            <a:r>
+              <a:rPr sz="1000" b="0">
+                <a:solidFill>
+                  <a:srgbClr val="000000"/>
+                </a:solidFill>
+                <a:latin typeface="맑은 고딕"/>
+                <a:ea typeface="맑은 고딕"/>
+              </a:rPr>
+              <a:t>배송중</a:t>
+            </a:r>
+            <a:r>
+              <a:rPr sz="1000" b="0">
+                <a:solidFill>
+                  <a:srgbClr val="000000"/>
+                </a:solidFill>
+                <a:latin typeface="맑은 고딕"/>
+                <a:ea typeface="맑은 고딕"/>
+              </a:rPr>
+              <a:t>에서 </a:t>
+            </a:r>
+            <a:r>
+              <a:rPr sz="1000" b="0">
+                <a:solidFill>
+                  <a:srgbClr val="000000"/>
+                </a:solidFill>
+                <a:latin typeface="맑은 고딕"/>
+                <a:ea typeface="맑은 고딕"/>
+              </a:rPr>
+              <a:t>배송완료</a:t>
+            </a:r>
+            <a:r>
+              <a:rPr sz="1000" b="0">
+                <a:solidFill>
+                  <a:srgbClr val="000000"/>
+                </a:solidFill>
+                <a:latin typeface="맑은 고딕"/>
+                <a:ea typeface="맑은 고딕"/>
+              </a:rPr>
+              <a:t>로 가려면 배송 완료 통보가 있어야 한다.</a:t>
+            </a:r>
+          </a:p>
+          <a:p>
+            <a:pPr lvl="2" marL="411480" indent="-137160">
+              <a:spcBef>
+                <a:spcPts val="300"/>
+              </a:spcBef>
+              <a:spcAft>
+                <a:spcPts val="300"/>
+              </a:spcAft>
+              <a:buSzPct val="90000"/>
+              <a:buFont typeface="Wingdings" pitchFamily="2" charset="2"/>
+              <a:buChar char=""/>
+            </a:pPr>
+            <a:r>
+              <a:rPr sz="1000" b="0">
+                <a:solidFill>
+                  <a:srgbClr val="000000"/>
+                </a:solidFill>
+                <a:latin typeface="맑은 고딕"/>
+                <a:ea typeface="맑은 고딕"/>
+              </a:rPr>
+              <a:t>통보가 오지 않거나 늦는 경우처럼 배송 진행 중의 다른 경우는 다루지 않는다.</a:t>
+            </a:r>
+          </a:p>
+          <a:p>
+            <a:pPr marL="182880" indent="0">
+              <a:spcBef>
+                <a:spcPts val="300"/>
+              </a:spcBef>
+              <a:spcAft>
+                <a:spcPts val="300"/>
+              </a:spcAft>
+              <a:buNone/>
+            </a:pPr>
+            <a:r>
+              <a:rPr sz="1000" b="1">
+                <a:solidFill>
+                  <a:srgbClr val="000000"/>
+                </a:solidFill>
+                <a:latin typeface="맑은 고딕"/>
+                <a:ea typeface="맑은 고딕"/>
+              </a:rPr>
+              <a:t>결정하지 않고 남겨 두는 정책</a:t>
+            </a:r>
+          </a:p>
+          <a:p>
+            <a:pPr lvl="2" marL="411480" indent="-137160">
+              <a:spcBef>
+                <a:spcPts val="300"/>
+              </a:spcBef>
+              <a:spcAft>
+                <a:spcPts val="300"/>
+              </a:spcAft>
+              <a:buSzPct val="90000"/>
+              <a:buFont typeface="Wingdings" pitchFamily="2" charset="2"/>
+              <a:buChar char=""/>
+            </a:pPr>
+            <a:r>
+              <a:rPr sz="1000" b="0">
+                <a:solidFill>
+                  <a:srgbClr val="000000"/>
+                </a:solidFill>
+                <a:latin typeface="맑은 고딕"/>
+                <a:ea typeface="맑은 고딕"/>
+              </a:rPr>
+              <a:t>결제대기 기한과 만료 처리</a:t>
+            </a:r>
+          </a:p>
+          <a:p>
+            <a:pPr lvl="2" marL="411480" indent="-137160">
+              <a:spcBef>
+                <a:spcPts val="300"/>
+              </a:spcBef>
+              <a:spcAft>
+                <a:spcPts val="300"/>
+              </a:spcAft>
+              <a:buSzPct val="90000"/>
+              <a:buFont typeface="Wingdings" pitchFamily="2" charset="2"/>
+              <a:buChar char=""/>
+            </a:pPr>
+            <a:r>
+              <a:rPr sz="1000" b="0">
+                <a:solidFill>
+                  <a:srgbClr val="000000"/>
+                </a:solidFill>
+                <a:latin typeface="맑은 고딕"/>
+                <a:ea typeface="맑은 고딕"/>
+              </a:rPr>
+              <a:t>결제 응답을 확정할 수 없을 때의 후속 처리와 재결제 허용 여부</a:t>
+            </a:r>
+          </a:p>
+          <a:p>
+            <a:pPr lvl="2" marL="411480" indent="-137160">
+              <a:spcBef>
+                <a:spcPts val="300"/>
+              </a:spcBef>
+              <a:spcAft>
+                <a:spcPts val="300"/>
+              </a:spcAft>
+              <a:buSzPct val="90000"/>
+              <a:buFont typeface="Wingdings" pitchFamily="2" charset="2"/>
+              <a:buChar char=""/>
+            </a:pPr>
+            <a:r>
+              <a:rPr sz="1000" b="0">
+                <a:solidFill>
+                  <a:srgbClr val="000000"/>
+                </a:solidFill>
+                <a:latin typeface="맑은 고딕"/>
+                <a:ea typeface="맑은 고딕"/>
+              </a:rPr>
+              <a:t>재고 판단 시점과 승인 전·후 재고 부족 시 처리</a:t>
+            </a:r>
+          </a:p>
+          <a:p>
+            <a:pPr lvl="2" marL="411480" indent="-137160">
+              <a:spcBef>
+                <a:spcPts val="300"/>
+              </a:spcBef>
+              <a:spcAft>
+                <a:spcPts val="300"/>
+              </a:spcAft>
+              <a:buSzPct val="90000"/>
+              <a:buFont typeface="Wingdings" pitchFamily="2" charset="2"/>
+              <a:buChar char=""/>
+            </a:pPr>
+            <a:r>
+              <a:rPr sz="1000" b="0">
+                <a:solidFill>
+                  <a:srgbClr val="000000"/>
+                </a:solidFill>
+                <a:latin typeface="맑은 고딕"/>
+                <a:ea typeface="맑은 고딕"/>
+              </a:rPr>
+              <a:t>회원·비회원 여부와 본인 확인 방법</a:t>
+            </a:r>
+          </a:p>
           <a:p>
             <a:pPr lvl="2" marL="411480" indent="-137160">
               <a:spcBef>

--- a/courses/ai-native/sessions/s05.pptx
+++ b/courses/ai-native/sessions/s05.pptx
@@ -1731,7 +1731,7 @@
             <a:pPr lvl="0"/>
             <a:r>
               <a:rPr lang="ko-KR" sz="1200"/>
-              <a:t>모델에서 보완된 내용은 결제대기의 거절 자기 전이, 승인 뒤 배송 요청, 배송 생애주기의 맥락, 금지된 순서와 대표 검사다. 승인 뒤 배송 요청 실패의 정책은 미정으로 유지한다.</a:t>
+              <a:t>모델에서 보완된 것 — 결제대기의 거절 자기 전이, 승인 뒤 배송 요청, 배송 생애주기의 맥락, 금지된 순서와 대표 검사다. 승인 뒤 배송 요청 실패의 정책은 미정으로 유지한다.</a:t>
             </a:r>
           </a:p>
         </p:txBody>
@@ -1821,6 +1821,499 @@
             <a:r>
               <a:rPr lang="ko-KR" sz="1200"/>
               <a:t>미정 목록의 다섯째 줄은 ④에서 도구가 되물은 질문을 사람이 미정으로 확정한 결과다.</a:t>
+            </a:r>
+          </a:p>
+          <a:p>
+            <a:pPr lvl="0"/>
+            <a:r>
+              <a:rPr lang="ko-KR" sz="1200"/>
+              <a:t>실제로 실행한 프롬프트 — 아래가 이 별첨을 만든 입력이다. 본문 실습의 ①~⑤는 수강생용 문구이고, 실제 실행은 앞 응답을 읽고 답한 내용이 붙어 길다. ①은 앞 실습의 최종 MD를 통째로 붙여 14KB라 노트에는 앞머리까지만 싣는다 — 그대로 재현하려면 code/s05/exercise-conversation/order/prompt-01.txt~prompt-05.txt를 그 파일 그대로 입력으로 쓴다. ①에 붙인 두 파일은 같은 폴더의 input-s03.md(실습 3 최종 MD)와 input-s04.md(실습 4 최종 MD)이며 앞 실습의 원본과 바이트 단위로 같다.</a:t>
+            </a:r>
+          </a:p>
+          <a:p>
+            <a:pPr lvl="1"/>
+            <a:r>
+              <a:rPr lang="ko-KR" sz="1200"/>
+              <a:t>1. 실제 프롬프트 1</a:t>
+            </a:r>
+          </a:p>
+          <a:p>
+            <a:pPr lvl="0">
+              <a:buNone/>
+            </a:pPr>
+            <a:r>
+              <a:rPr lang="ko-KR" sz="1200"/>
+              <a:t>    실습 3의 요구사항 정의서와 실습 4의 정적 관점을 읽고, 같은 도메인 모델의 동적 관점 초안을 제안해라. 사건·상태·전이·업무 상호작용과 업무 규칙의 대표 예를 담아라. 상태 기계와 분석 수준 시퀀스 다이어그램을 Mermaid로 보여 주고 같은 내용을 목록으로 읽을 수 있게 해라. 근거 없는 정책·구현은 확정하지 말고 질문해라. 소프트웨어 서비스·저장소·기술 연동 설계는 만들지 마라.</a:t>
+            </a:r>
+          </a:p>
+          <a:p>
+            <a:pPr lvl="0">
+              <a:buNone/>
+            </a:pPr>
+            <a:r>
+              <a:rPr lang="ko-KR" sz="1200"/>
+              <a:t>    [실습 3 실제 최종 MD] # “주문한다” 요구사항 정의서</a:t>
+            </a:r>
+          </a:p>
+          <a:p>
+            <a:pPr lvl="0">
+              <a:buNone/>
+            </a:pPr>
+            <a:r>
+              <a:rPr lang="ko-KR" sz="1200"/>
+              <a:t>    고객이 장바구니의 상품과 수량을 바탕으로 배송지를 지정하고, 카드 승인을 받아 주문을 성립시킨 뒤 그 결과를 확인할 때까지의 요구사항과 수용 기준을 정의한다.</a:t>
+            </a:r>
+          </a:p>
+          <a:p>
+            <a:pPr lvl="0">
+              <a:buNone/>
+            </a:pPr>
+            <a:r>
+              <a:rPr lang="ko-KR" sz="1200"/>
+              <a:t>    ## 목적과 범위</a:t>
+            </a:r>
+          </a:p>
+          <a:p>
+            <a:pPr lvl="2"/>
+            <a:r>
+              <a:rPr lang="ko-KR" sz="1200"/>
+              <a:t>상품 조회와 장바구니 구성은 전제다.</a:t>
+            </a:r>
+          </a:p>
+          <a:p>
+            <a:pPr lvl="2"/>
+            <a:r>
+              <a:rPr lang="ko-KR" sz="1200"/>
+              <a:t>상세 범위는 공통 흐름 3~5단계인 배송지 지정, 결제, 주문 결과 확인이다.</a:t>
+            </a:r>
+          </a:p>
+          <a:p>
+            <a:pPr lvl="2"/>
+            <a:r>
+              <a:rPr lang="ko-KR" sz="1200"/>
+              <a:t>상품·결제·배송 시스템은 외부 시스템으로 연계하며 내부 기능은 재구현하지 않는다.</a:t>
+            </a:r>
+          </a:p>
+          <a:p>
+            <a:pPr lvl="0">
+              <a:buNone/>
+            </a:pPr>
+            <a:r>
+              <a:rPr lang="ko-KR" sz="1200"/>
+              <a:t>    ## 사용자 이야기</a:t>
+            </a:r>
+          </a:p>
+          <a:p>
+            <a:pPr lvl="0">
+              <a:buNone/>
+            </a:pPr>
+            <a:r>
+              <a:rPr lang="ko-KR" sz="1200"/>
+              <a:t>    고객으로서 장바구니의 상품과 수량을 기준으로 배송지를 지정하고 카드 승인을 받아 주문을 성립시킨 뒤 그 결과를 확인하고 싶다.</a:t>
+            </a:r>
+          </a:p>
+          <a:p>
+            <a:pPr lvl="0">
+              <a:buNone/>
+            </a:pPr>
+            <a:r>
+              <a:rPr lang="ko-KR" sz="1200"/>
+              <a:t>    ## 핵심 기능과 업무 규칙</a:t>
+            </a:r>
+          </a:p>
+          <a:p>
+            <a:pPr lvl="2"/>
+            <a:r>
+              <a:rPr lang="ko-KR" sz="1200"/>
+              <a:t>배송지를 지정하면 주문 생성 시점의 판매가로 주문 금액을 확정하고 결제대기 주문을 생성한다.</a:t>
+            </a:r>
+          </a:p>
+          <a:p>
+            <a:pPr lvl="2"/>
+            <a:r>
+              <a:rPr lang="ko-KR" sz="1200"/>
+              <a:t>주문자와 수령인은 같은 사람으로 본다.</a:t>
+            </a:r>
+          </a:p>
+          <a:p>
+            <a:pPr lvl="2"/>
+            <a:r>
+              <a:rPr lang="ko-KR" sz="1200"/>
+              <a:t>주문 금액은 각 주문 항목의 주문 생성 시점 판매가에 수량을 곱하여 합한 금액이다.</a:t>
+            </a:r>
+          </a:p>
+          <a:p>
+            <a:pPr lvl="2"/>
+            <a:r>
+              <a:rPr lang="ko-KR" sz="1200"/>
+              <a:t>주문 생성 뒤 판매가가 변경되어도 주문 금액과 카드 승인 요청 금액은 바뀌지 않는다.</a:t>
+            </a:r>
+          </a:p>
+          <a:p>
+            <a:pPr lvl="2"/>
+            <a:r>
+              <a:rPr lang="ko-KR" sz="1200"/>
+              <a:t>결제대기 주문의 상품·수량·배송지는 변경할 수 없다. 변경하려면 새 주문을 생성한다.</a:t>
+            </a:r>
+          </a:p>
+          <a:p>
+            <a:pPr lvl="2"/>
+            <a:r>
+              <a:rPr lang="ko-KR" sz="1200"/>
+              <a:t>결제 수단은 카드만 허용한다.</a:t>
+            </a:r>
+          </a:p>
+          <a:p>
+            <a:pPr lvl="2"/>
+            <a:r>
+              <a:rPr lang="ko-KR" sz="1200"/>
+              <a:t>카드 승인이 거절되면 같은 주문을 결제대기로 유지하며 다른 카드로 재결제할 수 있다.</a:t>
+            </a:r>
+          </a:p>
+          <a:p>
+            <a:pPr lvl="2"/>
+            <a:r>
+              <a:rPr lang="ko-KR" sz="1200"/>
+              <a:t>카드 승인이 완료되면 같은 주문이 성립하고 상태가 결제완료가 된다.</a:t>
+            </a:r>
+          </a:p>
+          <a:p>
+            <a:pPr lvl="2"/>
+            <a:r>
+              <a:rPr lang="ko-KR" sz="1200"/>
+              <a:t>배송 요청은 카드 승인 완료 뒤 해당 주문의 확정된 배송지로 보낸다.</a:t>
+            </a:r>
+          </a:p>
+          <a:p>
+            <a:pPr lvl="2"/>
+            <a:r>
+              <a:rPr lang="ko-KR" sz="1200"/>
+              <a:t>주문 쪽에서 재고를 별도로 확보하지 않고 상품 시스템의 판단을 따른다.</a:t>
+            </a:r>
+          </a:p>
+          <a:p>
+            <a:pPr lvl="2"/>
+            <a:r>
+              <a:rPr lang="ko-KR" sz="1200"/>
+              <a:t>결제 응답을 확정할 수 없으면 승인 또는 거절로 간주하지 않는다.</a:t>
+            </a:r>
+          </a:p>
+          <a:p>
+            <a:pPr lvl="2"/>
+            <a:r>
+              <a:rPr lang="ko-KR" sz="1200"/>
+              <a:t>본인 주문에 대해서만 조회 또는 변경 요청의 권한을 인정한다. 권한이 있더라도 실제 변경 가능 여부에는 주문 상태와 업무 규칙을 적용한다.</a:t>
+            </a:r>
+          </a:p>
+          <a:p>
+            <a:pPr lvl="2"/>
+            <a:r>
+              <a:rPr lang="ko-KR" sz="1200"/>
+              <a:t>다른 고객의 주문에 대한 조회·변경 요청은 거절한다.</a:t>
+            </a:r>
+          </a:p>
+          <a:p>
+            <a:pPr lvl="0">
+              <a:buNone/>
+            </a:pPr>
+            <a:r>
+              <a:rPr lang="ko-KR" sz="1200"/>
+              <a:t>    ## 기본 용어집</a:t>
+            </a:r>
+          </a:p>
+          <a:p>
+            <a:pPr lvl="2"/>
+            <a:r>
+              <a:rPr lang="ko-KR" sz="1200"/>
+              <a:t>주문(Order): 배송지가 지정되어 생성된 거래 기록</a:t>
+            </a:r>
+          </a:p>
+          <a:p>
+            <a:pPr lvl="2"/>
+            <a:r>
+              <a:rPr lang="ko-KR" sz="1200"/>
+              <a:t>주문 항목(OrderItem): 주문에 포함된 상품, 수량 및 주문 생성 시점의 판매가</a:t>
+            </a:r>
+          </a:p>
+          <a:p>
+            <a:pPr lvl="2"/>
+            <a:r>
+              <a:rPr lang="ko-KR" sz="1200"/>
+              <a:t>판매가(salePrice): 상품 시스템이 제공하는 상품 가격</a:t>
+            </a:r>
+          </a:p>
+          <a:p>
+            <a:pPr lvl="2"/>
+            <a:r>
+              <a:rPr lang="ko-KR" sz="1200"/>
+              <a:t>주문 금액(totalAmount): 각 주문 항목의 주문 생성 시점 판매가에 수량을 곱하여 합한 금액</a:t>
+            </a:r>
+          </a:p>
+          <a:p>
+            <a:pPr lvl="2"/>
+            <a:r>
+              <a:rPr lang="ko-KR" sz="1200"/>
+              <a:t>주문 생성: 배송지 지정에 따라 주문이 기록되고 결제대기가 되는 것</a:t>
+            </a:r>
+          </a:p>
+          <a:p>
+            <a:pPr lvl="2"/>
+            <a:r>
+              <a:rPr lang="ko-KR" sz="1200"/>
+              <a:t>결제대기(PENDING_PAYMENT): 주문은 생성됐지만 카드 승인이 완료되지 않은 상태</a:t>
+            </a:r>
+          </a:p>
+          <a:p>
+            <a:pPr lvl="2"/>
+            <a:r>
+              <a:rPr lang="ko-KR" sz="1200"/>
+              <a:t>주문 성립: 카드 승인이 완료되어 같은 주문이 결제완료가 되는 것</a:t>
+            </a:r>
+          </a:p>
+          <a:p>
+            <a:pPr lvl="2"/>
+            <a:r>
+              <a:rPr lang="ko-KR" sz="1200"/>
+              <a:t>결제완료(PAID): 카드 승인이 완료되어 주문이 성립한 상태</a:t>
+            </a:r>
+          </a:p>
+          <a:p>
+            <a:pPr lvl="2"/>
+            <a:r>
+              <a:rPr lang="ko-KR" sz="1200"/>
+              <a:t>주문 결과 확인: 카드 승인 응답에 따른 주문 상태와 결과를 확인하는 것</a:t>
+            </a:r>
+          </a:p>
+          <a:p>
+            <a:pPr lvl="0">
+              <a:buNone/>
+            </a:pPr>
+            <a:r>
+              <a:rPr lang="ko-KR" sz="1200"/>
+              <a:t>    ## 공통 흐름</a:t>
+            </a:r>
+          </a:p>
+          <a:p>
+            <a:pPr lvl="2"/>
+            <a:r>
+              <a:rPr lang="ko-KR" sz="1200"/>
+              <a:t>1. 상품 조회 — 전제: 고객이 상품을 조회한다.</a:t>
+            </a:r>
+          </a:p>
+          <a:p>
+            <a:pPr lvl="2"/>
+            <a:r>
+              <a:rPr lang="ko-KR" sz="1200"/>
+              <a:t>2. 장바구니 — 전제: 고객이 상품과 수량을 장바구니에 담는다.</a:t>
+            </a:r>
+          </a:p>
+          <a:p>
+            <a:pPr lvl="2"/>
+            <a:r>
+              <a:rPr lang="ko-KR" sz="1200"/>
+              <a:t>3. 배송지 지정: 배송지를 지정하면 주문 생성 시점의 판매가로 주문 금액을 확정하고 결제대기 주문을 생성한다.</a:t>
+            </a:r>
+          </a:p>
+          <a:p>
+            <a:pPr lvl="2"/>
+            <a:r>
+              <a:rPr lang="ko-KR" sz="1200"/>
+              <a:t>4. 결제: 고객이 주문 금액으로 카드 승인을 요청한다.</a:t>
+            </a:r>
+          </a:p>
+          <a:p>
+            <a:pPr lvl="0">
+              <a:buNone/>
+            </a:pPr>
+            <a:r>
+              <a:rPr lang="ko-KR" sz="1200"/>
+              <a:t>    ⟨이하 생략 — input-s03.md·input-s04.md의 전문이 이어진다. 이 프롬프트의 전문은 prompt-01.txt에 있다⟩</a:t>
+            </a:r>
+          </a:p>
+          <a:p>
+            <a:pPr lvl="1"/>
+            <a:r>
+              <a:rPr lang="ko-KR" sz="1200"/>
+              <a:t>2. 실제 프롬프트 2</a:t>
+            </a:r>
+          </a:p>
+          <a:p>
+            <a:pPr lvl="0">
+              <a:buNone/>
+            </a:pPr>
+            <a:r>
+              <a:rPr lang="ko-KR" sz="1200"/>
+              <a:t>    [앞선 질문에 대한 답] 실습 3·4의 미정 정책은 새로 결정하지 않는다. 본인 확인, 기한, 응답 미확정의 후속 처리, 재고 판단·부족 처리, 배송 요청 실패, 별도 통지 정책은 미정으로 유지해라. 정해진 정상 승인·거절의 대표 예를 모델링할 수 있으므로 이 미정 전체를 해결하려고 범위를 늘리지 마라. 정상 응답의 대표 예에서 배송 요청 1회는 기록한 업무 요청이 1번이라는 뜻이며 운영상 중복 방지·재시도 정책은 아직 정하지 않는다.</a:t>
+            </a:r>
+          </a:p>
+          <a:p>
+            <a:pPr lvl="0">
+              <a:buNone/>
+            </a:pPr>
+            <a:r>
+              <a:rPr lang="ko-KR" sz="1200"/>
+              <a:t>    [추가 질문·수정 요청] 같은 주문 생애주기의 참고 범위를 확장하겠다. PAID에서 배송 시작 통보를 받으면 IN_DELIVERY, 배송중에 배송 완료 통보를 받으면 DELIVERED다. 이 두 상태와 전이는 주문한다의 요구 범위 밖인 생애주기 맥락으로 표시하고 실습 3 요구 범위 자체를 확대하지 마라. 취소는 범위 밖으로 유지해라. 상태 기계에서 카드 승인 거절은 PENDING_PAYMENT 자기 전이로 유지해라. 배송 요청은 PAID 상태에 진입하는 승인 사건의 반응이며 요청 자체로 IN_DELIVERY가 되지 않는다. 시퀀스는 고객·주문 시스템·결제 시스템·배송 시스템의 분석 수준으로 정상 승인 장면과 거절 뒤 재결제 장면을 나눠 보여라. 업무 사건의 선후 관계를 나타낼 뿐 동기·비동기 전달 방식을 정하지 않는다. 기술 객체·DB·재시도·복구 정책은 추가하지 마라. 펜 2개·확정 단가 1000원·총액 2000원·서울을 유지하고, 같은 주문의 식별·상품·수량·배송지·금액이 거절 뒤에도 유지됨을 명시해라. 이 조건으로 상태 기계·전이 목록·정상 승인 시퀀스·대표 예를 보완하고, 금지된 전이와 미정 정책의 차이를 짚어라. 전체 도메인 사건 목록을 발명하지 말고 범위 안의 대표 사건만 담아라.</a:t>
+            </a:r>
+          </a:p>
+          <a:p>
+            <a:pPr lvl="1"/>
+            <a:r>
+              <a:rPr lang="ko-KR" sz="1200"/>
+              <a:t>3. 실제 프롬프트 3</a:t>
+            </a:r>
+          </a:p>
+          <a:p>
+            <a:pPr lvl="0">
+              <a:buNone/>
+            </a:pPr>
+            <a:r>
+              <a:rPr lang="ko-KR" sz="1200"/>
+              <a:t>    [앞선 답 검토] 상태 기계에서 PAID를 두 composite 안에 중복 선언한 것은 같은 주문 상태를 서로 다른 상태로 오해하게 한다. 복합 상태 컨테이너를 제거하고 PENDING_PAYMENT·PAID·IN_DELIVERY·DELIVERED 네 상태를 한 번씩만 선언해라. 범위 차이는 도식 밖의 설명으로 명시해라. 상태 기계의 긴 노트는 목록에 두고 전이 라벨은 사건과 짧은 반응만 남겨라.</a:t>
+            </a:r>
+          </a:p>
+          <a:p>
+            <a:pPr lvl="0">
+              <a:buNone/>
+            </a:pPr>
+            <a:r>
+              <a:rPr lang="ko-KR" sz="1200"/>
+              <a:t>    [추가 수정 요청] 최종 문서는 요구와 정적 관점을 반복하지 않고 이번에 보완한 동적 관점의 핵심만 담아라. 도입·상태 기계·전이 목록·정상 승인 시퀀스·규칙의 대표 예 및 금지·미정으로 구성해라. 시퀀스는 정상 승인 한 장면만 도식으로 남기고 거절 뒤 재결제는 대표 예에 넣어라. 상태 기계와 시퀀스 도식의 제목·라벨은 한글을 쓰고 상태 코드 값은 전이 목록에 함께 적어라. 시퀀스에 응답 점선·색 바탕·rect를 넣지 말고 사건의 선후 관계를 나타내는 실선 화살표로 통일해라. 동기·비동기 미정을 본문에 밝혀라. 네 대표 예(승인, 판매가 변경 뒤 승인, 거절, 거절 뒤 재결제)는 전제·사건·결과를 한 줄씩 읽을 수 있는 간결한 목록 또는 표로 담아라. 취소는 범위 밖, 기한·미확정 응답·재고·본인 확인·배송 요청 실패·별도 통지는 미정으로 보존해라. 금지 목록에 배송 요청 전 승인 필요와 요청만으로 배송중 전이 금지를 명시해라. 불필요한 중복 설명을 빼고 이번 합의의 빠짐·모순을 점검해라. 아직 최종 파일 생성 단계는 아니다.</a:t>
+            </a:r>
+          </a:p>
+          <a:p>
+            <a:pPr lvl="1"/>
+            <a:r>
+              <a:rPr lang="ko-KR" sz="1200"/>
+              <a:t>4. 실제 프롬프트 4</a:t>
+            </a:r>
+          </a:p>
+          <a:p>
+            <a:pPr lvl="0">
+              <a:buNone/>
+            </a:pPr>
+            <a:r>
+              <a:rPr lang="ko-KR" sz="1200"/>
+              <a:t>    [앞선 답 검토] 세 가지가 합의한 범위를 넘었다.</a:t>
+            </a:r>
+          </a:p>
+          <a:p>
+            <a:pPr lvl="2"/>
+            <a:r>
+              <a:rPr lang="ko-KR" sz="1200"/>
+              <a:t>1. 시퀀스의 마지막 화살표가 주문 시스템이 고객에게 결제 완료 결과를 보내는 것으로 그려졌다. 주문 결과의 별도 통지 여부와 담당 주체는 미정 항목이다. 미정을 도식으로 확정하지 마라. 고객이 주문 결과를 확인하는 사건으로 두거나, 통지 주체를 정하지 않는다는 점을 본문에 밝혀라.</a:t>
+            </a:r>
+          </a:p>
+          <a:p>
+            <a:pPr lvl="2"/>
+            <a:r>
+              <a:rPr lang="ko-KR" sz="1200"/>
+              <a:t>2. 주문 시스템의 자기 화살표로 상태 전이를 그렸다. 이 도식은 참여자 사이에 전달되는 업무 사건을 보이는 자리다. 상태 변화는 사건의 반응으로 설명하고 전이는 상태 기계와 전이 목록이 맡게 해라.</a:t>
+            </a:r>
+          </a:p>
+          <a:p>
+            <a:pPr lvl="2"/>
+            <a:r>
+              <a:rPr lang="ko-KR" sz="1200"/>
+              <a:t>3. "배송 요청 1회 기록"은 주문 시스템 안에 기록 구조를 두기로 정한 것으로 읽힌다. 배송 요청이라는 업무 사건이 한 번 발생한다는 뜻으로 고쳐라. 운영상의 중복 방지·재시도는 여전히 미정이다.</a:t>
+            </a:r>
+          </a:p>
+          <a:p>
+            <a:pPr lvl="0">
+              <a:buNone/>
+            </a:pPr>
+            <a:r>
+              <a:rPr lang="ko-KR" sz="1200"/>
+              <a:t>    전이 목록 첫 행의 현재 상태 "주문 없음"은 상태가 아니다. 초기 상태로 진입하는 것임을 알 수 있게 적어라.</a:t>
+            </a:r>
+          </a:p>
+          <a:p>
+            <a:pPr lvl="0">
+              <a:buNone/>
+            </a:pPr>
+            <a:r>
+              <a:rPr lang="ko-KR" sz="1200"/>
+              <a:t>    [추가 수정 요청] 거절 뒤 재결제가 같은 주문임을 전이 목록과 대표 예가 같은 값으로 말하는지 확인해라. 네 대표 예(승인, 판매가 변경 뒤 승인, 거절, 거절 뒤 재결제)에서 주문 식별·펜 2개·확정 단가 1,000원·총액 2,000원·배송지 서울이 어느 예에서도 바뀌지 않는지 한 줄씩 확인할 수 있게 해라. 금지 목록에서 확정된 요구에 근거한 금지와, 생애주기 참고 범위의 전이 조건을 구별해 적어라. 참고 범위의 조건을 실습 3의 확정된 요구로 승격하지 마라. 남은 빠짐과 모순을 점검해 보완안 전체를 다시 정리해라. 아직 최종 파일 생성 단계는 아니다.</a:t>
+            </a:r>
+          </a:p>
+          <a:p>
+            <a:pPr lvl="1"/>
+            <a:r>
+              <a:rPr lang="ko-KR" sz="1200"/>
+              <a:t>5. 실제 프롬프트 5</a:t>
+            </a:r>
+          </a:p>
+          <a:p>
+            <a:pPr lvl="0">
+              <a:buNone/>
+            </a:pPr>
+            <a:r>
+              <a:rPr lang="ko-KR" sz="1200"/>
+              <a:t>    [이전 MD 검토] 구성·값·도식·미정 판단은 그대로 간다. 두 표가 표로 읽히지 않는다.</a:t>
+            </a:r>
+          </a:p>
+          <a:p>
+            <a:pPr lvl="2"/>
+            <a:r>
+              <a:rPr lang="ko-KR" sz="1200"/>
+              <a:t>1. 「규칙의 대표 예」를 표 하나에 몰아넣어 칸마다 문장이 들어갔다. 행을 훑어 비교할 수 없고 한 칸을 다 읽어야 뜻이 잡힌다. 표를 버리고 네 예를 각각 짧은 목록으로 적어라. 예마다 전제·사건·결과·유지되는 값을 한 줄씩 두고, 각 줄은 한 호흡에 읽히는 짧은 구로 끊어라.</a:t>
+            </a:r>
+          </a:p>
+          <a:p>
+            <a:pPr lvl="2"/>
+            <a:r>
+              <a:rPr lang="ko-KR" sz="1200"/>
+              <a:t>2. 「전이 목록」은 표로 두되 현재 상태·사건·다음 상태·범위 네 열로 줄여라. 반응은 표 아래 목록에 사건별로 적어라. 상태 칸에는 한글 이름만 쓰고 코드 값은 표 아래 한 줄로 모아라.</a:t>
+            </a:r>
+          </a:p>
+          <a:p>
+            <a:pPr lvl="2"/>
+            <a:r>
+              <a:rPr lang="ko-KR" sz="1200"/>
+              <a:t>3. 두 곳 모두 표의 칸에 문장을 넣지 말고 짧은 말로 끊어라.</a:t>
+            </a:r>
+          </a:p>
+          <a:p>
+            <a:pPr lvl="0">
+              <a:buNone/>
+            </a:pPr>
+            <a:r>
+              <a:rPr lang="ko-KR" sz="1200"/>
+              <a:t>    [최종 파일 생성] 위를 고쳐 같은 동적 관점 문서를 다시 생성해라.</a:t>
+            </a:r>
+          </a:p>
+          <a:p>
+            <a:pPr lvl="2"/>
+            <a:r>
+              <a:rPr lang="ko-KR" sz="1200"/>
+              <a:t>구성은 도입, 상태 기계, 전이 목록, 정상 승인 시퀀스, 규칙의 대표 예, 금지·참고 조건·미정·범위 밖이다.</a:t>
+            </a:r>
+          </a:p>
+          <a:p>
+            <a:pPr lvl="2"/>
+            <a:r>
+              <a:rPr lang="ko-KR" sz="1200"/>
+              <a:t>상태 기계와 시퀀스는 Mermaid 원본을 그대로 보존한다. 금지 목록과 미정 목록의 문장도 보존한다.</a:t>
+            </a:r>
+          </a:p>
+          <a:p>
+            <a:pPr lvl="2"/>
+            <a:r>
+              <a:rPr lang="ko-KR" sz="1200"/>
+              <a:t>네 예의 값(주문 A·펜 2개·확정 단가 1,000원·총액 2,000원·배송지 서울·배송 요청 횟수)과 전이 목록의 상태·사건·범위를 하나도 빼지 마라.</a:t>
+            </a:r>
+          </a:p>
+          <a:p>
+            <a:pPr lvl="2"/>
+            <a:r>
+              <a:rPr lang="ko-KR" sz="1200"/>
+              <a:t>요구사항 정의서와 정적 관점을 다시 설명하지 않는다. 새 정책·새 상태·새 전이를 추가하지 마라. 미정은 미정으로 적는다.</a:t>
+            </a:r>
+          </a:p>
+          <a:p>
+            <a:pPr lvl="2"/>
+            <a:r>
+              <a:rPr lang="ko-KR" sz="1200"/>
+              <a:t>대화 과정을 설명하는 절은 넣지 않는다.</a:t>
             </a:r>
           </a:p>
         </p:txBody>
@@ -3756,7 +4249,7 @@
                 <a:latin typeface="맑은 고딕"/>
                 <a:ea typeface="맑은 고딕"/>
               </a:rPr>
-              <a:t>11. 실습 —</a:t>
+              <a:t>11. 실습 5 —</a:t>
             </a:r>
             <a:r>
               <a:rPr sz="1400" b="0">
@@ -17851,7 +18344,7 @@
                 <a:latin typeface="맑은 고딕"/>
                 <a:ea typeface="맑은 고딕"/>
               </a:rPr>
-              <a:t>11. 실습 — 동적 모델</a:t>
+              <a:t>11. 실습 5 — 동적 모델</a:t>
             </a:r>
           </a:p>
         </p:txBody>
@@ -18586,16 +19079,6 @@
               <a:buNone/>
             </a:pPr>
             <a:r>
-              <a:rPr sz="1200" b="1">
-                <a:solidFill>
-                  <a:srgbClr val="000000"/>
-                </a:solidFill>
-                <a:latin typeface="맑은 고딕"/>
-                <a:ea typeface="맑은 고딕"/>
-              </a:rPr>
-              <a:t>도메인 모델의 동적 관점을 담은 최종 MD</a:t>
-            </a:r>
-            <a:r>
               <a:rPr sz="1200" b="0">
                 <a:solidFill>
                   <a:srgbClr val="000000"/>
@@ -18603,7 +19086,7 @@
                 <a:latin typeface="맑은 고딕"/>
                 <a:ea typeface="맑은 고딕"/>
               </a:rPr>
-              <a:t>를 저장소의 </a:t>
+              <a:t>주문한다-동적모델.md</a:t>
             </a:r>
             <a:r>
               <a:rPr sz="1200" b="0">
@@ -18613,17 +19096,57 @@
                 <a:latin typeface="맑은 고딕"/>
                 <a:ea typeface="맑은 고딕"/>
               </a:rPr>
+              <a:t> —</a:t>
+            </a:r>
+            <a:r>
+              <a:rPr sz="1000" b="0">
+                <a:solidFill>
+                  <a:srgbClr val="000000"/>
+                </a:solidFill>
+                <a:latin typeface="맑은 고딕"/>
+                <a:ea typeface="맑은 고딕"/>
+              </a:rPr>
+              <a:t> 도메인 모델의 동적 관점을 담아 저장소의 </a:t>
+            </a:r>
+            <a:r>
+              <a:rPr sz="1000" b="0">
+                <a:solidFill>
+                  <a:srgbClr val="000000"/>
+                </a:solidFill>
+                <a:latin typeface="맑은 고딕"/>
+                <a:ea typeface="맑은 고딕"/>
+              </a:rPr>
               <a:t>docs</a:t>
             </a:r>
             <a:r>
-              <a:rPr sz="1200" b="0">
-                <a:solidFill>
-                  <a:srgbClr val="000000"/>
-                </a:solidFill>
-                <a:latin typeface="맑은 고딕"/>
-                <a:ea typeface="맑은 고딕"/>
-              </a:rPr>
-              <a:t>에 두고 커밋한다. 실습 6에 요구·정적 관점과 함께 첨부한다.</a:t>
+              <a:rPr sz="1000" b="0">
+                <a:solidFill>
+                  <a:srgbClr val="000000"/>
+                </a:solidFill>
+                <a:latin typeface="맑은 고딕"/>
+                <a:ea typeface="맑은 고딕"/>
+              </a:rPr>
+              <a:t>에 두고 커밋한다. </a:t>
+            </a:r>
+            <a:r>
+              <a:rPr sz="1000" b="1">
+                <a:solidFill>
+                  <a:srgbClr val="000000"/>
+                </a:solidFill>
+                <a:latin typeface="맑은 고딕"/>
+                <a:ea typeface="맑은 고딕"/>
+              </a:rPr>
+              <a:t>실습 6의 투입물</a:t>
+            </a:r>
+            <a:r>
+              <a:rPr sz="1000" b="0">
+                <a:solidFill>
+                  <a:srgbClr val="000000"/>
+                </a:solidFill>
+                <a:latin typeface="맑은 고딕"/>
+                <a:ea typeface="맑은 고딕"/>
+              </a:rPr>
+              <a:t>이며 요구·정적 관점과 함께 첨부한다</a:t>
             </a:r>
           </a:p>
         </p:txBody>

--- a/courses/ai-native/sessions/s05.pptx
+++ b/courses/ai-native/sessions/s05.pptx
@@ -1806,14 +1806,14 @@
             <a:pPr lvl="0"/>
             <a:r>
               <a:rPr lang="ko-KR" sz="1200"/>
-              <a:t>첫 ⑤의 다섯 열 표는 칸마다 문장이 들어가 행을 훑어 읽을 수 없었다 — 그 응답은 finalization-rounds/01에 보존했다.</a:t>
+              <a:t>첫 ⑤의 5열 표는 칸마다 문장이 들어가 행을 훑어 읽을 수 없었다 — 그 응답은 finalization-rounds/01에 보존했다.</a:t>
             </a:r>
           </a:p>
           <a:p>
             <a:pPr lvl="0"/>
             <a:r>
               <a:rPr lang="ko-KR" sz="1200"/>
-              <a:t>정상 승인 시퀀스의 마지막 세 줄은 ④에서 사람이 지적해 고친 자리다 — 통지 주체를 확정한 결과 화살표와 주문 시스템의 자기 전이 화살표를 지운 근거가 응답 안에 남아 있다.</a:t>
+              <a:t>정상 승인 시퀀스의 마지막 3줄은 ④에서 사람이 지적해 고친 자리다 — 통지 주체를 확정한 결과 화살표와 주문 시스템의 자기 전이 화살표를 지운 근거가 응답 안에 남아 있다.</a:t>
             </a:r>
           </a:p>
           <a:p>
@@ -2193,7 +2193,7 @@
             </a:pPr>
             <a:r>
               <a:rPr lang="ko-KR" sz="1200"/>
-              <a:t>    [앞선 답 검토] 세 가지가 합의한 범위를 넘었다.</a:t>
+              <a:t>    [앞선 답 검토] 3가지가 합의한 범위를 넘었다.</a:t>
             </a:r>
           </a:p>
           <a:p>
@@ -2262,14 +2262,14 @@
             <a:pPr lvl="2"/>
             <a:r>
               <a:rPr lang="ko-KR" sz="1200"/>
-              <a:t>2. 「전이 목록」은 표로 두되 현재 상태·사건·다음 상태·범위 네 열로 줄여라. 반응은 표 아래 목록에 사건별로 적어라. 상태 칸에는 한글 이름만 쓰고 코드 값은 표 아래 한 줄로 모아라.</a:t>
+              <a:t>2. 「전이 목록」은 표로 두되 현재 상태·사건·다음 상태·범위 4열로 줄여라. 반응은 표 아래 목록에 사건별로 적어라. 상태 칸에는 한글 이름만 쓰고 코드 값은 표 아래 한 줄로 모아라.</a:t>
             </a:r>
           </a:p>
           <a:p>
             <a:pPr lvl="2"/>
             <a:r>
               <a:rPr lang="ko-KR" sz="1200"/>
-              <a:t>3. 두 곳 모두 표의 칸에 문장을 넣지 말고 짧은 말로 끊어라.</a:t>
+              <a:t>3. 2곳 모두 표의 칸에 문장을 넣지 말고 짧은 말로 끊어라.</a:t>
             </a:r>
           </a:p>
           <a:p>
@@ -4594,7 +4594,7 @@
                       </a:r>
                     </a:p>
                   </a:txBody>
-                  <a:tcPr marL="6750" marR="6750" marT="6750" marB="0" anchor="ctr">
+                  <a:tcPr marL="6750" marR="6750" marT="6750" marB="6750" anchor="ctr">
                     <a:lnL>
                       <a:noFill/>
                     </a:lnL>
@@ -4656,7 +4656,7 @@
                       </a:r>
                     </a:p>
                   </a:txBody>
-                  <a:tcPr marL="6750" marR="6750" marT="6750" marB="0" anchor="ctr">
+                  <a:tcPr marL="6750" marR="6750" marT="6750" marB="6750" anchor="ctr">
                     <a:lnL w="9525" cap="flat" cmpd="sng" algn="ctr">
                       <a:solidFill>
                         <a:schemeClr val="bg1">
@@ -4726,7 +4726,7 @@
                       </a:r>
                     </a:p>
                   </a:txBody>
-                  <a:tcPr marL="6750" marR="6750" marT="6750" marB="0" anchor="ctr">
+                  <a:tcPr marL="6750" marR="6750" marT="6750" marB="6750" anchor="ctr">
                     <a:lnL w="9525" cap="flat" cmpd="sng" algn="ctr">
                       <a:solidFill>
                         <a:schemeClr val="bg1">
@@ -4798,7 +4798,7 @@
                       </a:r>
                     </a:p>
                   </a:txBody>
-                  <a:tcPr marL="81005" marR="6750" marT="6750" marB="0" anchor="ctr">
+                  <a:tcPr marL="81005" marR="6750" marT="6750" marB="6750" anchor="ctr">
                     <a:lnL>
                       <a:noFill/>
                     </a:lnL>
@@ -4852,7 +4852,7 @@
                       </a:r>
                     </a:p>
                   </a:txBody>
-                  <a:tcPr marL="81005" marR="6750" marT="6750" marB="0" anchor="ctr">
+                  <a:tcPr marL="81005" marR="6750" marT="6750" marB="6750" anchor="ctr">
                     <a:lnL>
                       <a:noFill/>
                     </a:lnL>
@@ -4908,7 +4908,7 @@
                       </a:r>
                     </a:p>
                   </a:txBody>
-                  <a:tcPr marL="81005" marR="6750" marT="6750" marB="0" anchor="ctr">
+                  <a:tcPr marL="81005" marR="6750" marT="6750" marB="6750" anchor="ctr">
                     <a:lnL>
                       <a:noFill/>
                     </a:lnL>
@@ -4966,7 +4966,7 @@
                       </a:r>
                     </a:p>
                   </a:txBody>
-                  <a:tcPr marL="81005" marR="6750" marT="6750" marB="0" anchor="ctr">
+                  <a:tcPr marL="81005" marR="6750" marT="6750" marB="6750" anchor="ctr">
                     <a:lnL>
                       <a:noFill/>
                     </a:lnL>
@@ -5020,7 +5020,7 @@
                       </a:r>
                     </a:p>
                   </a:txBody>
-                  <a:tcPr marL="81005" marR="6750" marT="6750" marB="0" anchor="ctr">
+                  <a:tcPr marL="81005" marR="6750" marT="6750" marB="6750" anchor="ctr">
                     <a:lnL>
                       <a:noFill/>
                     </a:lnL>
@@ -5076,7 +5076,7 @@
                       </a:r>
                     </a:p>
                   </a:txBody>
-                  <a:tcPr marL="81005" marR="6750" marT="6750" marB="0" anchor="ctr">
+                  <a:tcPr marL="81005" marR="6750" marT="6750" marB="6750" anchor="ctr">
                     <a:lnL>
                       <a:noFill/>
                     </a:lnL>
@@ -5134,7 +5134,7 @@
                       </a:r>
                     </a:p>
                   </a:txBody>
-                  <a:tcPr marL="81005" marR="6750" marT="6750" marB="0" anchor="ctr">
+                  <a:tcPr marL="81005" marR="6750" marT="6750" marB="6750" anchor="ctr">
                     <a:lnL>
                       <a:noFill/>
                     </a:lnL>
@@ -5188,7 +5188,7 @@
                       </a:r>
                     </a:p>
                   </a:txBody>
-                  <a:tcPr marL="81005" marR="6750" marT="6750" marB="0" anchor="ctr">
+                  <a:tcPr marL="81005" marR="6750" marT="6750" marB="6750" anchor="ctr">
                     <a:lnL>
                       <a:noFill/>
                     </a:lnL>
@@ -5244,7 +5244,7 @@
                       </a:r>
                     </a:p>
                   </a:txBody>
-                  <a:tcPr marL="81005" marR="6750" marT="6750" marB="0" anchor="ctr">
+                  <a:tcPr marL="81005" marR="6750" marT="6750" marB="6750" anchor="ctr">
                     <a:lnL>
                       <a:noFill/>
                     </a:lnL>
@@ -5302,7 +5302,7 @@
                       </a:r>
                     </a:p>
                   </a:txBody>
-                  <a:tcPr marL="81005" marR="6750" marT="6750" marB="0" anchor="ctr">
+                  <a:tcPr marL="81005" marR="6750" marT="6750" marB="6750" anchor="ctr">
                     <a:lnL>
                       <a:noFill/>
                     </a:lnL>
@@ -5356,7 +5356,7 @@
                       </a:r>
                     </a:p>
                   </a:txBody>
-                  <a:tcPr marL="81005" marR="6750" marT="6750" marB="0" anchor="ctr">
+                  <a:tcPr marL="81005" marR="6750" marT="6750" marB="6750" anchor="ctr">
                     <a:lnL>
                       <a:noFill/>
                     </a:lnL>
@@ -5412,7 +5412,7 @@
                       </a:r>
                     </a:p>
                   </a:txBody>
-                  <a:tcPr marL="81005" marR="6750" marT="6750" marB="0" anchor="ctr">
+                  <a:tcPr marL="81005" marR="6750" marT="6750" marB="6750" anchor="ctr">
                     <a:lnL>
                       <a:noFill/>
                     </a:lnL>
@@ -5970,7 +5970,7 @@
                       </a:r>
                     </a:p>
                   </a:txBody>
-                  <a:tcPr marL="6750" marR="6750" marT="6750" marB="0" anchor="ctr">
+                  <a:tcPr marL="6750" marR="6750" marT="6750" marB="6750" anchor="ctr">
                     <a:lnL>
                       <a:noFill/>
                     </a:lnL>
@@ -6032,7 +6032,7 @@
                       </a:r>
                     </a:p>
                   </a:txBody>
-                  <a:tcPr marL="6750" marR="6750" marT="6750" marB="0" anchor="ctr">
+                  <a:tcPr marL="6750" marR="6750" marT="6750" marB="6750" anchor="ctr">
                     <a:lnL w="9525" cap="flat" cmpd="sng" algn="ctr">
                       <a:solidFill>
                         <a:schemeClr val="bg1">
@@ -6102,7 +6102,7 @@
                       </a:r>
                     </a:p>
                   </a:txBody>
-                  <a:tcPr marL="6750" marR="6750" marT="6750" marB="0" anchor="ctr">
+                  <a:tcPr marL="6750" marR="6750" marT="6750" marB="6750" anchor="ctr">
                     <a:lnL w="9525" cap="flat" cmpd="sng" algn="ctr">
                       <a:solidFill>
                         <a:schemeClr val="bg1">
@@ -6172,7 +6172,7 @@
                       </a:r>
                     </a:p>
                   </a:txBody>
-                  <a:tcPr marL="6750" marR="6750" marT="6750" marB="0" anchor="ctr">
+                  <a:tcPr marL="6750" marR="6750" marT="6750" marB="6750" anchor="ctr">
                     <a:lnL w="9525" cap="flat" cmpd="sng" algn="ctr">
                       <a:solidFill>
                         <a:schemeClr val="bg1">
@@ -6244,7 +6244,7 @@
                       </a:r>
                     </a:p>
                   </a:txBody>
-                  <a:tcPr marL="81005" marR="6750" marT="6750" marB="0" anchor="ctr">
+                  <a:tcPr marL="81005" marR="6750" marT="6750" marB="6750" anchor="ctr">
                     <a:lnL>
                       <a:noFill/>
                     </a:lnL>
@@ -6298,7 +6298,7 @@
                       </a:r>
                     </a:p>
                   </a:txBody>
-                  <a:tcPr marL="81005" marR="6750" marT="6750" marB="0" anchor="ctr">
+                  <a:tcPr marL="81005" marR="6750" marT="6750" marB="6750" anchor="ctr">
                     <a:lnL>
                       <a:noFill/>
                     </a:lnL>
@@ -6354,7 +6354,7 @@
                       </a:r>
                     </a:p>
                   </a:txBody>
-                  <a:tcPr marL="81005" marR="6750" marT="6750" marB="0" anchor="ctr">
+                  <a:tcPr marL="81005" marR="6750" marT="6750" marB="6750" anchor="ctr">
                     <a:lnL>
                       <a:noFill/>
                     </a:lnL>
@@ -6410,7 +6410,7 @@
                       </a:r>
                     </a:p>
                   </a:txBody>
-                  <a:tcPr marL="81005" marR="6750" marT="6750" marB="0" anchor="ctr">
+                  <a:tcPr marL="81005" marR="6750" marT="6750" marB="6750" anchor="ctr">
                     <a:lnL>
                       <a:noFill/>
                     </a:lnL>
@@ -6468,7 +6468,7 @@
                       </a:r>
                     </a:p>
                   </a:txBody>
-                  <a:tcPr marL="81005" marR="6750" marT="6750" marB="0" anchor="ctr">
+                  <a:tcPr marL="81005" marR="6750" marT="6750" marB="6750" anchor="ctr">
                     <a:lnL>
                       <a:noFill/>
                     </a:lnL>
@@ -6522,7 +6522,7 @@
                       </a:r>
                     </a:p>
                   </a:txBody>
-                  <a:tcPr marL="81005" marR="6750" marT="6750" marB="0" anchor="ctr">
+                  <a:tcPr marL="81005" marR="6750" marT="6750" marB="6750" anchor="ctr">
                     <a:lnL>
                       <a:noFill/>
                     </a:lnL>
@@ -6578,7 +6578,7 @@
                       </a:r>
                     </a:p>
                   </a:txBody>
-                  <a:tcPr marL="81005" marR="6750" marT="6750" marB="0" anchor="ctr">
+                  <a:tcPr marL="81005" marR="6750" marT="6750" marB="6750" anchor="ctr">
                     <a:lnL>
                       <a:noFill/>
                     </a:lnL>
@@ -6634,7 +6634,7 @@
                       </a:r>
                     </a:p>
                   </a:txBody>
-                  <a:tcPr marL="81005" marR="6750" marT="6750" marB="0" anchor="ctr">
+                  <a:tcPr marL="81005" marR="6750" marT="6750" marB="6750" anchor="ctr">
                     <a:lnL>
                       <a:noFill/>
                     </a:lnL>
@@ -6692,7 +6692,7 @@
                       </a:r>
                     </a:p>
                   </a:txBody>
-                  <a:tcPr marL="81005" marR="6750" marT="6750" marB="0" anchor="ctr">
+                  <a:tcPr marL="81005" marR="6750" marT="6750" marB="6750" anchor="ctr">
                     <a:lnL>
                       <a:noFill/>
                     </a:lnL>
@@ -6746,7 +6746,7 @@
                       </a:r>
                     </a:p>
                   </a:txBody>
-                  <a:tcPr marL="81005" marR="6750" marT="6750" marB="0" anchor="ctr">
+                  <a:tcPr marL="81005" marR="6750" marT="6750" marB="6750" anchor="ctr">
                     <a:lnL>
                       <a:noFill/>
                     </a:lnL>
@@ -6802,7 +6802,7 @@
                       </a:r>
                     </a:p>
                   </a:txBody>
-                  <a:tcPr marL="81005" marR="6750" marT="6750" marB="0" anchor="ctr">
+                  <a:tcPr marL="81005" marR="6750" marT="6750" marB="6750" anchor="ctr">
                     <a:lnL>
                       <a:noFill/>
                     </a:lnL>
@@ -6858,7 +6858,7 @@
                       </a:r>
                     </a:p>
                   </a:txBody>
-                  <a:tcPr marL="81005" marR="6750" marT="6750" marB="0" anchor="ctr">
+                  <a:tcPr marL="81005" marR="6750" marT="6750" marB="6750" anchor="ctr">
                     <a:lnL>
                       <a:noFill/>
                     </a:lnL>
@@ -6916,7 +6916,7 @@
                       </a:r>
                     </a:p>
                   </a:txBody>
-                  <a:tcPr marL="81005" marR="6750" marT="6750" marB="0" anchor="ctr">
+                  <a:tcPr marL="81005" marR="6750" marT="6750" marB="6750" anchor="ctr">
                     <a:lnL>
                       <a:noFill/>
                     </a:lnL>
@@ -6970,7 +6970,7 @@
                       </a:r>
                     </a:p>
                   </a:txBody>
-                  <a:tcPr marL="81005" marR="6750" marT="6750" marB="0" anchor="ctr">
+                  <a:tcPr marL="81005" marR="6750" marT="6750" marB="6750" anchor="ctr">
                     <a:lnL>
                       <a:noFill/>
                     </a:lnL>
@@ -7026,7 +7026,7 @@
                       </a:r>
                     </a:p>
                   </a:txBody>
-                  <a:tcPr marL="81005" marR="6750" marT="6750" marB="0" anchor="ctr">
+                  <a:tcPr marL="81005" marR="6750" marT="6750" marB="6750" anchor="ctr">
                     <a:lnL>
                       <a:noFill/>
                     </a:lnL>
@@ -7082,7 +7082,7 @@
                       </a:r>
                     </a:p>
                   </a:txBody>
-                  <a:tcPr marL="81005" marR="6750" marT="6750" marB="0" anchor="ctr">
+                  <a:tcPr marL="81005" marR="6750" marT="6750" marB="6750" anchor="ctr">
                     <a:lnL>
                       <a:noFill/>
                     </a:lnL>
@@ -7290,7 +7290,7 @@
                 <a:latin typeface="맑은 고딕"/>
                 <a:ea typeface="맑은 고딕"/>
               </a:rPr>
-              <a:t>같은 주문의 네 가지 대표 예</a:t>
+              <a:t>같은 주문의 4가지 대표 예</a:t>
             </a:r>
           </a:p>
         </p:txBody>
@@ -8614,7 +8614,7 @@
                 <a:latin typeface="맑은 고딕"/>
                 <a:ea typeface="맑은 고딕"/>
               </a:rPr>
-              <a:t>설계에서도 쓸 수 있다.</a:t>
+              <a:t>설계에서도 사용할 수 있다.</a:t>
             </a:r>
             <a:r>
               <a:rPr sz="1800" b="0">
@@ -9791,7 +9791,7 @@
                       </a:r>
                     </a:p>
                   </a:txBody>
-                  <a:tcPr marL="6750" marR="6750" marT="6750" marB="0" anchor="ctr">
+                  <a:tcPr marL="6750" marR="6750" marT="6750" marB="6750" anchor="ctr">
                     <a:lnL>
                       <a:noFill/>
                     </a:lnL>
@@ -9853,7 +9853,7 @@
                       </a:r>
                     </a:p>
                   </a:txBody>
-                  <a:tcPr marL="6750" marR="6750" marT="6750" marB="0" anchor="ctr">
+                  <a:tcPr marL="6750" marR="6750" marT="6750" marB="6750" anchor="ctr">
                     <a:lnL w="9525" cap="flat" cmpd="sng" algn="ctr">
                       <a:solidFill>
                         <a:schemeClr val="bg1">
@@ -9923,7 +9923,7 @@
                       </a:r>
                     </a:p>
                   </a:txBody>
-                  <a:tcPr marL="6750" marR="6750" marT="6750" marB="0" anchor="ctr">
+                  <a:tcPr marL="6750" marR="6750" marT="6750" marB="6750" anchor="ctr">
                     <a:lnL w="9525" cap="flat" cmpd="sng" algn="ctr">
                       <a:solidFill>
                         <a:schemeClr val="bg1">
@@ -9995,7 +9995,7 @@
                       </a:r>
                     </a:p>
                   </a:txBody>
-                  <a:tcPr marL="81005" marR="6750" marT="6750" marB="0" anchor="ctr">
+                  <a:tcPr marL="81005" marR="6750" marT="6750" marB="6750" anchor="ctr">
                     <a:lnL>
                       <a:noFill/>
                     </a:lnL>
@@ -10049,7 +10049,7 @@
                       </a:r>
                     </a:p>
                   </a:txBody>
-                  <a:tcPr marL="81005" marR="6750" marT="6750" marB="0" anchor="ctr">
+                  <a:tcPr marL="81005" marR="6750" marT="6750" marB="6750" anchor="ctr">
                     <a:lnL>
                       <a:noFill/>
                     </a:lnL>
@@ -10105,7 +10105,7 @@
                       </a:r>
                     </a:p>
                   </a:txBody>
-                  <a:tcPr marL="81005" marR="6750" marT="6750" marB="0" anchor="ctr">
+                  <a:tcPr marL="81005" marR="6750" marT="6750" marB="6750" anchor="ctr">
                     <a:lnL>
                       <a:noFill/>
                     </a:lnL>
@@ -10163,7 +10163,7 @@
                       </a:r>
                     </a:p>
                   </a:txBody>
-                  <a:tcPr marL="81005" marR="6750" marT="6750" marB="0" anchor="ctr">
+                  <a:tcPr marL="81005" marR="6750" marT="6750" marB="6750" anchor="ctr">
                     <a:lnL>
                       <a:noFill/>
                     </a:lnL>
@@ -10217,7 +10217,7 @@
                       </a:r>
                     </a:p>
                   </a:txBody>
-                  <a:tcPr marL="81005" marR="6750" marT="6750" marB="0" anchor="ctr">
+                  <a:tcPr marL="81005" marR="6750" marT="6750" marB="6750" anchor="ctr">
                     <a:lnL>
                       <a:noFill/>
                     </a:lnL>
@@ -10273,7 +10273,7 @@
                       </a:r>
                     </a:p>
                   </a:txBody>
-                  <a:tcPr marL="81005" marR="6750" marT="6750" marB="0" anchor="ctr">
+                  <a:tcPr marL="81005" marR="6750" marT="6750" marB="6750" anchor="ctr">
                     <a:lnL>
                       <a:noFill/>
                     </a:lnL>
@@ -10331,7 +10331,7 @@
                       </a:r>
                     </a:p>
                   </a:txBody>
-                  <a:tcPr marL="81005" marR="6750" marT="6750" marB="0" anchor="ctr">
+                  <a:tcPr marL="81005" marR="6750" marT="6750" marB="6750" anchor="ctr">
                     <a:lnL>
                       <a:noFill/>
                     </a:lnL>
@@ -10381,11 +10381,11 @@
                           <a:ea typeface="맑은 고딕" panose="020B0503020000020004" pitchFamily="34" charset="-127"/>
                           <a:cs typeface="맑은 고딕"/>
                         </a:rPr>
-                        <a:t>승인 요청 활동에서 쓴다</a:t>
+                        <a:t>승인 요청 활동에서 사용한다</a:t>
                       </a:r>
                     </a:p>
                   </a:txBody>
-                  <a:tcPr marL="81005" marR="6750" marT="6750" marB="0" anchor="ctr">
+                  <a:tcPr marL="81005" marR="6750" marT="6750" marB="6750" anchor="ctr">
                     <a:lnL>
                       <a:noFill/>
                     </a:lnL>
@@ -10441,7 +10441,7 @@
                       </a:r>
                     </a:p>
                   </a:txBody>
-                  <a:tcPr marL="81005" marR="6750" marT="6750" marB="0" anchor="ctr">
+                  <a:tcPr marL="81005" marR="6750" marT="6750" marB="6750" anchor="ctr">
                     <a:lnL>
                       <a:noFill/>
                     </a:lnL>
@@ -10499,7 +10499,7 @@
                       </a:r>
                     </a:p>
                   </a:txBody>
-                  <a:tcPr marL="81005" marR="6750" marT="6750" marB="0" anchor="ctr">
+                  <a:tcPr marL="81005" marR="6750" marT="6750" marB="6750" anchor="ctr">
                     <a:lnL>
                       <a:noFill/>
                     </a:lnL>
@@ -10553,7 +10553,7 @@
                       </a:r>
                     </a:p>
                   </a:txBody>
-                  <a:tcPr marL="81005" marR="6750" marT="6750" marB="0" anchor="ctr">
+                  <a:tcPr marL="81005" marR="6750" marT="6750" marB="6750" anchor="ctr">
                     <a:lnL>
                       <a:noFill/>
                     </a:lnL>
@@ -10609,7 +10609,7 @@
                       </a:r>
                     </a:p>
                   </a:txBody>
-                  <a:tcPr marL="81005" marR="6750" marT="6750" marB="0" anchor="ctr">
+                  <a:tcPr marL="81005" marR="6750" marT="6750" marB="6750" anchor="ctr">
                     <a:lnL>
                       <a:noFill/>
                     </a:lnL>
@@ -11154,7 +11154,7 @@
                       </a:r>
                     </a:p>
                   </a:txBody>
-                  <a:tcPr marL="6750" marR="6750" marT="6750" marB="0" anchor="ctr">
+                  <a:tcPr marL="6750" marR="6750" marT="6750" marB="6750" anchor="ctr">
                     <a:lnL>
                       <a:noFill/>
                     </a:lnL>
@@ -11216,7 +11216,7 @@
                       </a:r>
                     </a:p>
                   </a:txBody>
-                  <a:tcPr marL="6750" marR="6750" marT="6750" marB="0" anchor="ctr">
+                  <a:tcPr marL="6750" marR="6750" marT="6750" marB="6750" anchor="ctr">
                     <a:lnL w="9525" cap="flat" cmpd="sng" algn="ctr">
                       <a:solidFill>
                         <a:schemeClr val="bg1">
@@ -11286,7 +11286,7 @@
                       </a:r>
                     </a:p>
                   </a:txBody>
-                  <a:tcPr marL="6750" marR="6750" marT="6750" marB="0" anchor="ctr">
+                  <a:tcPr marL="6750" marR="6750" marT="6750" marB="6750" anchor="ctr">
                     <a:lnL w="9525" cap="flat" cmpd="sng" algn="ctr">
                       <a:solidFill>
                         <a:schemeClr val="bg1">
@@ -11358,7 +11358,7 @@
                       </a:r>
                     </a:p>
                   </a:txBody>
-                  <a:tcPr marL="81005" marR="6750" marT="6750" marB="0" anchor="ctr">
+                  <a:tcPr marL="81005" marR="6750" marT="6750" marB="6750" anchor="ctr">
                     <a:lnL>
                       <a:noFill/>
                     </a:lnL>
@@ -11412,7 +11412,7 @@
                       </a:r>
                     </a:p>
                   </a:txBody>
-                  <a:tcPr marL="81005" marR="6750" marT="6750" marB="0" anchor="ctr">
+                  <a:tcPr marL="81005" marR="6750" marT="6750" marB="6750" anchor="ctr">
                     <a:lnL>
                       <a:noFill/>
                     </a:lnL>
@@ -11468,7 +11468,7 @@
                       </a:r>
                     </a:p>
                   </a:txBody>
-                  <a:tcPr marL="81005" marR="6750" marT="6750" marB="0" anchor="ctr">
+                  <a:tcPr marL="81005" marR="6750" marT="6750" marB="6750" anchor="ctr">
                     <a:lnL>
                       <a:noFill/>
                     </a:lnL>
@@ -11526,7 +11526,7 @@
                       </a:r>
                     </a:p>
                   </a:txBody>
-                  <a:tcPr marL="81005" marR="6750" marT="6750" marB="0" anchor="ctr">
+                  <a:tcPr marL="81005" marR="6750" marT="6750" marB="6750" anchor="ctr">
                     <a:lnL>
                       <a:noFill/>
                     </a:lnL>
@@ -11580,7 +11580,7 @@
                       </a:r>
                     </a:p>
                   </a:txBody>
-                  <a:tcPr marL="81005" marR="6750" marT="6750" marB="0" anchor="ctr">
+                  <a:tcPr marL="81005" marR="6750" marT="6750" marB="6750" anchor="ctr">
                     <a:lnL>
                       <a:noFill/>
                     </a:lnL>
@@ -11636,7 +11636,7 @@
                       </a:r>
                     </a:p>
                   </a:txBody>
-                  <a:tcPr marL="81005" marR="6750" marT="6750" marB="0" anchor="ctr">
+                  <a:tcPr marL="81005" marR="6750" marT="6750" marB="6750" anchor="ctr">
                     <a:lnL>
                       <a:noFill/>
                     </a:lnL>
@@ -11694,7 +11694,7 @@
                       </a:r>
                     </a:p>
                   </a:txBody>
-                  <a:tcPr marL="81005" marR="6750" marT="6750" marB="0" anchor="ctr">
+                  <a:tcPr marL="81005" marR="6750" marT="6750" marB="6750" anchor="ctr">
                     <a:lnL>
                       <a:noFill/>
                     </a:lnL>
@@ -11748,7 +11748,7 @@
                       </a:r>
                     </a:p>
                   </a:txBody>
-                  <a:tcPr marL="81005" marR="6750" marT="6750" marB="0" anchor="ctr">
+                  <a:tcPr marL="81005" marR="6750" marT="6750" marB="6750" anchor="ctr">
                     <a:lnL>
                       <a:noFill/>
                     </a:lnL>
@@ -11804,7 +11804,7 @@
                       </a:r>
                     </a:p>
                   </a:txBody>
-                  <a:tcPr marL="81005" marR="6750" marT="6750" marB="0" anchor="ctr">
+                  <a:tcPr marL="81005" marR="6750" marT="6750" marB="6750" anchor="ctr">
                     <a:lnL>
                       <a:noFill/>
                     </a:lnL>
@@ -15537,7 +15537,7 @@
                       </a:r>
                     </a:p>
                   </a:txBody>
-                  <a:tcPr marL="6750" marR="6750" marT="6750" marB="0" anchor="ctr">
+                  <a:tcPr marL="6750" marR="6750" marT="6750" marB="6750" anchor="ctr">
                     <a:lnL>
                       <a:noFill/>
                     </a:lnL>
@@ -15599,7 +15599,7 @@
                       </a:r>
                     </a:p>
                   </a:txBody>
-                  <a:tcPr marL="6750" marR="6750" marT="6750" marB="0" anchor="ctr">
+                  <a:tcPr marL="6750" marR="6750" marT="6750" marB="6750" anchor="ctr">
                     <a:lnL w="9525" cap="flat" cmpd="sng" algn="ctr">
                       <a:solidFill>
                         <a:schemeClr val="bg1">
@@ -15671,7 +15671,7 @@
                       </a:r>
                     </a:p>
                   </a:txBody>
-                  <a:tcPr marL="81005" marR="6750" marT="6750" marB="0" anchor="ctr">
+                  <a:tcPr marL="81005" marR="6750" marT="6750" marB="6750" anchor="ctr">
                     <a:lnL>
                       <a:noFill/>
                     </a:lnL>
@@ -15725,7 +15725,7 @@
                       </a:r>
                     </a:p>
                   </a:txBody>
-                  <a:tcPr marL="81005" marR="6750" marT="6750" marB="0" anchor="ctr">
+                  <a:tcPr marL="81005" marR="6750" marT="6750" marB="6750" anchor="ctr">
                     <a:lnL>
                       <a:noFill/>
                     </a:lnL>
@@ -15783,7 +15783,7 @@
                       </a:r>
                     </a:p>
                   </a:txBody>
-                  <a:tcPr marL="81005" marR="6750" marT="6750" marB="0" anchor="ctr">
+                  <a:tcPr marL="81005" marR="6750" marT="6750" marB="6750" anchor="ctr">
                     <a:lnL>
                       <a:noFill/>
                     </a:lnL>
@@ -15837,7 +15837,7 @@
                       </a:r>
                     </a:p>
                   </a:txBody>
-                  <a:tcPr marL="81005" marR="6750" marT="6750" marB="0" anchor="ctr">
+                  <a:tcPr marL="81005" marR="6750" marT="6750" marB="6750" anchor="ctr">
                     <a:lnL>
                       <a:noFill/>
                     </a:lnL>
@@ -15895,7 +15895,7 @@
                       </a:r>
                     </a:p>
                   </a:txBody>
-                  <a:tcPr marL="81005" marR="6750" marT="6750" marB="0" anchor="ctr">
+                  <a:tcPr marL="81005" marR="6750" marT="6750" marB="6750" anchor="ctr">
                     <a:lnL>
                       <a:noFill/>
                     </a:lnL>
@@ -15949,7 +15949,7 @@
                       </a:r>
                     </a:p>
                   </a:txBody>
-                  <a:tcPr marL="81005" marR="6750" marT="6750" marB="0" anchor="ctr">
+                  <a:tcPr marL="81005" marR="6750" marT="6750" marB="6750" anchor="ctr">
                     <a:lnL>
                       <a:noFill/>
                     </a:lnL>
@@ -16007,7 +16007,7 @@
                       </a:r>
                     </a:p>
                   </a:txBody>
-                  <a:tcPr marL="81005" marR="6750" marT="6750" marB="0" anchor="ctr">
+                  <a:tcPr marL="81005" marR="6750" marT="6750" marB="6750" anchor="ctr">
                     <a:lnL>
                       <a:noFill/>
                     </a:lnL>
@@ -16061,7 +16061,7 @@
                       </a:r>
                     </a:p>
                   </a:txBody>
-                  <a:tcPr marL="81005" marR="6750" marT="6750" marB="0" anchor="ctr">
+                  <a:tcPr marL="81005" marR="6750" marT="6750" marB="6750" anchor="ctr">
                     <a:lnL>
                       <a:noFill/>
                     </a:lnL>
@@ -16119,7 +16119,7 @@
                       </a:r>
                     </a:p>
                   </a:txBody>
-                  <a:tcPr marL="81005" marR="6750" marT="6750" marB="0" anchor="ctr">
+                  <a:tcPr marL="81005" marR="6750" marT="6750" marB="6750" anchor="ctr">
                     <a:lnL>
                       <a:noFill/>
                     </a:lnL>
@@ -16173,7 +16173,7 @@
                       </a:r>
                     </a:p>
                   </a:txBody>
-                  <a:tcPr marL="81005" marR="6750" marT="6750" marB="0" anchor="ctr">
+                  <a:tcPr marL="81005" marR="6750" marT="6750" marB="6750" anchor="ctr">
                     <a:lnL>
                       <a:noFill/>
                     </a:lnL>
@@ -16231,7 +16231,7 @@
                       </a:r>
                     </a:p>
                   </a:txBody>
-                  <a:tcPr marL="81005" marR="6750" marT="6750" marB="0" anchor="ctr">
+                  <a:tcPr marL="81005" marR="6750" marT="6750" marB="6750" anchor="ctr">
                     <a:lnL>
                       <a:noFill/>
                     </a:lnL>
@@ -16285,7 +16285,7 @@
                       </a:r>
                     </a:p>
                   </a:txBody>
-                  <a:tcPr marL="81005" marR="6750" marT="6750" marB="0" anchor="ctr">
+                  <a:tcPr marL="81005" marR="6750" marT="6750" marB="6750" anchor="ctr">
                     <a:lnL>
                       <a:noFill/>
                     </a:lnL>
@@ -17223,7 +17223,7 @@
                       </a:r>
                     </a:p>
                   </a:txBody>
-                  <a:tcPr marL="6750" marR="6750" marT="6750" marB="0" anchor="ctr">
+                  <a:tcPr marL="6750" marR="6750" marT="6750" marB="6750" anchor="ctr">
                     <a:lnL>
                       <a:noFill/>
                     </a:lnL>
@@ -17285,7 +17285,7 @@
                       </a:r>
                     </a:p>
                   </a:txBody>
-                  <a:tcPr marL="6750" marR="6750" marT="6750" marB="0" anchor="ctr">
+                  <a:tcPr marL="6750" marR="6750" marT="6750" marB="6750" anchor="ctr">
                     <a:lnL w="9525" cap="flat" cmpd="sng" algn="ctr">
                       <a:solidFill>
                         <a:schemeClr val="bg1">
@@ -17357,7 +17357,7 @@
                       </a:r>
                     </a:p>
                   </a:txBody>
-                  <a:tcPr marL="81005" marR="6750" marT="6750" marB="0" anchor="ctr">
+                  <a:tcPr marL="81005" marR="6750" marT="6750" marB="6750" anchor="ctr">
                     <a:lnL>
                       <a:noFill/>
                     </a:lnL>
@@ -17411,7 +17411,7 @@
                       </a:r>
                     </a:p>
                   </a:txBody>
-                  <a:tcPr marL="81005" marR="6750" marT="6750" marB="0" anchor="ctr">
+                  <a:tcPr marL="81005" marR="6750" marT="6750" marB="6750" anchor="ctr">
                     <a:lnL>
                       <a:noFill/>
                     </a:lnL>
@@ -17469,7 +17469,7 @@
                       </a:r>
                     </a:p>
                   </a:txBody>
-                  <a:tcPr marL="81005" marR="6750" marT="6750" marB="0" anchor="ctr">
+                  <a:tcPr marL="81005" marR="6750" marT="6750" marB="6750" anchor="ctr">
                     <a:lnL>
                       <a:noFill/>
                     </a:lnL>
@@ -17523,7 +17523,7 @@
                       </a:r>
                     </a:p>
                   </a:txBody>
-                  <a:tcPr marL="81005" marR="6750" marT="6750" marB="0" anchor="ctr">
+                  <a:tcPr marL="81005" marR="6750" marT="6750" marB="6750" anchor="ctr">
                     <a:lnL>
                       <a:noFill/>
                     </a:lnL>
@@ -17581,7 +17581,7 @@
                       </a:r>
                     </a:p>
                   </a:txBody>
-                  <a:tcPr marL="81005" marR="6750" marT="6750" marB="0" anchor="ctr">
+                  <a:tcPr marL="81005" marR="6750" marT="6750" marB="6750" anchor="ctr">
                     <a:lnL>
                       <a:noFill/>
                     </a:lnL>
@@ -17635,7 +17635,7 @@
                       </a:r>
                     </a:p>
                   </a:txBody>
-                  <a:tcPr marL="81005" marR="6750" marT="6750" marB="0" anchor="ctr">
+                  <a:tcPr marL="81005" marR="6750" marT="6750" marB="6750" anchor="ctr">
                     <a:lnL>
                       <a:noFill/>
                     </a:lnL>
@@ -17693,7 +17693,7 @@
                       </a:r>
                     </a:p>
                   </a:txBody>
-                  <a:tcPr marL="81005" marR="6750" marT="6750" marB="0" anchor="ctr">
+                  <a:tcPr marL="81005" marR="6750" marT="6750" marB="6750" anchor="ctr">
                     <a:lnL>
                       <a:noFill/>
                     </a:lnL>
@@ -17747,7 +17747,7 @@
                       </a:r>
                     </a:p>
                   </a:txBody>
-                  <a:tcPr marL="81005" marR="6750" marT="6750" marB="0" anchor="ctr">
+                  <a:tcPr marL="81005" marR="6750" marT="6750" marB="6750" anchor="ctr">
                     <a:lnL>
                       <a:noFill/>
                     </a:lnL>
@@ -17805,7 +17805,7 @@
                       </a:r>
                     </a:p>
                   </a:txBody>
-                  <a:tcPr marL="81005" marR="6750" marT="6750" marB="0" anchor="ctr">
+                  <a:tcPr marL="81005" marR="6750" marT="6750" marB="6750" anchor="ctr">
                     <a:lnL>
                       <a:noFill/>
                     </a:lnL>
@@ -17859,7 +17859,7 @@
                       </a:r>
                     </a:p>
                   </a:txBody>
-                  <a:tcPr marL="81005" marR="6750" marT="6750" marB="0" anchor="ctr">
+                  <a:tcPr marL="81005" marR="6750" marT="6750" marB="6750" anchor="ctr">
                     <a:lnL>
                       <a:noFill/>
                     </a:lnL>
@@ -17917,7 +17917,7 @@
                       </a:r>
                     </a:p>
                   </a:txBody>
-                  <a:tcPr marL="81005" marR="6750" marT="6750" marB="0" anchor="ctr">
+                  <a:tcPr marL="81005" marR="6750" marT="6750" marB="6750" anchor="ctr">
                     <a:lnL>
                       <a:noFill/>
                     </a:lnL>
@@ -17971,7 +17971,7 @@
                       </a:r>
                     </a:p>
                   </a:txBody>
-                  <a:tcPr marL="81005" marR="6750" marT="6750" marB="0" anchor="ctr">
+                  <a:tcPr marL="81005" marR="6750" marT="6750" marB="6750" anchor="ctr">
                     <a:lnL>
                       <a:noFill/>
                     </a:lnL>
@@ -19977,7 +19977,7 @@
                 <a:latin typeface="맑은 고딕"/>
                 <a:ea typeface="맑은 고딕"/>
               </a:rPr>
-              <a:t>대표 예는 모두 같은 주문 A를 쓴다. 주문 A는 펜 2개, 확정 단가 1,000원, 총액 2,000원, 배송지 서울이다. "주문 A"는 예를 들기 위해 붙인 이름이며, 주문 번호 형식은 정하지 않는다.</a:t>
+              <a:t>대표 예는 모두 같은 주문 A를 사용한다. 주문 A는 펜 2개, 확정 단가 1,000원, 총액 2,000원, 배송지 서울이다. "주문 A"는 예를 들기 위해 붙인 이름이며, 주문 번호 형식은 정하지 않는다.</a:t>
             </a:r>
           </a:p>
           <a:p>
@@ -20296,7 +20296,7 @@
                       </a:r>
                     </a:p>
                   </a:txBody>
-                  <a:tcPr marL="6750" marR="6750" marT="6750" marB="0" anchor="ctr">
+                  <a:tcPr marL="6750" marR="6750" marT="6750" marB="6750" anchor="ctr">
                     <a:lnL>
                       <a:noFill/>
                     </a:lnL>
@@ -20358,7 +20358,7 @@
                       </a:r>
                     </a:p>
                   </a:txBody>
-                  <a:tcPr marL="6750" marR="6750" marT="6750" marB="0" anchor="ctr">
+                  <a:tcPr marL="6750" marR="6750" marT="6750" marB="6750" anchor="ctr">
                     <a:lnL w="9525" cap="flat" cmpd="sng" algn="ctr">
                       <a:solidFill>
                         <a:schemeClr val="bg1">
@@ -20428,7 +20428,7 @@
                       </a:r>
                     </a:p>
                   </a:txBody>
-                  <a:tcPr marL="6750" marR="6750" marT="6750" marB="0" anchor="ctr">
+                  <a:tcPr marL="6750" marR="6750" marT="6750" marB="6750" anchor="ctr">
                     <a:lnL w="9525" cap="flat" cmpd="sng" algn="ctr">
                       <a:solidFill>
                         <a:schemeClr val="bg1">
@@ -20498,7 +20498,7 @@
                       </a:r>
                     </a:p>
                   </a:txBody>
-                  <a:tcPr marL="6750" marR="6750" marT="6750" marB="0" anchor="ctr">
+                  <a:tcPr marL="6750" marR="6750" marT="6750" marB="6750" anchor="ctr">
                     <a:lnL w="9525" cap="flat" cmpd="sng" algn="ctr">
                       <a:solidFill>
                         <a:schemeClr val="bg1">
@@ -20570,7 +20570,7 @@
                       </a:r>
                     </a:p>
                   </a:txBody>
-                  <a:tcPr marL="81005" marR="6750" marT="6750" marB="0" anchor="ctr">
+                  <a:tcPr marL="81005" marR="6750" marT="6750" marB="6750" anchor="ctr">
                     <a:lnL>
                       <a:noFill/>
                     </a:lnL>
@@ -20624,7 +20624,7 @@
                       </a:r>
                     </a:p>
                   </a:txBody>
-                  <a:tcPr marL="81005" marR="6750" marT="6750" marB="0" anchor="ctr">
+                  <a:tcPr marL="81005" marR="6750" marT="6750" marB="6750" anchor="ctr">
                     <a:lnL>
                       <a:noFill/>
                     </a:lnL>
@@ -20680,7 +20680,7 @@
                       </a:r>
                     </a:p>
                   </a:txBody>
-                  <a:tcPr marL="81005" marR="6750" marT="6750" marB="0" anchor="ctr">
+                  <a:tcPr marL="81005" marR="6750" marT="6750" marB="6750" anchor="ctr">
                     <a:lnL>
                       <a:noFill/>
                     </a:lnL>
@@ -20736,7 +20736,7 @@
                       </a:r>
                     </a:p>
                   </a:txBody>
-                  <a:tcPr marL="81005" marR="6750" marT="6750" marB="0" anchor="ctr">
+                  <a:tcPr marL="81005" marR="6750" marT="6750" marB="6750" anchor="ctr">
                     <a:lnL>
                       <a:noFill/>
                     </a:lnL>
@@ -20794,7 +20794,7 @@
                       </a:r>
                     </a:p>
                   </a:txBody>
-                  <a:tcPr marL="81005" marR="6750" marT="6750" marB="0" anchor="ctr">
+                  <a:tcPr marL="81005" marR="6750" marT="6750" marB="6750" anchor="ctr">
                     <a:lnL>
                       <a:noFill/>
                     </a:lnL>
@@ -20848,7 +20848,7 @@
                       </a:r>
                     </a:p>
                   </a:txBody>
-                  <a:tcPr marL="81005" marR="6750" marT="6750" marB="0" anchor="ctr">
+                  <a:tcPr marL="81005" marR="6750" marT="6750" marB="6750" anchor="ctr">
                     <a:lnL>
                       <a:noFill/>
                     </a:lnL>
@@ -20904,7 +20904,7 @@
                       </a:r>
                     </a:p>
                   </a:txBody>
-                  <a:tcPr marL="81005" marR="6750" marT="6750" marB="0" anchor="ctr">
+                  <a:tcPr marL="81005" marR="6750" marT="6750" marB="6750" anchor="ctr">
                     <a:lnL>
                       <a:noFill/>
                     </a:lnL>
@@ -20960,7 +20960,7 @@
                       </a:r>
                     </a:p>
                   </a:txBody>
-                  <a:tcPr marL="81005" marR="6750" marT="6750" marB="0" anchor="ctr">
+                  <a:tcPr marL="81005" marR="6750" marT="6750" marB="6750" anchor="ctr">
                     <a:lnL>
                       <a:noFill/>
                     </a:lnL>
@@ -21018,7 +21018,7 @@
                       </a:r>
                     </a:p>
                   </a:txBody>
-                  <a:tcPr marL="81005" marR="6750" marT="6750" marB="0" anchor="ctr">
+                  <a:tcPr marL="81005" marR="6750" marT="6750" marB="6750" anchor="ctr">
                     <a:lnL>
                       <a:noFill/>
                     </a:lnL>
@@ -21072,7 +21072,7 @@
                       </a:r>
                     </a:p>
                   </a:txBody>
-                  <a:tcPr marL="81005" marR="6750" marT="6750" marB="0" anchor="ctr">
+                  <a:tcPr marL="81005" marR="6750" marT="6750" marB="6750" anchor="ctr">
                     <a:lnL>
                       <a:noFill/>
                     </a:lnL>
@@ -21128,7 +21128,7 @@
                       </a:r>
                     </a:p>
                   </a:txBody>
-                  <a:tcPr marL="81005" marR="6750" marT="6750" marB="0" anchor="ctr">
+                  <a:tcPr marL="81005" marR="6750" marT="6750" marB="6750" anchor="ctr">
                     <a:lnL>
                       <a:noFill/>
                     </a:lnL>
@@ -21184,7 +21184,7 @@
                       </a:r>
                     </a:p>
                   </a:txBody>
-                  <a:tcPr marL="81005" marR="6750" marT="6750" marB="0" anchor="ctr">
+                  <a:tcPr marL="81005" marR="6750" marT="6750" marB="6750" anchor="ctr">
                     <a:lnL>
                       <a:noFill/>
                     </a:lnL>
@@ -21242,7 +21242,7 @@
                       </a:r>
                     </a:p>
                   </a:txBody>
-                  <a:tcPr marL="81005" marR="6750" marT="6750" marB="0" anchor="ctr">
+                  <a:tcPr marL="81005" marR="6750" marT="6750" marB="6750" anchor="ctr">
                     <a:lnL>
                       <a:noFill/>
                     </a:lnL>
@@ -21296,7 +21296,7 @@
                       </a:r>
                     </a:p>
                   </a:txBody>
-                  <a:tcPr marL="81005" marR="6750" marT="6750" marB="0" anchor="ctr">
+                  <a:tcPr marL="81005" marR="6750" marT="6750" marB="6750" anchor="ctr">
                     <a:lnL>
                       <a:noFill/>
                     </a:lnL>
@@ -21352,7 +21352,7 @@
                       </a:r>
                     </a:p>
                   </a:txBody>
-                  <a:tcPr marL="81005" marR="6750" marT="6750" marB="0" anchor="ctr">
+                  <a:tcPr marL="81005" marR="6750" marT="6750" marB="6750" anchor="ctr">
                     <a:lnL>
                       <a:noFill/>
                     </a:lnL>
@@ -21408,7 +21408,7 @@
                       </a:r>
                     </a:p>
                   </a:txBody>
-                  <a:tcPr marL="81005" marR="6750" marT="6750" marB="0" anchor="ctr">
+                  <a:tcPr marL="81005" marR="6750" marT="6750" marB="6750" anchor="ctr">
                     <a:lnL>
                       <a:noFill/>
                     </a:lnL>
@@ -21466,7 +21466,7 @@
                       </a:r>
                     </a:p>
                   </a:txBody>
-                  <a:tcPr marL="81005" marR="6750" marT="6750" marB="0" anchor="ctr">
+                  <a:tcPr marL="81005" marR="6750" marT="6750" marB="6750" anchor="ctr">
                     <a:lnL>
                       <a:noFill/>
                     </a:lnL>
@@ -21520,7 +21520,7 @@
                       </a:r>
                     </a:p>
                   </a:txBody>
-                  <a:tcPr marL="81005" marR="6750" marT="6750" marB="0" anchor="ctr">
+                  <a:tcPr marL="81005" marR="6750" marT="6750" marB="6750" anchor="ctr">
                     <a:lnL>
                       <a:noFill/>
                     </a:lnL>
@@ -21576,7 +21576,7 @@
                       </a:r>
                     </a:p>
                   </a:txBody>
-                  <a:tcPr marL="81005" marR="6750" marT="6750" marB="0" anchor="ctr">
+                  <a:tcPr marL="81005" marR="6750" marT="6750" marB="6750" anchor="ctr">
                     <a:lnL>
                       <a:noFill/>
                     </a:lnL>
@@ -21632,7 +21632,7 @@
                       </a:r>
                     </a:p>
                   </a:txBody>
-                  <a:tcPr marL="81005" marR="6750" marT="6750" marB="0" anchor="ctr">
+                  <a:tcPr marL="81005" marR="6750" marT="6750" marB="6750" anchor="ctr">
                     <a:lnL>
                       <a:noFill/>
                     </a:lnL>
@@ -22189,7 +22189,7 @@
                       </a:r>
                     </a:p>
                   </a:txBody>
-                  <a:tcPr marL="6750" marR="6750" marT="6750" marB="0" anchor="ctr">
+                  <a:tcPr marL="6750" marR="6750" marT="6750" marB="6750" anchor="ctr">
                     <a:lnL>
                       <a:noFill/>
                     </a:lnL>
@@ -22251,7 +22251,7 @@
                       </a:r>
                     </a:p>
                   </a:txBody>
-                  <a:tcPr marL="6750" marR="6750" marT="6750" marB="0" anchor="ctr">
+                  <a:tcPr marL="6750" marR="6750" marT="6750" marB="6750" anchor="ctr">
                     <a:lnL w="9525" cap="flat" cmpd="sng" algn="ctr">
                       <a:solidFill>
                         <a:schemeClr val="bg1">
@@ -22323,7 +22323,7 @@
                       </a:r>
                     </a:p>
                   </a:txBody>
-                  <a:tcPr marL="81005" marR="6750" marT="6750" marB="0" anchor="ctr">
+                  <a:tcPr marL="81005" marR="6750" marT="6750" marB="6750" anchor="ctr">
                     <a:lnL>
                       <a:noFill/>
                     </a:lnL>
@@ -22377,7 +22377,7 @@
                       </a:r>
                     </a:p>
                   </a:txBody>
-                  <a:tcPr marL="81005" marR="6750" marT="6750" marB="0" anchor="ctr">
+                  <a:tcPr marL="81005" marR="6750" marT="6750" marB="6750" anchor="ctr">
                     <a:lnL>
                       <a:noFill/>
                     </a:lnL>
@@ -22435,7 +22435,7 @@
                       </a:r>
                     </a:p>
                   </a:txBody>
-                  <a:tcPr marL="81005" marR="6750" marT="6750" marB="0" anchor="ctr">
+                  <a:tcPr marL="81005" marR="6750" marT="6750" marB="6750" anchor="ctr">
                     <a:lnL>
                       <a:noFill/>
                     </a:lnL>
@@ -22489,7 +22489,7 @@
                       </a:r>
                     </a:p>
                   </a:txBody>
-                  <a:tcPr marL="81005" marR="6750" marT="6750" marB="0" anchor="ctr">
+                  <a:tcPr marL="81005" marR="6750" marT="6750" marB="6750" anchor="ctr">
                     <a:lnL>
                       <a:noFill/>
                     </a:lnL>
@@ -22547,7 +22547,7 @@
                       </a:r>
                     </a:p>
                   </a:txBody>
-                  <a:tcPr marL="81005" marR="6750" marT="6750" marB="0" anchor="ctr">
+                  <a:tcPr marL="81005" marR="6750" marT="6750" marB="6750" anchor="ctr">
                     <a:lnL>
                       <a:noFill/>
                     </a:lnL>
@@ -22601,7 +22601,7 @@
                       </a:r>
                     </a:p>
                   </a:txBody>
-                  <a:tcPr marL="81005" marR="6750" marT="6750" marB="0" anchor="ctr">
+                  <a:tcPr marL="81005" marR="6750" marT="6750" marB="6750" anchor="ctr">
                     <a:lnL>
                       <a:noFill/>
                     </a:lnL>
@@ -26241,7 +26241,7 @@
                       </a:r>
                     </a:p>
                   </a:txBody>
-                  <a:tcPr marL="6750" marR="6750" marT="6750" marB="0" anchor="ctr">
+                  <a:tcPr marL="6750" marR="6750" marT="6750" marB="6750" anchor="ctr">
                     <a:lnL>
                       <a:noFill/>
                     </a:lnL>
@@ -26303,7 +26303,7 @@
                       </a:r>
                     </a:p>
                   </a:txBody>
-                  <a:tcPr marL="6750" marR="6750" marT="6750" marB="0" anchor="ctr">
+                  <a:tcPr marL="6750" marR="6750" marT="6750" marB="6750" anchor="ctr">
                     <a:lnL w="9525" cap="flat" cmpd="sng" algn="ctr">
                       <a:solidFill>
                         <a:schemeClr val="bg1">
@@ -26373,7 +26373,7 @@
                       </a:r>
                     </a:p>
                   </a:txBody>
-                  <a:tcPr marL="6750" marR="6750" marT="6750" marB="0" anchor="ctr">
+                  <a:tcPr marL="6750" marR="6750" marT="6750" marB="6750" anchor="ctr">
                     <a:lnL w="9525" cap="flat" cmpd="sng" algn="ctr">
                       <a:solidFill>
                         <a:schemeClr val="bg1">
@@ -26445,7 +26445,7 @@
                       </a:r>
                     </a:p>
                   </a:txBody>
-                  <a:tcPr marL="81005" marR="6750" marT="6750" marB="0" anchor="ctr">
+                  <a:tcPr marL="81005" marR="6750" marT="6750" marB="6750" anchor="ctr">
                     <a:lnL>
                       <a:noFill/>
                     </a:lnL>
@@ -26499,7 +26499,7 @@
                       </a:r>
                     </a:p>
                   </a:txBody>
-                  <a:tcPr marL="81005" marR="6750" marT="6750" marB="0" anchor="ctr">
+                  <a:tcPr marL="81005" marR="6750" marT="6750" marB="6750" anchor="ctr">
                     <a:lnL>
                       <a:noFill/>
                     </a:lnL>
@@ -26555,7 +26555,7 @@
                       </a:r>
                     </a:p>
                   </a:txBody>
-                  <a:tcPr marL="81005" marR="6750" marT="6750" marB="0" anchor="ctr">
+                  <a:tcPr marL="81005" marR="6750" marT="6750" marB="6750" anchor="ctr">
                     <a:lnL>
                       <a:noFill/>
                     </a:lnL>
@@ -26613,7 +26613,7 @@
                       </a:r>
                     </a:p>
                   </a:txBody>
-                  <a:tcPr marL="81005" marR="6750" marT="6750" marB="0" anchor="ctr">
+                  <a:tcPr marL="81005" marR="6750" marT="6750" marB="6750" anchor="ctr">
                     <a:lnL>
                       <a:noFill/>
                     </a:lnL>
@@ -26667,7 +26667,7 @@
                       </a:r>
                     </a:p>
                   </a:txBody>
-                  <a:tcPr marL="81005" marR="6750" marT="6750" marB="0" anchor="ctr">
+                  <a:tcPr marL="81005" marR="6750" marT="6750" marB="6750" anchor="ctr">
                     <a:lnL>
                       <a:noFill/>
                     </a:lnL>
@@ -26723,7 +26723,7 @@
                       </a:r>
                     </a:p>
                   </a:txBody>
-                  <a:tcPr marL="81005" marR="6750" marT="6750" marB="0" anchor="ctr">
+                  <a:tcPr marL="81005" marR="6750" marT="6750" marB="6750" anchor="ctr">
                     <a:lnL>
                       <a:noFill/>
                     </a:lnL>
@@ -26781,7 +26781,7 @@
                       </a:r>
                     </a:p>
                   </a:txBody>
-                  <a:tcPr marL="81005" marR="6750" marT="6750" marB="0" anchor="ctr">
+                  <a:tcPr marL="81005" marR="6750" marT="6750" marB="6750" anchor="ctr">
                     <a:lnL>
                       <a:noFill/>
                     </a:lnL>
@@ -26835,7 +26835,7 @@
                       </a:r>
                     </a:p>
                   </a:txBody>
-                  <a:tcPr marL="81005" marR="6750" marT="6750" marB="0" anchor="ctr">
+                  <a:tcPr marL="81005" marR="6750" marT="6750" marB="6750" anchor="ctr">
                     <a:lnL>
                       <a:noFill/>
                     </a:lnL>
@@ -26891,7 +26891,7 @@
                       </a:r>
                     </a:p>
                   </a:txBody>
-                  <a:tcPr marL="81005" marR="6750" marT="6750" marB="0" anchor="ctr">
+                  <a:tcPr marL="81005" marR="6750" marT="6750" marB="6750" anchor="ctr">
                     <a:lnL>
                       <a:noFill/>
                     </a:lnL>
@@ -26949,7 +26949,7 @@
                       </a:r>
                     </a:p>
                   </a:txBody>
-                  <a:tcPr marL="81005" marR="6750" marT="6750" marB="0" anchor="ctr">
+                  <a:tcPr marL="81005" marR="6750" marT="6750" marB="6750" anchor="ctr">
                     <a:lnL>
                       <a:noFill/>
                     </a:lnL>
@@ -27003,7 +27003,7 @@
                       </a:r>
                     </a:p>
                   </a:txBody>
-                  <a:tcPr marL="81005" marR="6750" marT="6750" marB="0" anchor="ctr">
+                  <a:tcPr marL="81005" marR="6750" marT="6750" marB="6750" anchor="ctr">
                     <a:lnL>
                       <a:noFill/>
                     </a:lnL>
@@ -27059,7 +27059,7 @@
                       </a:r>
                     </a:p>
                   </a:txBody>
-                  <a:tcPr marL="81005" marR="6750" marT="6750" marB="0" anchor="ctr">
+                  <a:tcPr marL="81005" marR="6750" marT="6750" marB="6750" anchor="ctr">
                     <a:lnL>
                       <a:noFill/>
                     </a:lnL>
@@ -27117,7 +27117,7 @@
                       </a:r>
                     </a:p>
                   </a:txBody>
-                  <a:tcPr marL="81005" marR="6750" marT="6750" marB="0" anchor="ctr">
+                  <a:tcPr marL="81005" marR="6750" marT="6750" marB="6750" anchor="ctr">
                     <a:lnL>
                       <a:noFill/>
                     </a:lnL>
@@ -27171,7 +27171,7 @@
                       </a:r>
                     </a:p>
                   </a:txBody>
-                  <a:tcPr marL="81005" marR="6750" marT="6750" marB="0" anchor="ctr">
+                  <a:tcPr marL="81005" marR="6750" marT="6750" marB="6750" anchor="ctr">
                     <a:lnL>
                       <a:noFill/>
                     </a:lnL>
@@ -27227,7 +27227,7 @@
                       </a:r>
                     </a:p>
                   </a:txBody>
-                  <a:tcPr marL="81005" marR="6750" marT="6750" marB="0" anchor="ctr">
+                  <a:tcPr marL="81005" marR="6750" marT="6750" marB="6750" anchor="ctr">
                     <a:lnL>
                       <a:noFill/>
                     </a:lnL>
@@ -27783,7 +27783,7 @@
                       </a:r>
                     </a:p>
                   </a:txBody>
-                  <a:tcPr marL="6750" marR="6750" marT="6750" marB="0" anchor="ctr">
+                  <a:tcPr marL="6750" marR="6750" marT="6750" marB="6750" anchor="ctr">
                     <a:lnL>
                       <a:noFill/>
                     </a:lnL>
@@ -27845,7 +27845,7 @@
                       </a:r>
                     </a:p>
                   </a:txBody>
-                  <a:tcPr marL="6750" marR="6750" marT="6750" marB="0" anchor="ctr">
+                  <a:tcPr marL="6750" marR="6750" marT="6750" marB="6750" anchor="ctr">
                     <a:lnL w="9525" cap="flat" cmpd="sng" algn="ctr">
                       <a:solidFill>
                         <a:schemeClr val="bg1">
@@ -27917,7 +27917,7 @@
                       </a:r>
                     </a:p>
                   </a:txBody>
-                  <a:tcPr marL="81005" marR="6750" marT="6750" marB="0" anchor="ctr">
+                  <a:tcPr marL="81005" marR="6750" marT="6750" marB="6750" anchor="ctr">
                     <a:lnL>
                       <a:noFill/>
                     </a:lnL>
@@ -27971,7 +27971,7 @@
                       </a:r>
                     </a:p>
                   </a:txBody>
-                  <a:tcPr marL="81005" marR="6750" marT="6750" marB="0" anchor="ctr">
+                  <a:tcPr marL="81005" marR="6750" marT="6750" marB="6750" anchor="ctr">
                     <a:lnL>
                       <a:noFill/>
                     </a:lnL>
@@ -28029,7 +28029,7 @@
                       </a:r>
                     </a:p>
                   </a:txBody>
-                  <a:tcPr marL="81005" marR="6750" marT="6750" marB="0" anchor="ctr">
+                  <a:tcPr marL="81005" marR="6750" marT="6750" marB="6750" anchor="ctr">
                     <a:lnL>
                       <a:noFill/>
                     </a:lnL>
@@ -28083,7 +28083,7 @@
                       </a:r>
                     </a:p>
                   </a:txBody>
-                  <a:tcPr marL="81005" marR="6750" marT="6750" marB="0" anchor="ctr">
+                  <a:tcPr marL="81005" marR="6750" marT="6750" marB="6750" anchor="ctr">
                     <a:lnL>
                       <a:noFill/>
                     </a:lnL>
@@ -29627,7 +29627,7 @@
                       </a:r>
                     </a:p>
                   </a:txBody>
-                  <a:tcPr marL="6750" marR="6750" marT="6750" marB="0" anchor="ctr">
+                  <a:tcPr marL="6750" marR="6750" marT="6750" marB="6750" anchor="ctr">
                     <a:lnL>
                       <a:noFill/>
                     </a:lnL>
@@ -29689,7 +29689,7 @@
                       </a:r>
                     </a:p>
                   </a:txBody>
-                  <a:tcPr marL="6750" marR="6750" marT="6750" marB="0" anchor="ctr">
+                  <a:tcPr marL="6750" marR="6750" marT="6750" marB="6750" anchor="ctr">
                     <a:lnL w="9525" cap="flat" cmpd="sng" algn="ctr">
                       <a:solidFill>
                         <a:schemeClr val="bg1">
@@ -29759,7 +29759,7 @@
                       </a:r>
                     </a:p>
                   </a:txBody>
-                  <a:tcPr marL="6750" marR="6750" marT="6750" marB="0" anchor="ctr">
+                  <a:tcPr marL="6750" marR="6750" marT="6750" marB="6750" anchor="ctr">
                     <a:lnL w="9525" cap="flat" cmpd="sng" algn="ctr">
                       <a:solidFill>
                         <a:schemeClr val="bg1">
@@ -29829,7 +29829,7 @@
                       </a:r>
                     </a:p>
                   </a:txBody>
-                  <a:tcPr marL="6750" marR="6750" marT="6750" marB="0" anchor="ctr">
+                  <a:tcPr marL="6750" marR="6750" marT="6750" marB="6750" anchor="ctr">
                     <a:lnL w="9525" cap="flat" cmpd="sng" algn="ctr">
                       <a:solidFill>
                         <a:schemeClr val="bg1">
@@ -29901,7 +29901,7 @@
                       </a:r>
                     </a:p>
                   </a:txBody>
-                  <a:tcPr marL="81005" marR="6750" marT="6750" marB="0" anchor="ctr">
+                  <a:tcPr marL="81005" marR="6750" marT="6750" marB="6750" anchor="ctr">
                     <a:lnL>
                       <a:noFill/>
                     </a:lnL>
@@ -29955,7 +29955,7 @@
                       </a:r>
                     </a:p>
                   </a:txBody>
-                  <a:tcPr marL="81005" marR="6750" marT="6750" marB="0" anchor="ctr">
+                  <a:tcPr marL="81005" marR="6750" marT="6750" marB="6750" anchor="ctr">
                     <a:lnL>
                       <a:noFill/>
                     </a:lnL>
@@ -30011,7 +30011,7 @@
                       </a:r>
                     </a:p>
                   </a:txBody>
-                  <a:tcPr marL="81005" marR="6750" marT="6750" marB="0" anchor="ctr">
+                  <a:tcPr marL="81005" marR="6750" marT="6750" marB="6750" anchor="ctr">
                     <a:lnL>
                       <a:noFill/>
                     </a:lnL>
@@ -30067,7 +30067,7 @@
                       </a:r>
                     </a:p>
                   </a:txBody>
-                  <a:tcPr marL="81005" marR="6750" marT="6750" marB="0" anchor="ctr">
+                  <a:tcPr marL="81005" marR="6750" marT="6750" marB="6750" anchor="ctr">
                     <a:lnL>
                       <a:noFill/>
                     </a:lnL>
@@ -30125,7 +30125,7 @@
                       </a:r>
                     </a:p>
                   </a:txBody>
-                  <a:tcPr marL="81005" marR="6750" marT="6750" marB="0" anchor="ctr">
+                  <a:tcPr marL="81005" marR="6750" marT="6750" marB="6750" anchor="ctr">
                     <a:lnL>
                       <a:noFill/>
                     </a:lnL>
@@ -30179,7 +30179,7 @@
                       </a:r>
                     </a:p>
                   </a:txBody>
-                  <a:tcPr marL="81005" marR="6750" marT="6750" marB="0" anchor="ctr">
+                  <a:tcPr marL="81005" marR="6750" marT="6750" marB="6750" anchor="ctr">
                     <a:lnL>
                       <a:noFill/>
                     </a:lnL>
@@ -30235,7 +30235,7 @@
                       </a:r>
                     </a:p>
                   </a:txBody>
-                  <a:tcPr marL="81005" marR="6750" marT="6750" marB="0" anchor="ctr">
+                  <a:tcPr marL="81005" marR="6750" marT="6750" marB="6750" anchor="ctr">
                     <a:lnL>
                       <a:noFill/>
                     </a:lnL>
@@ -30291,7 +30291,7 @@
                       </a:r>
                     </a:p>
                   </a:txBody>
-                  <a:tcPr marL="81005" marR="6750" marT="6750" marB="0" anchor="ctr">
+                  <a:tcPr marL="81005" marR="6750" marT="6750" marB="6750" anchor="ctr">
                     <a:lnL>
                       <a:noFill/>
                     </a:lnL>
@@ -30349,7 +30349,7 @@
                       </a:r>
                     </a:p>
                   </a:txBody>
-                  <a:tcPr marL="81005" marR="6750" marT="6750" marB="0" anchor="ctr">
+                  <a:tcPr marL="81005" marR="6750" marT="6750" marB="6750" anchor="ctr">
                     <a:lnL>
                       <a:noFill/>
                     </a:lnL>
@@ -30403,7 +30403,7 @@
                       </a:r>
                     </a:p>
                   </a:txBody>
-                  <a:tcPr marL="81005" marR="6750" marT="6750" marB="0" anchor="ctr">
+                  <a:tcPr marL="81005" marR="6750" marT="6750" marB="6750" anchor="ctr">
                     <a:lnL>
                       <a:noFill/>
                     </a:lnL>
@@ -30459,7 +30459,7 @@
                       </a:r>
                     </a:p>
                   </a:txBody>
-                  <a:tcPr marL="81005" marR="6750" marT="6750" marB="0" anchor="ctr">
+                  <a:tcPr marL="81005" marR="6750" marT="6750" marB="6750" anchor="ctr">
                     <a:lnL>
                       <a:noFill/>
                     </a:lnL>
@@ -30515,7 +30515,7 @@
                       </a:r>
                     </a:p>
                   </a:txBody>
-                  <a:tcPr marL="81005" marR="6750" marT="6750" marB="0" anchor="ctr">
+                  <a:tcPr marL="81005" marR="6750" marT="6750" marB="6750" anchor="ctr">
                     <a:lnL>
                       <a:noFill/>
                     </a:lnL>
@@ -30573,7 +30573,7 @@
                       </a:r>
                     </a:p>
                   </a:txBody>
-                  <a:tcPr marL="81005" marR="6750" marT="6750" marB="0" anchor="ctr">
+                  <a:tcPr marL="81005" marR="6750" marT="6750" marB="6750" anchor="ctr">
                     <a:lnL>
                       <a:noFill/>
                     </a:lnL>
@@ -30627,7 +30627,7 @@
                       </a:r>
                     </a:p>
                   </a:txBody>
-                  <a:tcPr marL="81005" marR="6750" marT="6750" marB="0" anchor="ctr">
+                  <a:tcPr marL="81005" marR="6750" marT="6750" marB="6750" anchor="ctr">
                     <a:lnL>
                       <a:noFill/>
                     </a:lnL>
@@ -30683,7 +30683,7 @@
                       </a:r>
                     </a:p>
                   </a:txBody>
-                  <a:tcPr marL="81005" marR="6750" marT="6750" marB="0" anchor="ctr">
+                  <a:tcPr marL="81005" marR="6750" marT="6750" marB="6750" anchor="ctr">
                     <a:lnL>
                       <a:noFill/>
                     </a:lnL>
@@ -30739,7 +30739,7 @@
                       </a:r>
                     </a:p>
                   </a:txBody>
-                  <a:tcPr marL="81005" marR="6750" marT="6750" marB="0" anchor="ctr">
+                  <a:tcPr marL="81005" marR="6750" marT="6750" marB="6750" anchor="ctr">
                     <a:lnL>
                       <a:noFill/>
                     </a:lnL>
@@ -30797,7 +30797,7 @@
                       </a:r>
                     </a:p>
                   </a:txBody>
-                  <a:tcPr marL="81005" marR="6750" marT="6750" marB="0" anchor="ctr">
+                  <a:tcPr marL="81005" marR="6750" marT="6750" marB="6750" anchor="ctr">
                     <a:lnL>
                       <a:noFill/>
                     </a:lnL>
@@ -30851,7 +30851,7 @@
                       </a:r>
                     </a:p>
                   </a:txBody>
-                  <a:tcPr marL="81005" marR="6750" marT="6750" marB="0" anchor="ctr">
+                  <a:tcPr marL="81005" marR="6750" marT="6750" marB="6750" anchor="ctr">
                     <a:lnL>
                       <a:noFill/>
                     </a:lnL>
@@ -30907,7 +30907,7 @@
                       </a:r>
                     </a:p>
                   </a:txBody>
-                  <a:tcPr marL="81005" marR="6750" marT="6750" marB="0" anchor="ctr">
+                  <a:tcPr marL="81005" marR="6750" marT="6750" marB="6750" anchor="ctr">
                     <a:lnL>
                       <a:noFill/>
                     </a:lnL>
@@ -30963,7 +30963,7 @@
                       </a:r>
                     </a:p>
                   </a:txBody>
-                  <a:tcPr marL="81005" marR="6750" marT="6750" marB="0" anchor="ctr">
+                  <a:tcPr marL="81005" marR="6750" marT="6750" marB="6750" anchor="ctr">
                     <a:lnL>
                       <a:noFill/>
                     </a:lnL>
@@ -31522,7 +31522,7 @@
                       </a:r>
                     </a:p>
                   </a:txBody>
-                  <a:tcPr marL="6750" marR="6750" marT="6750" marB="0" anchor="ctr">
+                  <a:tcPr marL="6750" marR="6750" marT="6750" marB="6750" anchor="ctr">
                     <a:lnL>
                       <a:noFill/>
                     </a:lnL>
@@ -31584,7 +31584,7 @@
                       </a:r>
                     </a:p>
                   </a:txBody>
-                  <a:tcPr marL="6750" marR="6750" marT="6750" marB="0" anchor="ctr">
+                  <a:tcPr marL="6750" marR="6750" marT="6750" marB="6750" anchor="ctr">
                     <a:lnL w="9525" cap="flat" cmpd="sng" algn="ctr">
                       <a:solidFill>
                         <a:schemeClr val="bg1">
@@ -31654,7 +31654,7 @@
                       </a:r>
                     </a:p>
                   </a:txBody>
-                  <a:tcPr marL="6750" marR="6750" marT="6750" marB="0" anchor="ctr">
+                  <a:tcPr marL="6750" marR="6750" marT="6750" marB="6750" anchor="ctr">
                     <a:lnL w="9525" cap="flat" cmpd="sng" algn="ctr">
                       <a:solidFill>
                         <a:schemeClr val="bg1">
@@ -31724,7 +31724,7 @@
                       </a:r>
                     </a:p>
                   </a:txBody>
-                  <a:tcPr marL="6750" marR="6750" marT="6750" marB="0" anchor="ctr">
+                  <a:tcPr marL="6750" marR="6750" marT="6750" marB="6750" anchor="ctr">
                     <a:lnL w="9525" cap="flat" cmpd="sng" algn="ctr">
                       <a:solidFill>
                         <a:schemeClr val="bg1">
@@ -31794,7 +31794,7 @@
                       </a:r>
                     </a:p>
                   </a:txBody>
-                  <a:tcPr marL="6750" marR="6750" marT="6750" marB="0" anchor="ctr">
+                  <a:tcPr marL="6750" marR="6750" marT="6750" marB="6750" anchor="ctr">
                     <a:lnL w="9525" cap="flat" cmpd="sng" algn="ctr">
                       <a:solidFill>
                         <a:schemeClr val="bg1">
@@ -31858,7 +31858,7 @@
                       </a:r>
                     </a:p>
                   </a:txBody>
-                  <a:tcPr marL="81005" marR="6750" marT="6750" marB="0" anchor="ctr">
+                  <a:tcPr marL="81005" marR="6750" marT="6750" marB="6750" anchor="ctr">
                     <a:lnL>
                       <a:noFill/>
                     </a:lnL>
@@ -31912,7 +31912,7 @@
                       </a:r>
                     </a:p>
                   </a:txBody>
-                  <a:tcPr marL="81005" marR="6750" marT="6750" marB="0" anchor="ctr">
+                  <a:tcPr marL="81005" marR="6750" marT="6750" marB="6750" anchor="ctr">
                     <a:lnL>
                       <a:noFill/>
                     </a:lnL>
@@ -31968,7 +31968,7 @@
                       </a:r>
                     </a:p>
                   </a:txBody>
-                  <a:tcPr marL="81005" marR="6750" marT="6750" marB="0" anchor="ctr">
+                  <a:tcPr marL="81005" marR="6750" marT="6750" marB="6750" anchor="ctr">
                     <a:lnL>
                       <a:noFill/>
                     </a:lnL>
@@ -32024,7 +32024,7 @@
                       </a:r>
                     </a:p>
                   </a:txBody>
-                  <a:tcPr marL="81005" marR="6750" marT="6750" marB="0" anchor="ctr">
+                  <a:tcPr marL="81005" marR="6750" marT="6750" marB="6750" anchor="ctr">
                     <a:lnL>
                       <a:noFill/>
                     </a:lnL>
@@ -32080,7 +32080,7 @@
                       </a:r>
                     </a:p>
                   </a:txBody>
-                  <a:tcPr marL="81005" marR="6750" marT="6750" marB="0" anchor="ctr">
+                  <a:tcPr marL="81005" marR="6750" marT="6750" marB="6750" anchor="ctr">
                     <a:lnL>
                       <a:noFill/>
                     </a:lnL>
@@ -32138,7 +32138,7 @@
                       </a:r>
                     </a:p>
                   </a:txBody>
-                  <a:tcPr marL="81005" marR="6750" marT="6750" marB="0" anchor="ctr">
+                  <a:tcPr marL="81005" marR="6750" marT="6750" marB="6750" anchor="ctr">
                     <a:lnL>
                       <a:noFill/>
                     </a:lnL>
@@ -32192,7 +32192,7 @@
                       </a:r>
                     </a:p>
                   </a:txBody>
-                  <a:tcPr marL="81005" marR="6750" marT="6750" marB="0" anchor="ctr">
+                  <a:tcPr marL="81005" marR="6750" marT="6750" marB="6750" anchor="ctr">
                     <a:lnL>
                       <a:noFill/>
                     </a:lnL>
@@ -32248,7 +32248,7 @@
                       </a:r>
                     </a:p>
                   </a:txBody>
-                  <a:tcPr marL="81005" marR="6750" marT="6750" marB="0" anchor="ctr">
+                  <a:tcPr marL="81005" marR="6750" marT="6750" marB="6750" anchor="ctr">
                     <a:lnL>
                       <a:noFill/>
                     </a:lnL>
@@ -32304,7 +32304,7 @@
                       </a:r>
                     </a:p>
                   </a:txBody>
-                  <a:tcPr marL="81005" marR="6750" marT="6750" marB="0" anchor="ctr">
+                  <a:tcPr marL="81005" marR="6750" marT="6750" marB="6750" anchor="ctr">
                     <a:lnL>
                       <a:noFill/>
                     </a:lnL>
@@ -32360,7 +32360,7 @@
                       </a:r>
                     </a:p>
                   </a:txBody>
-                  <a:tcPr marL="81005" marR="6750" marT="6750" marB="0" anchor="ctr">
+                  <a:tcPr marL="81005" marR="6750" marT="6750" marB="6750" anchor="ctr">
                     <a:lnL>
                       <a:noFill/>
                     </a:lnL>
@@ -32418,7 +32418,7 @@
                       </a:r>
                     </a:p>
                   </a:txBody>
-                  <a:tcPr marL="81005" marR="6750" marT="6750" marB="0" anchor="ctr">
+                  <a:tcPr marL="81005" marR="6750" marT="6750" marB="6750" anchor="ctr">
                     <a:lnL>
                       <a:noFill/>
                     </a:lnL>
@@ -32472,7 +32472,7 @@
                       </a:r>
                     </a:p>
                   </a:txBody>
-                  <a:tcPr marL="81005" marR="6750" marT="6750" marB="0" anchor="ctr">
+                  <a:tcPr marL="81005" marR="6750" marT="6750" marB="6750" anchor="ctr">
                     <a:lnL>
                       <a:noFill/>
                     </a:lnL>
@@ -32528,7 +32528,7 @@
                       </a:r>
                     </a:p>
                   </a:txBody>
-                  <a:tcPr marL="81005" marR="6750" marT="6750" marB="0" anchor="ctr">
+                  <a:tcPr marL="81005" marR="6750" marT="6750" marB="6750" anchor="ctr">
                     <a:lnL>
                       <a:noFill/>
                     </a:lnL>
@@ -32584,7 +32584,7 @@
                       </a:r>
                     </a:p>
                   </a:txBody>
-                  <a:tcPr marL="81005" marR="6750" marT="6750" marB="0" anchor="ctr">
+                  <a:tcPr marL="81005" marR="6750" marT="6750" marB="6750" anchor="ctr">
                     <a:lnL>
                       <a:noFill/>
                     </a:lnL>
@@ -32640,7 +32640,7 @@
                       </a:r>
                     </a:p>
                   </a:txBody>
-                  <a:tcPr marL="81005" marR="6750" marT="6750" marB="0" anchor="ctr">
+                  <a:tcPr marL="81005" marR="6750" marT="6750" marB="6750" anchor="ctr">
                     <a:lnL>
                       <a:noFill/>
                     </a:lnL>
@@ -32976,7 +32976,7 @@
                 <a:latin typeface="맑은 고딕"/>
                 <a:ea typeface="맑은 고딕"/>
               </a:rPr>
-              <a:t>은 주문 식별·상품·수량·단가·배송지·총액이다. 세 줄 모두 펜 2개·단가 1,000원·총액 2,000원·서울이며, 재결제 때문에 새 주문이나 새 가격을 만들지 않는다.</a:t>
+              <a:t>은 주문 식별·상품·수량·단가·배송지·총액이다. 3줄 모두 펜 2개·단가 1,000원·총액 2,000원·서울이며, 재결제 때문에 새 주문이나 새 가격을 만들지 않는다.</a:t>
             </a:r>
           </a:p>
         </p:txBody>

--- a/courses/ai-native/sessions/s05.pptx
+++ b/courses/ai-native/sessions/s05.pptx
@@ -4560,7 +4560,7 @@
         </p:nvGraphicFramePr>
         <p:xfrm>
           <a:off x="1161606" y="2112010"/>
-          <a:ext cx="6807200" cy="3873500"/>
+          <a:ext cx="6807200" cy="1440000"/>
         </p:xfrm>
         <a:graphic>
           <a:graphicData uri="http://schemas.openxmlformats.org/drawingml/2006/table">
@@ -5935,7 +5935,7 @@
         </p:nvGraphicFramePr>
         <p:xfrm>
           <a:off x="1217485" y="2112010"/>
-          <a:ext cx="6695440" cy="3873500"/>
+          <a:ext cx="6695440" cy="1440000"/>
         </p:xfrm>
         <a:graphic>
           <a:graphicData uri="http://schemas.openxmlformats.org/drawingml/2006/table">
@@ -9757,7 +9757,7 @@
         </p:nvGraphicFramePr>
         <p:xfrm>
           <a:off x="1202246" y="2112010"/>
-          <a:ext cx="6725920" cy="3873500"/>
+          <a:ext cx="6725920" cy="1440000"/>
         </p:xfrm>
         <a:graphic>
           <a:graphicData uri="http://schemas.openxmlformats.org/drawingml/2006/table">
@@ -11120,7 +11120,7 @@
         </p:nvGraphicFramePr>
         <p:xfrm>
           <a:off x="1775016" y="2112010"/>
-          <a:ext cx="5580380" cy="3873500"/>
+          <a:ext cx="5580380" cy="1152000"/>
         </p:xfrm>
         <a:graphic>
           <a:graphicData uri="http://schemas.openxmlformats.org/drawingml/2006/table">
@@ -15504,7 +15504,7 @@
         </p:nvGraphicFramePr>
         <p:xfrm>
           <a:off x="1829626" y="2112010"/>
-          <a:ext cx="5471160" cy="3873500"/>
+          <a:ext cx="5471160" cy="2016000"/>
         </p:xfrm>
         <a:graphic>
           <a:graphicData uri="http://schemas.openxmlformats.org/drawingml/2006/table">
@@ -17190,7 +17190,7 @@
         </p:nvGraphicFramePr>
         <p:xfrm>
           <a:off x="1396556" y="2112010"/>
-          <a:ext cx="6337300" cy="3873500"/>
+          <a:ext cx="6337300" cy="2016000"/>
         </p:xfrm>
         <a:graphic>
           <a:graphicData uri="http://schemas.openxmlformats.org/drawingml/2006/table">
@@ -20261,7 +20261,7 @@
         </p:nvGraphicFramePr>
         <p:xfrm>
           <a:off x="1762316" y="2531392"/>
-          <a:ext cx="5605780" cy="3873500"/>
+          <a:ext cx="5605780" cy="1728000"/>
         </p:xfrm>
         <a:graphic>
           <a:graphicData uri="http://schemas.openxmlformats.org/drawingml/2006/table">
@@ -21970,6 +21970,283 @@
                 <a:ea typeface="맑은 고딕"/>
               </a:rPr>
               <a:t>전이 목록</a:t>
+            </a:r>
+          </a:p>
+        </p:txBody>
+      </p:sp>
+      <p:sp>
+        <p:nvSpPr>
+          <p:cNvPr id="15" name="TextBox 12">
+            <a:extLst>
+              <a:ext uri="{FF2B5EF4-FFF2-40B4-BE49-F238E27FC236}">
+                <a16:creationId xmlns:a16="http://schemas.microsoft.com/office/drawing/2014/main" id="{654EDDB4-901F-3D48-A715-17D163E8A7AC}"/>
+              </a:ext>
+            </a:extLst>
+          </p:cNvPr>
+          <p:cNvSpPr txBox="1"/>
+          <p:nvPr/>
+        </p:nvSpPr>
+        <p:spPr>
+          <a:xfrm>
+            <a:off x="365760" y="4487992"/>
+            <a:ext cx="8412480" cy="1566333"/>
+          </a:xfrm>
+          <a:prstGeom prst="rect">
+            <a:avLst/>
+          </a:prstGeom>
+          <a:noFill/>
+        </p:spPr>
+        <p:txBody>
+          <a:bodyPr wrap="square">
+            <a:spAutoFit/>
+          </a:bodyPr>
+          <a:lstStyle/>
+          <a:p>
+            <a:pPr lvl="2" marL="411480" indent="-137160">
+              <a:spcBef>
+                <a:spcPts val="300"/>
+              </a:spcBef>
+              <a:spcAft>
+                <a:spcPts val="300"/>
+              </a:spcAft>
+              <a:buSzPct val="90000"/>
+              <a:buFont typeface="Wingdings" pitchFamily="2" charset="2"/>
+              <a:buChar char=""/>
+            </a:pPr>
+            <a:r>
+              <a:rPr sz="1000" b="0">
+                <a:solidFill>
+                  <a:srgbClr val="000000"/>
+                </a:solidFill>
+                <a:latin typeface="맑은 고딕"/>
+                <a:ea typeface="맑은 고딕"/>
+              </a:rPr>
+              <a:t>상태 코드: 결제대기 </a:t>
+            </a:r>
+            <a:r>
+              <a:rPr sz="1000" b="0">
+                <a:solidFill>
+                  <a:srgbClr val="000000"/>
+                </a:solidFill>
+                <a:latin typeface="맑은 고딕"/>
+                <a:ea typeface="맑은 고딕"/>
+              </a:rPr>
+              <a:t>PENDING_PAYMENT</a:t>
+            </a:r>
+            <a:r>
+              <a:rPr sz="1000" b="0">
+                <a:solidFill>
+                  <a:srgbClr val="000000"/>
+                </a:solidFill>
+                <a:latin typeface="맑은 고딕"/>
+                <a:ea typeface="맑은 고딕"/>
+              </a:rPr>
+              <a:t>, 결제완료 </a:t>
+            </a:r>
+            <a:r>
+              <a:rPr sz="1000" b="0">
+                <a:solidFill>
+                  <a:srgbClr val="000000"/>
+                </a:solidFill>
+                <a:latin typeface="맑은 고딕"/>
+                <a:ea typeface="맑은 고딕"/>
+              </a:rPr>
+              <a:t>PAID</a:t>
+            </a:r>
+            <a:r>
+              <a:rPr sz="1000" b="0">
+                <a:solidFill>
+                  <a:srgbClr val="000000"/>
+                </a:solidFill>
+                <a:latin typeface="맑은 고딕"/>
+                <a:ea typeface="맑은 고딕"/>
+              </a:rPr>
+              <a:t>, 배송중 </a:t>
+            </a:r>
+            <a:r>
+              <a:rPr sz="1000" b="0">
+                <a:solidFill>
+                  <a:srgbClr val="000000"/>
+                </a:solidFill>
+                <a:latin typeface="맑은 고딕"/>
+                <a:ea typeface="맑은 고딕"/>
+              </a:rPr>
+              <a:t>IN_DELIVERY</a:t>
+            </a:r>
+            <a:r>
+              <a:rPr sz="1000" b="0">
+                <a:solidFill>
+                  <a:srgbClr val="000000"/>
+                </a:solidFill>
+                <a:latin typeface="맑은 고딕"/>
+                <a:ea typeface="맑은 고딕"/>
+              </a:rPr>
+              <a:t>, 배송완료 </a:t>
+            </a:r>
+            <a:r>
+              <a:rPr sz="1000" b="0">
+                <a:solidFill>
+                  <a:srgbClr val="000000"/>
+                </a:solidFill>
+                <a:latin typeface="맑은 고딕"/>
+                <a:ea typeface="맑은 고딕"/>
+              </a:rPr>
+              <a:t>DELIVERED</a:t>
+            </a:r>
+          </a:p>
+          <a:p>
+            <a:pPr lvl="2" marL="411480" indent="-137160">
+              <a:spcBef>
+                <a:spcPts val="300"/>
+              </a:spcBef>
+              <a:spcAft>
+                <a:spcPts val="300"/>
+              </a:spcAft>
+              <a:buSzPct val="90000"/>
+              <a:buFont typeface="Wingdings" pitchFamily="2" charset="2"/>
+              <a:buChar char=""/>
+            </a:pPr>
+            <a:r>
+              <a:rPr sz="1000" b="0">
+                <a:solidFill>
+                  <a:srgbClr val="000000"/>
+                </a:solidFill>
+                <a:latin typeface="맑은 고딕"/>
+                <a:ea typeface="맑은 고딕"/>
+              </a:rPr>
+              <a:t>사건별 반응은 다음과 같다.</a:t>
+            </a:r>
+          </a:p>
+          <a:p>
+            <a:pPr lvl="2" marL="411480" indent="-137160">
+              <a:spcBef>
+                <a:spcPts val="300"/>
+              </a:spcBef>
+              <a:spcAft>
+                <a:spcPts val="300"/>
+              </a:spcAft>
+              <a:buSzPct val="90000"/>
+              <a:buFont typeface="Wingdings" pitchFamily="2" charset="2"/>
+              <a:buChar char=""/>
+            </a:pPr>
+            <a:r>
+              <a:rPr sz="1000" b="1">
+                <a:solidFill>
+                  <a:srgbClr val="000000"/>
+                </a:solidFill>
+                <a:latin typeface="맑은 고딕"/>
+                <a:ea typeface="맑은 고딕"/>
+              </a:rPr>
+              <a:t>배송지 지정:</a:t>
+            </a:r>
+            <a:r>
+              <a:rPr sz="1000" b="0">
+                <a:solidFill>
+                  <a:srgbClr val="000000"/>
+                </a:solidFill>
+                <a:latin typeface="맑은 고딕"/>
+                <a:ea typeface="맑은 고딕"/>
+              </a:rPr>
+              <a:t> 주문 A 생성. 펜 2개·단가 1,000원·총액 2,000원·서울 확정</a:t>
+            </a:r>
+          </a:p>
+          <a:p>
+            <a:pPr lvl="2" marL="411480" indent="-137160">
+              <a:spcBef>
+                <a:spcPts val="300"/>
+              </a:spcBef>
+              <a:spcAft>
+                <a:spcPts val="300"/>
+              </a:spcAft>
+              <a:buSzPct val="90000"/>
+              <a:buFont typeface="Wingdings" pitchFamily="2" charset="2"/>
+              <a:buChar char=""/>
+            </a:pPr>
+            <a:r>
+              <a:rPr sz="1000" b="1">
+                <a:solidFill>
+                  <a:srgbClr val="000000"/>
+                </a:solidFill>
+                <a:latin typeface="맑은 고딕"/>
+                <a:ea typeface="맑은 고딕"/>
+              </a:rPr>
+              <a:t>카드 승인 완료:</a:t>
+            </a:r>
+            <a:r>
+              <a:rPr sz="1000" b="0">
+                <a:solidFill>
+                  <a:srgbClr val="000000"/>
+                </a:solidFill>
+                <a:latin typeface="맑은 고딕"/>
+                <a:ea typeface="맑은 고딕"/>
+              </a:rPr>
+              <a:t> 서울로 배송 요청 1회 발생</a:t>
+            </a:r>
+          </a:p>
+          <a:p>
+            <a:pPr lvl="2" marL="411480" indent="-137160">
+              <a:spcBef>
+                <a:spcPts val="300"/>
+              </a:spcBef>
+              <a:spcAft>
+                <a:spcPts val="300"/>
+              </a:spcAft>
+              <a:buSzPct val="90000"/>
+              <a:buFont typeface="Wingdings" pitchFamily="2" charset="2"/>
+              <a:buChar char=""/>
+            </a:pPr>
+            <a:r>
+              <a:rPr sz="1000" b="1">
+                <a:solidFill>
+                  <a:srgbClr val="000000"/>
+                </a:solidFill>
+                <a:latin typeface="맑은 고딕"/>
+                <a:ea typeface="맑은 고딕"/>
+              </a:rPr>
+              <a:t>카드 승인 거절:</a:t>
+            </a:r>
+            <a:r>
+              <a:rPr sz="1000" b="0">
+                <a:solidFill>
+                  <a:srgbClr val="000000"/>
+                </a:solidFill>
+                <a:latin typeface="맑은 고딕"/>
+                <a:ea typeface="맑은 고딕"/>
+              </a:rPr>
+              <a:t> 배송 요청 없음. 같은 주문 A 유지</a:t>
+            </a:r>
+          </a:p>
+          <a:p>
+            <a:pPr lvl="2" marL="411480" indent="-137160">
+              <a:spcBef>
+                <a:spcPts val="300"/>
+              </a:spcBef>
+              <a:spcAft>
+                <a:spcPts val="300"/>
+              </a:spcAft>
+              <a:buSzPct val="90000"/>
+              <a:buFont typeface="Wingdings" pitchFamily="2" charset="2"/>
+              <a:buChar char=""/>
+            </a:pPr>
+            <a:r>
+              <a:rPr sz="1000" b="1">
+                <a:solidFill>
+                  <a:srgbClr val="000000"/>
+                </a:solidFill>
+                <a:latin typeface="맑은 고딕"/>
+                <a:ea typeface="맑은 고딕"/>
+              </a:rPr>
+              <a:t>배송 시작 통보, 배송 완료 통보:</a:t>
+            </a:r>
+            <a:r>
+              <a:rPr sz="1000" b="0">
+                <a:solidFill>
+                  <a:srgbClr val="000000"/>
+                </a:solidFill>
+                <a:latin typeface="맑은 고딕"/>
+                <a:ea typeface="맑은 고딕"/>
+              </a:rPr>
+              <a:t> 정한 반응 없음</a:t>
             </a:r>
           </a:p>
         </p:txBody>
@@ -22156,7 +22433,7 @@
         </p:nvGraphicFramePr>
         <p:xfrm>
           <a:off x="1592136" y="4337050"/>
-          <a:ext cx="5946140" cy="3873500"/>
+          <a:ext cx="5946140" cy="1152000"/>
         </p:xfrm>
         <a:graphic>
           <a:graphicData uri="http://schemas.openxmlformats.org/drawingml/2006/table">
@@ -23198,254 +23475,6 @@
                 <a:latin typeface="맑은 고딕"/>
                 <a:ea typeface="맑은 고딕"/>
               </a:rPr>
-              <a:t>상태 코드: 결제대기 </a:t>
-            </a:r>
-            <a:r>
-              <a:rPr sz="1000" b="0">
-                <a:solidFill>
-                  <a:srgbClr val="000000"/>
-                </a:solidFill>
-                <a:latin typeface="맑은 고딕"/>
-                <a:ea typeface="맑은 고딕"/>
-              </a:rPr>
-              <a:t>PENDING_PAYMENT</a:t>
-            </a:r>
-            <a:r>
-              <a:rPr sz="1000" b="0">
-                <a:solidFill>
-                  <a:srgbClr val="000000"/>
-                </a:solidFill>
-                <a:latin typeface="맑은 고딕"/>
-                <a:ea typeface="맑은 고딕"/>
-              </a:rPr>
-              <a:t>, 결제완료 </a:t>
-            </a:r>
-            <a:r>
-              <a:rPr sz="1000" b="0">
-                <a:solidFill>
-                  <a:srgbClr val="000000"/>
-                </a:solidFill>
-                <a:latin typeface="맑은 고딕"/>
-                <a:ea typeface="맑은 고딕"/>
-              </a:rPr>
-              <a:t>PAID</a:t>
-            </a:r>
-            <a:r>
-              <a:rPr sz="1000" b="0">
-                <a:solidFill>
-                  <a:srgbClr val="000000"/>
-                </a:solidFill>
-                <a:latin typeface="맑은 고딕"/>
-                <a:ea typeface="맑은 고딕"/>
-              </a:rPr>
-              <a:t>, 배송중 </a:t>
-            </a:r>
-            <a:r>
-              <a:rPr sz="1000" b="0">
-                <a:solidFill>
-                  <a:srgbClr val="000000"/>
-                </a:solidFill>
-                <a:latin typeface="맑은 고딕"/>
-                <a:ea typeface="맑은 고딕"/>
-              </a:rPr>
-              <a:t>IN_DELIVERY</a:t>
-            </a:r>
-            <a:r>
-              <a:rPr sz="1000" b="0">
-                <a:solidFill>
-                  <a:srgbClr val="000000"/>
-                </a:solidFill>
-                <a:latin typeface="맑은 고딕"/>
-                <a:ea typeface="맑은 고딕"/>
-              </a:rPr>
-              <a:t>, 배송완료 </a:t>
-            </a:r>
-            <a:r>
-              <a:rPr sz="1000" b="0">
-                <a:solidFill>
-                  <a:srgbClr val="000000"/>
-                </a:solidFill>
-                <a:latin typeface="맑은 고딕"/>
-                <a:ea typeface="맑은 고딕"/>
-              </a:rPr>
-              <a:t>DELIVERED</a:t>
-            </a:r>
-          </a:p>
-          <a:p>
-            <a:pPr lvl="2" marL="411480" indent="-137160">
-              <a:spcBef>
-                <a:spcPts val="300"/>
-              </a:spcBef>
-              <a:spcAft>
-                <a:spcPts val="300"/>
-              </a:spcAft>
-              <a:buSzPct val="90000"/>
-              <a:buFont typeface="Wingdings" pitchFamily="2" charset="2"/>
-              <a:buChar char=""/>
-            </a:pPr>
-            <a:r>
-              <a:rPr sz="1000" b="0">
-                <a:solidFill>
-                  <a:srgbClr val="000000"/>
-                </a:solidFill>
-                <a:latin typeface="맑은 고딕"/>
-                <a:ea typeface="맑은 고딕"/>
-              </a:rPr>
-              <a:t>사건별 반응은 다음과 같다.</a:t>
-            </a:r>
-          </a:p>
-          <a:p>
-            <a:pPr lvl="2" marL="411480" indent="-137160">
-              <a:spcBef>
-                <a:spcPts val="300"/>
-              </a:spcBef>
-              <a:spcAft>
-                <a:spcPts val="300"/>
-              </a:spcAft>
-              <a:buSzPct val="90000"/>
-              <a:buFont typeface="Wingdings" pitchFamily="2" charset="2"/>
-              <a:buChar char=""/>
-            </a:pPr>
-            <a:r>
-              <a:rPr sz="1000" b="1">
-                <a:solidFill>
-                  <a:srgbClr val="000000"/>
-                </a:solidFill>
-                <a:latin typeface="맑은 고딕"/>
-                <a:ea typeface="맑은 고딕"/>
-              </a:rPr>
-              <a:t>배송지 지정:</a:t>
-            </a:r>
-            <a:r>
-              <a:rPr sz="1000" b="0">
-                <a:solidFill>
-                  <a:srgbClr val="000000"/>
-                </a:solidFill>
-                <a:latin typeface="맑은 고딕"/>
-                <a:ea typeface="맑은 고딕"/>
-              </a:rPr>
-              <a:t> 주문 A 생성. 펜 2개·단가 1,000원·총액 2,000원·서울 확정</a:t>
-            </a:r>
-          </a:p>
-          <a:p>
-            <a:pPr lvl="2" marL="411480" indent="-137160">
-              <a:spcBef>
-                <a:spcPts val="300"/>
-              </a:spcBef>
-              <a:spcAft>
-                <a:spcPts val="300"/>
-              </a:spcAft>
-              <a:buSzPct val="90000"/>
-              <a:buFont typeface="Wingdings" pitchFamily="2" charset="2"/>
-              <a:buChar char=""/>
-            </a:pPr>
-            <a:r>
-              <a:rPr sz="1000" b="1">
-                <a:solidFill>
-                  <a:srgbClr val="000000"/>
-                </a:solidFill>
-                <a:latin typeface="맑은 고딕"/>
-                <a:ea typeface="맑은 고딕"/>
-              </a:rPr>
-              <a:t>카드 승인 완료:</a:t>
-            </a:r>
-            <a:r>
-              <a:rPr sz="1000" b="0">
-                <a:solidFill>
-                  <a:srgbClr val="000000"/>
-                </a:solidFill>
-                <a:latin typeface="맑은 고딕"/>
-                <a:ea typeface="맑은 고딕"/>
-              </a:rPr>
-              <a:t> 서울로 배송 요청 1회 발생</a:t>
-            </a:r>
-          </a:p>
-          <a:p>
-            <a:pPr lvl="2" marL="411480" indent="-137160">
-              <a:spcBef>
-                <a:spcPts val="300"/>
-              </a:spcBef>
-              <a:spcAft>
-                <a:spcPts val="300"/>
-              </a:spcAft>
-              <a:buSzPct val="90000"/>
-              <a:buFont typeface="Wingdings" pitchFamily="2" charset="2"/>
-              <a:buChar char=""/>
-            </a:pPr>
-            <a:r>
-              <a:rPr sz="1000" b="1">
-                <a:solidFill>
-                  <a:srgbClr val="000000"/>
-                </a:solidFill>
-                <a:latin typeface="맑은 고딕"/>
-                <a:ea typeface="맑은 고딕"/>
-              </a:rPr>
-              <a:t>카드 승인 거절:</a:t>
-            </a:r>
-            <a:r>
-              <a:rPr sz="1000" b="0">
-                <a:solidFill>
-                  <a:srgbClr val="000000"/>
-                </a:solidFill>
-                <a:latin typeface="맑은 고딕"/>
-                <a:ea typeface="맑은 고딕"/>
-              </a:rPr>
-              <a:t> 배송 요청 없음. 같은 주문 A 유지</a:t>
-            </a:r>
-          </a:p>
-          <a:p>
-            <a:pPr lvl="2" marL="411480" indent="-137160">
-              <a:spcBef>
-                <a:spcPts val="300"/>
-              </a:spcBef>
-              <a:spcAft>
-                <a:spcPts val="300"/>
-              </a:spcAft>
-              <a:buSzPct val="90000"/>
-              <a:buFont typeface="Wingdings" pitchFamily="2" charset="2"/>
-              <a:buChar char=""/>
-            </a:pPr>
-            <a:r>
-              <a:rPr sz="1000" b="1">
-                <a:solidFill>
-                  <a:srgbClr val="000000"/>
-                </a:solidFill>
-                <a:latin typeface="맑은 고딕"/>
-                <a:ea typeface="맑은 고딕"/>
-              </a:rPr>
-              <a:t>배송 시작 통보, 배송 완료 통보:</a:t>
-            </a:r>
-            <a:r>
-              <a:rPr sz="1000" b="0">
-                <a:solidFill>
-                  <a:srgbClr val="000000"/>
-                </a:solidFill>
-                <a:latin typeface="맑은 고딕"/>
-                <a:ea typeface="맑은 고딕"/>
-              </a:rPr>
-              <a:t> 정한 반응 없음</a:t>
-            </a:r>
-          </a:p>
-          <a:p>
-            <a:pPr lvl="2" marL="411480" indent="-137160">
-              <a:spcBef>
-                <a:spcPts val="300"/>
-              </a:spcBef>
-              <a:spcAft>
-                <a:spcPts val="300"/>
-              </a:spcAft>
-              <a:buSzPct val="90000"/>
-              <a:buFont typeface="Wingdings" pitchFamily="2" charset="2"/>
-              <a:buChar char=""/>
-            </a:pPr>
-            <a:r>
-              <a:rPr sz="1000" b="0">
-                <a:solidFill>
-                  <a:srgbClr val="000000"/>
-                </a:solidFill>
-                <a:latin typeface="맑은 고딕"/>
-                <a:ea typeface="맑은 고딕"/>
-              </a:rPr>
               <a:t>거절 뒤의 재결제가 승인되는 경우에 새로운 전이가 생기지는 않는다. 같은 주문 A에 둘째 행</a:t>
             </a:r>
             <a:r>
@@ -23529,7 +23558,7 @@
         </p:nvSpPr>
         <p:spPr>
           <a:xfrm>
-            <a:off x="365760" y="3296623"/>
+            <a:off x="365760" y="2065616"/>
             <a:ext cx="8412480" cy="201168"/>
           </a:xfrm>
           <a:prstGeom prst="rect">
@@ -23573,7 +23602,7 @@
         </p:blipFill>
         <p:spPr>
           <a:xfrm>
-            <a:off x="877094" y="3534367"/>
+            <a:off x="877094" y="2303360"/>
             <a:ext cx="7389812" cy="2205633"/>
           </a:xfrm>
           <a:prstGeom prst="rect">
@@ -26207,7 +26236,7 @@
         </p:nvGraphicFramePr>
         <p:xfrm>
           <a:off x="992696" y="2112010"/>
-          <a:ext cx="7145020" cy="3873500"/>
+          <a:ext cx="7145020" cy="1728000"/>
         </p:xfrm>
         <a:graphic>
           <a:graphicData uri="http://schemas.openxmlformats.org/drawingml/2006/table">
@@ -27750,7 +27779,7 @@
         </p:nvGraphicFramePr>
         <p:xfrm>
           <a:off x="1969326" y="4499148"/>
-          <a:ext cx="5191760" cy="3873500"/>
+          <a:ext cx="5191760" cy="864000"/>
         </p:xfrm>
         <a:graphic>
           <a:graphicData uri="http://schemas.openxmlformats.org/drawingml/2006/table">
@@ -29592,7 +29621,7 @@
         </p:nvGraphicFramePr>
         <p:xfrm>
           <a:off x="1273366" y="2112010"/>
-          <a:ext cx="6583680" cy="3873500"/>
+          <a:ext cx="6583680" cy="1728000"/>
         </p:xfrm>
         <a:graphic>
           <a:graphicData uri="http://schemas.openxmlformats.org/drawingml/2006/table">
@@ -31486,7 +31515,7 @@
         </p:nvGraphicFramePr>
         <p:xfrm>
           <a:off x="1485456" y="2112010"/>
-          <a:ext cx="6159500" cy="3873500"/>
+          <a:ext cx="6159500" cy="1152000"/>
         </p:xfrm>
         <a:graphic>
           <a:graphicData uri="http://schemas.openxmlformats.org/drawingml/2006/table">
